--- a/slides/day4.pptx
+++ b/slides/day4.pptx
@@ -4179,7 +4179,7 @@
                 <a:ea typeface="NanumSquare"/>
                 <a:cs typeface="NanumSquare"/>
               </a:rPr>
-              <a:t>구현 ② — 검증 &amp; 확장</a:t>
+              <a:t>구현 ② — 검증 &amp; 종합·보고</a:t>
             </a:r>
           </a:p>
         </p:txBody>
@@ -4548,7 +4548,7 @@
                 <a:ea typeface="NanumGothic"/>
                 <a:cs typeface="NanumGothic"/>
               </a:rPr>
-              <a:t>검증 로직 추가(출처·교차확인)</a:t>
+              <a:t>검증 로직(출처·교차확인)</a:t>
             </a:r>
           </a:p>
         </p:txBody>
@@ -4686,7 +4686,7 @@
                 <a:ea typeface="NanumGothic"/>
                 <a:cs typeface="NanumGothic"/>
               </a:rPr>
-              <a:t>병렬/다중 검색</a:t>
+              <a:t>종합 → 인용 보고서 생성</a:t>
             </a:r>
           </a:p>
         </p:txBody>
@@ -4824,7 +4824,7 @@
                 <a:ea typeface="NanumGothic"/>
                 <a:cs typeface="NanumGothic"/>
               </a:rPr>
-              <a:t>종합 품질 개선</a:t>
+              <a:t>상충·불확실성 표기</a:t>
             </a:r>
           </a:p>
         </p:txBody>
@@ -5100,7 +5100,7 @@
                 <a:ea typeface="NanumGothic"/>
                 <a:cs typeface="NanumGothic"/>
               </a:rPr>
-              <a:t>검증·확장된 리서치 에이전트 v1
+              <a:t>검증·인용 보고서까지 되는 에이전트 v1
 (구성도 placeholder)</a:t>
             </a:r>
           </a:p>
@@ -14616,7 +14616,7 @@
                 <a:ea typeface="NanumSquare"/>
                 <a:cs typeface="NanumSquare"/>
               </a:rPr>
-              <a:t>재실행 &amp; 결과 분석 실습</a:t>
+              <a:t>재실행 &amp; 결과 분석 → 최종 확정</a:t>
             </a:r>
           </a:p>
         </p:txBody>
@@ -14985,7 +14985,7 @@
                 <a:ea typeface="NanumGothic"/>
                 <a:cs typeface="NanumGothic"/>
               </a:rPr>
-              <a:t>개선 항목 반영</a:t>
+              <a:t>개선 항목 반영·재실행</a:t>
             </a:r>
           </a:p>
         </p:txBody>
@@ -15123,7 +15123,7 @@
                 <a:ea typeface="NanumGothic"/>
                 <a:cs typeface="NanumGothic"/>
               </a:rPr>
-              <a:t>재실행 &amp; 비교</a:t>
+              <a:t>강점/약점·한계 표 정리</a:t>
             </a:r>
           </a:p>
         </p:txBody>
@@ -15261,7 +15261,7 @@
                 <a:ea typeface="NanumGothic"/>
                 <a:cs typeface="NanumGothic"/>
               </a:rPr>
-              <a:t>강점/약점 표 정리</a:t>
+              <a:t>발표 후보 결과 선별</a:t>
             </a:r>
           </a:p>
         </p:txBody>
@@ -15399,7 +15399,7 @@
                 <a:ea typeface="NanumGothic"/>
                 <a:cs typeface="NanumGothic"/>
               </a:rPr>
-              <a:t>개선 항목 도출</a:t>
+              <a:t>최종 결과 확정</a:t>
             </a:r>
           </a:p>
         </p:txBody>
@@ -15537,8 +15537,8 @@
                 <a:ea typeface="NanumGothic"/>
                 <a:cs typeface="NanumGothic"/>
               </a:rPr>
-              <a:t>결과 분석 노트(강점·약점·개선점)
-(placeholder)</a:t>
+              <a:t>최종 결과물 + 분석 노트(강점·약점·개선점)
+에이전트 완주! (placeholder)</a:t>
             </a:r>
           </a:p>
         </p:txBody>
@@ -16014,7 +16014,7 @@
                 <a:ea typeface="NanumGothic"/>
                 <a:cs typeface="NanumGothic"/>
               </a:rPr>
-              <a:t>팀 설계를 MVP → 검증·확장 순으로 구현한다</a:t>
+              <a:t>팀 에이전트를 MVP → 검증·종합(인용 보고서) 순으로 3세션 안에 완주</a:t>
             </a:r>
           </a:p>
         </p:txBody>
@@ -18778,7 +18778,7 @@
                 <a:ea typeface="NanumGothic"/>
                 <a:cs typeface="NanumGothic"/>
               </a:rPr>
-              <a:t>팀 에이전트 설계 정리</a:t>
+              <a:t>3세션 스코프 — 무엇을 만드나</a:t>
             </a:r>
           </a:p>
         </p:txBody>
@@ -18962,7 +18962,7 @@
                 <a:ea typeface="NanumGothic"/>
                 <a:cs typeface="NanumGothic"/>
               </a:rPr>
-              <a:t>구현 단계 개요</a:t>
+              <a:t>팀 에이전트 설계 정리</a:t>
             </a:r>
           </a:p>
         </p:txBody>
@@ -19330,7 +19330,7 @@
                 <a:ea typeface="NanumGothic"/>
                 <a:cs typeface="NanumGothic"/>
               </a:rPr>
-              <a:t>기본 흐름·검색 연결(실습)</a:t>
+              <a:t>구현① 기본 흐름·검색(corpus)</a:t>
             </a:r>
           </a:p>
         </p:txBody>
@@ -19514,7 +19514,7 @@
                 <a:ea typeface="NanumGothic"/>
                 <a:cs typeface="NanumGothic"/>
               </a:rPr>
-              <a:t>검증·확장(실습)</a:t>
+              <a:t>구현② 검증·종합·보고</a:t>
             </a:r>
           </a:p>
         </p:txBody>
@@ -19667,7 +19667,7 @@
                 <a:ea typeface="NanumGothic"/>
                 <a:cs typeface="NanumGothic"/>
               </a:rPr>
-              <a:t>기획</a:t>
+              <a:t>스코프</a:t>
             </a:r>
           </a:p>
         </p:txBody>
@@ -19714,7 +19714,7 @@
                 <a:ea typeface="NanumSquare"/>
                 <a:cs typeface="NanumSquare"/>
               </a:rPr>
-              <a:t>팀 에이전트 설계 정리</a:t>
+              <a:t>3세션 안에 만들 것</a:t>
             </a:r>
           </a:p>
         </p:txBody>
@@ -19943,7 +19943,7 @@
                 <a:ea typeface="NanumGothic"/>
                 <a:cs typeface="NanumGothic"/>
               </a:rPr>
-              <a:t>주제·핵심 질문 재확인</a:t>
+              <a:t>파이프라인</a:t>
             </a:r>
           </a:p>
         </p:txBody>
@@ -19990,7 +19990,7 @@
                 <a:ea typeface="NanumGothic"/>
                 <a:cs typeface="NanumGothic"/>
               </a:rPr>
-              <a:t>Day 3 기획서 기반</a:t>
+              <a:t>질문 → 검색(로컬 corpus) → 검증 → 종합 → 인용 보고서</a:t>
             </a:r>
           </a:p>
         </p:txBody>
@@ -20081,7 +20081,7 @@
                 <a:ea typeface="NanumGothic"/>
                 <a:cs typeface="NanumGothic"/>
               </a:rPr>
-              <a:t>필요한 데이터 소스·도구</a:t>
+              <a:t>스코프 제한</a:t>
             </a:r>
           </a:p>
         </p:txBody>
@@ -20128,7 +20128,7 @@
                 <a:ea typeface="NanumGothic"/>
                 <a:cs typeface="NanumGothic"/>
               </a:rPr>
-              <a:t>어디서 검색하나</a:t>
+              <a:t>corpus 기반 — 오픈 웹 크롤링·벡터DB 불필요</a:t>
             </a:r>
           </a:p>
         </p:txBody>
@@ -20219,7 +20219,7 @@
                 <a:ea typeface="NanumGothic"/>
                 <a:cs typeface="NanumGothic"/>
               </a:rPr>
-              <a:t>산출물 형태</a:t>
+              <a:t>완주 기준</a:t>
             </a:r>
           </a:p>
         </p:txBody>
@@ -20266,7 +20266,111 @@
                 <a:ea typeface="NanumGothic"/>
                 <a:cs typeface="NanumGothic"/>
               </a:rPr>
-              <a:t>보고서/요약 (placeholder)</a:t>
+              <a:t>Day 4 끝 = 핵심 질문에 답하는 1~2장 인용 보고서</a:t>
+            </a:r>
+          </a:p>
+        </p:txBody>
+      </p:sp>
+      <p:sp>
+        <p:nvSpPr>
+          <p:cNvPr id="18" name="Rounded Rectangle 17"/>
+          <p:cNvSpPr/>
+          <p:nvPr/>
+        </p:nvSpPr>
+        <p:spPr>
+          <a:xfrm>
+            <a:off x="502920" y="5532120"/>
+            <a:ext cx="11155680" cy="658368"/>
+          </a:xfrm>
+          <a:prstGeom prst="roundRect">
+            <a:avLst/>
+          </a:prstGeom>
+          <a:solidFill>
+            <a:srgbClr val="F1F5F9"/>
+          </a:solidFill>
+          <a:ln w="12700">
+            <a:solidFill>
+              <a:srgbClr val="E2E8F0"/>
+            </a:solidFill>
+          </a:ln>
+          <a:effectLst/>
+        </p:spPr>
+        <p:style>
+          <a:lnRef idx="1">
+            <a:schemeClr val="accent1"/>
+          </a:lnRef>
+          <a:fillRef idx="3">
+            <a:schemeClr val="accent1"/>
+          </a:fillRef>
+          <a:effectRef idx="2">
+            <a:schemeClr val="accent1"/>
+          </a:effectRef>
+          <a:fontRef idx="minor">
+            <a:schemeClr val="lt1"/>
+          </a:fontRef>
+        </p:style>
+        <p:txBody>
+          <a:bodyPr rtlCol="0" anchor="ctr"/>
+          <a:lstStyle/>
+          <a:p>
+            <a:pPr algn="ctr"/>
+          </a:p>
+        </p:txBody>
+      </p:sp>
+      <p:sp>
+        <p:nvSpPr>
+          <p:cNvPr id="19" name="TextBox 18"/>
+          <p:cNvSpPr txBox="1"/>
+          <p:nvPr/>
+        </p:nvSpPr>
+        <p:spPr>
+          <a:xfrm>
+            <a:off x="777240" y="5532120"/>
+            <a:ext cx="10607040" cy="658368"/>
+          </a:xfrm>
+          <a:prstGeom prst="rect">
+            <a:avLst/>
+          </a:prstGeom>
+          <a:noFill/>
+        </p:spPr>
+        <p:txBody>
+          <a:bodyPr wrap="square" anchor="ctr" lIns="0" rIns="0" tIns="0" bIns="0">
+            <a:spAutoFit/>
+          </a:bodyPr>
+          <a:lstStyle/>
+          <a:p>
+            <a:pPr algn="l">
+              <a:lnSpc>
+                <a:spcPct val="100000"/>
+              </a:lnSpc>
+              <a:spcBef>
+                <a:spcPts val="0"/>
+              </a:spcBef>
+              <a:spcAft>
+                <a:spcPts val="600"/>
+              </a:spcAft>
+            </a:pPr>
+            <a:r>
+              <a:rPr sz="1200" b="1">
+                <a:solidFill>
+                  <a:srgbClr val="F59E0B"/>
+                </a:solidFill>
+                <a:latin typeface="NanumGothic"/>
+                <a:ea typeface="NanumGothic"/>
+                <a:cs typeface="NanumGothic"/>
+              </a:rPr>
+              <a:t>NOTE   </a:t>
+            </a:r>
+            <a:r>
+              <a:rPr sz="1300" b="0">
+                <a:solidFill>
+                  <a:srgbClr val="0F172A"/>
+                </a:solidFill>
+                <a:latin typeface="NanumGothic"/>
+                <a:ea typeface="NanumGothic"/>
+                <a:cs typeface="NanumGothic"/>
+              </a:rPr>
+              <a:t>작게 만들고 키운다 — 욕심내지 말 것</a:t>
             </a:r>
           </a:p>
         </p:txBody>
@@ -20419,7 +20523,7 @@
                 <a:ea typeface="NanumGothic"/>
                 <a:cs typeface="NanumGothic"/>
               </a:rPr>
-              <a:t>학습 목표</a:t>
+              <a:t>기획</a:t>
             </a:r>
           </a:p>
         </p:txBody>
@@ -20466,7 +20570,7 @@
                 <a:ea typeface="NanumSquare"/>
                 <a:cs typeface="NanumSquare"/>
               </a:rPr>
-              <a:t>구현 단계에서 할 일</a:t>
+              <a:t>팀 에이전트 설계 정리</a:t>
             </a:r>
           </a:p>
         </p:txBody>
@@ -20695,7 +20799,7 @@
                 <a:ea typeface="NanumGothic"/>
                 <a:cs typeface="NanumGothic"/>
               </a:rPr>
-              <a:t>검색·검증·종합 흐름 구성</a:t>
+              <a:t>주제·핵심 질문 재확인</a:t>
             </a:r>
           </a:p>
         </p:txBody>
@@ -20742,7 +20846,7 @@
                 <a:ea typeface="NanumGothic"/>
                 <a:cs typeface="NanumGothic"/>
               </a:rPr>
-              <a:t>Day 3 아키텍처를 코드로</a:t>
+              <a:t>Day 3 기획서 기반</a:t>
             </a:r>
           </a:p>
         </p:txBody>
@@ -20833,7 +20937,7 @@
                 <a:ea typeface="NanumGothic"/>
                 <a:cs typeface="NanumGothic"/>
               </a:rPr>
-              <a:t>도구·MCP 연결</a:t>
+              <a:t>corpus 확인</a:t>
             </a:r>
           </a:p>
         </p:txBody>
@@ -20880,7 +20984,7 @@
                 <a:ea typeface="NanumGothic"/>
                 <a:cs typeface="NanumGothic"/>
               </a:rPr>
-              <a:t>데이터 소스 붙이기</a:t>
+              <a:t>어떤 문서 폴더에서 검색하나</a:t>
             </a:r>
           </a:p>
         </p:txBody>
@@ -20971,7 +21075,7 @@
                 <a:ea typeface="NanumGothic"/>
                 <a:cs typeface="NanumGothic"/>
               </a:rPr>
-              <a:t>작게 시작해 확장</a:t>
+              <a:t>산출물 형태</a:t>
             </a:r>
           </a:p>
         </p:txBody>
@@ -21018,7 +21122,7 @@
                 <a:ea typeface="NanumGothic"/>
                 <a:cs typeface="NanumGothic"/>
               </a:rPr>
-              <a:t>최소 기능부터</a:t>
+              <a:t>인용 보고서 구조 합의</a:t>
             </a:r>
           </a:p>
         </p:txBody>
@@ -21494,7 +21598,7 @@
                 <a:ea typeface="NanumGothic"/>
                 <a:cs typeface="NanumGothic"/>
               </a:rPr>
-              <a:t>질문→검색→요약</a:t>
+              <a:t>질문 → 검색 → 요약</a:t>
             </a:r>
           </a:p>
         </p:txBody>
@@ -21632,7 +21736,7 @@
                 <a:ea typeface="NanumGothic"/>
                 <a:cs typeface="NanumGothic"/>
               </a:rPr>
-              <a:t>검증·병렬화 추가</a:t>
+              <a:t>검증·인용 추가</a:t>
             </a:r>
           </a:p>
         </p:txBody>
@@ -21970,7 +22074,7 @@
                 <a:ea typeface="NanumSquare"/>
                 <a:cs typeface="NanumSquare"/>
               </a:rPr>
-              <a:t>구현 ① — 기본 흐름 &amp; 검색 연결</a:t>
+              <a:t>구현 ① — 기본 흐름 &amp; 검색(로컬 corpus)</a:t>
             </a:r>
           </a:p>
         </p:txBody>
@@ -22339,7 +22443,7 @@
                 <a:ea typeface="NanumGothic"/>
                 <a:cs typeface="NanumGothic"/>
               </a:rPr>
-              <a:t>기본 흐름 구성(질문→검색→요약)</a:t>
+              <a:t>기본 흐름(질문→검색→요약)</a:t>
             </a:r>
           </a:p>
         </p:txBody>
@@ -22477,7 +22581,7 @@
                 <a:ea typeface="NanumGothic"/>
                 <a:cs typeface="NanumGothic"/>
               </a:rPr>
-              <a:t>검색/도구 연결</a:t>
+              <a:t>corpus 폴더 검색 연결</a:t>
             </a:r>
           </a:p>
         </p:txBody>

--- a/slides/day4.pptx
+++ b/slides/day4.pptx
@@ -5102,7 +5102,7 @@
                 <a:cs typeface="NanumGothic"/>
               </a:rPr>
               <a:t>동작하는 리서치 에이전트 MVP
-(구성도 placeholder)</a:t>
+구조: examples/research-agent 참고</a:t>
             </a:r>
           </a:p>
         </p:txBody>
@@ -6224,7 +6224,7 @@
                 <a:cs typeface="NanumGothic"/>
               </a:rPr>
               <a:t>검증·인용 보고서까지 되는 에이전트 v1
-(구성도 placeholder)</a:t>
+구조: examples/research-agent 참고</a:t>
             </a:r>
           </a:p>
         </p:txBody>
@@ -9430,7 +9430,7 @@
                 <a:cs typeface="NanumGothic"/>
               </a:rPr>
               <a:t>1차 실행 로그 + 결과물
-(placeholder)</a:t>
+실행 기록: run-log-template.md</a:t>
             </a:r>
           </a:p>
         </p:txBody>
@@ -16661,7 +16661,7 @@
                 <a:cs typeface="NanumGothic"/>
               </a:rPr>
               <a:t>최종 결과물 + 분석 노트(강점·약점·개선점)
-에이전트 완주! (placeholder)</a:t>
+에이전트 완주! → 분석: result-analysis-template.md</a:t>
             </a:r>
           </a:p>
         </p:txBody>

--- a/slides/day4.pptx
+++ b/slides/day4.pptx
@@ -4411,7 +4411,7 @@
                 <a:ea typeface="NanumGothic"/>
                 <a:cs typeface="NanumGothic"/>
               </a:rPr>
-              <a:t>실습 단계 (placeholder)</a:t>
+              <a:t>실습 단계</a:t>
             </a:r>
           </a:p>
         </p:txBody>
@@ -5533,7 +5533,7 @@
                 <a:ea typeface="NanumGothic"/>
                 <a:cs typeface="NanumGothic"/>
               </a:rPr>
-              <a:t>실습 단계 (placeholder)</a:t>
+              <a:t>실습 단계</a:t>
             </a:r>
           </a:p>
         </p:txBody>
@@ -8739,7 +8739,7 @@
                 <a:ea typeface="NanumGothic"/>
                 <a:cs typeface="NanumGothic"/>
               </a:rPr>
-              <a:t>실습 단계 (placeholder)</a:t>
+              <a:t>실습 단계</a:t>
             </a:r>
           </a:p>
         </p:txBody>
@@ -15970,7 +15970,7 @@
                 <a:ea typeface="NanumGothic"/>
                 <a:cs typeface="NanumGothic"/>
               </a:rPr>
-              <a:t>실습 단계 (placeholder)</a:t>
+              <a:t>실습 단계</a:t>
             </a:r>
           </a:p>
         </p:txBody>

--- a/slides/day4.pptx
+++ b/slides/day4.pptx
@@ -3378,7 +3378,7 @@
                 <a:ea typeface="NanumGothic"/>
                 <a:cs typeface="NanumGothic"/>
               </a:rPr>
-              <a:t>팀 주제로 리서치 에이전트를 설계·구현하고, 실행하며 결과를 분석한다</a:t>
+              <a:t>팀 분야에서 가설 생성 에이전트를 구현·실행해 rationale 갖춘 새 가설을 제안한다</a:t>
             </a:r>
           </a:p>
         </p:txBody>
@@ -4180,7 +4180,7 @@
                 <a:ea typeface="NanumSquare"/>
                 <a:cs typeface="NanumSquare"/>
               </a:rPr>
-              <a:t>구현 ① — 기본 흐름 &amp; 검색(로컬 corpus)</a:t>
+              <a:t>구현 ① — 자료 파악 &amp; gap 발견</a:t>
             </a:r>
           </a:p>
         </p:txBody>
@@ -4549,7 +4549,7 @@
                 <a:ea typeface="NanumGothic"/>
                 <a:cs typeface="NanumGothic"/>
               </a:rPr>
-              <a:t>기본 흐름(질문→검색→요약)</a:t>
+              <a:t>주제·자료(corpus) 입력</a:t>
             </a:r>
           </a:p>
         </p:txBody>
@@ -4687,7 +4687,7 @@
                 <a:ea typeface="NanumGothic"/>
                 <a:cs typeface="NanumGothic"/>
               </a:rPr>
-              <a:t>corpus 폴더 검색 연결</a:t>
+              <a:t>검색 → 주장·근거 정리</a:t>
             </a:r>
           </a:p>
         </p:txBody>
@@ -4825,7 +4825,7 @@
                 <a:ea typeface="NanumGothic"/>
                 <a:cs typeface="NanumGothic"/>
               </a:rPr>
-              <a:t>MVP 1회 동작 확인</a:t>
+              <a:t>모순·공백(gap) 찾기</a:t>
             </a:r>
           </a:p>
         </p:txBody>
@@ -4963,7 +4963,7 @@
                 <a:ea typeface="NanumGothic"/>
                 <a:cs typeface="NanumGothic"/>
               </a:rPr>
-              <a:t>소규모 테스트</a:t>
+              <a:t>MVP 1회 동작 확인</a:t>
             </a:r>
           </a:p>
         </p:txBody>
@@ -5101,7 +5101,7 @@
                 <a:ea typeface="NanumGothic"/>
                 <a:cs typeface="NanumGothic"/>
               </a:rPr>
-              <a:t>동작하는 리서치 에이전트 MVP
+              <a:t>자료 파악 + gap 발견까지 되는 MVP
 구조: examples/research-agent 참고</a:t>
             </a:r>
           </a:p>
@@ -5302,7 +5302,7 @@
                 <a:ea typeface="NanumSquare"/>
                 <a:cs typeface="NanumSquare"/>
               </a:rPr>
-              <a:t>구현 ② — 검증 &amp; 종합·보고</a:t>
+              <a:t>구현 ② — 가설 생성 &amp; 평가</a:t>
             </a:r>
           </a:p>
         </p:txBody>
@@ -5671,7 +5671,7 @@
                 <a:ea typeface="NanumGothic"/>
                 <a:cs typeface="NanumGothic"/>
               </a:rPr>
-              <a:t>검증 로직(출처·교차확인)</a:t>
+              <a:t>gap에서 가설 다수 생성</a:t>
             </a:r>
           </a:p>
         </p:txBody>
@@ -5809,7 +5809,7 @@
                 <a:ea typeface="NanumGothic"/>
                 <a:cs typeface="NanumGothic"/>
               </a:rPr>
-              <a:t>종합 → 인용 보고서 생성</a:t>
+              <a:t>각 가설에 rationale·근거</a:t>
             </a:r>
           </a:p>
         </p:txBody>
@@ -5947,7 +5947,7 @@
                 <a:ea typeface="NanumGothic"/>
                 <a:cs typeface="NanumGothic"/>
               </a:rPr>
-              <a:t>상충·불확실성 표기</a:t>
+              <a:t>평가·우선순위</a:t>
             </a:r>
           </a:p>
         </p:txBody>
@@ -6223,7 +6223,7 @@
                 <a:ea typeface="NanumGothic"/>
                 <a:cs typeface="NanumGothic"/>
               </a:rPr>
-              <a:t>검증·인용 보고서까지 되는 에이전트 v1
+              <a:t>가설 제안(평가 포함)까지 되는 에이전트 v1
 구조: examples/research-agent 참고</a:t>
             </a:r>
           </a:p>
@@ -6482,7 +6482,7 @@
                 <a:ea typeface="NanumGothic"/>
                 <a:cs typeface="NanumGothic"/>
               </a:rPr>
-              <a:t>팀 주제로 1차 실행하고, 결과를 관찰하며 반복 개선한다.</a:t>
+              <a:t>팀 분야로 1차 실행해 가설 후보를 만들고, 관찰하며 반복 개선한다.</a:t>
             </a:r>
           </a:p>
         </p:txBody>
@@ -7556,7 +7556,7 @@
                 <a:ea typeface="NanumGothic"/>
                 <a:cs typeface="NanumGothic"/>
               </a:rPr>
-              <a:t>1차 결과 점검</a:t>
+              <a:t>1차 가설 점검</a:t>
             </a:r>
           </a:p>
         </p:txBody>
@@ -7985,7 +7985,7 @@
                 <a:ea typeface="NanumGothic"/>
                 <a:cs typeface="NanumGothic"/>
               </a:rPr>
-              <a:t>실제 질문으로 구동</a:t>
+              <a:t>실제 분야로 구동</a:t>
             </a:r>
           </a:p>
         </p:txBody>
@@ -8032,7 +8032,7 @@
                 <a:ea typeface="NanumGothic"/>
                 <a:cs typeface="NanumGothic"/>
               </a:rPr>
-              <a:t>팀 주제 투입</a:t>
+              <a:t>팀 분야·자료 투입</a:t>
             </a:r>
           </a:p>
         </p:txBody>
@@ -8877,7 +8877,7 @@
                 <a:ea typeface="NanumGothic"/>
                 <a:cs typeface="NanumGothic"/>
               </a:rPr>
-              <a:t>팀 주제로 1차 실행</a:t>
+              <a:t>팀 분야로 1차 실행 → 가설 후보</a:t>
             </a:r>
           </a:p>
         </p:txBody>
@@ -9429,7 +9429,7 @@
                 <a:ea typeface="NanumGothic"/>
                 <a:cs typeface="NanumGothic"/>
               </a:rPr>
-              <a:t>1차 실행 로그 + 결과물
+              <a:t>1차 실행 로그 + 가설 후보
 실행 기록: run-log-template.md</a:t>
             </a:r>
           </a:p>
@@ -9630,7 +9630,7 @@
                 <a:ea typeface="NanumSquare"/>
                 <a:cs typeface="NanumSquare"/>
               </a:rPr>
-              <a:t>1차 결과 빠른 점검</a:t>
+              <a:t>1차 가설 빠른 점검</a:t>
             </a:r>
           </a:p>
         </p:txBody>
@@ -9859,7 +9859,7 @@
                 <a:ea typeface="NanumGothic"/>
                 <a:cs typeface="NanumGothic"/>
               </a:rPr>
-              <a:t>정확성·출처는?</a:t>
+              <a:t>근거 있나?</a:t>
             </a:r>
           </a:p>
         </p:txBody>
@@ -9906,7 +9906,7 @@
                 <a:ea typeface="NanumGothic"/>
                 <a:cs typeface="NanumGothic"/>
               </a:rPr>
-              <a:t>근거 확인</a:t>
+              <a:t>gap·출처에 기반했나</a:t>
             </a:r>
           </a:p>
         </p:txBody>
@@ -9997,7 +9997,7 @@
                 <a:ea typeface="NanumGothic"/>
                 <a:cs typeface="NanumGothic"/>
               </a:rPr>
-              <a:t>빠진 내용은?</a:t>
+              <a:t>새로운가?</a:t>
             </a:r>
           </a:p>
         </p:txBody>
@@ -10044,7 +10044,7 @@
                 <a:ea typeface="NanumGothic"/>
                 <a:cs typeface="NanumGothic"/>
               </a:rPr>
-              <a:t>커버리지</a:t>
+              <a:t>이미 있는 가설 아닌지</a:t>
             </a:r>
           </a:p>
         </p:txBody>
@@ -10135,7 +10135,7 @@
                 <a:ea typeface="NanumGothic"/>
                 <a:cs typeface="NanumGothic"/>
               </a:rPr>
-              <a:t>다음 개선 포인트</a:t>
+              <a:t>검증 가능한가?</a:t>
             </a:r>
           </a:p>
         </p:txBody>
@@ -10440,7 +10440,7 @@
                 <a:ea typeface="NanumGothic"/>
                 <a:cs typeface="NanumGothic"/>
               </a:rPr>
-              <a:t>평가 기준으로 결과를 분석하고, 개선 방향을 도출해 재실행한다.</a:t>
+              <a:t>근거·새로움·타당성 기준으로 가설을 평가하고, 우선순위 가설을 제안으로 확정한다.</a:t>
             </a:r>
           </a:p>
         </p:txBody>
@@ -11146,7 +11146,7 @@
                 <a:ea typeface="NanumGothic"/>
                 <a:cs typeface="NanumGothic"/>
               </a:rPr>
-              <a:t>결과 평가 기준</a:t>
+              <a:t>좋은 가설 평가란</a:t>
             </a:r>
           </a:p>
         </p:txBody>
@@ -11330,7 +11330,7 @@
                 <a:ea typeface="NanumGothic"/>
                 <a:cs typeface="NanumGothic"/>
               </a:rPr>
-              <a:t>정확성·출처 / 누락·편향</a:t>
+              <a:t>가설 평가 기준</a:t>
             </a:r>
           </a:p>
         </p:txBody>
@@ -11514,7 +11514,7 @@
                 <a:ea typeface="NanumGothic"/>
                 <a:cs typeface="NanumGothic"/>
               </a:rPr>
-              <a:t>품질 vs 개선 방향</a:t>
+              <a:t>우선순위 vs 개선 방향</a:t>
             </a:r>
           </a:p>
         </p:txBody>
@@ -11698,7 +11698,7 @@
                 <a:ea typeface="NanumGothic"/>
                 <a:cs typeface="NanumGothic"/>
               </a:rPr>
-              <a:t>재실행·분석(실습)</a:t>
+              <a:t>재실행·평가(실습)</a:t>
             </a:r>
           </a:p>
         </p:txBody>
@@ -11898,7 +11898,7 @@
                 <a:ea typeface="NanumSquare"/>
                 <a:cs typeface="NanumSquare"/>
               </a:rPr>
-              <a:t>결과를 평가한다는 것</a:t>
+              <a:t>좋은 가설을 평가한다는 것</a:t>
             </a:r>
           </a:p>
         </p:txBody>
@@ -12312,7 +12312,7 @@
                 <a:ea typeface="NanumGothic"/>
                 <a:cs typeface="NanumGothic"/>
               </a:rPr>
-              <a:t>정확성·완전성·재현성</a:t>
+              <a:t>근거·새로움·타당성·feasibility</a:t>
             </a:r>
           </a:p>
         </p:txBody>
@@ -13911,7 +13911,7 @@
                 <a:ea typeface="NanumSquare"/>
                 <a:cs typeface="NanumSquare"/>
               </a:rPr>
-              <a:t>정확성·출처 / 누락·편향</a:t>
+              <a:t>가설 평가 기준</a:t>
             </a:r>
           </a:p>
         </p:txBody>
@@ -14140,7 +14140,7 @@
                 <a:ea typeface="NanumGothic"/>
                 <a:cs typeface="NanumGothic"/>
               </a:rPr>
-              <a:t>주장에 근거가 있는가</a:t>
+              <a:t>근거·rationale</a:t>
             </a:r>
           </a:p>
         </p:txBody>
@@ -14187,7 +14187,7 @@
                 <a:ea typeface="NanumGothic"/>
                 <a:cs typeface="NanumGothic"/>
               </a:rPr>
-              <a:t>출처 확인·신뢰도</a:t>
+              <a:t>gap·출처에 제대로 기반했나</a:t>
             </a:r>
           </a:p>
         </p:txBody>
@@ -14278,7 +14278,7 @@
                 <a:ea typeface="NanumGothic"/>
                 <a:cs typeface="NanumGothic"/>
               </a:rPr>
-              <a:t>빠진 관점·편향은 없나</a:t>
+              <a:t>새로움·중요성</a:t>
             </a:r>
           </a:p>
         </p:txBody>
@@ -14325,7 +14325,7 @@
                 <a:ea typeface="NanumGothic"/>
                 <a:cs typeface="NanumGothic"/>
               </a:rPr>
-              <a:t>커버리지</a:t>
+              <a:t>이미 있나 · 풀 가치 있나</a:t>
             </a:r>
           </a:p>
         </p:txBody>
@@ -14416,7 +14416,7 @@
                 <a:ea typeface="NanumGothic"/>
                 <a:cs typeface="NanumGothic"/>
               </a:rPr>
-              <a:t>불확실성은 표기됐나</a:t>
+              <a:t>타당성·feasibility</a:t>
             </a:r>
           </a:p>
         </p:txBody>
@@ -14463,7 +14463,7 @@
                 <a:ea typeface="NanumGothic"/>
                 <a:cs typeface="NanumGothic"/>
               </a:rPr>
-              <a:t>한계 명시</a:t>
+              <a:t>그럴듯한가 · 검증 가능한가</a:t>
             </a:r>
           </a:p>
         </p:txBody>
@@ -14663,7 +14663,7 @@
                 <a:ea typeface="NanumSquare"/>
                 <a:cs typeface="NanumSquare"/>
               </a:rPr>
-              <a:t>품질 점검 vs 개선 방향</a:t>
+              <a:t>우선순위 vs 개선 방향</a:t>
             </a:r>
           </a:p>
         </p:txBody>
@@ -14938,7 +14938,7 @@
                 <a:ea typeface="NanumSquare"/>
                 <a:cs typeface="NanumSquare"/>
               </a:rPr>
-              <a:t>품질 점검</a:t>
+              <a:t>우선순위 기준</a:t>
             </a:r>
           </a:p>
         </p:txBody>
@@ -14996,7 +14996,7 @@
                 <a:ea typeface="NanumGothic"/>
                 <a:cs typeface="NanumGothic"/>
               </a:rPr>
-              <a:t>정확성·출처</a:t>
+              <a:t>rationale 강함</a:t>
             </a:r>
           </a:p>
         </p:txBody>
@@ -15054,7 +15054,7 @@
                 <a:ea typeface="NanumGothic"/>
                 <a:cs typeface="NanumGothic"/>
               </a:rPr>
-              <a:t>누락·편향</a:t>
+              <a:t>새로움</a:t>
             </a:r>
           </a:p>
         </p:txBody>
@@ -15112,7 +15112,7 @@
                 <a:ea typeface="NanumGothic"/>
                 <a:cs typeface="NanumGothic"/>
               </a:rPr>
-              <a:t>재현성</a:t>
+              <a:t>중요성</a:t>
             </a:r>
           </a:p>
         </p:txBody>
@@ -15170,7 +15170,7 @@
                 <a:ea typeface="NanumGothic"/>
                 <a:cs typeface="NanumGothic"/>
               </a:rPr>
-              <a:t>일관성</a:t>
+              <a:t>검증 가능성</a:t>
             </a:r>
           </a:p>
         </p:txBody>
@@ -15365,7 +15365,7 @@
                 <a:ea typeface="NanumGothic"/>
                 <a:cs typeface="NanumGothic"/>
               </a:rPr>
-              <a:t>프롬프트 보완</a:t>
+              <a:t>근거 보강</a:t>
             </a:r>
           </a:p>
         </p:txBody>
@@ -15423,7 +15423,7 @@
                 <a:ea typeface="NanumGothic"/>
                 <a:cs typeface="NanumGothic"/>
               </a:rPr>
-              <a:t>검증 강화</a:t>
+              <a:t>가설 구체화</a:t>
             </a:r>
           </a:p>
         </p:txBody>
@@ -15481,7 +15481,7 @@
                 <a:ea typeface="NanumGothic"/>
                 <a:cs typeface="NanumGothic"/>
               </a:rPr>
-              <a:t>범위 조정</a:t>
+              <a:t>생성 다양화</a:t>
             </a:r>
           </a:p>
         </p:txBody>
@@ -15539,7 +15539,7 @@
                 <a:ea typeface="NanumGothic"/>
                 <a:cs typeface="NanumGothic"/>
               </a:rPr>
-              <a:t>출처 확대</a:t>
+              <a:t>평가 강화</a:t>
             </a:r>
           </a:p>
         </p:txBody>
@@ -15739,7 +15739,7 @@
                 <a:ea typeface="NanumSquare"/>
                 <a:cs typeface="NanumSquare"/>
               </a:rPr>
-              <a:t>재실행 &amp; 결과 분석 → 최종 확정</a:t>
+              <a:t>재실행 &amp; 가설 평가 → 제안 확정</a:t>
             </a:r>
           </a:p>
         </p:txBody>
@@ -16108,7 +16108,7 @@
                 <a:ea typeface="NanumGothic"/>
                 <a:cs typeface="NanumGothic"/>
               </a:rPr>
-              <a:t>개선 항목 반영·재실행</a:t>
+              <a:t>개선 반영·재실행</a:t>
             </a:r>
           </a:p>
         </p:txBody>
@@ -16246,7 +16246,7 @@
                 <a:ea typeface="NanumGothic"/>
                 <a:cs typeface="NanumGothic"/>
               </a:rPr>
-              <a:t>강점/약점·한계 표 정리</a:t>
+              <a:t>가설 강점/약점·rationale 표</a:t>
             </a:r>
           </a:p>
         </p:txBody>
@@ -16384,7 +16384,7 @@
                 <a:ea typeface="NanumGothic"/>
                 <a:cs typeface="NanumGothic"/>
               </a:rPr>
-              <a:t>발표 후보 결과 선별</a:t>
+              <a:t>우선순위 가설 1~2개 선별</a:t>
             </a:r>
           </a:p>
         </p:txBody>
@@ -16522,7 +16522,7 @@
                 <a:ea typeface="NanumGothic"/>
                 <a:cs typeface="NanumGothic"/>
               </a:rPr>
-              <a:t>최종 결과 확정</a:t>
+              <a:t>가설 제안 확정</a:t>
             </a:r>
           </a:p>
         </p:txBody>
@@ -16660,7 +16660,7 @@
                 <a:ea typeface="NanumGothic"/>
                 <a:cs typeface="NanumGothic"/>
               </a:rPr>
-              <a:t>최종 결과물 + 분석 노트(강점·약점·개선점)
+              <a:t>최종 가설 제안 + 분석 노트
 에이전트 완주! → 분석: result-analysis-template.md</a:t>
             </a:r>
           </a:p>
@@ -17137,7 +17137,7 @@
                 <a:ea typeface="NanumGothic"/>
                 <a:cs typeface="NanumGothic"/>
               </a:rPr>
-              <a:t>팀 에이전트를 MVP → 검증·종합(인용 보고서) 순으로 3세션 안에 완주</a:t>
+              <a:t>에이전트를 자료파악 → gap → 가설생성 → 평가 순으로 3세션 안에 완주</a:t>
             </a:r>
           </a:p>
         </p:txBody>
@@ -17319,7 +17319,7 @@
                 <a:ea typeface="NanumGothic"/>
                 <a:cs typeface="NanumGothic"/>
               </a:rPr>
-              <a:t>결과는 근거를 갖고 평가 — 강점·약점·개선점 정리</a:t>
+              <a:t>가설은 근거(rationale)·새로움·타당성으로 평가 — 우선순위로 제안</a:t>
             </a:r>
           </a:p>
         </p:txBody>
@@ -17459,7 +17459,7 @@
                 <a:ea typeface="NanumGothic"/>
                 <a:cs typeface="NanumGothic"/>
               </a:rPr>
-              <a:t>실행·분석을 마무리하고, AI 에이전트로 보고서·발표자료를 만들어 팀별로 발표합니다.</a:t>
+              <a:t>버퍼로 마무리하고, AI 에이전트로 가설 제안서·발표자료를 만들어 팀별로 발표합니다.</a:t>
             </a:r>
           </a:p>
         </p:txBody>
@@ -18083,7 +18083,7 @@
                 <a:ea typeface="NanumGothic"/>
                 <a:cs typeface="NanumGothic"/>
               </a:rPr>
-              <a:t>설계를 코드로 — MVP에서 검증·확장까지</a:t>
+              <a:t>자료파악→gap→가설생성→평가 파이프라인 구현</a:t>
             </a:r>
           </a:p>
         </p:txBody>
@@ -18463,7 +18463,7 @@
                 <a:ea typeface="NanumGothic"/>
                 <a:cs typeface="NanumGothic"/>
               </a:rPr>
-              <a:t>1차 실행·반복 개선</a:t>
+              <a:t>1차 실행→가설 후보·반복 개선</a:t>
             </a:r>
           </a:p>
         </p:txBody>
@@ -18843,7 +18843,7 @@
                 <a:ea typeface="NanumGothic"/>
                 <a:cs typeface="NanumGothic"/>
               </a:rPr>
-              <a:t>결과 평가·개선</a:t>
+              <a:t>가설 평가·우선순위→제안 확정</a:t>
             </a:r>
           </a:p>
         </p:txBody>
@@ -19195,7 +19195,7 @@
                 <a:ea typeface="NanumGothic"/>
                 <a:cs typeface="NanumGothic"/>
               </a:rPr>
-              <a:t>팀 주제 발표·강사 피드백으로 방향을 확정하고, 리서치 에이전트를 설계·구현한다.</a:t>
+              <a:t>팀 발표·강사 피드백으로 방향을 확정하고, 가설 생성 에이전트를 설계·구현한다.</a:t>
             </a:r>
           </a:p>
         </p:txBody>
@@ -19901,7 +19901,7 @@
                 <a:ea typeface="NanumGothic"/>
                 <a:cs typeface="NanumGothic"/>
               </a:rPr>
-              <a:t>팀 주제 발표 + 강사 피드백</a:t>
+              <a:t>팀 발표 + 강사 피드백</a:t>
             </a:r>
           </a:p>
         </p:txBody>
@@ -20637,7 +20637,7 @@
                 <a:ea typeface="NanumGothic"/>
                 <a:cs typeface="NanumGothic"/>
               </a:rPr>
-              <a:t>구현① 기본 흐름·검색(corpus)</a:t>
+              <a:t>구현① 자료 파악·gap 발견</a:t>
             </a:r>
           </a:p>
         </p:txBody>
@@ -20821,7 +20821,7 @@
                 <a:ea typeface="NanumGothic"/>
                 <a:cs typeface="NanumGothic"/>
               </a:rPr>
-              <a:t>구현② 검증·종합·보고</a:t>
+              <a:t>구현② 가설 생성·평가</a:t>
             </a:r>
           </a:p>
         </p:txBody>
@@ -21021,7 +21021,7 @@
                 <a:ea typeface="NanumSquare"/>
                 <a:cs typeface="NanumSquare"/>
               </a:rPr>
-              <a:t>팀별 주제 발표 → 강사 피드백</a:t>
+              <a:t>팀별 발표 → 강사 피드백</a:t>
             </a:r>
           </a:p>
         </p:txBody>
@@ -21297,7 +21297,7 @@
                 <a:ea typeface="NanumGothic"/>
                 <a:cs typeface="NanumGothic"/>
               </a:rPr>
-              <a:t>주제 · 선정 이유 · 핵심 질문</a:t>
+              <a:t>분야 · 발견 목표 · 왜 가치 있나</a:t>
             </a:r>
           </a:p>
         </p:txBody>
@@ -21435,7 +21435,7 @@
                 <a:ea typeface="NanumGothic"/>
                 <a:cs typeface="NanumGothic"/>
               </a:rPr>
-              <a:t>스코프 적정? · 핵심질문 명확? · corpus 확보?</a:t>
+              <a:t>스코프 적정? · 발견 목표 명확? · corpus 확보?</a:t>
             </a:r>
           </a:p>
         </p:txBody>
@@ -21573,7 +21573,7 @@
                 <a:ea typeface="NanumGothic"/>
                 <a:cs typeface="NanumGothic"/>
               </a:rPr>
-              <a:t>피드백대로 스코프·질문 조정 후 빌드 시작</a:t>
+              <a:t>피드백대로 조정 후 빌드 시작</a:t>
             </a:r>
           </a:p>
         </p:txBody>
@@ -22153,7 +22153,7 @@
                 <a:ea typeface="NanumGothic"/>
                 <a:cs typeface="NanumGothic"/>
               </a:rPr>
-              <a:t>질문 → 검색(로컬 corpus) → 검증 → 종합 → 인용 보고서</a:t>
+              <a:t>자료 파악 → gap 발견 → 가설 생성(다수) → 평가·제안</a:t>
             </a:r>
           </a:p>
         </p:txBody>
@@ -22429,7 +22429,7 @@
                 <a:ea typeface="NanumGothic"/>
                 <a:cs typeface="NanumGothic"/>
               </a:rPr>
-              <a:t>Day 4 끝 = 핵심 질문에 답하는 1~2장 인용 보고서</a:t>
+              <a:t>Day 4 끝 = rationale 갖춘 새 가설 제안서</a:t>
             </a:r>
           </a:p>
         </p:txBody>
@@ -22962,7 +22962,7 @@
                 <a:ea typeface="NanumGothic"/>
                 <a:cs typeface="NanumGothic"/>
               </a:rPr>
-              <a:t>주제·핵심 질문 재확인</a:t>
+              <a:t>분야·발견 목표 재확인</a:t>
             </a:r>
           </a:p>
         </p:txBody>
@@ -23147,7 +23147,7 @@
                 <a:ea typeface="NanumGothic"/>
                 <a:cs typeface="NanumGothic"/>
               </a:rPr>
-              <a:t>어떤 문서 폴더에서 검색하나</a:t>
+              <a:t>어떤 문서 폴더에서 자료 파악하나</a:t>
             </a:r>
           </a:p>
         </p:txBody>
@@ -23285,7 +23285,7 @@
                 <a:ea typeface="NanumGothic"/>
                 <a:cs typeface="NanumGothic"/>
               </a:rPr>
-              <a:t>인용 보고서 구조 합의</a:t>
+              <a:t>가설 제안서 구조 합의</a:t>
             </a:r>
           </a:p>
         </p:txBody>
@@ -23761,7 +23761,7 @@
                 <a:ea typeface="NanumGothic"/>
                 <a:cs typeface="NanumGothic"/>
               </a:rPr>
-              <a:t>질문 → 검색 → 요약</a:t>
+              <a:t>자료 파악 → gap 1개 → 가설 1개</a:t>
             </a:r>
           </a:p>
         </p:txBody>
@@ -23899,7 +23899,7 @@
                 <a:ea typeface="NanumGothic"/>
                 <a:cs typeface="NanumGothic"/>
               </a:rPr>
-              <a:t>검증·인용 추가</a:t>
+              <a:t>다수 생성·평가 추가</a:t>
             </a:r>
           </a:p>
         </p:txBody>

--- a/slides/day4.pptx
+++ b/slides/day4.pptx
@@ -29,6 +29,8 @@
     <p:sldId id="277" r:id="rId28"/>
     <p:sldId id="278" r:id="rId29"/>
     <p:sldId id="279" r:id="rId30"/>
+    <p:sldId id="280" r:id="rId31"/>
+    <p:sldId id="281" r:id="rId32"/>
   </p:sldIdLst>
   <p:sldSz cx="12191695" cy="6858000" type="screen4x3"/>
   <p:notesSz cx="6858000" cy="9144000"/>
@@ -10672,7 +10674,7 @@
                 <a:ea typeface="NanumGothic"/>
                 <a:cs typeface="NanumGothic"/>
               </a:rPr>
-              <a:t>90분 · 4 파트</a:t>
+              <a:t>90분 · 5 파트</a:t>
             </a:r>
           </a:p>
         </p:txBody>
@@ -11087,7 +11089,7 @@
                 <a:ea typeface="NanumGothic"/>
                 <a:cs typeface="NanumGothic"/>
               </a:rPr>
-              <a:t>가설 생성 (다수)</a:t>
+              <a:t>방법론 — MOOSE-Chem 청사진</a:t>
             </a:r>
           </a:p>
         </p:txBody>
@@ -11271,7 +11273,7 @@
                 <a:ea typeface="NanumGothic"/>
                 <a:cs typeface="NanumGothic"/>
               </a:rPr>
-              <a:t>평가·우선순위 (생성 vs 선별)</a:t>
+              <a:t>가설 생성 (gap + 조합)</a:t>
             </a:r>
           </a:p>
         </p:txBody>
@@ -11422,6 +11424,190 @@
         <p:spPr>
           <a:xfrm>
             <a:off x="1216152" y="4288536"/>
+            <a:ext cx="10287000" cy="603504"/>
+          </a:xfrm>
+          <a:prstGeom prst="rect">
+            <a:avLst/>
+          </a:prstGeom>
+          <a:noFill/>
+        </p:spPr>
+        <p:txBody>
+          <a:bodyPr wrap="square" anchor="ctr" lIns="0" rIns="0" tIns="0" bIns="0">
+            <a:spAutoFit/>
+          </a:bodyPr>
+          <a:lstStyle/>
+          <a:p>
+            <a:pPr algn="l">
+              <a:lnSpc>
+                <a:spcPct val="100000"/>
+              </a:lnSpc>
+              <a:spcBef>
+                <a:spcPts val="0"/>
+              </a:spcBef>
+              <a:spcAft>
+                <a:spcPts val="600"/>
+              </a:spcAft>
+            </a:pPr>
+            <a:r>
+              <a:rPr sz="1400" b="1">
+                <a:solidFill>
+                  <a:srgbClr val="0F172A"/>
+                </a:solidFill>
+                <a:latin typeface="NanumGothic"/>
+                <a:ea typeface="NanumGothic"/>
+                <a:cs typeface="NanumGothic"/>
+              </a:rPr>
+              <a:t>평가·우선순위 (생성 vs 선별)</a:t>
+            </a:r>
+          </a:p>
+        </p:txBody>
+      </p:sp>
+      <p:sp>
+        <p:nvSpPr>
+          <p:cNvPr id="28" name="Rounded Rectangle 27"/>
+          <p:cNvSpPr/>
+          <p:nvPr/>
+        </p:nvSpPr>
+        <p:spPr>
+          <a:xfrm>
+            <a:off x="502920" y="5001768"/>
+            <a:ext cx="11155680" cy="603504"/>
+          </a:xfrm>
+          <a:prstGeom prst="roundRect">
+            <a:avLst/>
+          </a:prstGeom>
+          <a:solidFill>
+            <a:srgbClr val="F8FAFC"/>
+          </a:solidFill>
+          <a:ln w="12700">
+            <a:solidFill>
+              <a:srgbClr val="E2E8F0"/>
+            </a:solidFill>
+          </a:ln>
+          <a:effectLst/>
+        </p:spPr>
+        <p:style>
+          <a:lnRef idx="1">
+            <a:schemeClr val="accent1"/>
+          </a:lnRef>
+          <a:fillRef idx="3">
+            <a:schemeClr val="accent1"/>
+          </a:fillRef>
+          <a:effectRef idx="2">
+            <a:schemeClr val="accent1"/>
+          </a:effectRef>
+          <a:fontRef idx="minor">
+            <a:schemeClr val="lt1"/>
+          </a:fontRef>
+        </p:style>
+        <p:txBody>
+          <a:bodyPr rtlCol="0" anchor="ctr"/>
+          <a:lstStyle/>
+          <a:p>
+            <a:pPr algn="ctr"/>
+          </a:p>
+        </p:txBody>
+      </p:sp>
+      <p:sp>
+        <p:nvSpPr>
+          <p:cNvPr id="29" name="Oval 28"/>
+          <p:cNvSpPr/>
+          <p:nvPr/>
+        </p:nvSpPr>
+        <p:spPr>
+          <a:xfrm>
+            <a:off x="649224" y="5120640"/>
+            <a:ext cx="384048" cy="384048"/>
+          </a:xfrm>
+          <a:prstGeom prst="ellipse">
+            <a:avLst/>
+          </a:prstGeom>
+          <a:solidFill>
+            <a:srgbClr val="F59E0B"/>
+          </a:solidFill>
+          <a:ln>
+            <a:noFill/>
+          </a:ln>
+          <a:effectLst/>
+        </p:spPr>
+        <p:style>
+          <a:lnRef idx="1">
+            <a:schemeClr val="accent1"/>
+          </a:lnRef>
+          <a:fillRef idx="3">
+            <a:schemeClr val="accent1"/>
+          </a:fillRef>
+          <a:effectRef idx="2">
+            <a:schemeClr val="accent1"/>
+          </a:effectRef>
+          <a:fontRef idx="minor">
+            <a:schemeClr val="lt1"/>
+          </a:fontRef>
+        </p:style>
+        <p:txBody>
+          <a:bodyPr rtlCol="0" anchor="ctr"/>
+          <a:lstStyle/>
+          <a:p>
+            <a:pPr algn="ctr"/>
+          </a:p>
+        </p:txBody>
+      </p:sp>
+      <p:sp>
+        <p:nvSpPr>
+          <p:cNvPr id="30" name="TextBox 29"/>
+          <p:cNvSpPr txBox="1"/>
+          <p:nvPr/>
+        </p:nvSpPr>
+        <p:spPr>
+          <a:xfrm>
+            <a:off x="649224" y="5120640"/>
+            <a:ext cx="384048" cy="384048"/>
+          </a:xfrm>
+          <a:prstGeom prst="rect">
+            <a:avLst/>
+          </a:prstGeom>
+          <a:noFill/>
+        </p:spPr>
+        <p:txBody>
+          <a:bodyPr wrap="square" anchor="ctr" lIns="0" rIns="0" tIns="0" bIns="0">
+            <a:spAutoFit/>
+          </a:bodyPr>
+          <a:lstStyle/>
+          <a:p>
+            <a:pPr algn="ctr">
+              <a:lnSpc>
+                <a:spcPct val="100000"/>
+              </a:lnSpc>
+              <a:spcBef>
+                <a:spcPts val="0"/>
+              </a:spcBef>
+              <a:spcAft>
+                <a:spcPts val="600"/>
+              </a:spcAft>
+            </a:pPr>
+            <a:r>
+              <a:rPr sz="1300" b="1">
+                <a:solidFill>
+                  <a:srgbClr val="FFFFFF"/>
+                </a:solidFill>
+                <a:latin typeface="NanumSquare"/>
+                <a:ea typeface="NanumSquare"/>
+                <a:cs typeface="NanumSquare"/>
+              </a:rPr>
+              <a:t>5</a:t>
+            </a:r>
+          </a:p>
+        </p:txBody>
+      </p:sp>
+      <p:sp>
+        <p:nvSpPr>
+          <p:cNvPr id="31" name="TextBox 30"/>
+          <p:cNvSpPr txBox="1"/>
+          <p:nvPr/>
+        </p:nvSpPr>
+        <p:spPr>
+          <a:xfrm>
+            <a:off x="1216152" y="5001768"/>
             <a:ext cx="10287000" cy="603504"/>
           </a:xfrm>
           <a:prstGeom prst="rect">
@@ -13725,7 +13911,7 @@
                 <a:ea typeface="NanumGothic"/>
                 <a:cs typeface="NanumGothic"/>
               </a:rPr>
-              <a:t>가설 생성</a:t>
+              <a:t>방법론</a:t>
             </a:r>
           </a:p>
         </p:txBody>
@@ -13772,7 +13958,7 @@
                 <a:ea typeface="NanumSquare"/>
                 <a:cs typeface="NanumSquare"/>
               </a:rPr>
-              <a:t>gap에서 가설 다수 만들기</a:t>
+              <a:t>가설 생성 방법론 — MOOSE-Chem 청사진</a:t>
             </a:r>
           </a:p>
         </p:txBody>
@@ -13917,16 +14103,62 @@
       </p:sp>
       <p:sp>
         <p:nvSpPr>
-          <p:cNvPr id="9" name="Oval 8"/>
+          <p:cNvPr id="9" name="Rounded Rectangle 8"/>
           <p:cNvSpPr/>
           <p:nvPr/>
         </p:nvSpPr>
         <p:spPr>
           <a:xfrm>
-            <a:off x="548640" y="1911096"/>
-            <a:ext cx="146304" cy="146304"/>
-          </a:xfrm>
-          <a:prstGeom prst="ellipse">
+            <a:off x="502920" y="2651760"/>
+            <a:ext cx="3505200" cy="1737360"/>
+          </a:xfrm>
+          <a:prstGeom prst="roundRect">
+            <a:avLst/>
+          </a:prstGeom>
+          <a:solidFill>
+            <a:srgbClr val="F8FAFC"/>
+          </a:solidFill>
+          <a:ln w="12700">
+            <a:solidFill>
+              <a:srgbClr val="E2E8F0"/>
+            </a:solidFill>
+          </a:ln>
+          <a:effectLst/>
+        </p:spPr>
+        <p:style>
+          <a:lnRef idx="1">
+            <a:schemeClr val="accent1"/>
+          </a:lnRef>
+          <a:fillRef idx="3">
+            <a:schemeClr val="accent1"/>
+          </a:fillRef>
+          <a:effectRef idx="2">
+            <a:schemeClr val="accent1"/>
+          </a:effectRef>
+          <a:fontRef idx="minor">
+            <a:schemeClr val="lt1"/>
+          </a:fontRef>
+        </p:style>
+        <p:txBody>
+          <a:bodyPr rtlCol="0" anchor="ctr"/>
+          <a:lstStyle/>
+          <a:p>
+            <a:pPr algn="ctr"/>
+          </a:p>
+        </p:txBody>
+      </p:sp>
+      <p:sp>
+        <p:nvSpPr>
+          <p:cNvPr id="10" name="Rectangle 9"/>
+          <p:cNvSpPr/>
+          <p:nvPr/>
+        </p:nvSpPr>
+        <p:spPr>
+          <a:xfrm>
+            <a:off x="502920" y="2651760"/>
+            <a:ext cx="3505200" cy="109728"/>
+          </a:xfrm>
+          <a:prstGeom prst="rect">
             <a:avLst/>
           </a:prstGeom>
           <a:solidFill>
@@ -13961,14 +14193,14 @@
       </p:sp>
       <p:sp>
         <p:nvSpPr>
-          <p:cNvPr id="10" name="TextBox 9"/>
-          <p:cNvSpPr txBox="1"/>
-          <p:nvPr/>
-        </p:nvSpPr>
-        <p:spPr>
-          <a:xfrm>
-            <a:off x="868680" y="1828800"/>
-            <a:ext cx="10607040" cy="457200"/>
+          <p:cNvPr id="11" name="TextBox 10"/>
+          <p:cNvSpPr txBox="1"/>
+          <p:nvPr/>
+        </p:nvSpPr>
+        <p:spPr>
+          <a:xfrm>
+            <a:off x="640080" y="2944368"/>
+            <a:ext cx="3230880" cy="365760"/>
           </a:xfrm>
           <a:prstGeom prst="rect">
             <a:avLst/>
@@ -13993,7 +14225,54 @@
               </a:spcAft>
             </a:pPr>
             <a:r>
-              <a:rPr sz="1600" b="1">
+              <a:rPr sz="1300" b="1">
+                <a:solidFill>
+                  <a:srgbClr val="F59E0B"/>
+                </a:solidFill>
+                <a:latin typeface="NanumSquare"/>
+                <a:ea typeface="NanumSquare"/>
+                <a:cs typeface="NanumSquare"/>
+              </a:rPr>
+              <a:t>1</a:t>
+            </a:r>
+          </a:p>
+        </p:txBody>
+      </p:sp>
+      <p:sp>
+        <p:nvSpPr>
+          <p:cNvPr id="12" name="TextBox 11"/>
+          <p:cNvSpPr txBox="1"/>
+          <p:nvPr/>
+        </p:nvSpPr>
+        <p:spPr>
+          <a:xfrm>
+            <a:off x="640080" y="3310128"/>
+            <a:ext cx="3230880" cy="548640"/>
+          </a:xfrm>
+          <a:prstGeom prst="rect">
+            <a:avLst/>
+          </a:prstGeom>
+          <a:noFill/>
+        </p:spPr>
+        <p:txBody>
+          <a:bodyPr wrap="square" anchor="t" lIns="0" rIns="0" tIns="0" bIns="0">
+            <a:spAutoFit/>
+          </a:bodyPr>
+          <a:lstStyle/>
+          <a:p>
+            <a:pPr algn="l">
+              <a:lnSpc>
+                <a:spcPct val="100000"/>
+              </a:lnSpc>
+              <a:spcBef>
+                <a:spcPts val="0"/>
+              </a:spcBef>
+              <a:spcAft>
+                <a:spcPts val="600"/>
+              </a:spcAft>
+            </a:pPr>
+            <a:r>
+              <a:rPr sz="1500" b="1">
                 <a:solidFill>
                   <a:srgbClr val="0F172A"/>
                 </a:solidFill>
@@ -14001,21 +14280,21 @@
                 <a:ea typeface="NanumGothic"/>
                 <a:cs typeface="NanumGothic"/>
               </a:rPr>
-              <a:t>각 gap에서 여러 개</a:t>
-            </a:r>
-          </a:p>
-        </p:txBody>
-      </p:sp>
-      <p:sp>
-        <p:nvSpPr>
-          <p:cNvPr id="11" name="TextBox 10"/>
-          <p:cNvSpPr txBox="1"/>
-          <p:nvPr/>
-        </p:nvSpPr>
-        <p:spPr>
-          <a:xfrm>
-            <a:off x="868680" y="2212848"/>
-            <a:ext cx="10607040" cy="457200"/>
+              <a:t>영감 검색</a:t>
+            </a:r>
+          </a:p>
+        </p:txBody>
+      </p:sp>
+      <p:sp>
+        <p:nvSpPr>
+          <p:cNvPr id="13" name="TextBox 12"/>
+          <p:cNvSpPr txBox="1"/>
+          <p:nvPr/>
+        </p:nvSpPr>
+        <p:spPr>
+          <a:xfrm>
+            <a:off x="640080" y="3822192"/>
+            <a:ext cx="3230880" cy="457200"/>
           </a:xfrm>
           <a:prstGeom prst="rect">
             <a:avLst/>
@@ -14040,7 +14319,7 @@
               </a:spcAft>
             </a:pPr>
             <a:r>
-              <a:rPr sz="1300" b="0">
+              <a:rPr sz="1100" b="0">
                 <a:solidFill>
                   <a:srgbClr val="64748B"/>
                 </a:solidFill>
@@ -14048,23 +14327,116 @@
                 <a:ea typeface="NanumGothic"/>
                 <a:cs typeface="NanumGothic"/>
               </a:rPr>
-              <a:t>하나가 아니라 6~10개 — breadth</a:t>
-            </a:r>
-          </a:p>
-        </p:txBody>
-      </p:sp>
-      <p:sp>
-        <p:nvSpPr>
-          <p:cNvPr id="12" name="Oval 11"/>
+              <a:t>논문에서 아이디어</a:t>
+            </a:r>
+          </a:p>
+        </p:txBody>
+      </p:sp>
+      <p:sp>
+        <p:nvSpPr>
+          <p:cNvPr id="14" name="TextBox 13"/>
+          <p:cNvSpPr txBox="1"/>
+          <p:nvPr/>
+        </p:nvSpPr>
+        <p:spPr>
+          <a:xfrm>
+            <a:off x="4053840" y="3154680"/>
+            <a:ext cx="274320" cy="548640"/>
+          </a:xfrm>
+          <a:prstGeom prst="rect">
+            <a:avLst/>
+          </a:prstGeom>
+          <a:noFill/>
+        </p:spPr>
+        <p:txBody>
+          <a:bodyPr wrap="square" anchor="ctr" lIns="0" rIns="0" tIns="0" bIns="0">
+            <a:spAutoFit/>
+          </a:bodyPr>
+          <a:lstStyle/>
+          <a:p>
+            <a:pPr algn="ctr">
+              <a:lnSpc>
+                <a:spcPct val="100000"/>
+              </a:lnSpc>
+              <a:spcBef>
+                <a:spcPts val="0"/>
+              </a:spcBef>
+              <a:spcAft>
+                <a:spcPts val="600"/>
+              </a:spcAft>
+            </a:pPr>
+            <a:r>
+              <a:rPr sz="2200" b="1">
+                <a:solidFill>
+                  <a:srgbClr val="F59E0B"/>
+                </a:solidFill>
+                <a:latin typeface="NanumSquare"/>
+                <a:ea typeface="NanumSquare"/>
+                <a:cs typeface="NanumSquare"/>
+              </a:rPr>
+              <a:t>→</a:t>
+            </a:r>
+          </a:p>
+        </p:txBody>
+      </p:sp>
+      <p:sp>
+        <p:nvSpPr>
+          <p:cNvPr id="15" name="Rounded Rectangle 14"/>
           <p:cNvSpPr/>
           <p:nvPr/>
         </p:nvSpPr>
         <p:spPr>
           <a:xfrm>
-            <a:off x="548640" y="2779776"/>
-            <a:ext cx="146304" cy="146304"/>
-          </a:xfrm>
-          <a:prstGeom prst="ellipse">
+            <a:off x="4328160" y="2651760"/>
+            <a:ext cx="3505200" cy="1737360"/>
+          </a:xfrm>
+          <a:prstGeom prst="roundRect">
+            <a:avLst/>
+          </a:prstGeom>
+          <a:solidFill>
+            <a:srgbClr val="F8FAFC"/>
+          </a:solidFill>
+          <a:ln w="12700">
+            <a:solidFill>
+              <a:srgbClr val="E2E8F0"/>
+            </a:solidFill>
+          </a:ln>
+          <a:effectLst/>
+        </p:spPr>
+        <p:style>
+          <a:lnRef idx="1">
+            <a:schemeClr val="accent1"/>
+          </a:lnRef>
+          <a:fillRef idx="3">
+            <a:schemeClr val="accent1"/>
+          </a:fillRef>
+          <a:effectRef idx="2">
+            <a:schemeClr val="accent1"/>
+          </a:effectRef>
+          <a:fontRef idx="minor">
+            <a:schemeClr val="lt1"/>
+          </a:fontRef>
+        </p:style>
+        <p:txBody>
+          <a:bodyPr rtlCol="0" anchor="ctr"/>
+          <a:lstStyle/>
+          <a:p>
+            <a:pPr algn="ctr"/>
+          </a:p>
+        </p:txBody>
+      </p:sp>
+      <p:sp>
+        <p:nvSpPr>
+          <p:cNvPr id="16" name="Rectangle 15"/>
+          <p:cNvSpPr/>
+          <p:nvPr/>
+        </p:nvSpPr>
+        <p:spPr>
+          <a:xfrm>
+            <a:off x="4328160" y="2651760"/>
+            <a:ext cx="3505200" cy="109728"/>
+          </a:xfrm>
+          <a:prstGeom prst="rect">
             <a:avLst/>
           </a:prstGeom>
           <a:solidFill>
@@ -14099,14 +14471,14 @@
       </p:sp>
       <p:sp>
         <p:nvSpPr>
-          <p:cNvPr id="13" name="TextBox 12"/>
-          <p:cNvSpPr txBox="1"/>
-          <p:nvPr/>
-        </p:nvSpPr>
-        <p:spPr>
-          <a:xfrm>
-            <a:off x="868680" y="2697480"/>
-            <a:ext cx="10607040" cy="457200"/>
+          <p:cNvPr id="17" name="TextBox 16"/>
+          <p:cNvSpPr txBox="1"/>
+          <p:nvPr/>
+        </p:nvSpPr>
+        <p:spPr>
+          <a:xfrm>
+            <a:off x="4465320" y="2944368"/>
+            <a:ext cx="3230880" cy="365760"/>
           </a:xfrm>
           <a:prstGeom prst="rect">
             <a:avLst/>
@@ -14131,7 +14503,54 @@
               </a:spcAft>
             </a:pPr>
             <a:r>
-              <a:rPr sz="1600" b="1">
+              <a:rPr sz="1300" b="1">
+                <a:solidFill>
+                  <a:srgbClr val="F59E0B"/>
+                </a:solidFill>
+                <a:latin typeface="NanumSquare"/>
+                <a:ea typeface="NanumSquare"/>
+                <a:cs typeface="NanumSquare"/>
+              </a:rPr>
+              <a:t>2</a:t>
+            </a:r>
+          </a:p>
+        </p:txBody>
+      </p:sp>
+      <p:sp>
+        <p:nvSpPr>
+          <p:cNvPr id="18" name="TextBox 17"/>
+          <p:cNvSpPr txBox="1"/>
+          <p:nvPr/>
+        </p:nvSpPr>
+        <p:spPr>
+          <a:xfrm>
+            <a:off x="4465320" y="3310128"/>
+            <a:ext cx="3230880" cy="548640"/>
+          </a:xfrm>
+          <a:prstGeom prst="rect">
+            <a:avLst/>
+          </a:prstGeom>
+          <a:noFill/>
+        </p:spPr>
+        <p:txBody>
+          <a:bodyPr wrap="square" anchor="t" lIns="0" rIns="0" tIns="0" bIns="0">
+            <a:spAutoFit/>
+          </a:bodyPr>
+          <a:lstStyle/>
+          <a:p>
+            <a:pPr algn="l">
+              <a:lnSpc>
+                <a:spcPct val="100000"/>
+              </a:lnSpc>
+              <a:spcBef>
+                <a:spcPts val="0"/>
+              </a:spcBef>
+              <a:spcAft>
+                <a:spcPts val="600"/>
+              </a:spcAft>
+            </a:pPr>
+            <a:r>
+              <a:rPr sz="1500" b="1">
                 <a:solidFill>
                   <a:srgbClr val="0F172A"/>
                 </a:solidFill>
@@ -14139,21 +14558,21 @@
                 <a:ea typeface="NanumGothic"/>
                 <a:cs typeface="NanumGothic"/>
               </a:rPr>
-              <a:t>검증 가능한 형태로</a:t>
-            </a:r>
-          </a:p>
-        </p:txBody>
-      </p:sp>
-      <p:sp>
-        <p:nvSpPr>
-          <p:cNvPr id="14" name="TextBox 13"/>
-          <p:cNvSpPr txBox="1"/>
-          <p:nvPr/>
-        </p:nvSpPr>
-        <p:spPr>
-          <a:xfrm>
-            <a:off x="868680" y="3081528"/>
-            <a:ext cx="10607040" cy="457200"/>
+              <a:t>조합 생성</a:t>
+            </a:r>
+          </a:p>
+        </p:txBody>
+      </p:sp>
+      <p:sp>
+        <p:nvSpPr>
+          <p:cNvPr id="19" name="TextBox 18"/>
+          <p:cNvSpPr txBox="1"/>
+          <p:nvPr/>
+        </p:nvSpPr>
+        <p:spPr>
+          <a:xfrm>
+            <a:off x="4465320" y="3822192"/>
+            <a:ext cx="3230880" cy="457200"/>
           </a:xfrm>
           <a:prstGeom prst="rect">
             <a:avLst/>
@@ -14178,7 +14597,7 @@
               </a:spcAft>
             </a:pPr>
             <a:r>
-              <a:rPr sz="1300" b="0">
+              <a:rPr sz="1100" b="0">
                 <a:solidFill>
                   <a:srgbClr val="64748B"/>
                 </a:solidFill>
@@ -14186,23 +14605,116 @@
                 <a:ea typeface="NanumGothic"/>
                 <a:cs typeface="NanumGothic"/>
               </a:rPr>
-              <a:t>'~한 조건에서 ~할 것이다' (한 문장)</a:t>
-            </a:r>
-          </a:p>
-        </p:txBody>
-      </p:sp>
-      <p:sp>
-        <p:nvSpPr>
-          <p:cNvPr id="15" name="Oval 14"/>
+              <a:t>배경+영감 → 가설</a:t>
+            </a:r>
+          </a:p>
+        </p:txBody>
+      </p:sp>
+      <p:sp>
+        <p:nvSpPr>
+          <p:cNvPr id="20" name="TextBox 19"/>
+          <p:cNvSpPr txBox="1"/>
+          <p:nvPr/>
+        </p:nvSpPr>
+        <p:spPr>
+          <a:xfrm>
+            <a:off x="7879080" y="3154680"/>
+            <a:ext cx="274320" cy="548640"/>
+          </a:xfrm>
+          <a:prstGeom prst="rect">
+            <a:avLst/>
+          </a:prstGeom>
+          <a:noFill/>
+        </p:spPr>
+        <p:txBody>
+          <a:bodyPr wrap="square" anchor="ctr" lIns="0" rIns="0" tIns="0" bIns="0">
+            <a:spAutoFit/>
+          </a:bodyPr>
+          <a:lstStyle/>
+          <a:p>
+            <a:pPr algn="ctr">
+              <a:lnSpc>
+                <a:spcPct val="100000"/>
+              </a:lnSpc>
+              <a:spcBef>
+                <a:spcPts val="0"/>
+              </a:spcBef>
+              <a:spcAft>
+                <a:spcPts val="600"/>
+              </a:spcAft>
+            </a:pPr>
+            <a:r>
+              <a:rPr sz="2200" b="1">
+                <a:solidFill>
+                  <a:srgbClr val="F59E0B"/>
+                </a:solidFill>
+                <a:latin typeface="NanumSquare"/>
+                <a:ea typeface="NanumSquare"/>
+                <a:cs typeface="NanumSquare"/>
+              </a:rPr>
+              <a:t>→</a:t>
+            </a:r>
+          </a:p>
+        </p:txBody>
+      </p:sp>
+      <p:sp>
+        <p:nvSpPr>
+          <p:cNvPr id="21" name="Rounded Rectangle 20"/>
           <p:cNvSpPr/>
           <p:nvPr/>
         </p:nvSpPr>
         <p:spPr>
           <a:xfrm>
-            <a:off x="548640" y="3648456"/>
-            <a:ext cx="146304" cy="146304"/>
-          </a:xfrm>
-          <a:prstGeom prst="ellipse">
+            <a:off x="8153400" y="2651760"/>
+            <a:ext cx="3505200" cy="1737360"/>
+          </a:xfrm>
+          <a:prstGeom prst="roundRect">
+            <a:avLst/>
+          </a:prstGeom>
+          <a:solidFill>
+            <a:srgbClr val="F8FAFC"/>
+          </a:solidFill>
+          <a:ln w="12700">
+            <a:solidFill>
+              <a:srgbClr val="E2E8F0"/>
+            </a:solidFill>
+          </a:ln>
+          <a:effectLst/>
+        </p:spPr>
+        <p:style>
+          <a:lnRef idx="1">
+            <a:schemeClr val="accent1"/>
+          </a:lnRef>
+          <a:fillRef idx="3">
+            <a:schemeClr val="accent1"/>
+          </a:fillRef>
+          <a:effectRef idx="2">
+            <a:schemeClr val="accent1"/>
+          </a:effectRef>
+          <a:fontRef idx="minor">
+            <a:schemeClr val="lt1"/>
+          </a:fontRef>
+        </p:style>
+        <p:txBody>
+          <a:bodyPr rtlCol="0" anchor="ctr"/>
+          <a:lstStyle/>
+          <a:p>
+            <a:pPr algn="ctr"/>
+          </a:p>
+        </p:txBody>
+      </p:sp>
+      <p:sp>
+        <p:nvSpPr>
+          <p:cNvPr id="22" name="Rectangle 21"/>
+          <p:cNvSpPr/>
+          <p:nvPr/>
+        </p:nvSpPr>
+        <p:spPr>
+          <a:xfrm>
+            <a:off x="8153400" y="2651760"/>
+            <a:ext cx="3505200" cy="109728"/>
+          </a:xfrm>
+          <a:prstGeom prst="rect">
             <a:avLst/>
           </a:prstGeom>
           <a:solidFill>
@@ -14237,14 +14749,14 @@
       </p:sp>
       <p:sp>
         <p:nvSpPr>
-          <p:cNvPr id="16" name="TextBox 15"/>
-          <p:cNvSpPr txBox="1"/>
-          <p:nvPr/>
-        </p:nvSpPr>
-        <p:spPr>
-          <a:xfrm>
-            <a:off x="868680" y="3566160"/>
-            <a:ext cx="10607040" cy="457200"/>
+          <p:cNvPr id="23" name="TextBox 22"/>
+          <p:cNvSpPr txBox="1"/>
+          <p:nvPr/>
+        </p:nvSpPr>
+        <p:spPr>
+          <a:xfrm>
+            <a:off x="8290560" y="2944368"/>
+            <a:ext cx="3230880" cy="365760"/>
           </a:xfrm>
           <a:prstGeom prst="rect">
             <a:avLst/>
@@ -14269,7 +14781,54 @@
               </a:spcAft>
             </a:pPr>
             <a:r>
-              <a:rPr sz="1600" b="1">
+              <a:rPr sz="1300" b="1">
+                <a:solidFill>
+                  <a:srgbClr val="F59E0B"/>
+                </a:solidFill>
+                <a:latin typeface="NanumSquare"/>
+                <a:ea typeface="NanumSquare"/>
+                <a:cs typeface="NanumSquare"/>
+              </a:rPr>
+              <a:t>3</a:t>
+            </a:r>
+          </a:p>
+        </p:txBody>
+      </p:sp>
+      <p:sp>
+        <p:nvSpPr>
+          <p:cNvPr id="24" name="TextBox 23"/>
+          <p:cNvSpPr txBox="1"/>
+          <p:nvPr/>
+        </p:nvSpPr>
+        <p:spPr>
+          <a:xfrm>
+            <a:off x="8290560" y="3310128"/>
+            <a:ext cx="3230880" cy="548640"/>
+          </a:xfrm>
+          <a:prstGeom prst="rect">
+            <a:avLst/>
+          </a:prstGeom>
+          <a:noFill/>
+        </p:spPr>
+        <p:txBody>
+          <a:bodyPr wrap="square" anchor="t" lIns="0" rIns="0" tIns="0" bIns="0">
+            <a:spAutoFit/>
+          </a:bodyPr>
+          <a:lstStyle/>
+          <a:p>
+            <a:pPr algn="l">
+              <a:lnSpc>
+                <a:spcPct val="100000"/>
+              </a:lnSpc>
+              <a:spcBef>
+                <a:spcPts val="0"/>
+              </a:spcBef>
+              <a:spcAft>
+                <a:spcPts val="600"/>
+              </a:spcAft>
+            </a:pPr>
+            <a:r>
+              <a:rPr sz="1500" b="1">
                 <a:solidFill>
                   <a:srgbClr val="0F172A"/>
                 </a:solidFill>
@@ -14277,21 +14836,21 @@
                 <a:ea typeface="NanumGothic"/>
                 <a:cs typeface="NanumGothic"/>
               </a:rPr>
-              <a:t>근거 태그</a:t>
-            </a:r>
-          </a:p>
-        </p:txBody>
-      </p:sp>
-      <p:sp>
-        <p:nvSpPr>
-          <p:cNvPr id="17" name="TextBox 16"/>
-          <p:cNvSpPr txBox="1"/>
-          <p:nvPr/>
-        </p:nvSpPr>
-        <p:spPr>
-          <a:xfrm>
-            <a:off x="868680" y="3950208"/>
-            <a:ext cx="10607040" cy="457200"/>
+              <a:t>순위</a:t>
+            </a:r>
+          </a:p>
+        </p:txBody>
+      </p:sp>
+      <p:sp>
+        <p:nvSpPr>
+          <p:cNvPr id="25" name="TextBox 24"/>
+          <p:cNvSpPr txBox="1"/>
+          <p:nvPr/>
+        </p:nvSpPr>
+        <p:spPr>
+          <a:xfrm>
+            <a:off x="8290560" y="3822192"/>
+            <a:ext cx="3230880" cy="457200"/>
           </a:xfrm>
           <a:prstGeom prst="rect">
             <a:avLst/>
@@ -14316,7 +14875,7 @@
               </a:spcAft>
             </a:pPr>
             <a:r>
-              <a:rPr sz="1300" b="0">
+              <a:rPr sz="1100" b="0">
                 <a:solidFill>
                   <a:srgbClr val="64748B"/>
                 </a:solidFill>
@@ -14324,20 +14883,20 @@
                 <a:ea typeface="NanumGothic"/>
                 <a:cs typeface="NanumGothic"/>
               </a:rPr>
-              <a:t>어느 gap·논문에서 나왔는지 표기</a:t>
-            </a:r>
-          </a:p>
-        </p:txBody>
-      </p:sp>
-      <p:sp>
-        <p:nvSpPr>
-          <p:cNvPr id="18" name="Rounded Rectangle 17"/>
+              <a:t>평가·랭킹</a:t>
+            </a:r>
+          </a:p>
+        </p:txBody>
+      </p:sp>
+      <p:sp>
+        <p:nvSpPr>
+          <p:cNvPr id="26" name="Rounded Rectangle 25"/>
           <p:cNvSpPr/>
           <p:nvPr/>
         </p:nvSpPr>
         <p:spPr>
           <a:xfrm>
-            <a:off x="502920" y="5532120"/>
+            <a:off x="502920" y="5029200"/>
             <a:ext cx="11155680" cy="658368"/>
           </a:xfrm>
           <a:prstGeom prst="roundRect">
@@ -14377,13 +14936,13 @@
       </p:sp>
       <p:sp>
         <p:nvSpPr>
-          <p:cNvPr id="19" name="TextBox 18"/>
-          <p:cNvSpPr txBox="1"/>
-          <p:nvPr/>
-        </p:nvSpPr>
-        <p:spPr>
-          <a:xfrm>
-            <a:off x="777240" y="5532120"/>
+          <p:cNvPr id="27" name="TextBox 26"/>
+          <p:cNvSpPr txBox="1"/>
+          <p:nvPr/>
+        </p:nvSpPr>
+        <p:spPr>
+          <a:xfrm>
+            <a:off x="777240" y="5029200"/>
             <a:ext cx="10607040" cy="658368"/>
           </a:xfrm>
           <a:prstGeom prst="rect">
@@ -14428,7 +14987,7 @@
                 <a:ea typeface="NanumGothic"/>
                 <a:cs typeface="NanumGothic"/>
               </a:rPr>
-              <a:t>예: '단시간 수면자는 특정 유전형에서 인지저하가 덜할 것이다'</a:t>
+              <a:t>연구로 검증된 3단계 (MOOSE-Chem, ICLR'25 · 화학) — 우리는 간소화해 차용</a:t>
             </a:r>
           </a:p>
         </p:txBody>
@@ -14581,7 +15140,7 @@
                 <a:ea typeface="NanumGothic"/>
                 <a:cs typeface="NanumGothic"/>
               </a:rPr>
-              <a:t>평가·우선순위</a:t>
+              <a:t>가설 생성</a:t>
             </a:r>
           </a:p>
         </p:txBody>
@@ -14628,7 +15187,7 @@
                 <a:ea typeface="NanumSquare"/>
                 <a:cs typeface="NanumSquare"/>
               </a:rPr>
-              <a:t>생성 → 선별 (강의 쟁점 적용)</a:t>
+              <a:t>가설 만들기 — 두 갈래</a:t>
             </a:r>
           </a:p>
         </p:txBody>
@@ -14903,7 +15462,7 @@
                 <a:ea typeface="NanumSquare"/>
                 <a:cs typeface="NanumSquare"/>
               </a:rPr>
-              <a:t>생성 (breadth)</a:t>
+              <a:t>gap 기반</a:t>
             </a:r>
           </a:p>
         </p:txBody>
@@ -14961,7 +15520,7 @@
                 <a:ea typeface="NanumGothic"/>
                 <a:cs typeface="NanumGothic"/>
               </a:rPr>
-              <a:t>많이·다양하게</a:t>
+              <a:t>모순·미검증·공백에서</a:t>
             </a:r>
           </a:p>
         </p:txBody>
@@ -15019,7 +15578,7 @@
                 <a:ea typeface="NanumGothic"/>
                 <a:cs typeface="NanumGothic"/>
               </a:rPr>
-              <a:t>데이터/도구로 제약</a:t>
+              <a:t>'~조건에서 ~할 것이다'</a:t>
             </a:r>
           </a:p>
         </p:txBody>
@@ -15077,7 +15636,7 @@
                 <a:ea typeface="NanumGothic"/>
                 <a:cs typeface="NanumGothic"/>
               </a:rPr>
-              <a:t>이미 있는 건 제외</a:t>
+              <a:t>근거: 어느 gap</a:t>
             </a:r>
           </a:p>
         </p:txBody>
@@ -15214,7 +15773,7 @@
                 <a:ea typeface="NanumSquare"/>
                 <a:cs typeface="NanumSquare"/>
               </a:rPr>
-              <a:t>선별 (우선순위)</a:t>
+              <a:t>조합(영감) 기반</a:t>
             </a:r>
           </a:p>
         </p:txBody>
@@ -15272,7 +15831,7 @@
                 <a:ea typeface="NanumGothic"/>
                 <a:cs typeface="NanumGothic"/>
               </a:rPr>
-              <a:t>근거·새로움·중요성</a:t>
+              <a:t>다른 논문 아이디어를 끌어와</a:t>
             </a:r>
           </a:p>
         </p:txBody>
@@ -15330,7 +15889,7 @@
                 <a:ea typeface="NanumGothic"/>
                 <a:cs typeface="NanumGothic"/>
               </a:rPr>
-              <a:t>검증 가능성</a:t>
+              <a:t>배경 + 영감 = 새 가설</a:t>
             </a:r>
           </a:p>
         </p:txBody>
@@ -15388,7 +15947,7 @@
                 <a:ea typeface="NanumGothic"/>
                 <a:cs typeface="NanumGothic"/>
               </a:rPr>
-              <a:t>상위 1~2개 추리기</a:t>
+              <a:t>근거: 어느 논문</a:t>
             </a:r>
           </a:p>
         </p:txBody>
@@ -15541,7 +16100,7 @@
                 <a:ea typeface="NanumGothic"/>
                 <a:cs typeface="NanumGothic"/>
               </a:rPr>
-              <a:t>점검</a:t>
+              <a:t>생성 원칙</a:t>
             </a:r>
           </a:p>
         </p:txBody>
@@ -15588,7 +16147,7 @@
                 <a:ea typeface="NanumSquare"/>
                 <a:cs typeface="NanumSquare"/>
               </a:rPr>
-              <a:t>제안 전 마지막 점검</a:t>
+              <a:t>많이·다양하게 — 그리고 제약</a:t>
             </a:r>
           </a:p>
         </p:txBody>
@@ -15817,7 +16376,7 @@
                 <a:ea typeface="NanumGothic"/>
                 <a:cs typeface="NanumGothic"/>
               </a:rPr>
-              <a:t>근거 있나?</a:t>
+              <a:t>각 갈래에서 여러 개</a:t>
             </a:r>
           </a:p>
         </p:txBody>
@@ -15864,7 +16423,7 @@
                 <a:ea typeface="NanumGothic"/>
                 <a:cs typeface="NanumGothic"/>
               </a:rPr>
-              <a:t>막연한 상상 아닌, gap·출처 기반</a:t>
+              <a:t>하나가 아니라 6~10개 — breadth</a:t>
             </a:r>
           </a:p>
         </p:txBody>
@@ -15955,7 +16514,7 @@
                 <a:ea typeface="NanumGothic"/>
                 <a:cs typeface="NanumGothic"/>
               </a:rPr>
-              <a:t>새로운가?</a:t>
+              <a:t>검증 가능·근거 태그</a:t>
             </a:r>
           </a:p>
         </p:txBody>
@@ -16002,7 +16561,7 @@
                 <a:ea typeface="NanumGothic"/>
                 <a:cs typeface="NanumGothic"/>
               </a:rPr>
-              <a:t>기존 논문에 이미 있는 건 아닌지</a:t>
+              <a:t>한 문장 + 어디서 나왔는지</a:t>
             </a:r>
           </a:p>
         </p:txBody>
@@ -16093,7 +16652,7 @@
                 <a:ea typeface="NanumGothic"/>
                 <a:cs typeface="NanumGothic"/>
               </a:rPr>
-              <a:t>검증 아이디어 있나?</a:t>
+              <a:t>이미 있는 건 제외</a:t>
             </a:r>
           </a:p>
         </p:txBody>
@@ -16140,7 +16699,7 @@
                 <a:ea typeface="NanumGothic"/>
                 <a:cs typeface="NanumGothic"/>
               </a:rPr>
-              <a:t>어떻게 확인할지 한 줄이라도</a:t>
+              <a:t>가용 데이터/도구로 제약</a:t>
             </a:r>
           </a:p>
         </p:txBody>
@@ -16244,7 +16803,7 @@
                 <a:ea typeface="NanumGothic"/>
                 <a:cs typeface="NanumGothic"/>
               </a:rPr>
-              <a:t>약하면 되돌아가 재생성·보강 (iteration)</a:t>
+              <a:t>예: '단시간 수면자는 특정 유전형에서 인지저하가 덜할 것이다'</a:t>
             </a:r>
           </a:p>
         </p:txBody>
@@ -16397,7 +16956,7 @@
                 <a:ea typeface="NanumGothic"/>
                 <a:cs typeface="NanumGothic"/>
               </a:rPr>
-              <a:t>LAB · 실습</a:t>
+              <a:t>평가·우선순위</a:t>
             </a:r>
           </a:p>
         </p:txBody>
@@ -16444,7 +17003,7 @@
                 <a:ea typeface="NanumSquare"/>
                 <a:cs typeface="NanumSquare"/>
               </a:rPr>
-              <a:t>가설 생성·평가 → 제안 확정</a:t>
+              <a:t>생성 → 선별 (강의 쟁점 적용)</a:t>
             </a:r>
           </a:p>
         </p:txBody>
@@ -16595,8 +17154,8 @@
         </p:nvSpPr>
         <p:spPr>
           <a:xfrm>
-            <a:off x="502920" y="1783080"/>
-            <a:ext cx="7315200" cy="4160520"/>
+            <a:off x="502920" y="1828800"/>
+            <a:ext cx="5440680" cy="4023360"/>
           </a:xfrm>
           <a:prstGeom prst="roundRect">
             <a:avLst/>
@@ -16635,63 +17194,16 @@
       </p:sp>
       <p:sp>
         <p:nvSpPr>
-          <p:cNvPr id="10" name="TextBox 9"/>
-          <p:cNvSpPr txBox="1"/>
-          <p:nvPr/>
-        </p:nvSpPr>
-        <p:spPr>
-          <a:xfrm>
-            <a:off x="777240" y="1965960"/>
-            <a:ext cx="6766560" cy="365760"/>
-          </a:xfrm>
-          <a:prstGeom prst="rect">
-            <a:avLst/>
-          </a:prstGeom>
-          <a:noFill/>
-        </p:spPr>
-        <p:txBody>
-          <a:bodyPr wrap="square" anchor="t" lIns="0" rIns="0" tIns="0" bIns="0">
-            <a:spAutoFit/>
-          </a:bodyPr>
-          <a:lstStyle/>
-          <a:p>
-            <a:pPr algn="l">
-              <a:lnSpc>
-                <a:spcPct val="100000"/>
-              </a:lnSpc>
-              <a:spcBef>
-                <a:spcPts val="0"/>
-              </a:spcBef>
-              <a:spcAft>
-                <a:spcPts val="600"/>
-              </a:spcAft>
-            </a:pPr>
-            <a:r>
-              <a:rPr sz="1300" b="1">
-                <a:solidFill>
-                  <a:srgbClr val="F59E0B"/>
-                </a:solidFill>
-                <a:latin typeface="NanumGothic"/>
-                <a:ea typeface="NanumGothic"/>
-                <a:cs typeface="NanumGothic"/>
-              </a:rPr>
-              <a:t>실습 단계</a:t>
-            </a:r>
-          </a:p>
-        </p:txBody>
-      </p:sp>
-      <p:sp>
-        <p:nvSpPr>
-          <p:cNvPr id="11" name="Oval 10"/>
+          <p:cNvPr id="10" name="Rounded Rectangle 9"/>
           <p:cNvSpPr/>
           <p:nvPr/>
         </p:nvSpPr>
         <p:spPr>
           <a:xfrm>
-            <a:off x="777240" y="2468880"/>
-            <a:ext cx="411480" cy="411480"/>
-          </a:xfrm>
-          <a:prstGeom prst="ellipse">
+            <a:off x="502920" y="1828800"/>
+            <a:ext cx="5440680" cy="640080"/>
+          </a:xfrm>
+          <a:prstGeom prst="roundRect">
             <a:avLst/>
           </a:prstGeom>
           <a:solidFill>
@@ -16726,14 +17238,14 @@
       </p:sp>
       <p:sp>
         <p:nvSpPr>
-          <p:cNvPr id="12" name="TextBox 11"/>
-          <p:cNvSpPr txBox="1"/>
-          <p:nvPr/>
-        </p:nvSpPr>
-        <p:spPr>
-          <a:xfrm>
-            <a:off x="777240" y="2468880"/>
-            <a:ext cx="411480" cy="411480"/>
+          <p:cNvPr id="11" name="TextBox 10"/>
+          <p:cNvSpPr txBox="1"/>
+          <p:nvPr/>
+        </p:nvSpPr>
+        <p:spPr>
+          <a:xfrm>
+            <a:off x="777240" y="1828800"/>
+            <a:ext cx="4937760" cy="640080"/>
           </a:xfrm>
           <a:prstGeom prst="rect">
             <a:avLst/>
@@ -16746,19 +17258,19 @@
           </a:bodyPr>
           <a:lstStyle/>
           <a:p>
-            <a:pPr algn="ctr">
-              <a:lnSpc>
-                <a:spcPct val="100000"/>
-              </a:lnSpc>
-              <a:spcBef>
-                <a:spcPts val="0"/>
-              </a:spcBef>
-              <a:spcAft>
-                <a:spcPts val="600"/>
-              </a:spcAft>
-            </a:pPr>
-            <a:r>
-              <a:rPr sz="1300" b="1">
+            <a:pPr algn="l">
+              <a:lnSpc>
+                <a:spcPct val="100000"/>
+              </a:lnSpc>
+              <a:spcBef>
+                <a:spcPts val="0"/>
+              </a:spcBef>
+              <a:spcAft>
+                <a:spcPts val="600"/>
+              </a:spcAft>
+            </a:pPr>
+            <a:r>
+              <a:rPr sz="1600" b="1">
                 <a:solidFill>
                   <a:srgbClr val="FFFFFF"/>
                 </a:solidFill>
@@ -16766,29 +17278,29 @@
                 <a:ea typeface="NanumSquare"/>
                 <a:cs typeface="NanumSquare"/>
               </a:rPr>
-              <a:t>1</a:t>
-            </a:r>
-          </a:p>
-        </p:txBody>
-      </p:sp>
-      <p:sp>
-        <p:nvSpPr>
-          <p:cNvPr id="13" name="TextBox 12"/>
-          <p:cNvSpPr txBox="1"/>
-          <p:nvPr/>
-        </p:nvSpPr>
-        <p:spPr>
-          <a:xfrm>
-            <a:off x="1371600" y="2487168"/>
-            <a:ext cx="6309360" cy="457200"/>
-          </a:xfrm>
-          <a:prstGeom prst="rect">
-            <a:avLst/>
-          </a:prstGeom>
-          <a:noFill/>
-        </p:spPr>
-        <p:txBody>
-          <a:bodyPr wrap="square" anchor="ctr" lIns="0" rIns="0" tIns="0" bIns="0">
+              <a:t>생성 (breadth)</a:t>
+            </a:r>
+          </a:p>
+        </p:txBody>
+      </p:sp>
+      <p:sp>
+        <p:nvSpPr>
+          <p:cNvPr id="12" name="TextBox 11"/>
+          <p:cNvSpPr txBox="1"/>
+          <p:nvPr/>
+        </p:nvSpPr>
+        <p:spPr>
+          <a:xfrm>
+            <a:off x="822960" y="2697480"/>
+            <a:ext cx="4846320" cy="548640"/>
+          </a:xfrm>
+          <a:prstGeom prst="rect">
+            <a:avLst/>
+          </a:prstGeom>
+          <a:noFill/>
+        </p:spPr>
+        <p:txBody>
+          <a:bodyPr wrap="square" anchor="t" lIns="0" rIns="0" tIns="0" bIns="0">
             <a:spAutoFit/>
           </a:bodyPr>
           <a:lstStyle/>
@@ -16805,38 +17317,167 @@
               </a:spcAft>
             </a:pPr>
             <a:r>
-              <a:rPr sz="1400" b="0">
-                <a:solidFill>
-                  <a:srgbClr val="0F172A"/>
+              <a:rPr sz="1400" b="1">
+                <a:solidFill>
+                  <a:srgbClr val="F59E0B"/>
                 </a:solidFill>
                 <a:latin typeface="NanumGothic"/>
                 <a:ea typeface="NanumGothic"/>
                 <a:cs typeface="NanumGothic"/>
               </a:rPr>
-              <a:t>gap에서 가설 다수 생성</a:t>
-            </a:r>
-          </a:p>
-        </p:txBody>
-      </p:sp>
-      <p:sp>
-        <p:nvSpPr>
-          <p:cNvPr id="14" name="Oval 13"/>
+              <a:t>•  </a:t>
+            </a:r>
+            <a:r>
+              <a:rPr sz="1400" b="0">
+                <a:solidFill>
+                  <a:srgbClr val="0F172A"/>
+                </a:solidFill>
+                <a:latin typeface="NanumGothic"/>
+                <a:ea typeface="NanumGothic"/>
+                <a:cs typeface="NanumGothic"/>
+              </a:rPr>
+              <a:t>많이·다양하게</a:t>
+            </a:r>
+          </a:p>
+        </p:txBody>
+      </p:sp>
+      <p:sp>
+        <p:nvSpPr>
+          <p:cNvPr id="13" name="TextBox 12"/>
+          <p:cNvSpPr txBox="1"/>
+          <p:nvPr/>
+        </p:nvSpPr>
+        <p:spPr>
+          <a:xfrm>
+            <a:off x="822960" y="3264408"/>
+            <a:ext cx="4846320" cy="548640"/>
+          </a:xfrm>
+          <a:prstGeom prst="rect">
+            <a:avLst/>
+          </a:prstGeom>
+          <a:noFill/>
+        </p:spPr>
+        <p:txBody>
+          <a:bodyPr wrap="square" anchor="t" lIns="0" rIns="0" tIns="0" bIns="0">
+            <a:spAutoFit/>
+          </a:bodyPr>
+          <a:lstStyle/>
+          <a:p>
+            <a:pPr algn="l">
+              <a:lnSpc>
+                <a:spcPct val="100000"/>
+              </a:lnSpc>
+              <a:spcBef>
+                <a:spcPts val="0"/>
+              </a:spcBef>
+              <a:spcAft>
+                <a:spcPts val="600"/>
+              </a:spcAft>
+            </a:pPr>
+            <a:r>
+              <a:rPr sz="1400" b="1">
+                <a:solidFill>
+                  <a:srgbClr val="F59E0B"/>
+                </a:solidFill>
+                <a:latin typeface="NanumGothic"/>
+                <a:ea typeface="NanumGothic"/>
+                <a:cs typeface="NanumGothic"/>
+              </a:rPr>
+              <a:t>•  </a:t>
+            </a:r>
+            <a:r>
+              <a:rPr sz="1400" b="0">
+                <a:solidFill>
+                  <a:srgbClr val="0F172A"/>
+                </a:solidFill>
+                <a:latin typeface="NanumGothic"/>
+                <a:ea typeface="NanumGothic"/>
+                <a:cs typeface="NanumGothic"/>
+              </a:rPr>
+              <a:t>데이터/도구로 제약</a:t>
+            </a:r>
+          </a:p>
+        </p:txBody>
+      </p:sp>
+      <p:sp>
+        <p:nvSpPr>
+          <p:cNvPr id="14" name="TextBox 13"/>
+          <p:cNvSpPr txBox="1"/>
+          <p:nvPr/>
+        </p:nvSpPr>
+        <p:spPr>
+          <a:xfrm>
+            <a:off x="822960" y="3831336"/>
+            <a:ext cx="4846320" cy="548640"/>
+          </a:xfrm>
+          <a:prstGeom prst="rect">
+            <a:avLst/>
+          </a:prstGeom>
+          <a:noFill/>
+        </p:spPr>
+        <p:txBody>
+          <a:bodyPr wrap="square" anchor="t" lIns="0" rIns="0" tIns="0" bIns="0">
+            <a:spAutoFit/>
+          </a:bodyPr>
+          <a:lstStyle/>
+          <a:p>
+            <a:pPr algn="l">
+              <a:lnSpc>
+                <a:spcPct val="100000"/>
+              </a:lnSpc>
+              <a:spcBef>
+                <a:spcPts val="0"/>
+              </a:spcBef>
+              <a:spcAft>
+                <a:spcPts val="600"/>
+              </a:spcAft>
+            </a:pPr>
+            <a:r>
+              <a:rPr sz="1400" b="1">
+                <a:solidFill>
+                  <a:srgbClr val="F59E0B"/>
+                </a:solidFill>
+                <a:latin typeface="NanumGothic"/>
+                <a:ea typeface="NanumGothic"/>
+                <a:cs typeface="NanumGothic"/>
+              </a:rPr>
+              <a:t>•  </a:t>
+            </a:r>
+            <a:r>
+              <a:rPr sz="1400" b="0">
+                <a:solidFill>
+                  <a:srgbClr val="0F172A"/>
+                </a:solidFill>
+                <a:latin typeface="NanumGothic"/>
+                <a:ea typeface="NanumGothic"/>
+                <a:cs typeface="NanumGothic"/>
+              </a:rPr>
+              <a:t>이미 있는 건 제외</a:t>
+            </a:r>
+          </a:p>
+        </p:txBody>
+      </p:sp>
+      <p:sp>
+        <p:nvSpPr>
+          <p:cNvPr id="15" name="Rounded Rectangle 14"/>
           <p:cNvSpPr/>
           <p:nvPr/>
         </p:nvSpPr>
         <p:spPr>
           <a:xfrm>
-            <a:off x="777240" y="3035808"/>
-            <a:ext cx="411480" cy="411480"/>
-          </a:xfrm>
-          <a:prstGeom prst="ellipse">
+            <a:off x="6172200" y="1828800"/>
+            <a:ext cx="5440680" cy="4023360"/>
+          </a:xfrm>
+          <a:prstGeom prst="roundRect">
             <a:avLst/>
           </a:prstGeom>
           <a:solidFill>
-            <a:srgbClr val="F59E0B"/>
+            <a:srgbClr val="F8FAFC"/>
           </a:solidFill>
-          <a:ln>
-            <a:noFill/>
+          <a:ln w="12700">
+            <a:solidFill>
+              <a:srgbClr val="E2E8F0"/>
+            </a:solidFill>
           </a:ln>
           <a:effectLst/>
         </p:spPr>
@@ -16864,384 +17505,14 @@
       </p:sp>
       <p:sp>
         <p:nvSpPr>
-          <p:cNvPr id="15" name="TextBox 14"/>
-          <p:cNvSpPr txBox="1"/>
-          <p:nvPr/>
-        </p:nvSpPr>
-        <p:spPr>
-          <a:xfrm>
-            <a:off x="777240" y="3035808"/>
-            <a:ext cx="411480" cy="411480"/>
-          </a:xfrm>
-          <a:prstGeom prst="rect">
-            <a:avLst/>
-          </a:prstGeom>
-          <a:noFill/>
-        </p:spPr>
-        <p:txBody>
-          <a:bodyPr wrap="square" anchor="ctr" lIns="0" rIns="0" tIns="0" bIns="0">
-            <a:spAutoFit/>
-          </a:bodyPr>
-          <a:lstStyle/>
-          <a:p>
-            <a:pPr algn="ctr">
-              <a:lnSpc>
-                <a:spcPct val="100000"/>
-              </a:lnSpc>
-              <a:spcBef>
-                <a:spcPts val="0"/>
-              </a:spcBef>
-              <a:spcAft>
-                <a:spcPts val="600"/>
-              </a:spcAft>
-            </a:pPr>
-            <a:r>
-              <a:rPr sz="1300" b="1">
-                <a:solidFill>
-                  <a:srgbClr val="FFFFFF"/>
-                </a:solidFill>
-                <a:latin typeface="NanumSquare"/>
-                <a:ea typeface="NanumSquare"/>
-                <a:cs typeface="NanumSquare"/>
-              </a:rPr>
-              <a:t>2</a:t>
-            </a:r>
-          </a:p>
-        </p:txBody>
-      </p:sp>
-      <p:sp>
-        <p:nvSpPr>
-          <p:cNvPr id="16" name="TextBox 15"/>
-          <p:cNvSpPr txBox="1"/>
-          <p:nvPr/>
-        </p:nvSpPr>
-        <p:spPr>
-          <a:xfrm>
-            <a:off x="1371600" y="3054096"/>
-            <a:ext cx="6309360" cy="457200"/>
-          </a:xfrm>
-          <a:prstGeom prst="rect">
-            <a:avLst/>
-          </a:prstGeom>
-          <a:noFill/>
-        </p:spPr>
-        <p:txBody>
-          <a:bodyPr wrap="square" anchor="ctr" lIns="0" rIns="0" tIns="0" bIns="0">
-            <a:spAutoFit/>
-          </a:bodyPr>
-          <a:lstStyle/>
-          <a:p>
-            <a:pPr algn="l">
-              <a:lnSpc>
-                <a:spcPct val="100000"/>
-              </a:lnSpc>
-              <a:spcBef>
-                <a:spcPts val="0"/>
-              </a:spcBef>
-              <a:spcAft>
-                <a:spcPts val="600"/>
-              </a:spcAft>
-            </a:pPr>
-            <a:r>
-              <a:rPr sz="1400" b="0">
-                <a:solidFill>
-                  <a:srgbClr val="0F172A"/>
-                </a:solidFill>
-                <a:latin typeface="NanumGothic"/>
-                <a:ea typeface="NanumGothic"/>
-                <a:cs typeface="NanumGothic"/>
-              </a:rPr>
-              <a:t>기준별 평가·점수·랭킹</a:t>
-            </a:r>
-          </a:p>
-        </p:txBody>
-      </p:sp>
-      <p:sp>
-        <p:nvSpPr>
-          <p:cNvPr id="17" name="Oval 16"/>
+          <p:cNvPr id="16" name="Rounded Rectangle 15"/>
           <p:cNvSpPr/>
           <p:nvPr/>
         </p:nvSpPr>
         <p:spPr>
           <a:xfrm>
-            <a:off x="777240" y="3602736"/>
-            <a:ext cx="411480" cy="411480"/>
-          </a:xfrm>
-          <a:prstGeom prst="ellipse">
-            <a:avLst/>
-          </a:prstGeom>
-          <a:solidFill>
-            <a:srgbClr val="F59E0B"/>
-          </a:solidFill>
-          <a:ln>
-            <a:noFill/>
-          </a:ln>
-          <a:effectLst/>
-        </p:spPr>
-        <p:style>
-          <a:lnRef idx="1">
-            <a:schemeClr val="accent1"/>
-          </a:lnRef>
-          <a:fillRef idx="3">
-            <a:schemeClr val="accent1"/>
-          </a:fillRef>
-          <a:effectRef idx="2">
-            <a:schemeClr val="accent1"/>
-          </a:effectRef>
-          <a:fontRef idx="minor">
-            <a:schemeClr val="lt1"/>
-          </a:fontRef>
-        </p:style>
-        <p:txBody>
-          <a:bodyPr rtlCol="0" anchor="ctr"/>
-          <a:lstStyle/>
-          <a:p>
-            <a:pPr algn="ctr"/>
-          </a:p>
-        </p:txBody>
-      </p:sp>
-      <p:sp>
-        <p:nvSpPr>
-          <p:cNvPr id="18" name="TextBox 17"/>
-          <p:cNvSpPr txBox="1"/>
-          <p:nvPr/>
-        </p:nvSpPr>
-        <p:spPr>
-          <a:xfrm>
-            <a:off x="777240" y="3602736"/>
-            <a:ext cx="411480" cy="411480"/>
-          </a:xfrm>
-          <a:prstGeom prst="rect">
-            <a:avLst/>
-          </a:prstGeom>
-          <a:noFill/>
-        </p:spPr>
-        <p:txBody>
-          <a:bodyPr wrap="square" anchor="ctr" lIns="0" rIns="0" tIns="0" bIns="0">
-            <a:spAutoFit/>
-          </a:bodyPr>
-          <a:lstStyle/>
-          <a:p>
-            <a:pPr algn="ctr">
-              <a:lnSpc>
-                <a:spcPct val="100000"/>
-              </a:lnSpc>
-              <a:spcBef>
-                <a:spcPts val="0"/>
-              </a:spcBef>
-              <a:spcAft>
-                <a:spcPts val="600"/>
-              </a:spcAft>
-            </a:pPr>
-            <a:r>
-              <a:rPr sz="1300" b="1">
-                <a:solidFill>
-                  <a:srgbClr val="FFFFFF"/>
-                </a:solidFill>
-                <a:latin typeface="NanumSquare"/>
-                <a:ea typeface="NanumSquare"/>
-                <a:cs typeface="NanumSquare"/>
-              </a:rPr>
-              <a:t>3</a:t>
-            </a:r>
-          </a:p>
-        </p:txBody>
-      </p:sp>
-      <p:sp>
-        <p:nvSpPr>
-          <p:cNvPr id="19" name="TextBox 18"/>
-          <p:cNvSpPr txBox="1"/>
-          <p:nvPr/>
-        </p:nvSpPr>
-        <p:spPr>
-          <a:xfrm>
-            <a:off x="1371600" y="3621024"/>
-            <a:ext cx="6309360" cy="457200"/>
-          </a:xfrm>
-          <a:prstGeom prst="rect">
-            <a:avLst/>
-          </a:prstGeom>
-          <a:noFill/>
-        </p:spPr>
-        <p:txBody>
-          <a:bodyPr wrap="square" anchor="ctr" lIns="0" rIns="0" tIns="0" bIns="0">
-            <a:spAutoFit/>
-          </a:bodyPr>
-          <a:lstStyle/>
-          <a:p>
-            <a:pPr algn="l">
-              <a:lnSpc>
-                <a:spcPct val="100000"/>
-              </a:lnSpc>
-              <a:spcBef>
-                <a:spcPts val="0"/>
-              </a:spcBef>
-              <a:spcAft>
-                <a:spcPts val="600"/>
-              </a:spcAft>
-            </a:pPr>
-            <a:r>
-              <a:rPr sz="1400" b="0">
-                <a:solidFill>
-                  <a:srgbClr val="0F172A"/>
-                </a:solidFill>
-                <a:latin typeface="NanumGothic"/>
-                <a:ea typeface="NanumGothic"/>
-                <a:cs typeface="NanumGothic"/>
-              </a:rPr>
-              <a:t>우선순위 1~2개 + rationale 보강</a:t>
-            </a:r>
-          </a:p>
-        </p:txBody>
-      </p:sp>
-      <p:sp>
-        <p:nvSpPr>
-          <p:cNvPr id="20" name="Oval 19"/>
-          <p:cNvSpPr/>
-          <p:nvPr/>
-        </p:nvSpPr>
-        <p:spPr>
-          <a:xfrm>
-            <a:off x="777240" y="4169664"/>
-            <a:ext cx="411480" cy="411480"/>
-          </a:xfrm>
-          <a:prstGeom prst="ellipse">
-            <a:avLst/>
-          </a:prstGeom>
-          <a:solidFill>
-            <a:srgbClr val="F59E0B"/>
-          </a:solidFill>
-          <a:ln>
-            <a:noFill/>
-          </a:ln>
-          <a:effectLst/>
-        </p:spPr>
-        <p:style>
-          <a:lnRef idx="1">
-            <a:schemeClr val="accent1"/>
-          </a:lnRef>
-          <a:fillRef idx="3">
-            <a:schemeClr val="accent1"/>
-          </a:fillRef>
-          <a:effectRef idx="2">
-            <a:schemeClr val="accent1"/>
-          </a:effectRef>
-          <a:fontRef idx="minor">
-            <a:schemeClr val="lt1"/>
-          </a:fontRef>
-        </p:style>
-        <p:txBody>
-          <a:bodyPr rtlCol="0" anchor="ctr"/>
-          <a:lstStyle/>
-          <a:p>
-            <a:pPr algn="ctr"/>
-          </a:p>
-        </p:txBody>
-      </p:sp>
-      <p:sp>
-        <p:nvSpPr>
-          <p:cNvPr id="21" name="TextBox 20"/>
-          <p:cNvSpPr txBox="1"/>
-          <p:nvPr/>
-        </p:nvSpPr>
-        <p:spPr>
-          <a:xfrm>
-            <a:off x="777240" y="4169664"/>
-            <a:ext cx="411480" cy="411480"/>
-          </a:xfrm>
-          <a:prstGeom prst="rect">
-            <a:avLst/>
-          </a:prstGeom>
-          <a:noFill/>
-        </p:spPr>
-        <p:txBody>
-          <a:bodyPr wrap="square" anchor="ctr" lIns="0" rIns="0" tIns="0" bIns="0">
-            <a:spAutoFit/>
-          </a:bodyPr>
-          <a:lstStyle/>
-          <a:p>
-            <a:pPr algn="ctr">
-              <a:lnSpc>
-                <a:spcPct val="100000"/>
-              </a:lnSpc>
-              <a:spcBef>
-                <a:spcPts val="0"/>
-              </a:spcBef>
-              <a:spcAft>
-                <a:spcPts val="600"/>
-              </a:spcAft>
-            </a:pPr>
-            <a:r>
-              <a:rPr sz="1300" b="1">
-                <a:solidFill>
-                  <a:srgbClr val="FFFFFF"/>
-                </a:solidFill>
-                <a:latin typeface="NanumSquare"/>
-                <a:ea typeface="NanumSquare"/>
-                <a:cs typeface="NanumSquare"/>
-              </a:rPr>
-              <a:t>4</a:t>
-            </a:r>
-          </a:p>
-        </p:txBody>
-      </p:sp>
-      <p:sp>
-        <p:nvSpPr>
-          <p:cNvPr id="22" name="TextBox 21"/>
-          <p:cNvSpPr txBox="1"/>
-          <p:nvPr/>
-        </p:nvSpPr>
-        <p:spPr>
-          <a:xfrm>
-            <a:off x="1371600" y="4187952"/>
-            <a:ext cx="6309360" cy="457200"/>
-          </a:xfrm>
-          <a:prstGeom prst="rect">
-            <a:avLst/>
-          </a:prstGeom>
-          <a:noFill/>
-        </p:spPr>
-        <p:txBody>
-          <a:bodyPr wrap="square" anchor="ctr" lIns="0" rIns="0" tIns="0" bIns="0">
-            <a:spAutoFit/>
-          </a:bodyPr>
-          <a:lstStyle/>
-          <a:p>
-            <a:pPr algn="l">
-              <a:lnSpc>
-                <a:spcPct val="100000"/>
-              </a:lnSpc>
-              <a:spcBef>
-                <a:spcPts val="0"/>
-              </a:spcBef>
-              <a:spcAft>
-                <a:spcPts val="600"/>
-              </a:spcAft>
-            </a:pPr>
-            <a:r>
-              <a:rPr sz="1400" b="0">
-                <a:solidFill>
-                  <a:srgbClr val="0F172A"/>
-                </a:solidFill>
-                <a:latin typeface="NanumGothic"/>
-                <a:ea typeface="NanumGothic"/>
-                <a:cs typeface="NanumGothic"/>
-              </a:rPr>
-              <a:t>가설 제안 확정</a:t>
-            </a:r>
-          </a:p>
-        </p:txBody>
-      </p:sp>
-      <p:sp>
-        <p:nvSpPr>
-          <p:cNvPr id="23" name="Rounded Rectangle 22"/>
-          <p:cNvSpPr/>
-          <p:nvPr/>
-        </p:nvSpPr>
-        <p:spPr>
-          <a:xfrm>
-            <a:off x="8001000" y="1783080"/>
-            <a:ext cx="3657600" cy="4160520"/>
+            <a:off x="6172200" y="1828800"/>
+            <a:ext cx="5440680" cy="640080"/>
           </a:xfrm>
           <a:prstGeom prst="roundRect">
             <a:avLst/>
@@ -17278,22 +17549,22 @@
       </p:sp>
       <p:sp>
         <p:nvSpPr>
-          <p:cNvPr id="24" name="TextBox 23"/>
-          <p:cNvSpPr txBox="1"/>
-          <p:nvPr/>
-        </p:nvSpPr>
-        <p:spPr>
-          <a:xfrm>
-            <a:off x="8275320" y="2011680"/>
-            <a:ext cx="3108960" cy="457200"/>
-          </a:xfrm>
-          <a:prstGeom prst="rect">
-            <a:avLst/>
-          </a:prstGeom>
-          <a:noFill/>
-        </p:spPr>
-        <p:txBody>
-          <a:bodyPr wrap="square" anchor="t" lIns="0" rIns="0" tIns="0" bIns="0">
+          <p:cNvPr id="17" name="TextBox 16"/>
+          <p:cNvSpPr txBox="1"/>
+          <p:nvPr/>
+        </p:nvSpPr>
+        <p:spPr>
+          <a:xfrm>
+            <a:off x="6446520" y="1828800"/>
+            <a:ext cx="4937760" cy="640080"/>
+          </a:xfrm>
+          <a:prstGeom prst="rect">
+            <a:avLst/>
+          </a:prstGeom>
+          <a:noFill/>
+        </p:spPr>
+        <p:txBody>
+          <a:bodyPr wrap="square" anchor="ctr" lIns="0" rIns="0" tIns="0" bIns="0">
             <a:spAutoFit/>
           </a:bodyPr>
           <a:lstStyle/>
@@ -17310,29 +17581,29 @@
               </a:spcAft>
             </a:pPr>
             <a:r>
-              <a:rPr sz="1500" b="1">
-                <a:solidFill>
-                  <a:srgbClr val="F59E0B"/>
+              <a:rPr sz="1600" b="1">
+                <a:solidFill>
+                  <a:srgbClr val="FFFFFF"/>
                 </a:solidFill>
                 <a:latin typeface="NanumSquare"/>
                 <a:ea typeface="NanumSquare"/>
                 <a:cs typeface="NanumSquare"/>
               </a:rPr>
-              <a:t>산출물</a:t>
-            </a:r>
-          </a:p>
-        </p:txBody>
-      </p:sp>
-      <p:sp>
-        <p:nvSpPr>
-          <p:cNvPr id="25" name="TextBox 24"/>
-          <p:cNvSpPr txBox="1"/>
-          <p:nvPr/>
-        </p:nvSpPr>
-        <p:spPr>
-          <a:xfrm>
-            <a:off x="8275320" y="2560320"/>
-            <a:ext cx="3154680" cy="3108960"/>
+              <a:t>선별 (우선순위)</a:t>
+            </a:r>
+          </a:p>
+        </p:txBody>
+      </p:sp>
+      <p:sp>
+        <p:nvSpPr>
+          <p:cNvPr id="18" name="TextBox 17"/>
+          <p:cNvSpPr txBox="1"/>
+          <p:nvPr/>
+        </p:nvSpPr>
+        <p:spPr>
+          <a:xfrm>
+            <a:off x="6492240" y="2697480"/>
+            <a:ext cx="4846320" cy="548640"/>
           </a:xfrm>
           <a:prstGeom prst="rect">
             <a:avLst/>
@@ -17347,26 +17618,152 @@
           <a:p>
             <a:pPr algn="l">
               <a:lnSpc>
-                <a:spcPct val="120000"/>
-              </a:lnSpc>
-              <a:spcBef>
-                <a:spcPts val="0"/>
-              </a:spcBef>
-              <a:spcAft>
-                <a:spcPts val="600"/>
-              </a:spcAft>
-            </a:pPr>
-            <a:r>
-              <a:rPr sz="1400" b="0">
-                <a:solidFill>
-                  <a:srgbClr val="FFFFFF"/>
+                <a:spcPct val="100000"/>
+              </a:lnSpc>
+              <a:spcBef>
+                <a:spcPts val="0"/>
+              </a:spcBef>
+              <a:spcAft>
+                <a:spcPts val="600"/>
+              </a:spcAft>
+            </a:pPr>
+            <a:r>
+              <a:rPr sz="1400" b="1">
+                <a:solidFill>
+                  <a:srgbClr val="12203C"/>
                 </a:solidFill>
                 <a:latin typeface="NanumGothic"/>
                 <a:ea typeface="NanumGothic"/>
                 <a:cs typeface="NanumGothic"/>
               </a:rPr>
-              <a:t>최종 가설 제안 + 분석 노트
-에이전트 완주! 양식: output/report-template.md · 분석: result-analysis-template.md</a:t>
+              <a:t>•  </a:t>
+            </a:r>
+            <a:r>
+              <a:rPr sz="1400" b="0">
+                <a:solidFill>
+                  <a:srgbClr val="0F172A"/>
+                </a:solidFill>
+                <a:latin typeface="NanumGothic"/>
+                <a:ea typeface="NanumGothic"/>
+                <a:cs typeface="NanumGothic"/>
+              </a:rPr>
+              <a:t>근거·새로움·중요성</a:t>
+            </a:r>
+          </a:p>
+        </p:txBody>
+      </p:sp>
+      <p:sp>
+        <p:nvSpPr>
+          <p:cNvPr id="19" name="TextBox 18"/>
+          <p:cNvSpPr txBox="1"/>
+          <p:nvPr/>
+        </p:nvSpPr>
+        <p:spPr>
+          <a:xfrm>
+            <a:off x="6492240" y="3264408"/>
+            <a:ext cx="4846320" cy="548640"/>
+          </a:xfrm>
+          <a:prstGeom prst="rect">
+            <a:avLst/>
+          </a:prstGeom>
+          <a:noFill/>
+        </p:spPr>
+        <p:txBody>
+          <a:bodyPr wrap="square" anchor="t" lIns="0" rIns="0" tIns="0" bIns="0">
+            <a:spAutoFit/>
+          </a:bodyPr>
+          <a:lstStyle/>
+          <a:p>
+            <a:pPr algn="l">
+              <a:lnSpc>
+                <a:spcPct val="100000"/>
+              </a:lnSpc>
+              <a:spcBef>
+                <a:spcPts val="0"/>
+              </a:spcBef>
+              <a:spcAft>
+                <a:spcPts val="600"/>
+              </a:spcAft>
+            </a:pPr>
+            <a:r>
+              <a:rPr sz="1400" b="1">
+                <a:solidFill>
+                  <a:srgbClr val="12203C"/>
+                </a:solidFill>
+                <a:latin typeface="NanumGothic"/>
+                <a:ea typeface="NanumGothic"/>
+                <a:cs typeface="NanumGothic"/>
+              </a:rPr>
+              <a:t>•  </a:t>
+            </a:r>
+            <a:r>
+              <a:rPr sz="1400" b="0">
+                <a:solidFill>
+                  <a:srgbClr val="0F172A"/>
+                </a:solidFill>
+                <a:latin typeface="NanumGothic"/>
+                <a:ea typeface="NanumGothic"/>
+                <a:cs typeface="NanumGothic"/>
+              </a:rPr>
+              <a:t>검증 가능성</a:t>
+            </a:r>
+          </a:p>
+        </p:txBody>
+      </p:sp>
+      <p:sp>
+        <p:nvSpPr>
+          <p:cNvPr id="20" name="TextBox 19"/>
+          <p:cNvSpPr txBox="1"/>
+          <p:nvPr/>
+        </p:nvSpPr>
+        <p:spPr>
+          <a:xfrm>
+            <a:off x="6492240" y="3831336"/>
+            <a:ext cx="4846320" cy="548640"/>
+          </a:xfrm>
+          <a:prstGeom prst="rect">
+            <a:avLst/>
+          </a:prstGeom>
+          <a:noFill/>
+        </p:spPr>
+        <p:txBody>
+          <a:bodyPr wrap="square" anchor="t" lIns="0" rIns="0" tIns="0" bIns="0">
+            <a:spAutoFit/>
+          </a:bodyPr>
+          <a:lstStyle/>
+          <a:p>
+            <a:pPr algn="l">
+              <a:lnSpc>
+                <a:spcPct val="100000"/>
+              </a:lnSpc>
+              <a:spcBef>
+                <a:spcPts val="0"/>
+              </a:spcBef>
+              <a:spcAft>
+                <a:spcPts val="600"/>
+              </a:spcAft>
+            </a:pPr>
+            <a:r>
+              <a:rPr sz="1400" b="1">
+                <a:solidFill>
+                  <a:srgbClr val="12203C"/>
+                </a:solidFill>
+                <a:latin typeface="NanumGothic"/>
+                <a:ea typeface="NanumGothic"/>
+                <a:cs typeface="NanumGothic"/>
+              </a:rPr>
+              <a:t>•  </a:t>
+            </a:r>
+            <a:r>
+              <a:rPr sz="1400" b="0">
+                <a:solidFill>
+                  <a:srgbClr val="0F172A"/>
+                </a:solidFill>
+                <a:latin typeface="NanumGothic"/>
+                <a:ea typeface="NanumGothic"/>
+                <a:cs typeface="NanumGothic"/>
+              </a:rPr>
+              <a:t>상위 1~2개 추리기</a:t>
             </a:r>
           </a:p>
         </p:txBody>
@@ -17380,6 +17777,1984 @@
 </file>
 
 <file path=ppt/slides/slide24.xml><?xml version="1.0" encoding="utf-8"?>
+<p:sld xmlns:a="http://schemas.openxmlformats.org/drawingml/2006/main" xmlns:p="http://schemas.openxmlformats.org/presentationml/2006/main" xmlns:r="http://schemas.openxmlformats.org/officeDocument/2006/relationships">
+  <p:cSld>
+    <p:spTree>
+      <p:nvGrpSpPr>
+        <p:cNvPr id="1" name=""/>
+        <p:cNvGrpSpPr/>
+        <p:nvPr/>
+      </p:nvGrpSpPr>
+      <p:grpSpPr/>
+      <p:sp>
+        <p:nvSpPr>
+          <p:cNvPr id="2" name="Rectangle 1"/>
+          <p:cNvSpPr/>
+          <p:nvPr/>
+        </p:nvSpPr>
+        <p:spPr>
+          <a:xfrm>
+            <a:off x="0" y="0"/>
+            <a:ext cx="12191695" cy="6858000"/>
+          </a:xfrm>
+          <a:prstGeom prst="rect">
+            <a:avLst/>
+          </a:prstGeom>
+          <a:solidFill>
+            <a:srgbClr val="FFFFFF"/>
+          </a:solidFill>
+          <a:ln>
+            <a:noFill/>
+          </a:ln>
+          <a:effectLst/>
+        </p:spPr>
+        <p:style>
+          <a:lnRef idx="1">
+            <a:schemeClr val="accent1"/>
+          </a:lnRef>
+          <a:fillRef idx="3">
+            <a:schemeClr val="accent1"/>
+          </a:fillRef>
+          <a:effectRef idx="2">
+            <a:schemeClr val="accent1"/>
+          </a:effectRef>
+          <a:fontRef idx="minor">
+            <a:schemeClr val="lt1"/>
+          </a:fontRef>
+        </p:style>
+        <p:txBody>
+          <a:bodyPr rtlCol="0" anchor="ctr"/>
+          <a:lstStyle/>
+          <a:p>
+            <a:pPr algn="ctr"/>
+          </a:p>
+        </p:txBody>
+      </p:sp>
+      <p:sp>
+        <p:nvSpPr>
+          <p:cNvPr id="3" name="Rectangle 2"/>
+          <p:cNvSpPr/>
+          <p:nvPr/>
+        </p:nvSpPr>
+        <p:spPr>
+          <a:xfrm>
+            <a:off x="0" y="0"/>
+            <a:ext cx="164592" cy="6858000"/>
+          </a:xfrm>
+          <a:prstGeom prst="rect">
+            <a:avLst/>
+          </a:prstGeom>
+          <a:solidFill>
+            <a:srgbClr val="F59E0B"/>
+          </a:solidFill>
+          <a:ln>
+            <a:noFill/>
+          </a:ln>
+          <a:effectLst/>
+        </p:spPr>
+        <p:style>
+          <a:lnRef idx="1">
+            <a:schemeClr val="accent1"/>
+          </a:lnRef>
+          <a:fillRef idx="3">
+            <a:schemeClr val="accent1"/>
+          </a:fillRef>
+          <a:effectRef idx="2">
+            <a:schemeClr val="accent1"/>
+          </a:effectRef>
+          <a:fontRef idx="minor">
+            <a:schemeClr val="lt1"/>
+          </a:fontRef>
+        </p:style>
+        <p:txBody>
+          <a:bodyPr rtlCol="0" anchor="ctr"/>
+          <a:lstStyle/>
+          <a:p>
+            <a:pPr algn="ctr"/>
+          </a:p>
+        </p:txBody>
+      </p:sp>
+      <p:sp>
+        <p:nvSpPr>
+          <p:cNvPr id="4" name="TextBox 3"/>
+          <p:cNvSpPr txBox="1"/>
+          <p:nvPr/>
+        </p:nvSpPr>
+        <p:spPr>
+          <a:xfrm>
+            <a:off x="502920" y="384048"/>
+            <a:ext cx="10058400" cy="320040"/>
+          </a:xfrm>
+          <a:prstGeom prst="rect">
+            <a:avLst/>
+          </a:prstGeom>
+          <a:noFill/>
+        </p:spPr>
+        <p:txBody>
+          <a:bodyPr wrap="square" anchor="t" lIns="0" rIns="0" tIns="0" bIns="0">
+            <a:spAutoFit/>
+          </a:bodyPr>
+          <a:lstStyle/>
+          <a:p>
+            <a:pPr algn="l">
+              <a:lnSpc>
+                <a:spcPct val="100000"/>
+              </a:lnSpc>
+              <a:spcBef>
+                <a:spcPts val="0"/>
+              </a:spcBef>
+              <a:spcAft>
+                <a:spcPts val="600"/>
+              </a:spcAft>
+            </a:pPr>
+            <a:r>
+              <a:rPr sz="1200" b="1">
+                <a:solidFill>
+                  <a:srgbClr val="F59E0B"/>
+                </a:solidFill>
+                <a:latin typeface="NanumGothic"/>
+                <a:ea typeface="NanumGothic"/>
+                <a:cs typeface="NanumGothic"/>
+              </a:rPr>
+              <a:t>점검</a:t>
+            </a:r>
+          </a:p>
+        </p:txBody>
+      </p:sp>
+      <p:sp>
+        <p:nvSpPr>
+          <p:cNvPr id="5" name="TextBox 4"/>
+          <p:cNvSpPr txBox="1"/>
+          <p:nvPr/>
+        </p:nvSpPr>
+        <p:spPr>
+          <a:xfrm>
+            <a:off x="502920" y="713232"/>
+            <a:ext cx="11155680" cy="731520"/>
+          </a:xfrm>
+          <a:prstGeom prst="rect">
+            <a:avLst/>
+          </a:prstGeom>
+          <a:noFill/>
+        </p:spPr>
+        <p:txBody>
+          <a:bodyPr wrap="square" anchor="t" lIns="0" rIns="0" tIns="0" bIns="0">
+            <a:spAutoFit/>
+          </a:bodyPr>
+          <a:lstStyle/>
+          <a:p>
+            <a:pPr algn="l">
+              <a:lnSpc>
+                <a:spcPct val="100000"/>
+              </a:lnSpc>
+              <a:spcBef>
+                <a:spcPts val="0"/>
+              </a:spcBef>
+              <a:spcAft>
+                <a:spcPts val="600"/>
+              </a:spcAft>
+            </a:pPr>
+            <a:r>
+              <a:rPr sz="2700" b="1">
+                <a:solidFill>
+                  <a:srgbClr val="0F172A"/>
+                </a:solidFill>
+                <a:latin typeface="NanumSquare"/>
+                <a:ea typeface="NanumSquare"/>
+                <a:cs typeface="NanumSquare"/>
+              </a:rPr>
+              <a:t>제안 전 마지막 점검</a:t>
+            </a:r>
+          </a:p>
+        </p:txBody>
+      </p:sp>
+      <p:sp>
+        <p:nvSpPr>
+          <p:cNvPr id="6" name="Rectangle 5"/>
+          <p:cNvSpPr/>
+          <p:nvPr/>
+        </p:nvSpPr>
+        <p:spPr>
+          <a:xfrm>
+            <a:off x="521207" y="1417320"/>
+            <a:ext cx="1005840" cy="45720"/>
+          </a:xfrm>
+          <a:prstGeom prst="rect">
+            <a:avLst/>
+          </a:prstGeom>
+          <a:solidFill>
+            <a:srgbClr val="F59E0B"/>
+          </a:solidFill>
+          <a:ln>
+            <a:noFill/>
+          </a:ln>
+          <a:effectLst/>
+        </p:spPr>
+        <p:style>
+          <a:lnRef idx="1">
+            <a:schemeClr val="accent1"/>
+          </a:lnRef>
+          <a:fillRef idx="3">
+            <a:schemeClr val="accent1"/>
+          </a:fillRef>
+          <a:effectRef idx="2">
+            <a:schemeClr val="accent1"/>
+          </a:effectRef>
+          <a:fontRef idx="minor">
+            <a:schemeClr val="lt1"/>
+          </a:fontRef>
+        </p:style>
+        <p:txBody>
+          <a:bodyPr rtlCol="0" anchor="ctr"/>
+          <a:lstStyle/>
+          <a:p>
+            <a:pPr algn="ctr"/>
+          </a:p>
+        </p:txBody>
+      </p:sp>
+      <p:sp>
+        <p:nvSpPr>
+          <p:cNvPr id="7" name="TextBox 6"/>
+          <p:cNvSpPr txBox="1"/>
+          <p:nvPr/>
+        </p:nvSpPr>
+        <p:spPr>
+          <a:xfrm>
+            <a:off x="502920" y="6419088"/>
+            <a:ext cx="7315200" cy="365760"/>
+          </a:xfrm>
+          <a:prstGeom prst="rect">
+            <a:avLst/>
+          </a:prstGeom>
+          <a:noFill/>
+        </p:spPr>
+        <p:txBody>
+          <a:bodyPr wrap="square" anchor="ctr" lIns="0" rIns="0" tIns="0" bIns="0">
+            <a:spAutoFit/>
+          </a:bodyPr>
+          <a:lstStyle/>
+          <a:p>
+            <a:pPr algn="l">
+              <a:lnSpc>
+                <a:spcPct val="100000"/>
+              </a:lnSpc>
+              <a:spcBef>
+                <a:spcPts val="0"/>
+              </a:spcBef>
+              <a:spcAft>
+                <a:spcPts val="600"/>
+              </a:spcAft>
+            </a:pPr>
+            <a:r>
+              <a:rPr sz="900" b="0">
+                <a:solidFill>
+                  <a:srgbClr val="64748B"/>
+                </a:solidFill>
+                <a:latin typeface="NanumGothic"/>
+                <a:ea typeface="NanumGothic"/>
+                <a:cs typeface="NanumGothic"/>
+              </a:rPr>
+              <a:t>AI 에이전트와 응용  ·  원광대학교 5일 교육</a:t>
+            </a:r>
+          </a:p>
+        </p:txBody>
+      </p:sp>
+      <p:sp>
+        <p:nvSpPr>
+          <p:cNvPr id="8" name="TextBox 7"/>
+          <p:cNvSpPr txBox="1"/>
+          <p:nvPr/>
+        </p:nvSpPr>
+        <p:spPr>
+          <a:xfrm>
+            <a:off x="10241280" y="6419088"/>
+            <a:ext cx="1463040" cy="365760"/>
+          </a:xfrm>
+          <a:prstGeom prst="rect">
+            <a:avLst/>
+          </a:prstGeom>
+          <a:noFill/>
+        </p:spPr>
+        <p:txBody>
+          <a:bodyPr wrap="square" anchor="ctr" lIns="0" rIns="0" tIns="0" bIns="0">
+            <a:spAutoFit/>
+          </a:bodyPr>
+          <a:lstStyle/>
+          <a:p>
+            <a:pPr algn="r">
+              <a:lnSpc>
+                <a:spcPct val="100000"/>
+              </a:lnSpc>
+              <a:spcBef>
+                <a:spcPts val="0"/>
+              </a:spcBef>
+              <a:spcAft>
+                <a:spcPts val="600"/>
+              </a:spcAft>
+            </a:pPr>
+            <a:r>
+              <a:rPr sz="900" b="1">
+                <a:solidFill>
+                  <a:srgbClr val="F59E0B"/>
+                </a:solidFill>
+                <a:latin typeface="NanumGothic"/>
+                <a:ea typeface="NanumGothic"/>
+                <a:cs typeface="NanumGothic"/>
+              </a:rPr>
+              <a:t>Day 4 · 목</a:t>
+            </a:r>
+          </a:p>
+        </p:txBody>
+      </p:sp>
+      <p:sp>
+        <p:nvSpPr>
+          <p:cNvPr id="9" name="Oval 8"/>
+          <p:cNvSpPr/>
+          <p:nvPr/>
+        </p:nvSpPr>
+        <p:spPr>
+          <a:xfrm>
+            <a:off x="548640" y="1911096"/>
+            <a:ext cx="146304" cy="146304"/>
+          </a:xfrm>
+          <a:prstGeom prst="ellipse">
+            <a:avLst/>
+          </a:prstGeom>
+          <a:solidFill>
+            <a:srgbClr val="F59E0B"/>
+          </a:solidFill>
+          <a:ln>
+            <a:noFill/>
+          </a:ln>
+          <a:effectLst/>
+        </p:spPr>
+        <p:style>
+          <a:lnRef idx="1">
+            <a:schemeClr val="accent1"/>
+          </a:lnRef>
+          <a:fillRef idx="3">
+            <a:schemeClr val="accent1"/>
+          </a:fillRef>
+          <a:effectRef idx="2">
+            <a:schemeClr val="accent1"/>
+          </a:effectRef>
+          <a:fontRef idx="minor">
+            <a:schemeClr val="lt1"/>
+          </a:fontRef>
+        </p:style>
+        <p:txBody>
+          <a:bodyPr rtlCol="0" anchor="ctr"/>
+          <a:lstStyle/>
+          <a:p>
+            <a:pPr algn="ctr"/>
+          </a:p>
+        </p:txBody>
+      </p:sp>
+      <p:sp>
+        <p:nvSpPr>
+          <p:cNvPr id="10" name="TextBox 9"/>
+          <p:cNvSpPr txBox="1"/>
+          <p:nvPr/>
+        </p:nvSpPr>
+        <p:spPr>
+          <a:xfrm>
+            <a:off x="868680" y="1828800"/>
+            <a:ext cx="10607040" cy="457200"/>
+          </a:xfrm>
+          <a:prstGeom prst="rect">
+            <a:avLst/>
+          </a:prstGeom>
+          <a:noFill/>
+        </p:spPr>
+        <p:txBody>
+          <a:bodyPr wrap="square" anchor="t" lIns="0" rIns="0" tIns="0" bIns="0">
+            <a:spAutoFit/>
+          </a:bodyPr>
+          <a:lstStyle/>
+          <a:p>
+            <a:pPr algn="l">
+              <a:lnSpc>
+                <a:spcPct val="100000"/>
+              </a:lnSpc>
+              <a:spcBef>
+                <a:spcPts val="0"/>
+              </a:spcBef>
+              <a:spcAft>
+                <a:spcPts val="600"/>
+              </a:spcAft>
+            </a:pPr>
+            <a:r>
+              <a:rPr sz="1600" b="1">
+                <a:solidFill>
+                  <a:srgbClr val="0F172A"/>
+                </a:solidFill>
+                <a:latin typeface="NanumGothic"/>
+                <a:ea typeface="NanumGothic"/>
+                <a:cs typeface="NanumGothic"/>
+              </a:rPr>
+              <a:t>근거 있나?</a:t>
+            </a:r>
+          </a:p>
+        </p:txBody>
+      </p:sp>
+      <p:sp>
+        <p:nvSpPr>
+          <p:cNvPr id="11" name="TextBox 10"/>
+          <p:cNvSpPr txBox="1"/>
+          <p:nvPr/>
+        </p:nvSpPr>
+        <p:spPr>
+          <a:xfrm>
+            <a:off x="868680" y="2212848"/>
+            <a:ext cx="10607040" cy="457200"/>
+          </a:xfrm>
+          <a:prstGeom prst="rect">
+            <a:avLst/>
+          </a:prstGeom>
+          <a:noFill/>
+        </p:spPr>
+        <p:txBody>
+          <a:bodyPr wrap="square" anchor="t" lIns="0" rIns="0" tIns="0" bIns="0">
+            <a:spAutoFit/>
+          </a:bodyPr>
+          <a:lstStyle/>
+          <a:p>
+            <a:pPr algn="l">
+              <a:lnSpc>
+                <a:spcPct val="100000"/>
+              </a:lnSpc>
+              <a:spcBef>
+                <a:spcPts val="0"/>
+              </a:spcBef>
+              <a:spcAft>
+                <a:spcPts val="600"/>
+              </a:spcAft>
+            </a:pPr>
+            <a:r>
+              <a:rPr sz="1300" b="0">
+                <a:solidFill>
+                  <a:srgbClr val="64748B"/>
+                </a:solidFill>
+                <a:latin typeface="NanumGothic"/>
+                <a:ea typeface="NanumGothic"/>
+                <a:cs typeface="NanumGothic"/>
+              </a:rPr>
+              <a:t>막연한 상상 아닌, gap·출처 기반</a:t>
+            </a:r>
+          </a:p>
+        </p:txBody>
+      </p:sp>
+      <p:sp>
+        <p:nvSpPr>
+          <p:cNvPr id="12" name="Oval 11"/>
+          <p:cNvSpPr/>
+          <p:nvPr/>
+        </p:nvSpPr>
+        <p:spPr>
+          <a:xfrm>
+            <a:off x="548640" y="2779776"/>
+            <a:ext cx="146304" cy="146304"/>
+          </a:xfrm>
+          <a:prstGeom prst="ellipse">
+            <a:avLst/>
+          </a:prstGeom>
+          <a:solidFill>
+            <a:srgbClr val="F59E0B"/>
+          </a:solidFill>
+          <a:ln>
+            <a:noFill/>
+          </a:ln>
+          <a:effectLst/>
+        </p:spPr>
+        <p:style>
+          <a:lnRef idx="1">
+            <a:schemeClr val="accent1"/>
+          </a:lnRef>
+          <a:fillRef idx="3">
+            <a:schemeClr val="accent1"/>
+          </a:fillRef>
+          <a:effectRef idx="2">
+            <a:schemeClr val="accent1"/>
+          </a:effectRef>
+          <a:fontRef idx="minor">
+            <a:schemeClr val="lt1"/>
+          </a:fontRef>
+        </p:style>
+        <p:txBody>
+          <a:bodyPr rtlCol="0" anchor="ctr"/>
+          <a:lstStyle/>
+          <a:p>
+            <a:pPr algn="ctr"/>
+          </a:p>
+        </p:txBody>
+      </p:sp>
+      <p:sp>
+        <p:nvSpPr>
+          <p:cNvPr id="13" name="TextBox 12"/>
+          <p:cNvSpPr txBox="1"/>
+          <p:nvPr/>
+        </p:nvSpPr>
+        <p:spPr>
+          <a:xfrm>
+            <a:off x="868680" y="2697480"/>
+            <a:ext cx="10607040" cy="457200"/>
+          </a:xfrm>
+          <a:prstGeom prst="rect">
+            <a:avLst/>
+          </a:prstGeom>
+          <a:noFill/>
+        </p:spPr>
+        <p:txBody>
+          <a:bodyPr wrap="square" anchor="t" lIns="0" rIns="0" tIns="0" bIns="0">
+            <a:spAutoFit/>
+          </a:bodyPr>
+          <a:lstStyle/>
+          <a:p>
+            <a:pPr algn="l">
+              <a:lnSpc>
+                <a:spcPct val="100000"/>
+              </a:lnSpc>
+              <a:spcBef>
+                <a:spcPts val="0"/>
+              </a:spcBef>
+              <a:spcAft>
+                <a:spcPts val="600"/>
+              </a:spcAft>
+            </a:pPr>
+            <a:r>
+              <a:rPr sz="1600" b="1">
+                <a:solidFill>
+                  <a:srgbClr val="0F172A"/>
+                </a:solidFill>
+                <a:latin typeface="NanumGothic"/>
+                <a:ea typeface="NanumGothic"/>
+                <a:cs typeface="NanumGothic"/>
+              </a:rPr>
+              <a:t>새로운가?</a:t>
+            </a:r>
+          </a:p>
+        </p:txBody>
+      </p:sp>
+      <p:sp>
+        <p:nvSpPr>
+          <p:cNvPr id="14" name="TextBox 13"/>
+          <p:cNvSpPr txBox="1"/>
+          <p:nvPr/>
+        </p:nvSpPr>
+        <p:spPr>
+          <a:xfrm>
+            <a:off x="868680" y="3081528"/>
+            <a:ext cx="10607040" cy="457200"/>
+          </a:xfrm>
+          <a:prstGeom prst="rect">
+            <a:avLst/>
+          </a:prstGeom>
+          <a:noFill/>
+        </p:spPr>
+        <p:txBody>
+          <a:bodyPr wrap="square" anchor="t" lIns="0" rIns="0" tIns="0" bIns="0">
+            <a:spAutoFit/>
+          </a:bodyPr>
+          <a:lstStyle/>
+          <a:p>
+            <a:pPr algn="l">
+              <a:lnSpc>
+                <a:spcPct val="100000"/>
+              </a:lnSpc>
+              <a:spcBef>
+                <a:spcPts val="0"/>
+              </a:spcBef>
+              <a:spcAft>
+                <a:spcPts val="600"/>
+              </a:spcAft>
+            </a:pPr>
+            <a:r>
+              <a:rPr sz="1300" b="0">
+                <a:solidFill>
+                  <a:srgbClr val="64748B"/>
+                </a:solidFill>
+                <a:latin typeface="NanumGothic"/>
+                <a:ea typeface="NanumGothic"/>
+                <a:cs typeface="NanumGothic"/>
+              </a:rPr>
+              <a:t>기존 논문에 이미 있는 건 아닌지</a:t>
+            </a:r>
+          </a:p>
+        </p:txBody>
+      </p:sp>
+      <p:sp>
+        <p:nvSpPr>
+          <p:cNvPr id="15" name="Oval 14"/>
+          <p:cNvSpPr/>
+          <p:nvPr/>
+        </p:nvSpPr>
+        <p:spPr>
+          <a:xfrm>
+            <a:off x="548640" y="3648456"/>
+            <a:ext cx="146304" cy="146304"/>
+          </a:xfrm>
+          <a:prstGeom prst="ellipse">
+            <a:avLst/>
+          </a:prstGeom>
+          <a:solidFill>
+            <a:srgbClr val="F59E0B"/>
+          </a:solidFill>
+          <a:ln>
+            <a:noFill/>
+          </a:ln>
+          <a:effectLst/>
+        </p:spPr>
+        <p:style>
+          <a:lnRef idx="1">
+            <a:schemeClr val="accent1"/>
+          </a:lnRef>
+          <a:fillRef idx="3">
+            <a:schemeClr val="accent1"/>
+          </a:fillRef>
+          <a:effectRef idx="2">
+            <a:schemeClr val="accent1"/>
+          </a:effectRef>
+          <a:fontRef idx="minor">
+            <a:schemeClr val="lt1"/>
+          </a:fontRef>
+        </p:style>
+        <p:txBody>
+          <a:bodyPr rtlCol="0" anchor="ctr"/>
+          <a:lstStyle/>
+          <a:p>
+            <a:pPr algn="ctr"/>
+          </a:p>
+        </p:txBody>
+      </p:sp>
+      <p:sp>
+        <p:nvSpPr>
+          <p:cNvPr id="16" name="TextBox 15"/>
+          <p:cNvSpPr txBox="1"/>
+          <p:nvPr/>
+        </p:nvSpPr>
+        <p:spPr>
+          <a:xfrm>
+            <a:off x="868680" y="3566160"/>
+            <a:ext cx="10607040" cy="457200"/>
+          </a:xfrm>
+          <a:prstGeom prst="rect">
+            <a:avLst/>
+          </a:prstGeom>
+          <a:noFill/>
+        </p:spPr>
+        <p:txBody>
+          <a:bodyPr wrap="square" anchor="t" lIns="0" rIns="0" tIns="0" bIns="0">
+            <a:spAutoFit/>
+          </a:bodyPr>
+          <a:lstStyle/>
+          <a:p>
+            <a:pPr algn="l">
+              <a:lnSpc>
+                <a:spcPct val="100000"/>
+              </a:lnSpc>
+              <a:spcBef>
+                <a:spcPts val="0"/>
+              </a:spcBef>
+              <a:spcAft>
+                <a:spcPts val="600"/>
+              </a:spcAft>
+            </a:pPr>
+            <a:r>
+              <a:rPr sz="1600" b="1">
+                <a:solidFill>
+                  <a:srgbClr val="0F172A"/>
+                </a:solidFill>
+                <a:latin typeface="NanumGothic"/>
+                <a:ea typeface="NanumGothic"/>
+                <a:cs typeface="NanumGothic"/>
+              </a:rPr>
+              <a:t>검증 아이디어 있나?</a:t>
+            </a:r>
+          </a:p>
+        </p:txBody>
+      </p:sp>
+      <p:sp>
+        <p:nvSpPr>
+          <p:cNvPr id="17" name="TextBox 16"/>
+          <p:cNvSpPr txBox="1"/>
+          <p:nvPr/>
+        </p:nvSpPr>
+        <p:spPr>
+          <a:xfrm>
+            <a:off x="868680" y="3950208"/>
+            <a:ext cx="10607040" cy="457200"/>
+          </a:xfrm>
+          <a:prstGeom prst="rect">
+            <a:avLst/>
+          </a:prstGeom>
+          <a:noFill/>
+        </p:spPr>
+        <p:txBody>
+          <a:bodyPr wrap="square" anchor="t" lIns="0" rIns="0" tIns="0" bIns="0">
+            <a:spAutoFit/>
+          </a:bodyPr>
+          <a:lstStyle/>
+          <a:p>
+            <a:pPr algn="l">
+              <a:lnSpc>
+                <a:spcPct val="100000"/>
+              </a:lnSpc>
+              <a:spcBef>
+                <a:spcPts val="0"/>
+              </a:spcBef>
+              <a:spcAft>
+                <a:spcPts val="600"/>
+              </a:spcAft>
+            </a:pPr>
+            <a:r>
+              <a:rPr sz="1300" b="0">
+                <a:solidFill>
+                  <a:srgbClr val="64748B"/>
+                </a:solidFill>
+                <a:latin typeface="NanumGothic"/>
+                <a:ea typeface="NanumGothic"/>
+                <a:cs typeface="NanumGothic"/>
+              </a:rPr>
+              <a:t>어떻게 확인할지 한 줄이라도</a:t>
+            </a:r>
+          </a:p>
+        </p:txBody>
+      </p:sp>
+      <p:sp>
+        <p:nvSpPr>
+          <p:cNvPr id="18" name="Rounded Rectangle 17"/>
+          <p:cNvSpPr/>
+          <p:nvPr/>
+        </p:nvSpPr>
+        <p:spPr>
+          <a:xfrm>
+            <a:off x="502920" y="5532120"/>
+            <a:ext cx="11155680" cy="658368"/>
+          </a:xfrm>
+          <a:prstGeom prst="roundRect">
+            <a:avLst/>
+          </a:prstGeom>
+          <a:solidFill>
+            <a:srgbClr val="F1F5F9"/>
+          </a:solidFill>
+          <a:ln w="12700">
+            <a:solidFill>
+              <a:srgbClr val="E2E8F0"/>
+            </a:solidFill>
+          </a:ln>
+          <a:effectLst/>
+        </p:spPr>
+        <p:style>
+          <a:lnRef idx="1">
+            <a:schemeClr val="accent1"/>
+          </a:lnRef>
+          <a:fillRef idx="3">
+            <a:schemeClr val="accent1"/>
+          </a:fillRef>
+          <a:effectRef idx="2">
+            <a:schemeClr val="accent1"/>
+          </a:effectRef>
+          <a:fontRef idx="minor">
+            <a:schemeClr val="lt1"/>
+          </a:fontRef>
+        </p:style>
+        <p:txBody>
+          <a:bodyPr rtlCol="0" anchor="ctr"/>
+          <a:lstStyle/>
+          <a:p>
+            <a:pPr algn="ctr"/>
+          </a:p>
+        </p:txBody>
+      </p:sp>
+      <p:sp>
+        <p:nvSpPr>
+          <p:cNvPr id="19" name="TextBox 18"/>
+          <p:cNvSpPr txBox="1"/>
+          <p:nvPr/>
+        </p:nvSpPr>
+        <p:spPr>
+          <a:xfrm>
+            <a:off x="777240" y="5532120"/>
+            <a:ext cx="10607040" cy="658368"/>
+          </a:xfrm>
+          <a:prstGeom prst="rect">
+            <a:avLst/>
+          </a:prstGeom>
+          <a:noFill/>
+        </p:spPr>
+        <p:txBody>
+          <a:bodyPr wrap="square" anchor="ctr" lIns="0" rIns="0" tIns="0" bIns="0">
+            <a:spAutoFit/>
+          </a:bodyPr>
+          <a:lstStyle/>
+          <a:p>
+            <a:pPr algn="l">
+              <a:lnSpc>
+                <a:spcPct val="100000"/>
+              </a:lnSpc>
+              <a:spcBef>
+                <a:spcPts val="0"/>
+              </a:spcBef>
+              <a:spcAft>
+                <a:spcPts val="600"/>
+              </a:spcAft>
+            </a:pPr>
+            <a:r>
+              <a:rPr sz="1200" b="1">
+                <a:solidFill>
+                  <a:srgbClr val="F59E0B"/>
+                </a:solidFill>
+                <a:latin typeface="NanumGothic"/>
+                <a:ea typeface="NanumGothic"/>
+                <a:cs typeface="NanumGothic"/>
+              </a:rPr>
+              <a:t>NOTE   </a:t>
+            </a:r>
+            <a:r>
+              <a:rPr sz="1300" b="0">
+                <a:solidFill>
+                  <a:srgbClr val="0F172A"/>
+                </a:solidFill>
+                <a:latin typeface="NanumGothic"/>
+                <a:ea typeface="NanumGothic"/>
+                <a:cs typeface="NanumGothic"/>
+              </a:rPr>
+              <a:t>약하면 되돌아가 재생성·보강 (iteration)</a:t>
+            </a:r>
+          </a:p>
+        </p:txBody>
+      </p:sp>
+    </p:spTree>
+  </p:cSld>
+  <p:clrMapOvr>
+    <a:masterClrMapping/>
+  </p:clrMapOvr>
+</p:sld>
+</file>
+
+<file path=ppt/slides/slide25.xml><?xml version="1.0" encoding="utf-8"?>
+<p:sld xmlns:a="http://schemas.openxmlformats.org/drawingml/2006/main" xmlns:p="http://schemas.openxmlformats.org/presentationml/2006/main" xmlns:r="http://schemas.openxmlformats.org/officeDocument/2006/relationships">
+  <p:cSld>
+    <p:spTree>
+      <p:nvGrpSpPr>
+        <p:cNvPr id="1" name=""/>
+        <p:cNvGrpSpPr/>
+        <p:nvPr/>
+      </p:nvGrpSpPr>
+      <p:grpSpPr/>
+      <p:sp>
+        <p:nvSpPr>
+          <p:cNvPr id="2" name="Rectangle 1"/>
+          <p:cNvSpPr/>
+          <p:nvPr/>
+        </p:nvSpPr>
+        <p:spPr>
+          <a:xfrm>
+            <a:off x="0" y="0"/>
+            <a:ext cx="12191695" cy="6858000"/>
+          </a:xfrm>
+          <a:prstGeom prst="rect">
+            <a:avLst/>
+          </a:prstGeom>
+          <a:solidFill>
+            <a:srgbClr val="FFFFFF"/>
+          </a:solidFill>
+          <a:ln>
+            <a:noFill/>
+          </a:ln>
+          <a:effectLst/>
+        </p:spPr>
+        <p:style>
+          <a:lnRef idx="1">
+            <a:schemeClr val="accent1"/>
+          </a:lnRef>
+          <a:fillRef idx="3">
+            <a:schemeClr val="accent1"/>
+          </a:fillRef>
+          <a:effectRef idx="2">
+            <a:schemeClr val="accent1"/>
+          </a:effectRef>
+          <a:fontRef idx="minor">
+            <a:schemeClr val="lt1"/>
+          </a:fontRef>
+        </p:style>
+        <p:txBody>
+          <a:bodyPr rtlCol="0" anchor="ctr"/>
+          <a:lstStyle/>
+          <a:p>
+            <a:pPr algn="ctr"/>
+          </a:p>
+        </p:txBody>
+      </p:sp>
+      <p:sp>
+        <p:nvSpPr>
+          <p:cNvPr id="3" name="Rectangle 2"/>
+          <p:cNvSpPr/>
+          <p:nvPr/>
+        </p:nvSpPr>
+        <p:spPr>
+          <a:xfrm>
+            <a:off x="0" y="0"/>
+            <a:ext cx="164592" cy="6858000"/>
+          </a:xfrm>
+          <a:prstGeom prst="rect">
+            <a:avLst/>
+          </a:prstGeom>
+          <a:solidFill>
+            <a:srgbClr val="F59E0B"/>
+          </a:solidFill>
+          <a:ln>
+            <a:noFill/>
+          </a:ln>
+          <a:effectLst/>
+        </p:spPr>
+        <p:style>
+          <a:lnRef idx="1">
+            <a:schemeClr val="accent1"/>
+          </a:lnRef>
+          <a:fillRef idx="3">
+            <a:schemeClr val="accent1"/>
+          </a:fillRef>
+          <a:effectRef idx="2">
+            <a:schemeClr val="accent1"/>
+          </a:effectRef>
+          <a:fontRef idx="minor">
+            <a:schemeClr val="lt1"/>
+          </a:fontRef>
+        </p:style>
+        <p:txBody>
+          <a:bodyPr rtlCol="0" anchor="ctr"/>
+          <a:lstStyle/>
+          <a:p>
+            <a:pPr algn="ctr"/>
+          </a:p>
+        </p:txBody>
+      </p:sp>
+      <p:sp>
+        <p:nvSpPr>
+          <p:cNvPr id="4" name="TextBox 3"/>
+          <p:cNvSpPr txBox="1"/>
+          <p:nvPr/>
+        </p:nvSpPr>
+        <p:spPr>
+          <a:xfrm>
+            <a:off x="502920" y="384048"/>
+            <a:ext cx="10058400" cy="320040"/>
+          </a:xfrm>
+          <a:prstGeom prst="rect">
+            <a:avLst/>
+          </a:prstGeom>
+          <a:noFill/>
+        </p:spPr>
+        <p:txBody>
+          <a:bodyPr wrap="square" anchor="t" lIns="0" rIns="0" tIns="0" bIns="0">
+            <a:spAutoFit/>
+          </a:bodyPr>
+          <a:lstStyle/>
+          <a:p>
+            <a:pPr algn="l">
+              <a:lnSpc>
+                <a:spcPct val="100000"/>
+              </a:lnSpc>
+              <a:spcBef>
+                <a:spcPts val="0"/>
+              </a:spcBef>
+              <a:spcAft>
+                <a:spcPts val="600"/>
+              </a:spcAft>
+            </a:pPr>
+            <a:r>
+              <a:rPr sz="1200" b="1">
+                <a:solidFill>
+                  <a:srgbClr val="F59E0B"/>
+                </a:solidFill>
+                <a:latin typeface="NanumGothic"/>
+                <a:ea typeface="NanumGothic"/>
+                <a:cs typeface="NanumGothic"/>
+              </a:rPr>
+              <a:t>LAB · 실습</a:t>
+            </a:r>
+          </a:p>
+        </p:txBody>
+      </p:sp>
+      <p:sp>
+        <p:nvSpPr>
+          <p:cNvPr id="5" name="TextBox 4"/>
+          <p:cNvSpPr txBox="1"/>
+          <p:nvPr/>
+        </p:nvSpPr>
+        <p:spPr>
+          <a:xfrm>
+            <a:off x="502920" y="713232"/>
+            <a:ext cx="11155680" cy="731520"/>
+          </a:xfrm>
+          <a:prstGeom prst="rect">
+            <a:avLst/>
+          </a:prstGeom>
+          <a:noFill/>
+        </p:spPr>
+        <p:txBody>
+          <a:bodyPr wrap="square" anchor="t" lIns="0" rIns="0" tIns="0" bIns="0">
+            <a:spAutoFit/>
+          </a:bodyPr>
+          <a:lstStyle/>
+          <a:p>
+            <a:pPr algn="l">
+              <a:lnSpc>
+                <a:spcPct val="100000"/>
+              </a:lnSpc>
+              <a:spcBef>
+                <a:spcPts val="0"/>
+              </a:spcBef>
+              <a:spcAft>
+                <a:spcPts val="600"/>
+              </a:spcAft>
+            </a:pPr>
+            <a:r>
+              <a:rPr sz="2700" b="1">
+                <a:solidFill>
+                  <a:srgbClr val="0F172A"/>
+                </a:solidFill>
+                <a:latin typeface="NanumSquare"/>
+                <a:ea typeface="NanumSquare"/>
+                <a:cs typeface="NanumSquare"/>
+              </a:rPr>
+              <a:t>가설 생성·평가 → 제안 확정</a:t>
+            </a:r>
+          </a:p>
+        </p:txBody>
+      </p:sp>
+      <p:sp>
+        <p:nvSpPr>
+          <p:cNvPr id="6" name="Rectangle 5"/>
+          <p:cNvSpPr/>
+          <p:nvPr/>
+        </p:nvSpPr>
+        <p:spPr>
+          <a:xfrm>
+            <a:off x="521207" y="1417320"/>
+            <a:ext cx="1005840" cy="45720"/>
+          </a:xfrm>
+          <a:prstGeom prst="rect">
+            <a:avLst/>
+          </a:prstGeom>
+          <a:solidFill>
+            <a:srgbClr val="F59E0B"/>
+          </a:solidFill>
+          <a:ln>
+            <a:noFill/>
+          </a:ln>
+          <a:effectLst/>
+        </p:spPr>
+        <p:style>
+          <a:lnRef idx="1">
+            <a:schemeClr val="accent1"/>
+          </a:lnRef>
+          <a:fillRef idx="3">
+            <a:schemeClr val="accent1"/>
+          </a:fillRef>
+          <a:effectRef idx="2">
+            <a:schemeClr val="accent1"/>
+          </a:effectRef>
+          <a:fontRef idx="minor">
+            <a:schemeClr val="lt1"/>
+          </a:fontRef>
+        </p:style>
+        <p:txBody>
+          <a:bodyPr rtlCol="0" anchor="ctr"/>
+          <a:lstStyle/>
+          <a:p>
+            <a:pPr algn="ctr"/>
+          </a:p>
+        </p:txBody>
+      </p:sp>
+      <p:sp>
+        <p:nvSpPr>
+          <p:cNvPr id="7" name="TextBox 6"/>
+          <p:cNvSpPr txBox="1"/>
+          <p:nvPr/>
+        </p:nvSpPr>
+        <p:spPr>
+          <a:xfrm>
+            <a:off x="502920" y="6419088"/>
+            <a:ext cx="7315200" cy="365760"/>
+          </a:xfrm>
+          <a:prstGeom prst="rect">
+            <a:avLst/>
+          </a:prstGeom>
+          <a:noFill/>
+        </p:spPr>
+        <p:txBody>
+          <a:bodyPr wrap="square" anchor="ctr" lIns="0" rIns="0" tIns="0" bIns="0">
+            <a:spAutoFit/>
+          </a:bodyPr>
+          <a:lstStyle/>
+          <a:p>
+            <a:pPr algn="l">
+              <a:lnSpc>
+                <a:spcPct val="100000"/>
+              </a:lnSpc>
+              <a:spcBef>
+                <a:spcPts val="0"/>
+              </a:spcBef>
+              <a:spcAft>
+                <a:spcPts val="600"/>
+              </a:spcAft>
+            </a:pPr>
+            <a:r>
+              <a:rPr sz="900" b="0">
+                <a:solidFill>
+                  <a:srgbClr val="64748B"/>
+                </a:solidFill>
+                <a:latin typeface="NanumGothic"/>
+                <a:ea typeface="NanumGothic"/>
+                <a:cs typeface="NanumGothic"/>
+              </a:rPr>
+              <a:t>AI 에이전트와 응용  ·  원광대학교 5일 교육</a:t>
+            </a:r>
+          </a:p>
+        </p:txBody>
+      </p:sp>
+      <p:sp>
+        <p:nvSpPr>
+          <p:cNvPr id="8" name="TextBox 7"/>
+          <p:cNvSpPr txBox="1"/>
+          <p:nvPr/>
+        </p:nvSpPr>
+        <p:spPr>
+          <a:xfrm>
+            <a:off x="10241280" y="6419088"/>
+            <a:ext cx="1463040" cy="365760"/>
+          </a:xfrm>
+          <a:prstGeom prst="rect">
+            <a:avLst/>
+          </a:prstGeom>
+          <a:noFill/>
+        </p:spPr>
+        <p:txBody>
+          <a:bodyPr wrap="square" anchor="ctr" lIns="0" rIns="0" tIns="0" bIns="0">
+            <a:spAutoFit/>
+          </a:bodyPr>
+          <a:lstStyle/>
+          <a:p>
+            <a:pPr algn="r">
+              <a:lnSpc>
+                <a:spcPct val="100000"/>
+              </a:lnSpc>
+              <a:spcBef>
+                <a:spcPts val="0"/>
+              </a:spcBef>
+              <a:spcAft>
+                <a:spcPts val="600"/>
+              </a:spcAft>
+            </a:pPr>
+            <a:r>
+              <a:rPr sz="900" b="1">
+                <a:solidFill>
+                  <a:srgbClr val="F59E0B"/>
+                </a:solidFill>
+                <a:latin typeface="NanumGothic"/>
+                <a:ea typeface="NanumGothic"/>
+                <a:cs typeface="NanumGothic"/>
+              </a:rPr>
+              <a:t>Day 4 · 목</a:t>
+            </a:r>
+          </a:p>
+        </p:txBody>
+      </p:sp>
+      <p:sp>
+        <p:nvSpPr>
+          <p:cNvPr id="9" name="Rounded Rectangle 8"/>
+          <p:cNvSpPr/>
+          <p:nvPr/>
+        </p:nvSpPr>
+        <p:spPr>
+          <a:xfrm>
+            <a:off x="502920" y="1783080"/>
+            <a:ext cx="7315200" cy="4160520"/>
+          </a:xfrm>
+          <a:prstGeom prst="roundRect">
+            <a:avLst/>
+          </a:prstGeom>
+          <a:solidFill>
+            <a:srgbClr val="F8FAFC"/>
+          </a:solidFill>
+          <a:ln w="12700">
+            <a:solidFill>
+              <a:srgbClr val="E2E8F0"/>
+            </a:solidFill>
+          </a:ln>
+          <a:effectLst/>
+        </p:spPr>
+        <p:style>
+          <a:lnRef idx="1">
+            <a:schemeClr val="accent1"/>
+          </a:lnRef>
+          <a:fillRef idx="3">
+            <a:schemeClr val="accent1"/>
+          </a:fillRef>
+          <a:effectRef idx="2">
+            <a:schemeClr val="accent1"/>
+          </a:effectRef>
+          <a:fontRef idx="minor">
+            <a:schemeClr val="lt1"/>
+          </a:fontRef>
+        </p:style>
+        <p:txBody>
+          <a:bodyPr rtlCol="0" anchor="ctr"/>
+          <a:lstStyle/>
+          <a:p>
+            <a:pPr algn="ctr"/>
+          </a:p>
+        </p:txBody>
+      </p:sp>
+      <p:sp>
+        <p:nvSpPr>
+          <p:cNvPr id="10" name="TextBox 9"/>
+          <p:cNvSpPr txBox="1"/>
+          <p:nvPr/>
+        </p:nvSpPr>
+        <p:spPr>
+          <a:xfrm>
+            <a:off x="777240" y="1965960"/>
+            <a:ext cx="6766560" cy="365760"/>
+          </a:xfrm>
+          <a:prstGeom prst="rect">
+            <a:avLst/>
+          </a:prstGeom>
+          <a:noFill/>
+        </p:spPr>
+        <p:txBody>
+          <a:bodyPr wrap="square" anchor="t" lIns="0" rIns="0" tIns="0" bIns="0">
+            <a:spAutoFit/>
+          </a:bodyPr>
+          <a:lstStyle/>
+          <a:p>
+            <a:pPr algn="l">
+              <a:lnSpc>
+                <a:spcPct val="100000"/>
+              </a:lnSpc>
+              <a:spcBef>
+                <a:spcPts val="0"/>
+              </a:spcBef>
+              <a:spcAft>
+                <a:spcPts val="600"/>
+              </a:spcAft>
+            </a:pPr>
+            <a:r>
+              <a:rPr sz="1300" b="1">
+                <a:solidFill>
+                  <a:srgbClr val="F59E0B"/>
+                </a:solidFill>
+                <a:latin typeface="NanumGothic"/>
+                <a:ea typeface="NanumGothic"/>
+                <a:cs typeface="NanumGothic"/>
+              </a:rPr>
+              <a:t>실습 단계</a:t>
+            </a:r>
+          </a:p>
+        </p:txBody>
+      </p:sp>
+      <p:sp>
+        <p:nvSpPr>
+          <p:cNvPr id="11" name="Oval 10"/>
+          <p:cNvSpPr/>
+          <p:nvPr/>
+        </p:nvSpPr>
+        <p:spPr>
+          <a:xfrm>
+            <a:off x="777240" y="2468880"/>
+            <a:ext cx="411480" cy="411480"/>
+          </a:xfrm>
+          <a:prstGeom prst="ellipse">
+            <a:avLst/>
+          </a:prstGeom>
+          <a:solidFill>
+            <a:srgbClr val="F59E0B"/>
+          </a:solidFill>
+          <a:ln>
+            <a:noFill/>
+          </a:ln>
+          <a:effectLst/>
+        </p:spPr>
+        <p:style>
+          <a:lnRef idx="1">
+            <a:schemeClr val="accent1"/>
+          </a:lnRef>
+          <a:fillRef idx="3">
+            <a:schemeClr val="accent1"/>
+          </a:fillRef>
+          <a:effectRef idx="2">
+            <a:schemeClr val="accent1"/>
+          </a:effectRef>
+          <a:fontRef idx="minor">
+            <a:schemeClr val="lt1"/>
+          </a:fontRef>
+        </p:style>
+        <p:txBody>
+          <a:bodyPr rtlCol="0" anchor="ctr"/>
+          <a:lstStyle/>
+          <a:p>
+            <a:pPr algn="ctr"/>
+          </a:p>
+        </p:txBody>
+      </p:sp>
+      <p:sp>
+        <p:nvSpPr>
+          <p:cNvPr id="12" name="TextBox 11"/>
+          <p:cNvSpPr txBox="1"/>
+          <p:nvPr/>
+        </p:nvSpPr>
+        <p:spPr>
+          <a:xfrm>
+            <a:off x="777240" y="2468880"/>
+            <a:ext cx="411480" cy="411480"/>
+          </a:xfrm>
+          <a:prstGeom prst="rect">
+            <a:avLst/>
+          </a:prstGeom>
+          <a:noFill/>
+        </p:spPr>
+        <p:txBody>
+          <a:bodyPr wrap="square" anchor="ctr" lIns="0" rIns="0" tIns="0" bIns="0">
+            <a:spAutoFit/>
+          </a:bodyPr>
+          <a:lstStyle/>
+          <a:p>
+            <a:pPr algn="ctr">
+              <a:lnSpc>
+                <a:spcPct val="100000"/>
+              </a:lnSpc>
+              <a:spcBef>
+                <a:spcPts val="0"/>
+              </a:spcBef>
+              <a:spcAft>
+                <a:spcPts val="600"/>
+              </a:spcAft>
+            </a:pPr>
+            <a:r>
+              <a:rPr sz="1300" b="1">
+                <a:solidFill>
+                  <a:srgbClr val="FFFFFF"/>
+                </a:solidFill>
+                <a:latin typeface="NanumSquare"/>
+                <a:ea typeface="NanumSquare"/>
+                <a:cs typeface="NanumSquare"/>
+              </a:rPr>
+              <a:t>1</a:t>
+            </a:r>
+          </a:p>
+        </p:txBody>
+      </p:sp>
+      <p:sp>
+        <p:nvSpPr>
+          <p:cNvPr id="13" name="TextBox 12"/>
+          <p:cNvSpPr txBox="1"/>
+          <p:nvPr/>
+        </p:nvSpPr>
+        <p:spPr>
+          <a:xfrm>
+            <a:off x="1371600" y="2487168"/>
+            <a:ext cx="6309360" cy="457200"/>
+          </a:xfrm>
+          <a:prstGeom prst="rect">
+            <a:avLst/>
+          </a:prstGeom>
+          <a:noFill/>
+        </p:spPr>
+        <p:txBody>
+          <a:bodyPr wrap="square" anchor="ctr" lIns="0" rIns="0" tIns="0" bIns="0">
+            <a:spAutoFit/>
+          </a:bodyPr>
+          <a:lstStyle/>
+          <a:p>
+            <a:pPr algn="l">
+              <a:lnSpc>
+                <a:spcPct val="100000"/>
+              </a:lnSpc>
+              <a:spcBef>
+                <a:spcPts val="0"/>
+              </a:spcBef>
+              <a:spcAft>
+                <a:spcPts val="600"/>
+              </a:spcAft>
+            </a:pPr>
+            <a:r>
+              <a:rPr sz="1400" b="0">
+                <a:solidFill>
+                  <a:srgbClr val="0F172A"/>
+                </a:solidFill>
+                <a:latin typeface="NanumGothic"/>
+                <a:ea typeface="NanumGothic"/>
+                <a:cs typeface="NanumGothic"/>
+              </a:rPr>
+              <a:t>gap에서 가설 다수 생성</a:t>
+            </a:r>
+          </a:p>
+        </p:txBody>
+      </p:sp>
+      <p:sp>
+        <p:nvSpPr>
+          <p:cNvPr id="14" name="Oval 13"/>
+          <p:cNvSpPr/>
+          <p:nvPr/>
+        </p:nvSpPr>
+        <p:spPr>
+          <a:xfrm>
+            <a:off x="777240" y="3035808"/>
+            <a:ext cx="411480" cy="411480"/>
+          </a:xfrm>
+          <a:prstGeom prst="ellipse">
+            <a:avLst/>
+          </a:prstGeom>
+          <a:solidFill>
+            <a:srgbClr val="F59E0B"/>
+          </a:solidFill>
+          <a:ln>
+            <a:noFill/>
+          </a:ln>
+          <a:effectLst/>
+        </p:spPr>
+        <p:style>
+          <a:lnRef idx="1">
+            <a:schemeClr val="accent1"/>
+          </a:lnRef>
+          <a:fillRef idx="3">
+            <a:schemeClr val="accent1"/>
+          </a:fillRef>
+          <a:effectRef idx="2">
+            <a:schemeClr val="accent1"/>
+          </a:effectRef>
+          <a:fontRef idx="minor">
+            <a:schemeClr val="lt1"/>
+          </a:fontRef>
+        </p:style>
+        <p:txBody>
+          <a:bodyPr rtlCol="0" anchor="ctr"/>
+          <a:lstStyle/>
+          <a:p>
+            <a:pPr algn="ctr"/>
+          </a:p>
+        </p:txBody>
+      </p:sp>
+      <p:sp>
+        <p:nvSpPr>
+          <p:cNvPr id="15" name="TextBox 14"/>
+          <p:cNvSpPr txBox="1"/>
+          <p:nvPr/>
+        </p:nvSpPr>
+        <p:spPr>
+          <a:xfrm>
+            <a:off x="777240" y="3035808"/>
+            <a:ext cx="411480" cy="411480"/>
+          </a:xfrm>
+          <a:prstGeom prst="rect">
+            <a:avLst/>
+          </a:prstGeom>
+          <a:noFill/>
+        </p:spPr>
+        <p:txBody>
+          <a:bodyPr wrap="square" anchor="ctr" lIns="0" rIns="0" tIns="0" bIns="0">
+            <a:spAutoFit/>
+          </a:bodyPr>
+          <a:lstStyle/>
+          <a:p>
+            <a:pPr algn="ctr">
+              <a:lnSpc>
+                <a:spcPct val="100000"/>
+              </a:lnSpc>
+              <a:spcBef>
+                <a:spcPts val="0"/>
+              </a:spcBef>
+              <a:spcAft>
+                <a:spcPts val="600"/>
+              </a:spcAft>
+            </a:pPr>
+            <a:r>
+              <a:rPr sz="1300" b="1">
+                <a:solidFill>
+                  <a:srgbClr val="FFFFFF"/>
+                </a:solidFill>
+                <a:latin typeface="NanumSquare"/>
+                <a:ea typeface="NanumSquare"/>
+                <a:cs typeface="NanumSquare"/>
+              </a:rPr>
+              <a:t>2</a:t>
+            </a:r>
+          </a:p>
+        </p:txBody>
+      </p:sp>
+      <p:sp>
+        <p:nvSpPr>
+          <p:cNvPr id="16" name="TextBox 15"/>
+          <p:cNvSpPr txBox="1"/>
+          <p:nvPr/>
+        </p:nvSpPr>
+        <p:spPr>
+          <a:xfrm>
+            <a:off x="1371600" y="3054096"/>
+            <a:ext cx="6309360" cy="457200"/>
+          </a:xfrm>
+          <a:prstGeom prst="rect">
+            <a:avLst/>
+          </a:prstGeom>
+          <a:noFill/>
+        </p:spPr>
+        <p:txBody>
+          <a:bodyPr wrap="square" anchor="ctr" lIns="0" rIns="0" tIns="0" bIns="0">
+            <a:spAutoFit/>
+          </a:bodyPr>
+          <a:lstStyle/>
+          <a:p>
+            <a:pPr algn="l">
+              <a:lnSpc>
+                <a:spcPct val="100000"/>
+              </a:lnSpc>
+              <a:spcBef>
+                <a:spcPts val="0"/>
+              </a:spcBef>
+              <a:spcAft>
+                <a:spcPts val="600"/>
+              </a:spcAft>
+            </a:pPr>
+            <a:r>
+              <a:rPr sz="1400" b="0">
+                <a:solidFill>
+                  <a:srgbClr val="0F172A"/>
+                </a:solidFill>
+                <a:latin typeface="NanumGothic"/>
+                <a:ea typeface="NanumGothic"/>
+                <a:cs typeface="NanumGothic"/>
+              </a:rPr>
+              <a:t>기준별 평가·점수·랭킹</a:t>
+            </a:r>
+          </a:p>
+        </p:txBody>
+      </p:sp>
+      <p:sp>
+        <p:nvSpPr>
+          <p:cNvPr id="17" name="Oval 16"/>
+          <p:cNvSpPr/>
+          <p:nvPr/>
+        </p:nvSpPr>
+        <p:spPr>
+          <a:xfrm>
+            <a:off x="777240" y="3602736"/>
+            <a:ext cx="411480" cy="411480"/>
+          </a:xfrm>
+          <a:prstGeom prst="ellipse">
+            <a:avLst/>
+          </a:prstGeom>
+          <a:solidFill>
+            <a:srgbClr val="F59E0B"/>
+          </a:solidFill>
+          <a:ln>
+            <a:noFill/>
+          </a:ln>
+          <a:effectLst/>
+        </p:spPr>
+        <p:style>
+          <a:lnRef idx="1">
+            <a:schemeClr val="accent1"/>
+          </a:lnRef>
+          <a:fillRef idx="3">
+            <a:schemeClr val="accent1"/>
+          </a:fillRef>
+          <a:effectRef idx="2">
+            <a:schemeClr val="accent1"/>
+          </a:effectRef>
+          <a:fontRef idx="minor">
+            <a:schemeClr val="lt1"/>
+          </a:fontRef>
+        </p:style>
+        <p:txBody>
+          <a:bodyPr rtlCol="0" anchor="ctr"/>
+          <a:lstStyle/>
+          <a:p>
+            <a:pPr algn="ctr"/>
+          </a:p>
+        </p:txBody>
+      </p:sp>
+      <p:sp>
+        <p:nvSpPr>
+          <p:cNvPr id="18" name="TextBox 17"/>
+          <p:cNvSpPr txBox="1"/>
+          <p:nvPr/>
+        </p:nvSpPr>
+        <p:spPr>
+          <a:xfrm>
+            <a:off x="777240" y="3602736"/>
+            <a:ext cx="411480" cy="411480"/>
+          </a:xfrm>
+          <a:prstGeom prst="rect">
+            <a:avLst/>
+          </a:prstGeom>
+          <a:noFill/>
+        </p:spPr>
+        <p:txBody>
+          <a:bodyPr wrap="square" anchor="ctr" lIns="0" rIns="0" tIns="0" bIns="0">
+            <a:spAutoFit/>
+          </a:bodyPr>
+          <a:lstStyle/>
+          <a:p>
+            <a:pPr algn="ctr">
+              <a:lnSpc>
+                <a:spcPct val="100000"/>
+              </a:lnSpc>
+              <a:spcBef>
+                <a:spcPts val="0"/>
+              </a:spcBef>
+              <a:spcAft>
+                <a:spcPts val="600"/>
+              </a:spcAft>
+            </a:pPr>
+            <a:r>
+              <a:rPr sz="1300" b="1">
+                <a:solidFill>
+                  <a:srgbClr val="FFFFFF"/>
+                </a:solidFill>
+                <a:latin typeface="NanumSquare"/>
+                <a:ea typeface="NanumSquare"/>
+                <a:cs typeface="NanumSquare"/>
+              </a:rPr>
+              <a:t>3</a:t>
+            </a:r>
+          </a:p>
+        </p:txBody>
+      </p:sp>
+      <p:sp>
+        <p:nvSpPr>
+          <p:cNvPr id="19" name="TextBox 18"/>
+          <p:cNvSpPr txBox="1"/>
+          <p:nvPr/>
+        </p:nvSpPr>
+        <p:spPr>
+          <a:xfrm>
+            <a:off x="1371600" y="3621024"/>
+            <a:ext cx="6309360" cy="457200"/>
+          </a:xfrm>
+          <a:prstGeom prst="rect">
+            <a:avLst/>
+          </a:prstGeom>
+          <a:noFill/>
+        </p:spPr>
+        <p:txBody>
+          <a:bodyPr wrap="square" anchor="ctr" lIns="0" rIns="0" tIns="0" bIns="0">
+            <a:spAutoFit/>
+          </a:bodyPr>
+          <a:lstStyle/>
+          <a:p>
+            <a:pPr algn="l">
+              <a:lnSpc>
+                <a:spcPct val="100000"/>
+              </a:lnSpc>
+              <a:spcBef>
+                <a:spcPts val="0"/>
+              </a:spcBef>
+              <a:spcAft>
+                <a:spcPts val="600"/>
+              </a:spcAft>
+            </a:pPr>
+            <a:r>
+              <a:rPr sz="1400" b="0">
+                <a:solidFill>
+                  <a:srgbClr val="0F172A"/>
+                </a:solidFill>
+                <a:latin typeface="NanumGothic"/>
+                <a:ea typeface="NanumGothic"/>
+                <a:cs typeface="NanumGothic"/>
+              </a:rPr>
+              <a:t>우선순위 1~2개 + rationale 보강</a:t>
+            </a:r>
+          </a:p>
+        </p:txBody>
+      </p:sp>
+      <p:sp>
+        <p:nvSpPr>
+          <p:cNvPr id="20" name="Oval 19"/>
+          <p:cNvSpPr/>
+          <p:nvPr/>
+        </p:nvSpPr>
+        <p:spPr>
+          <a:xfrm>
+            <a:off x="777240" y="4169664"/>
+            <a:ext cx="411480" cy="411480"/>
+          </a:xfrm>
+          <a:prstGeom prst="ellipse">
+            <a:avLst/>
+          </a:prstGeom>
+          <a:solidFill>
+            <a:srgbClr val="F59E0B"/>
+          </a:solidFill>
+          <a:ln>
+            <a:noFill/>
+          </a:ln>
+          <a:effectLst/>
+        </p:spPr>
+        <p:style>
+          <a:lnRef idx="1">
+            <a:schemeClr val="accent1"/>
+          </a:lnRef>
+          <a:fillRef idx="3">
+            <a:schemeClr val="accent1"/>
+          </a:fillRef>
+          <a:effectRef idx="2">
+            <a:schemeClr val="accent1"/>
+          </a:effectRef>
+          <a:fontRef idx="minor">
+            <a:schemeClr val="lt1"/>
+          </a:fontRef>
+        </p:style>
+        <p:txBody>
+          <a:bodyPr rtlCol="0" anchor="ctr"/>
+          <a:lstStyle/>
+          <a:p>
+            <a:pPr algn="ctr"/>
+          </a:p>
+        </p:txBody>
+      </p:sp>
+      <p:sp>
+        <p:nvSpPr>
+          <p:cNvPr id="21" name="TextBox 20"/>
+          <p:cNvSpPr txBox="1"/>
+          <p:nvPr/>
+        </p:nvSpPr>
+        <p:spPr>
+          <a:xfrm>
+            <a:off x="777240" y="4169664"/>
+            <a:ext cx="411480" cy="411480"/>
+          </a:xfrm>
+          <a:prstGeom prst="rect">
+            <a:avLst/>
+          </a:prstGeom>
+          <a:noFill/>
+        </p:spPr>
+        <p:txBody>
+          <a:bodyPr wrap="square" anchor="ctr" lIns="0" rIns="0" tIns="0" bIns="0">
+            <a:spAutoFit/>
+          </a:bodyPr>
+          <a:lstStyle/>
+          <a:p>
+            <a:pPr algn="ctr">
+              <a:lnSpc>
+                <a:spcPct val="100000"/>
+              </a:lnSpc>
+              <a:spcBef>
+                <a:spcPts val="0"/>
+              </a:spcBef>
+              <a:spcAft>
+                <a:spcPts val="600"/>
+              </a:spcAft>
+            </a:pPr>
+            <a:r>
+              <a:rPr sz="1300" b="1">
+                <a:solidFill>
+                  <a:srgbClr val="FFFFFF"/>
+                </a:solidFill>
+                <a:latin typeface="NanumSquare"/>
+                <a:ea typeface="NanumSquare"/>
+                <a:cs typeface="NanumSquare"/>
+              </a:rPr>
+              <a:t>4</a:t>
+            </a:r>
+          </a:p>
+        </p:txBody>
+      </p:sp>
+      <p:sp>
+        <p:nvSpPr>
+          <p:cNvPr id="22" name="TextBox 21"/>
+          <p:cNvSpPr txBox="1"/>
+          <p:nvPr/>
+        </p:nvSpPr>
+        <p:spPr>
+          <a:xfrm>
+            <a:off x="1371600" y="4187952"/>
+            <a:ext cx="6309360" cy="457200"/>
+          </a:xfrm>
+          <a:prstGeom prst="rect">
+            <a:avLst/>
+          </a:prstGeom>
+          <a:noFill/>
+        </p:spPr>
+        <p:txBody>
+          <a:bodyPr wrap="square" anchor="ctr" lIns="0" rIns="0" tIns="0" bIns="0">
+            <a:spAutoFit/>
+          </a:bodyPr>
+          <a:lstStyle/>
+          <a:p>
+            <a:pPr algn="l">
+              <a:lnSpc>
+                <a:spcPct val="100000"/>
+              </a:lnSpc>
+              <a:spcBef>
+                <a:spcPts val="0"/>
+              </a:spcBef>
+              <a:spcAft>
+                <a:spcPts val="600"/>
+              </a:spcAft>
+            </a:pPr>
+            <a:r>
+              <a:rPr sz="1400" b="0">
+                <a:solidFill>
+                  <a:srgbClr val="0F172A"/>
+                </a:solidFill>
+                <a:latin typeface="NanumGothic"/>
+                <a:ea typeface="NanumGothic"/>
+                <a:cs typeface="NanumGothic"/>
+              </a:rPr>
+              <a:t>가설 제안 확정</a:t>
+            </a:r>
+          </a:p>
+        </p:txBody>
+      </p:sp>
+      <p:sp>
+        <p:nvSpPr>
+          <p:cNvPr id="23" name="Rounded Rectangle 22"/>
+          <p:cNvSpPr/>
+          <p:nvPr/>
+        </p:nvSpPr>
+        <p:spPr>
+          <a:xfrm>
+            <a:off x="8001000" y="1783080"/>
+            <a:ext cx="3657600" cy="4160520"/>
+          </a:xfrm>
+          <a:prstGeom prst="roundRect">
+            <a:avLst/>
+          </a:prstGeom>
+          <a:solidFill>
+            <a:srgbClr val="12203C"/>
+          </a:solidFill>
+          <a:ln>
+            <a:noFill/>
+          </a:ln>
+          <a:effectLst/>
+        </p:spPr>
+        <p:style>
+          <a:lnRef idx="1">
+            <a:schemeClr val="accent1"/>
+          </a:lnRef>
+          <a:fillRef idx="3">
+            <a:schemeClr val="accent1"/>
+          </a:fillRef>
+          <a:effectRef idx="2">
+            <a:schemeClr val="accent1"/>
+          </a:effectRef>
+          <a:fontRef idx="minor">
+            <a:schemeClr val="lt1"/>
+          </a:fontRef>
+        </p:style>
+        <p:txBody>
+          <a:bodyPr rtlCol="0" anchor="ctr"/>
+          <a:lstStyle/>
+          <a:p>
+            <a:pPr algn="ctr"/>
+          </a:p>
+        </p:txBody>
+      </p:sp>
+      <p:sp>
+        <p:nvSpPr>
+          <p:cNvPr id="24" name="TextBox 23"/>
+          <p:cNvSpPr txBox="1"/>
+          <p:nvPr/>
+        </p:nvSpPr>
+        <p:spPr>
+          <a:xfrm>
+            <a:off x="8275320" y="2011680"/>
+            <a:ext cx="3108960" cy="457200"/>
+          </a:xfrm>
+          <a:prstGeom prst="rect">
+            <a:avLst/>
+          </a:prstGeom>
+          <a:noFill/>
+        </p:spPr>
+        <p:txBody>
+          <a:bodyPr wrap="square" anchor="t" lIns="0" rIns="0" tIns="0" bIns="0">
+            <a:spAutoFit/>
+          </a:bodyPr>
+          <a:lstStyle/>
+          <a:p>
+            <a:pPr algn="l">
+              <a:lnSpc>
+                <a:spcPct val="100000"/>
+              </a:lnSpc>
+              <a:spcBef>
+                <a:spcPts val="0"/>
+              </a:spcBef>
+              <a:spcAft>
+                <a:spcPts val="600"/>
+              </a:spcAft>
+            </a:pPr>
+            <a:r>
+              <a:rPr sz="1500" b="1">
+                <a:solidFill>
+                  <a:srgbClr val="F59E0B"/>
+                </a:solidFill>
+                <a:latin typeface="NanumSquare"/>
+                <a:ea typeface="NanumSquare"/>
+                <a:cs typeface="NanumSquare"/>
+              </a:rPr>
+              <a:t>산출물</a:t>
+            </a:r>
+          </a:p>
+        </p:txBody>
+      </p:sp>
+      <p:sp>
+        <p:nvSpPr>
+          <p:cNvPr id="25" name="TextBox 24"/>
+          <p:cNvSpPr txBox="1"/>
+          <p:nvPr/>
+        </p:nvSpPr>
+        <p:spPr>
+          <a:xfrm>
+            <a:off x="8275320" y="2560320"/>
+            <a:ext cx="3154680" cy="3108960"/>
+          </a:xfrm>
+          <a:prstGeom prst="rect">
+            <a:avLst/>
+          </a:prstGeom>
+          <a:noFill/>
+        </p:spPr>
+        <p:txBody>
+          <a:bodyPr wrap="square" anchor="t" lIns="0" rIns="0" tIns="0" bIns="0">
+            <a:spAutoFit/>
+          </a:bodyPr>
+          <a:lstStyle/>
+          <a:p>
+            <a:pPr algn="l">
+              <a:lnSpc>
+                <a:spcPct val="120000"/>
+              </a:lnSpc>
+              <a:spcBef>
+                <a:spcPts val="0"/>
+              </a:spcBef>
+              <a:spcAft>
+                <a:spcPts val="600"/>
+              </a:spcAft>
+            </a:pPr>
+            <a:r>
+              <a:rPr sz="1400" b="0">
+                <a:solidFill>
+                  <a:srgbClr val="FFFFFF"/>
+                </a:solidFill>
+                <a:latin typeface="NanumGothic"/>
+                <a:ea typeface="NanumGothic"/>
+                <a:cs typeface="NanumGothic"/>
+              </a:rPr>
+              <a:t>최종 가설 제안 + 분석 노트
+에이전트 완주! 양식: output/report-template.md · 분석: result-analysis-template.md</a:t>
+            </a:r>
+          </a:p>
+        </p:txBody>
+      </p:sp>
+    </p:spTree>
+  </p:cSld>
+  <p:clrMapOvr>
+    <a:masterClrMapping/>
+  </p:clrMapOvr>
+</p:sld>
+</file>
+
+<file path=ppt/slides/slide26.xml><?xml version="1.0" encoding="utf-8"?>
 <p:sld xmlns:a="http://schemas.openxmlformats.org/drawingml/2006/main" xmlns:p="http://schemas.openxmlformats.org/presentationml/2006/main" xmlns:r="http://schemas.openxmlformats.org/officeDocument/2006/relationships">
   <p:cSld>
     <p:spTree>

--- a/slides/day4.pptx
+++ b/slides/day4.pptx
@@ -7866,7 +7866,145 @@
       </p:sp>
       <p:sp>
         <p:nvSpPr>
-          <p:cNvPr id="18" name="Rounded Rectangle 17"/>
+          <p:cNvPr id="18" name="Oval 17"/>
+          <p:cNvSpPr/>
+          <p:nvPr/>
+        </p:nvSpPr>
+        <p:spPr>
+          <a:xfrm>
+            <a:off x="548640" y="4517136"/>
+            <a:ext cx="146304" cy="146304"/>
+          </a:xfrm>
+          <a:prstGeom prst="ellipse">
+            <a:avLst/>
+          </a:prstGeom>
+          <a:solidFill>
+            <a:srgbClr val="F59E0B"/>
+          </a:solidFill>
+          <a:ln>
+            <a:noFill/>
+          </a:ln>
+          <a:effectLst/>
+        </p:spPr>
+        <p:style>
+          <a:lnRef idx="1">
+            <a:schemeClr val="accent1"/>
+          </a:lnRef>
+          <a:fillRef idx="3">
+            <a:schemeClr val="accent1"/>
+          </a:fillRef>
+          <a:effectRef idx="2">
+            <a:schemeClr val="accent1"/>
+          </a:effectRef>
+          <a:fontRef idx="minor">
+            <a:schemeClr val="lt1"/>
+          </a:fontRef>
+        </p:style>
+        <p:txBody>
+          <a:bodyPr rtlCol="0" anchor="ctr"/>
+          <a:lstStyle/>
+          <a:p>
+            <a:pPr algn="ctr"/>
+          </a:p>
+        </p:txBody>
+      </p:sp>
+      <p:sp>
+        <p:nvSpPr>
+          <p:cNvPr id="19" name="TextBox 18"/>
+          <p:cNvSpPr txBox="1"/>
+          <p:nvPr/>
+        </p:nvSpPr>
+        <p:spPr>
+          <a:xfrm>
+            <a:off x="868680" y="4434840"/>
+            <a:ext cx="10607040" cy="457200"/>
+          </a:xfrm>
+          <a:prstGeom prst="rect">
+            <a:avLst/>
+          </a:prstGeom>
+          <a:noFill/>
+        </p:spPr>
+        <p:txBody>
+          <a:bodyPr wrap="square" anchor="t" lIns="0" rIns="0" tIns="0" bIns="0">
+            <a:spAutoFit/>
+          </a:bodyPr>
+          <a:lstStyle/>
+          <a:p>
+            <a:pPr algn="l">
+              <a:lnSpc>
+                <a:spcPct val="100000"/>
+              </a:lnSpc>
+              <a:spcBef>
+                <a:spcPts val="0"/>
+              </a:spcBef>
+              <a:spcAft>
+                <a:spcPts val="600"/>
+              </a:spcAft>
+            </a:pPr>
+            <a:r>
+              <a:rPr sz="1600" b="1">
+                <a:solidFill>
+                  <a:srgbClr val="0F172A"/>
+                </a:solidFill>
+                <a:latin typeface="NanumGothic"/>
+                <a:ea typeface="NanumGothic"/>
+                <a:cs typeface="NanumGothic"/>
+              </a:rPr>
+              <a:t>예시</a:t>
+            </a:r>
+          </a:p>
+        </p:txBody>
+      </p:sp>
+      <p:sp>
+        <p:nvSpPr>
+          <p:cNvPr id="20" name="TextBox 19"/>
+          <p:cNvSpPr txBox="1"/>
+          <p:nvPr/>
+        </p:nvSpPr>
+        <p:spPr>
+          <a:xfrm>
+            <a:off x="868680" y="4818888"/>
+            <a:ext cx="10607040" cy="457200"/>
+          </a:xfrm>
+          <a:prstGeom prst="rect">
+            <a:avLst/>
+          </a:prstGeom>
+          <a:noFill/>
+        </p:spPr>
+        <p:txBody>
+          <a:bodyPr wrap="square" anchor="t" lIns="0" rIns="0" tIns="0" bIns="0">
+            <a:spAutoFit/>
+          </a:bodyPr>
+          <a:lstStyle/>
+          <a:p>
+            <a:pPr algn="l">
+              <a:lnSpc>
+                <a:spcPct val="100000"/>
+              </a:lnSpc>
+              <a:spcBef>
+                <a:spcPts val="0"/>
+              </a:spcBef>
+              <a:spcAft>
+                <a:spcPts val="600"/>
+              </a:spcAft>
+            </a:pPr>
+            <a:r>
+              <a:rPr sz="1300" b="0">
+                <a:solidFill>
+                  <a:srgbClr val="64748B"/>
+                </a:solidFill>
+                <a:latin typeface="NanumGothic"/>
+                <a:ea typeface="NanumGothic"/>
+                <a:cs typeface="NanumGothic"/>
+              </a:rPr>
+              <a:t>논문마다 동일 표로 → 주장이 엇갈리는 행이 한눈에</a:t>
+            </a:r>
+          </a:p>
+        </p:txBody>
+      </p:sp>
+      <p:sp>
+        <p:nvSpPr>
+          <p:cNvPr id="21" name="Rounded Rectangle 20"/>
           <p:cNvSpPr/>
           <p:nvPr/>
         </p:nvSpPr>
@@ -7912,7 +8050,7 @@
       </p:sp>
       <p:sp>
         <p:nvSpPr>
-          <p:cNvPr id="19" name="TextBox 18"/>
+          <p:cNvPr id="22" name="TextBox 21"/>
           <p:cNvSpPr txBox="1"/>
           <p:nvPr/>
         </p:nvSpPr>
@@ -7963,7 +8101,7 @@
                 <a:ea typeface="NanumGothic"/>
                 <a:cs typeface="NanumGothic"/>
               </a:rPr>
-              <a:t>예: 논문마다 동일 표로 → 주장이 엇갈리는 행이 한눈에</a:t>
+              <a:t>정규화해야 비교가 되고, 비교에서 gap이 드러난다</a:t>
             </a:r>
           </a:p>
         </p:txBody>
@@ -16706,7 +16844,145 @@
       </p:sp>
       <p:sp>
         <p:nvSpPr>
-          <p:cNvPr id="18" name="Rounded Rectangle 17"/>
+          <p:cNvPr id="18" name="Oval 17"/>
+          <p:cNvSpPr/>
+          <p:nvPr/>
+        </p:nvSpPr>
+        <p:spPr>
+          <a:xfrm>
+            <a:off x="548640" y="4517136"/>
+            <a:ext cx="146304" cy="146304"/>
+          </a:xfrm>
+          <a:prstGeom prst="ellipse">
+            <a:avLst/>
+          </a:prstGeom>
+          <a:solidFill>
+            <a:srgbClr val="F59E0B"/>
+          </a:solidFill>
+          <a:ln>
+            <a:noFill/>
+          </a:ln>
+          <a:effectLst/>
+        </p:spPr>
+        <p:style>
+          <a:lnRef idx="1">
+            <a:schemeClr val="accent1"/>
+          </a:lnRef>
+          <a:fillRef idx="3">
+            <a:schemeClr val="accent1"/>
+          </a:fillRef>
+          <a:effectRef idx="2">
+            <a:schemeClr val="accent1"/>
+          </a:effectRef>
+          <a:fontRef idx="minor">
+            <a:schemeClr val="lt1"/>
+          </a:fontRef>
+        </p:style>
+        <p:txBody>
+          <a:bodyPr rtlCol="0" anchor="ctr"/>
+          <a:lstStyle/>
+          <a:p>
+            <a:pPr algn="ctr"/>
+          </a:p>
+        </p:txBody>
+      </p:sp>
+      <p:sp>
+        <p:nvSpPr>
+          <p:cNvPr id="19" name="TextBox 18"/>
+          <p:cNvSpPr txBox="1"/>
+          <p:nvPr/>
+        </p:nvSpPr>
+        <p:spPr>
+          <a:xfrm>
+            <a:off x="868680" y="4434840"/>
+            <a:ext cx="10607040" cy="457200"/>
+          </a:xfrm>
+          <a:prstGeom prst="rect">
+            <a:avLst/>
+          </a:prstGeom>
+          <a:noFill/>
+        </p:spPr>
+        <p:txBody>
+          <a:bodyPr wrap="square" anchor="t" lIns="0" rIns="0" tIns="0" bIns="0">
+            <a:spAutoFit/>
+          </a:bodyPr>
+          <a:lstStyle/>
+          <a:p>
+            <a:pPr algn="l">
+              <a:lnSpc>
+                <a:spcPct val="100000"/>
+              </a:lnSpc>
+              <a:spcBef>
+                <a:spcPts val="0"/>
+              </a:spcBef>
+              <a:spcAft>
+                <a:spcPts val="600"/>
+              </a:spcAft>
+            </a:pPr>
+            <a:r>
+              <a:rPr sz="1600" b="1">
+                <a:solidFill>
+                  <a:srgbClr val="0F172A"/>
+                </a:solidFill>
+                <a:latin typeface="NanumGothic"/>
+                <a:ea typeface="NanumGothic"/>
+                <a:cs typeface="NanumGothic"/>
+              </a:rPr>
+              <a:t>예시</a:t>
+            </a:r>
+          </a:p>
+        </p:txBody>
+      </p:sp>
+      <p:sp>
+        <p:nvSpPr>
+          <p:cNvPr id="20" name="TextBox 19"/>
+          <p:cNvSpPr txBox="1"/>
+          <p:nvPr/>
+        </p:nvSpPr>
+        <p:spPr>
+          <a:xfrm>
+            <a:off x="868680" y="4818888"/>
+            <a:ext cx="10607040" cy="457200"/>
+          </a:xfrm>
+          <a:prstGeom prst="rect">
+            <a:avLst/>
+          </a:prstGeom>
+          <a:noFill/>
+        </p:spPr>
+        <p:txBody>
+          <a:bodyPr wrap="square" anchor="t" lIns="0" rIns="0" tIns="0" bIns="0">
+            <a:spAutoFit/>
+          </a:bodyPr>
+          <a:lstStyle/>
+          <a:p>
+            <a:pPr algn="l">
+              <a:lnSpc>
+                <a:spcPct val="100000"/>
+              </a:lnSpc>
+              <a:spcBef>
+                <a:spcPts val="0"/>
+              </a:spcBef>
+              <a:spcAft>
+                <a:spcPts val="600"/>
+              </a:spcAft>
+            </a:pPr>
+            <a:r>
+              <a:rPr sz="1300" b="0">
+                <a:solidFill>
+                  <a:srgbClr val="64748B"/>
+                </a:solidFill>
+                <a:latin typeface="NanumGothic"/>
+                <a:ea typeface="NanumGothic"/>
+                <a:cs typeface="NanumGothic"/>
+              </a:rPr>
+              <a:t>'단시간 수면자는 특정 유전형에서 인지저하가 덜할 것이다'</a:t>
+            </a:r>
+          </a:p>
+        </p:txBody>
+      </p:sp>
+      <p:sp>
+        <p:nvSpPr>
+          <p:cNvPr id="21" name="Rounded Rectangle 20"/>
           <p:cNvSpPr/>
           <p:nvPr/>
         </p:nvSpPr>
@@ -16752,7 +17028,7 @@
       </p:sp>
       <p:sp>
         <p:nvSpPr>
-          <p:cNvPr id="19" name="TextBox 18"/>
+          <p:cNvPr id="22" name="TextBox 21"/>
           <p:cNvSpPr txBox="1"/>
           <p:nvPr/>
         </p:nvSpPr>
@@ -16803,7 +17079,7 @@
                 <a:ea typeface="NanumGothic"/>
                 <a:cs typeface="NanumGothic"/>
               </a:rPr>
-              <a:t>예: '단시간 수면자는 특정 유전형에서 인지저하가 덜할 것이다'</a:t>
+              <a:t>많이·다양하게가 이 단계의 목표</a:t>
             </a:r>
           </a:p>
         </p:txBody>

--- a/slides/day4.pptx
+++ b/slides/day4.pptx
@@ -3988,6 +3988,64 @@
           </a:p>
         </p:txBody>
       </p:sp>
+      <p:sp>
+        <p:nvSpPr>
+          <p:cNvPr id="21" name="TextBox 20"/>
+          <p:cNvSpPr txBox="1"/>
+          <p:nvPr/>
+        </p:nvSpPr>
+        <p:spPr>
+          <a:xfrm>
+            <a:off x="8988552" y="6419088"/>
+            <a:ext cx="2697480" cy="365760"/>
+          </a:xfrm>
+          <a:prstGeom prst="rect">
+            <a:avLst/>
+          </a:prstGeom>
+          <a:noFill/>
+        </p:spPr>
+        <p:txBody>
+          <a:bodyPr wrap="square" anchor="ctr" lIns="0" rIns="0" tIns="0" bIns="0">
+            <a:spAutoFit/>
+          </a:bodyPr>
+          <a:lstStyle/>
+          <a:p>
+            <a:pPr algn="r">
+              <a:lnSpc>
+                <a:spcPct val="100000"/>
+              </a:lnSpc>
+              <a:spcBef>
+                <a:spcPts val="0"/>
+              </a:spcBef>
+              <a:spcAft>
+                <a:spcPts val="600"/>
+              </a:spcAft>
+            </a:pPr>
+            <a:r>
+              <a:rPr sz="900" b="1">
+                <a:solidFill>
+                  <a:srgbClr val="F59E0B"/>
+                </a:solidFill>
+                <a:latin typeface="NanumGothic"/>
+                <a:ea typeface="NanumGothic"/>
+                <a:cs typeface="NanumGothic"/>
+              </a:rPr>
+              <a:t>Day 4 · 목</a:t>
+            </a:r>
+            <a:r>
+              <a:rPr sz="900" b="1">
+                <a:solidFill>
+                  <a:srgbClr val="CBD5E1"/>
+                </a:solidFill>
+                <a:latin typeface="NanumGothic"/>
+                <a:ea typeface="NanumGothic"/>
+                <a:cs typeface="NanumGothic"/>
+              </a:rPr>
+              <a:t>   ·   1 / 26</a:t>
+            </a:r>
+          </a:p>
+        </p:txBody>
+      </p:sp>
     </p:spTree>
   </p:cSld>
   <p:clrMapOvr>
@@ -4281,54 +4339,7 @@
       </p:sp>
       <p:sp>
         <p:nvSpPr>
-          <p:cNvPr id="8" name="TextBox 7"/>
-          <p:cNvSpPr txBox="1"/>
-          <p:nvPr/>
-        </p:nvSpPr>
-        <p:spPr>
-          <a:xfrm>
-            <a:off x="10241280" y="6419088"/>
-            <a:ext cx="1463040" cy="365760"/>
-          </a:xfrm>
-          <a:prstGeom prst="rect">
-            <a:avLst/>
-          </a:prstGeom>
-          <a:noFill/>
-        </p:spPr>
-        <p:txBody>
-          <a:bodyPr wrap="square" anchor="ctr" lIns="0" rIns="0" tIns="0" bIns="0">
-            <a:spAutoFit/>
-          </a:bodyPr>
-          <a:lstStyle/>
-          <a:p>
-            <a:pPr algn="r">
-              <a:lnSpc>
-                <a:spcPct val="100000"/>
-              </a:lnSpc>
-              <a:spcBef>
-                <a:spcPts val="0"/>
-              </a:spcBef>
-              <a:spcAft>
-                <a:spcPts val="600"/>
-              </a:spcAft>
-            </a:pPr>
-            <a:r>
-              <a:rPr sz="900" b="1">
-                <a:solidFill>
-                  <a:srgbClr val="F59E0B"/>
-                </a:solidFill>
-                <a:latin typeface="NanumGothic"/>
-                <a:ea typeface="NanumGothic"/>
-                <a:cs typeface="NanumGothic"/>
-              </a:rPr>
-              <a:t>Day 4 · 목</a:t>
-            </a:r>
-          </a:p>
-        </p:txBody>
-      </p:sp>
-      <p:sp>
-        <p:nvSpPr>
-          <p:cNvPr id="9" name="Oval 8"/>
+          <p:cNvPr id="8" name="Oval 7"/>
           <p:cNvSpPr/>
           <p:nvPr/>
         </p:nvSpPr>
@@ -4372,7 +4383,7 @@
       </p:sp>
       <p:sp>
         <p:nvSpPr>
-          <p:cNvPr id="10" name="TextBox 9"/>
+          <p:cNvPr id="9" name="TextBox 8"/>
           <p:cNvSpPr txBox="1"/>
           <p:nvPr/>
         </p:nvSpPr>
@@ -4419,7 +4430,7 @@
       </p:sp>
       <p:sp>
         <p:nvSpPr>
-          <p:cNvPr id="11" name="TextBox 10"/>
+          <p:cNvPr id="10" name="TextBox 9"/>
           <p:cNvSpPr txBox="1"/>
           <p:nvPr/>
         </p:nvSpPr>
@@ -4466,7 +4477,7 @@
       </p:sp>
       <p:sp>
         <p:nvSpPr>
-          <p:cNvPr id="12" name="Oval 11"/>
+          <p:cNvPr id="11" name="Oval 10"/>
           <p:cNvSpPr/>
           <p:nvPr/>
         </p:nvSpPr>
@@ -4510,7 +4521,7 @@
       </p:sp>
       <p:sp>
         <p:nvSpPr>
-          <p:cNvPr id="13" name="TextBox 12"/>
+          <p:cNvPr id="12" name="TextBox 11"/>
           <p:cNvSpPr txBox="1"/>
           <p:nvPr/>
         </p:nvSpPr>
@@ -4557,7 +4568,7 @@
       </p:sp>
       <p:sp>
         <p:nvSpPr>
-          <p:cNvPr id="14" name="TextBox 13"/>
+          <p:cNvPr id="13" name="TextBox 12"/>
           <p:cNvSpPr txBox="1"/>
           <p:nvPr/>
         </p:nvSpPr>
@@ -4604,7 +4615,7 @@
       </p:sp>
       <p:sp>
         <p:nvSpPr>
-          <p:cNvPr id="15" name="Oval 14"/>
+          <p:cNvPr id="14" name="Oval 13"/>
           <p:cNvSpPr/>
           <p:nvPr/>
         </p:nvSpPr>
@@ -4648,7 +4659,7 @@
       </p:sp>
       <p:sp>
         <p:nvSpPr>
-          <p:cNvPr id="16" name="TextBox 15"/>
+          <p:cNvPr id="15" name="TextBox 14"/>
           <p:cNvSpPr txBox="1"/>
           <p:nvPr/>
         </p:nvSpPr>
@@ -4695,7 +4706,7 @@
       </p:sp>
       <p:sp>
         <p:nvSpPr>
-          <p:cNvPr id="17" name="TextBox 16"/>
+          <p:cNvPr id="16" name="TextBox 15"/>
           <p:cNvSpPr txBox="1"/>
           <p:nvPr/>
         </p:nvSpPr>
@@ -4742,7 +4753,7 @@
       </p:sp>
       <p:sp>
         <p:nvSpPr>
-          <p:cNvPr id="18" name="Rounded Rectangle 17"/>
+          <p:cNvPr id="17" name="Rounded Rectangle 16"/>
           <p:cNvSpPr/>
           <p:nvPr/>
         </p:nvSpPr>
@@ -4788,7 +4799,7 @@
       </p:sp>
       <p:sp>
         <p:nvSpPr>
-          <p:cNvPr id="19" name="TextBox 18"/>
+          <p:cNvPr id="18" name="TextBox 17"/>
           <p:cNvSpPr txBox="1"/>
           <p:nvPr/>
         </p:nvSpPr>
@@ -4840,6 +4851,64 @@
                 <a:cs typeface="NanumGothic"/>
               </a:rPr>
               <a:t>corpus 품질이 이후 가설 품질을 좌우한다</a:t>
+            </a:r>
+          </a:p>
+        </p:txBody>
+      </p:sp>
+      <p:sp>
+        <p:nvSpPr>
+          <p:cNvPr id="19" name="TextBox 18"/>
+          <p:cNvSpPr txBox="1"/>
+          <p:nvPr/>
+        </p:nvSpPr>
+        <p:spPr>
+          <a:xfrm>
+            <a:off x="8988552" y="6419088"/>
+            <a:ext cx="2697480" cy="365760"/>
+          </a:xfrm>
+          <a:prstGeom prst="rect">
+            <a:avLst/>
+          </a:prstGeom>
+          <a:noFill/>
+        </p:spPr>
+        <p:txBody>
+          <a:bodyPr wrap="square" anchor="ctr" lIns="0" rIns="0" tIns="0" bIns="0">
+            <a:spAutoFit/>
+          </a:bodyPr>
+          <a:lstStyle/>
+          <a:p>
+            <a:pPr algn="r">
+              <a:lnSpc>
+                <a:spcPct val="100000"/>
+              </a:lnSpc>
+              <a:spcBef>
+                <a:spcPts val="0"/>
+              </a:spcBef>
+              <a:spcAft>
+                <a:spcPts val="600"/>
+              </a:spcAft>
+            </a:pPr>
+            <a:r>
+              <a:rPr sz="900" b="1">
+                <a:solidFill>
+                  <a:srgbClr val="F59E0B"/>
+                </a:solidFill>
+                <a:latin typeface="NanumGothic"/>
+                <a:ea typeface="NanumGothic"/>
+                <a:cs typeface="NanumGothic"/>
+              </a:rPr>
+              <a:t>Day 4 · 목</a:t>
+            </a:r>
+            <a:r>
+              <a:rPr sz="900" b="1">
+                <a:solidFill>
+                  <a:srgbClr val="64748B"/>
+                </a:solidFill>
+                <a:latin typeface="NanumGothic"/>
+                <a:ea typeface="NanumGothic"/>
+                <a:cs typeface="NanumGothic"/>
+              </a:rPr>
+              <a:t>   ·   10 / 26</a:t>
             </a:r>
           </a:p>
         </p:txBody>
@@ -5146,6 +5215,64 @@
           </a:p>
         </p:txBody>
       </p:sp>
+      <p:sp>
+        <p:nvSpPr>
+          <p:cNvPr id="8" name="TextBox 7"/>
+          <p:cNvSpPr txBox="1"/>
+          <p:nvPr/>
+        </p:nvSpPr>
+        <p:spPr>
+          <a:xfrm>
+            <a:off x="8988552" y="6419088"/>
+            <a:ext cx="2697480" cy="365760"/>
+          </a:xfrm>
+          <a:prstGeom prst="rect">
+            <a:avLst/>
+          </a:prstGeom>
+          <a:noFill/>
+        </p:spPr>
+        <p:txBody>
+          <a:bodyPr wrap="square" anchor="ctr" lIns="0" rIns="0" tIns="0" bIns="0">
+            <a:spAutoFit/>
+          </a:bodyPr>
+          <a:lstStyle/>
+          <a:p>
+            <a:pPr algn="r">
+              <a:lnSpc>
+                <a:spcPct val="100000"/>
+              </a:lnSpc>
+              <a:spcBef>
+                <a:spcPts val="0"/>
+              </a:spcBef>
+              <a:spcAft>
+                <a:spcPts val="600"/>
+              </a:spcAft>
+            </a:pPr>
+            <a:r>
+              <a:rPr sz="900" b="1">
+                <a:solidFill>
+                  <a:srgbClr val="F59E0B"/>
+                </a:solidFill>
+                <a:latin typeface="NanumGothic"/>
+                <a:ea typeface="NanumGothic"/>
+                <a:cs typeface="NanumGothic"/>
+              </a:rPr>
+              <a:t>Day 4 · 목</a:t>
+            </a:r>
+            <a:r>
+              <a:rPr sz="900" b="1">
+                <a:solidFill>
+                  <a:srgbClr val="CBD5E1"/>
+                </a:solidFill>
+                <a:latin typeface="NanumGothic"/>
+                <a:ea typeface="NanumGothic"/>
+                <a:cs typeface="NanumGothic"/>
+              </a:rPr>
+              <a:t>   ·   11 / 26</a:t>
+            </a:r>
+          </a:p>
+        </p:txBody>
+      </p:sp>
     </p:spTree>
   </p:cSld>
   <p:clrMapOvr>
@@ -5439,54 +5566,7 @@
       </p:sp>
       <p:sp>
         <p:nvSpPr>
-          <p:cNvPr id="8" name="TextBox 7"/>
-          <p:cNvSpPr txBox="1"/>
-          <p:nvPr/>
-        </p:nvSpPr>
-        <p:spPr>
-          <a:xfrm>
-            <a:off x="10241280" y="6419088"/>
-            <a:ext cx="1463040" cy="365760"/>
-          </a:xfrm>
-          <a:prstGeom prst="rect">
-            <a:avLst/>
-          </a:prstGeom>
-          <a:noFill/>
-        </p:spPr>
-        <p:txBody>
-          <a:bodyPr wrap="square" anchor="ctr" lIns="0" rIns="0" tIns="0" bIns="0">
-            <a:spAutoFit/>
-          </a:bodyPr>
-          <a:lstStyle/>
-          <a:p>
-            <a:pPr algn="r">
-              <a:lnSpc>
-                <a:spcPct val="100000"/>
-              </a:lnSpc>
-              <a:spcBef>
-                <a:spcPts val="0"/>
-              </a:spcBef>
-              <a:spcAft>
-                <a:spcPts val="600"/>
-              </a:spcAft>
-            </a:pPr>
-            <a:r>
-              <a:rPr sz="900" b="1">
-                <a:solidFill>
-                  <a:srgbClr val="F59E0B"/>
-                </a:solidFill>
-                <a:latin typeface="NanumGothic"/>
-                <a:ea typeface="NanumGothic"/>
-                <a:cs typeface="NanumGothic"/>
-              </a:rPr>
-              <a:t>Day 4 · 목</a:t>
-            </a:r>
-          </a:p>
-        </p:txBody>
-      </p:sp>
-      <p:sp>
-        <p:nvSpPr>
-          <p:cNvPr id="9" name="Rounded Rectangle 8"/>
+          <p:cNvPr id="8" name="Rounded Rectangle 7"/>
           <p:cNvSpPr/>
           <p:nvPr/>
         </p:nvSpPr>
@@ -5532,7 +5612,7 @@
       </p:sp>
       <p:sp>
         <p:nvSpPr>
-          <p:cNvPr id="10" name="TextBox 9"/>
+          <p:cNvPr id="9" name="TextBox 8"/>
           <p:cNvSpPr txBox="1"/>
           <p:nvPr/>
         </p:nvSpPr>
@@ -5579,7 +5659,7 @@
       </p:sp>
       <p:sp>
         <p:nvSpPr>
-          <p:cNvPr id="11" name="TextBox 10"/>
+          <p:cNvPr id="10" name="TextBox 9"/>
           <p:cNvSpPr txBox="1"/>
           <p:nvPr/>
         </p:nvSpPr>
@@ -5626,7 +5706,7 @@
       </p:sp>
       <p:sp>
         <p:nvSpPr>
-          <p:cNvPr id="12" name="Rounded Rectangle 11"/>
+          <p:cNvPr id="11" name="Rounded Rectangle 10"/>
           <p:cNvSpPr/>
           <p:nvPr/>
         </p:nvSpPr>
@@ -5672,7 +5752,7 @@
       </p:sp>
       <p:sp>
         <p:nvSpPr>
-          <p:cNvPr id="13" name="Oval 12"/>
+          <p:cNvPr id="12" name="Oval 11"/>
           <p:cNvSpPr/>
           <p:nvPr/>
         </p:nvSpPr>
@@ -5716,7 +5796,7 @@
       </p:sp>
       <p:sp>
         <p:nvSpPr>
-          <p:cNvPr id="14" name="TextBox 13"/>
+          <p:cNvPr id="13" name="TextBox 12"/>
           <p:cNvSpPr txBox="1"/>
           <p:nvPr/>
         </p:nvSpPr>
@@ -5763,7 +5843,7 @@
       </p:sp>
       <p:sp>
         <p:nvSpPr>
-          <p:cNvPr id="15" name="TextBox 14"/>
+          <p:cNvPr id="14" name="TextBox 13"/>
           <p:cNvSpPr txBox="1"/>
           <p:nvPr/>
         </p:nvSpPr>
@@ -5810,7 +5890,7 @@
       </p:sp>
       <p:sp>
         <p:nvSpPr>
-          <p:cNvPr id="16" name="Rounded Rectangle 15"/>
+          <p:cNvPr id="15" name="Rounded Rectangle 14"/>
           <p:cNvSpPr/>
           <p:nvPr/>
         </p:nvSpPr>
@@ -5856,7 +5936,7 @@
       </p:sp>
       <p:sp>
         <p:nvSpPr>
-          <p:cNvPr id="17" name="Oval 16"/>
+          <p:cNvPr id="16" name="Oval 15"/>
           <p:cNvSpPr/>
           <p:nvPr/>
         </p:nvSpPr>
@@ -5900,7 +5980,7 @@
       </p:sp>
       <p:sp>
         <p:nvSpPr>
-          <p:cNvPr id="18" name="TextBox 17"/>
+          <p:cNvPr id="17" name="TextBox 16"/>
           <p:cNvSpPr txBox="1"/>
           <p:nvPr/>
         </p:nvSpPr>
@@ -5947,7 +6027,7 @@
       </p:sp>
       <p:sp>
         <p:nvSpPr>
-          <p:cNvPr id="19" name="TextBox 18"/>
+          <p:cNvPr id="18" name="TextBox 17"/>
           <p:cNvSpPr txBox="1"/>
           <p:nvPr/>
         </p:nvSpPr>
@@ -5994,7 +6074,7 @@
       </p:sp>
       <p:sp>
         <p:nvSpPr>
-          <p:cNvPr id="20" name="Rounded Rectangle 19"/>
+          <p:cNvPr id="19" name="Rounded Rectangle 18"/>
           <p:cNvSpPr/>
           <p:nvPr/>
         </p:nvSpPr>
@@ -6040,7 +6120,7 @@
       </p:sp>
       <p:sp>
         <p:nvSpPr>
-          <p:cNvPr id="21" name="Oval 20"/>
+          <p:cNvPr id="20" name="Oval 19"/>
           <p:cNvSpPr/>
           <p:nvPr/>
         </p:nvSpPr>
@@ -6084,7 +6164,7 @@
       </p:sp>
       <p:sp>
         <p:nvSpPr>
-          <p:cNvPr id="22" name="TextBox 21"/>
+          <p:cNvPr id="21" name="TextBox 20"/>
           <p:cNvSpPr txBox="1"/>
           <p:nvPr/>
         </p:nvSpPr>
@@ -6131,7 +6211,7 @@
       </p:sp>
       <p:sp>
         <p:nvSpPr>
-          <p:cNvPr id="23" name="TextBox 22"/>
+          <p:cNvPr id="22" name="TextBox 21"/>
           <p:cNvSpPr txBox="1"/>
           <p:nvPr/>
         </p:nvSpPr>
@@ -6178,7 +6258,7 @@
       </p:sp>
       <p:sp>
         <p:nvSpPr>
-          <p:cNvPr id="24" name="Rounded Rectangle 23"/>
+          <p:cNvPr id="23" name="Rounded Rectangle 22"/>
           <p:cNvSpPr/>
           <p:nvPr/>
         </p:nvSpPr>
@@ -6224,7 +6304,7 @@
       </p:sp>
       <p:sp>
         <p:nvSpPr>
-          <p:cNvPr id="25" name="Oval 24"/>
+          <p:cNvPr id="24" name="Oval 23"/>
           <p:cNvSpPr/>
           <p:nvPr/>
         </p:nvSpPr>
@@ -6268,7 +6348,7 @@
       </p:sp>
       <p:sp>
         <p:nvSpPr>
-          <p:cNvPr id="26" name="TextBox 25"/>
+          <p:cNvPr id="25" name="TextBox 24"/>
           <p:cNvSpPr txBox="1"/>
           <p:nvPr/>
         </p:nvSpPr>
@@ -6315,7 +6395,7 @@
       </p:sp>
       <p:sp>
         <p:nvSpPr>
-          <p:cNvPr id="27" name="TextBox 26"/>
+          <p:cNvPr id="26" name="TextBox 25"/>
           <p:cNvSpPr txBox="1"/>
           <p:nvPr/>
         </p:nvSpPr>
@@ -6356,6 +6436,64 @@
                 <a:cs typeface="NanumGothic"/>
               </a:rPr>
               <a:t>자료 파악 &amp; gap 실습</a:t>
+            </a:r>
+          </a:p>
+        </p:txBody>
+      </p:sp>
+      <p:sp>
+        <p:nvSpPr>
+          <p:cNvPr id="27" name="TextBox 26"/>
+          <p:cNvSpPr txBox="1"/>
+          <p:nvPr/>
+        </p:nvSpPr>
+        <p:spPr>
+          <a:xfrm>
+            <a:off x="8988552" y="6419088"/>
+            <a:ext cx="2697480" cy="365760"/>
+          </a:xfrm>
+          <a:prstGeom prst="rect">
+            <a:avLst/>
+          </a:prstGeom>
+          <a:noFill/>
+        </p:spPr>
+        <p:txBody>
+          <a:bodyPr wrap="square" anchor="ctr" lIns="0" rIns="0" tIns="0" bIns="0">
+            <a:spAutoFit/>
+          </a:bodyPr>
+          <a:lstStyle/>
+          <a:p>
+            <a:pPr algn="r">
+              <a:lnSpc>
+                <a:spcPct val="100000"/>
+              </a:lnSpc>
+              <a:spcBef>
+                <a:spcPts val="0"/>
+              </a:spcBef>
+              <a:spcAft>
+                <a:spcPts val="600"/>
+              </a:spcAft>
+            </a:pPr>
+            <a:r>
+              <a:rPr sz="900" b="1">
+                <a:solidFill>
+                  <a:srgbClr val="F59E0B"/>
+                </a:solidFill>
+                <a:latin typeface="NanumGothic"/>
+                <a:ea typeface="NanumGothic"/>
+                <a:cs typeface="NanumGothic"/>
+              </a:rPr>
+              <a:t>Day 4 · 목</a:t>
+            </a:r>
+            <a:r>
+              <a:rPr sz="900" b="1">
+                <a:solidFill>
+                  <a:srgbClr val="64748B"/>
+                </a:solidFill>
+                <a:latin typeface="NanumGothic"/>
+                <a:ea typeface="NanumGothic"/>
+                <a:cs typeface="NanumGothic"/>
+              </a:rPr>
+              <a:t>   ·   12 / 26</a:t>
             </a:r>
           </a:p>
         </p:txBody>
@@ -6653,54 +6791,7 @@
       </p:sp>
       <p:sp>
         <p:nvSpPr>
-          <p:cNvPr id="8" name="TextBox 7"/>
-          <p:cNvSpPr txBox="1"/>
-          <p:nvPr/>
-        </p:nvSpPr>
-        <p:spPr>
-          <a:xfrm>
-            <a:off x="10241280" y="6419088"/>
-            <a:ext cx="1463040" cy="365760"/>
-          </a:xfrm>
-          <a:prstGeom prst="rect">
-            <a:avLst/>
-          </a:prstGeom>
-          <a:noFill/>
-        </p:spPr>
-        <p:txBody>
-          <a:bodyPr wrap="square" anchor="ctr" lIns="0" rIns="0" tIns="0" bIns="0">
-            <a:spAutoFit/>
-          </a:bodyPr>
-          <a:lstStyle/>
-          <a:p>
-            <a:pPr algn="r">
-              <a:lnSpc>
-                <a:spcPct val="100000"/>
-              </a:lnSpc>
-              <a:spcBef>
-                <a:spcPts val="0"/>
-              </a:spcBef>
-              <a:spcAft>
-                <a:spcPts val="600"/>
-              </a:spcAft>
-            </a:pPr>
-            <a:r>
-              <a:rPr sz="900" b="1">
-                <a:solidFill>
-                  <a:srgbClr val="F59E0B"/>
-                </a:solidFill>
-                <a:latin typeface="NanumGothic"/>
-                <a:ea typeface="NanumGothic"/>
-                <a:cs typeface="NanumGothic"/>
-              </a:rPr>
-              <a:t>Day 4 · 목</a:t>
-            </a:r>
-          </a:p>
-        </p:txBody>
-      </p:sp>
-      <p:sp>
-        <p:nvSpPr>
-          <p:cNvPr id="9" name="Oval 8"/>
+          <p:cNvPr id="8" name="Oval 7"/>
           <p:cNvSpPr/>
           <p:nvPr/>
         </p:nvSpPr>
@@ -6744,7 +6835,7 @@
       </p:sp>
       <p:sp>
         <p:nvSpPr>
-          <p:cNvPr id="10" name="TextBox 9"/>
+          <p:cNvPr id="9" name="TextBox 8"/>
           <p:cNvSpPr txBox="1"/>
           <p:nvPr/>
         </p:nvSpPr>
@@ -6791,7 +6882,7 @@
       </p:sp>
       <p:sp>
         <p:nvSpPr>
-          <p:cNvPr id="11" name="TextBox 10"/>
+          <p:cNvPr id="10" name="TextBox 9"/>
           <p:cNvSpPr txBox="1"/>
           <p:nvPr/>
         </p:nvSpPr>
@@ -6838,7 +6929,7 @@
       </p:sp>
       <p:sp>
         <p:nvSpPr>
-          <p:cNvPr id="12" name="Oval 11"/>
+          <p:cNvPr id="11" name="Oval 10"/>
           <p:cNvSpPr/>
           <p:nvPr/>
         </p:nvSpPr>
@@ -6882,7 +6973,7 @@
       </p:sp>
       <p:sp>
         <p:nvSpPr>
-          <p:cNvPr id="13" name="TextBox 12"/>
+          <p:cNvPr id="12" name="TextBox 11"/>
           <p:cNvSpPr txBox="1"/>
           <p:nvPr/>
         </p:nvSpPr>
@@ -6929,7 +7020,7 @@
       </p:sp>
       <p:sp>
         <p:nvSpPr>
-          <p:cNvPr id="14" name="TextBox 13"/>
+          <p:cNvPr id="13" name="TextBox 12"/>
           <p:cNvSpPr txBox="1"/>
           <p:nvPr/>
         </p:nvSpPr>
@@ -6976,7 +7067,7 @@
       </p:sp>
       <p:sp>
         <p:nvSpPr>
-          <p:cNvPr id="15" name="Oval 14"/>
+          <p:cNvPr id="14" name="Oval 13"/>
           <p:cNvSpPr/>
           <p:nvPr/>
         </p:nvSpPr>
@@ -7020,7 +7111,7 @@
       </p:sp>
       <p:sp>
         <p:nvSpPr>
-          <p:cNvPr id="16" name="TextBox 15"/>
+          <p:cNvPr id="15" name="TextBox 14"/>
           <p:cNvSpPr txBox="1"/>
           <p:nvPr/>
         </p:nvSpPr>
@@ -7067,7 +7158,7 @@
       </p:sp>
       <p:sp>
         <p:nvSpPr>
-          <p:cNvPr id="17" name="TextBox 16"/>
+          <p:cNvPr id="16" name="TextBox 15"/>
           <p:cNvSpPr txBox="1"/>
           <p:nvPr/>
         </p:nvSpPr>
@@ -7108,6 +7199,64 @@
                 <a:cs typeface="NanumGothic"/>
               </a:rPr>
               <a:t>gap 목록 (각 gap에 근거 논문)</a:t>
+            </a:r>
+          </a:p>
+        </p:txBody>
+      </p:sp>
+      <p:sp>
+        <p:nvSpPr>
+          <p:cNvPr id="17" name="TextBox 16"/>
+          <p:cNvSpPr txBox="1"/>
+          <p:nvPr/>
+        </p:nvSpPr>
+        <p:spPr>
+          <a:xfrm>
+            <a:off x="8988552" y="6419088"/>
+            <a:ext cx="2697480" cy="365760"/>
+          </a:xfrm>
+          <a:prstGeom prst="rect">
+            <a:avLst/>
+          </a:prstGeom>
+          <a:noFill/>
+        </p:spPr>
+        <p:txBody>
+          <a:bodyPr wrap="square" anchor="ctr" lIns="0" rIns="0" tIns="0" bIns="0">
+            <a:spAutoFit/>
+          </a:bodyPr>
+          <a:lstStyle/>
+          <a:p>
+            <a:pPr algn="r">
+              <a:lnSpc>
+                <a:spcPct val="100000"/>
+              </a:lnSpc>
+              <a:spcBef>
+                <a:spcPts val="0"/>
+              </a:spcBef>
+              <a:spcAft>
+                <a:spcPts val="600"/>
+              </a:spcAft>
+            </a:pPr>
+            <a:r>
+              <a:rPr sz="900" b="1">
+                <a:solidFill>
+                  <a:srgbClr val="F59E0B"/>
+                </a:solidFill>
+                <a:latin typeface="NanumGothic"/>
+                <a:ea typeface="NanumGothic"/>
+                <a:cs typeface="NanumGothic"/>
+              </a:rPr>
+              <a:t>Day 4 · 목</a:t>
+            </a:r>
+            <a:r>
+              <a:rPr sz="900" b="1">
+                <a:solidFill>
+                  <a:srgbClr val="64748B"/>
+                </a:solidFill>
+                <a:latin typeface="NanumGothic"/>
+                <a:ea typeface="NanumGothic"/>
+                <a:cs typeface="NanumGothic"/>
+              </a:rPr>
+              <a:t>   ·   13 / 26</a:t>
             </a:r>
           </a:p>
         </p:txBody>
@@ -7405,54 +7554,7 @@
       </p:sp>
       <p:sp>
         <p:nvSpPr>
-          <p:cNvPr id="8" name="TextBox 7"/>
-          <p:cNvSpPr txBox="1"/>
-          <p:nvPr/>
-        </p:nvSpPr>
-        <p:spPr>
-          <a:xfrm>
-            <a:off x="10241280" y="6419088"/>
-            <a:ext cx="1463040" cy="365760"/>
-          </a:xfrm>
-          <a:prstGeom prst="rect">
-            <a:avLst/>
-          </a:prstGeom>
-          <a:noFill/>
-        </p:spPr>
-        <p:txBody>
-          <a:bodyPr wrap="square" anchor="ctr" lIns="0" rIns="0" tIns="0" bIns="0">
-            <a:spAutoFit/>
-          </a:bodyPr>
-          <a:lstStyle/>
-          <a:p>
-            <a:pPr algn="r">
-              <a:lnSpc>
-                <a:spcPct val="100000"/>
-              </a:lnSpc>
-              <a:spcBef>
-                <a:spcPts val="0"/>
-              </a:spcBef>
-              <a:spcAft>
-                <a:spcPts val="600"/>
-              </a:spcAft>
-            </a:pPr>
-            <a:r>
-              <a:rPr sz="900" b="1">
-                <a:solidFill>
-                  <a:srgbClr val="F59E0B"/>
-                </a:solidFill>
-                <a:latin typeface="NanumGothic"/>
-                <a:ea typeface="NanumGothic"/>
-                <a:cs typeface="NanumGothic"/>
-              </a:rPr>
-              <a:t>Day 4 · 목</a:t>
-            </a:r>
-          </a:p>
-        </p:txBody>
-      </p:sp>
-      <p:sp>
-        <p:nvSpPr>
-          <p:cNvPr id="9" name="Oval 8"/>
+          <p:cNvPr id="8" name="Oval 7"/>
           <p:cNvSpPr/>
           <p:nvPr/>
         </p:nvSpPr>
@@ -7496,7 +7598,7 @@
       </p:sp>
       <p:sp>
         <p:nvSpPr>
-          <p:cNvPr id="10" name="TextBox 9"/>
+          <p:cNvPr id="9" name="TextBox 8"/>
           <p:cNvSpPr txBox="1"/>
           <p:nvPr/>
         </p:nvSpPr>
@@ -7543,7 +7645,7 @@
       </p:sp>
       <p:sp>
         <p:nvSpPr>
-          <p:cNvPr id="11" name="TextBox 10"/>
+          <p:cNvPr id="10" name="TextBox 9"/>
           <p:cNvSpPr txBox="1"/>
           <p:nvPr/>
         </p:nvSpPr>
@@ -7590,7 +7692,7 @@
       </p:sp>
       <p:sp>
         <p:nvSpPr>
-          <p:cNvPr id="12" name="Oval 11"/>
+          <p:cNvPr id="11" name="Oval 10"/>
           <p:cNvSpPr/>
           <p:nvPr/>
         </p:nvSpPr>
@@ -7634,7 +7736,7 @@
       </p:sp>
       <p:sp>
         <p:nvSpPr>
-          <p:cNvPr id="13" name="TextBox 12"/>
+          <p:cNvPr id="12" name="TextBox 11"/>
           <p:cNvSpPr txBox="1"/>
           <p:nvPr/>
         </p:nvSpPr>
@@ -7681,7 +7783,7 @@
       </p:sp>
       <p:sp>
         <p:nvSpPr>
-          <p:cNvPr id="14" name="TextBox 13"/>
+          <p:cNvPr id="13" name="TextBox 12"/>
           <p:cNvSpPr txBox="1"/>
           <p:nvPr/>
         </p:nvSpPr>
@@ -7728,7 +7830,7 @@
       </p:sp>
       <p:sp>
         <p:nvSpPr>
-          <p:cNvPr id="15" name="Oval 14"/>
+          <p:cNvPr id="14" name="Oval 13"/>
           <p:cNvSpPr/>
           <p:nvPr/>
         </p:nvSpPr>
@@ -7772,7 +7874,7 @@
       </p:sp>
       <p:sp>
         <p:nvSpPr>
-          <p:cNvPr id="16" name="TextBox 15"/>
+          <p:cNvPr id="15" name="TextBox 14"/>
           <p:cNvSpPr txBox="1"/>
           <p:nvPr/>
         </p:nvSpPr>
@@ -7819,7 +7921,7 @@
       </p:sp>
       <p:sp>
         <p:nvSpPr>
-          <p:cNvPr id="17" name="TextBox 16"/>
+          <p:cNvPr id="16" name="TextBox 15"/>
           <p:cNvSpPr txBox="1"/>
           <p:nvPr/>
         </p:nvSpPr>
@@ -7866,7 +7968,7 @@
       </p:sp>
       <p:sp>
         <p:nvSpPr>
-          <p:cNvPr id="18" name="Oval 17"/>
+          <p:cNvPr id="17" name="Oval 16"/>
           <p:cNvSpPr/>
           <p:nvPr/>
         </p:nvSpPr>
@@ -7910,7 +8012,7 @@
       </p:sp>
       <p:sp>
         <p:nvSpPr>
-          <p:cNvPr id="19" name="TextBox 18"/>
+          <p:cNvPr id="18" name="TextBox 17"/>
           <p:cNvSpPr txBox="1"/>
           <p:nvPr/>
         </p:nvSpPr>
@@ -7957,7 +8059,7 @@
       </p:sp>
       <p:sp>
         <p:nvSpPr>
-          <p:cNvPr id="20" name="TextBox 19"/>
+          <p:cNvPr id="19" name="TextBox 18"/>
           <p:cNvSpPr txBox="1"/>
           <p:nvPr/>
         </p:nvSpPr>
@@ -8004,7 +8106,7 @@
       </p:sp>
       <p:sp>
         <p:nvSpPr>
-          <p:cNvPr id="21" name="Rounded Rectangle 20"/>
+          <p:cNvPr id="20" name="Rounded Rectangle 19"/>
           <p:cNvSpPr/>
           <p:nvPr/>
         </p:nvSpPr>
@@ -8050,7 +8152,7 @@
       </p:sp>
       <p:sp>
         <p:nvSpPr>
-          <p:cNvPr id="22" name="TextBox 21"/>
+          <p:cNvPr id="21" name="TextBox 20"/>
           <p:cNvSpPr txBox="1"/>
           <p:nvPr/>
         </p:nvSpPr>
@@ -8102,6 +8204,64 @@
                 <a:cs typeface="NanumGothic"/>
               </a:rPr>
               <a:t>정규화해야 비교가 되고, 비교에서 gap이 드러난다</a:t>
+            </a:r>
+          </a:p>
+        </p:txBody>
+      </p:sp>
+      <p:sp>
+        <p:nvSpPr>
+          <p:cNvPr id="22" name="TextBox 21"/>
+          <p:cNvSpPr txBox="1"/>
+          <p:nvPr/>
+        </p:nvSpPr>
+        <p:spPr>
+          <a:xfrm>
+            <a:off x="8988552" y="6419088"/>
+            <a:ext cx="2697480" cy="365760"/>
+          </a:xfrm>
+          <a:prstGeom prst="rect">
+            <a:avLst/>
+          </a:prstGeom>
+          <a:noFill/>
+        </p:spPr>
+        <p:txBody>
+          <a:bodyPr wrap="square" anchor="ctr" lIns="0" rIns="0" tIns="0" bIns="0">
+            <a:spAutoFit/>
+          </a:bodyPr>
+          <a:lstStyle/>
+          <a:p>
+            <a:pPr algn="r">
+              <a:lnSpc>
+                <a:spcPct val="100000"/>
+              </a:lnSpc>
+              <a:spcBef>
+                <a:spcPts val="0"/>
+              </a:spcBef>
+              <a:spcAft>
+                <a:spcPts val="600"/>
+              </a:spcAft>
+            </a:pPr>
+            <a:r>
+              <a:rPr sz="900" b="1">
+                <a:solidFill>
+                  <a:srgbClr val="F59E0B"/>
+                </a:solidFill>
+                <a:latin typeface="NanumGothic"/>
+                <a:ea typeface="NanumGothic"/>
+                <a:cs typeface="NanumGothic"/>
+              </a:rPr>
+              <a:t>Day 4 · 목</a:t>
+            </a:r>
+            <a:r>
+              <a:rPr sz="900" b="1">
+                <a:solidFill>
+                  <a:srgbClr val="64748B"/>
+                </a:solidFill>
+                <a:latin typeface="NanumGothic"/>
+                <a:ea typeface="NanumGothic"/>
+                <a:cs typeface="NanumGothic"/>
+              </a:rPr>
+              <a:t>   ·   14 / 26</a:t>
             </a:r>
           </a:p>
         </p:txBody>
@@ -8399,54 +8559,7 @@
       </p:sp>
       <p:sp>
         <p:nvSpPr>
-          <p:cNvPr id="8" name="TextBox 7"/>
-          <p:cNvSpPr txBox="1"/>
-          <p:nvPr/>
-        </p:nvSpPr>
-        <p:spPr>
-          <a:xfrm>
-            <a:off x="10241280" y="6419088"/>
-            <a:ext cx="1463040" cy="365760"/>
-          </a:xfrm>
-          <a:prstGeom prst="rect">
-            <a:avLst/>
-          </a:prstGeom>
-          <a:noFill/>
-        </p:spPr>
-        <p:txBody>
-          <a:bodyPr wrap="square" anchor="ctr" lIns="0" rIns="0" tIns="0" bIns="0">
-            <a:spAutoFit/>
-          </a:bodyPr>
-          <a:lstStyle/>
-          <a:p>
-            <a:pPr algn="r">
-              <a:lnSpc>
-                <a:spcPct val="100000"/>
-              </a:lnSpc>
-              <a:spcBef>
-                <a:spcPts val="0"/>
-              </a:spcBef>
-              <a:spcAft>
-                <a:spcPts val="600"/>
-              </a:spcAft>
-            </a:pPr>
-            <a:r>
-              <a:rPr sz="900" b="1">
-                <a:solidFill>
-                  <a:srgbClr val="F59E0B"/>
-                </a:solidFill>
-                <a:latin typeface="NanumGothic"/>
-                <a:ea typeface="NanumGothic"/>
-                <a:cs typeface="NanumGothic"/>
-              </a:rPr>
-              <a:t>Day 4 · 목</a:t>
-            </a:r>
-          </a:p>
-        </p:txBody>
-      </p:sp>
-      <p:sp>
-        <p:nvSpPr>
-          <p:cNvPr id="9" name="Oval 8"/>
+          <p:cNvPr id="8" name="Oval 7"/>
           <p:cNvSpPr/>
           <p:nvPr/>
         </p:nvSpPr>
@@ -8490,7 +8603,7 @@
       </p:sp>
       <p:sp>
         <p:nvSpPr>
-          <p:cNvPr id="10" name="TextBox 9"/>
+          <p:cNvPr id="9" name="TextBox 8"/>
           <p:cNvSpPr txBox="1"/>
           <p:nvPr/>
         </p:nvSpPr>
@@ -8537,7 +8650,7 @@
       </p:sp>
       <p:sp>
         <p:nvSpPr>
-          <p:cNvPr id="11" name="TextBox 10"/>
+          <p:cNvPr id="10" name="TextBox 9"/>
           <p:cNvSpPr txBox="1"/>
           <p:nvPr/>
         </p:nvSpPr>
@@ -8584,7 +8697,7 @@
       </p:sp>
       <p:sp>
         <p:nvSpPr>
-          <p:cNvPr id="12" name="Oval 11"/>
+          <p:cNvPr id="11" name="Oval 10"/>
           <p:cNvSpPr/>
           <p:nvPr/>
         </p:nvSpPr>
@@ -8628,7 +8741,7 @@
       </p:sp>
       <p:sp>
         <p:nvSpPr>
-          <p:cNvPr id="13" name="TextBox 12"/>
+          <p:cNvPr id="12" name="TextBox 11"/>
           <p:cNvSpPr txBox="1"/>
           <p:nvPr/>
         </p:nvSpPr>
@@ -8675,7 +8788,7 @@
       </p:sp>
       <p:sp>
         <p:nvSpPr>
-          <p:cNvPr id="14" name="TextBox 13"/>
+          <p:cNvPr id="13" name="TextBox 12"/>
           <p:cNvSpPr txBox="1"/>
           <p:nvPr/>
         </p:nvSpPr>
@@ -8722,7 +8835,7 @@
       </p:sp>
       <p:sp>
         <p:nvSpPr>
-          <p:cNvPr id="15" name="Oval 14"/>
+          <p:cNvPr id="14" name="Oval 13"/>
           <p:cNvSpPr/>
           <p:nvPr/>
         </p:nvSpPr>
@@ -8766,7 +8879,7 @@
       </p:sp>
       <p:sp>
         <p:nvSpPr>
-          <p:cNvPr id="16" name="TextBox 15"/>
+          <p:cNvPr id="15" name="TextBox 14"/>
           <p:cNvSpPr txBox="1"/>
           <p:nvPr/>
         </p:nvSpPr>
@@ -8813,7 +8926,7 @@
       </p:sp>
       <p:sp>
         <p:nvSpPr>
-          <p:cNvPr id="17" name="TextBox 16"/>
+          <p:cNvPr id="16" name="TextBox 15"/>
           <p:cNvSpPr txBox="1"/>
           <p:nvPr/>
         </p:nvSpPr>
@@ -8860,7 +8973,7 @@
       </p:sp>
       <p:sp>
         <p:nvSpPr>
-          <p:cNvPr id="18" name="Rounded Rectangle 17"/>
+          <p:cNvPr id="17" name="Rounded Rectangle 16"/>
           <p:cNvSpPr/>
           <p:nvPr/>
         </p:nvSpPr>
@@ -8906,7 +9019,7 @@
       </p:sp>
       <p:sp>
         <p:nvSpPr>
-          <p:cNvPr id="19" name="TextBox 18"/>
+          <p:cNvPr id="18" name="TextBox 17"/>
           <p:cNvSpPr txBox="1"/>
           <p:nvPr/>
         </p:nvSpPr>
@@ -8958,6 +9071,64 @@
                 <a:cs typeface="NanumGothic"/>
               </a:rPr>
               <a:t>각 gap에 '어느 논문에서 나왔나' 근거를 반드시 표기</a:t>
+            </a:r>
+          </a:p>
+        </p:txBody>
+      </p:sp>
+      <p:sp>
+        <p:nvSpPr>
+          <p:cNvPr id="19" name="TextBox 18"/>
+          <p:cNvSpPr txBox="1"/>
+          <p:nvPr/>
+        </p:nvSpPr>
+        <p:spPr>
+          <a:xfrm>
+            <a:off x="8988552" y="6419088"/>
+            <a:ext cx="2697480" cy="365760"/>
+          </a:xfrm>
+          <a:prstGeom prst="rect">
+            <a:avLst/>
+          </a:prstGeom>
+          <a:noFill/>
+        </p:spPr>
+        <p:txBody>
+          <a:bodyPr wrap="square" anchor="ctr" lIns="0" rIns="0" tIns="0" bIns="0">
+            <a:spAutoFit/>
+          </a:bodyPr>
+          <a:lstStyle/>
+          <a:p>
+            <a:pPr algn="r">
+              <a:lnSpc>
+                <a:spcPct val="100000"/>
+              </a:lnSpc>
+              <a:spcBef>
+                <a:spcPts val="0"/>
+              </a:spcBef>
+              <a:spcAft>
+                <a:spcPts val="600"/>
+              </a:spcAft>
+            </a:pPr>
+            <a:r>
+              <a:rPr sz="900" b="1">
+                <a:solidFill>
+                  <a:srgbClr val="F59E0B"/>
+                </a:solidFill>
+                <a:latin typeface="NanumGothic"/>
+                <a:ea typeface="NanumGothic"/>
+                <a:cs typeface="NanumGothic"/>
+              </a:rPr>
+              <a:t>Day 4 · 목</a:t>
+            </a:r>
+            <a:r>
+              <a:rPr sz="900" b="1">
+                <a:solidFill>
+                  <a:srgbClr val="64748B"/>
+                </a:solidFill>
+                <a:latin typeface="NanumGothic"/>
+                <a:ea typeface="NanumGothic"/>
+                <a:cs typeface="NanumGothic"/>
+              </a:rPr>
+              <a:t>   ·   15 / 26</a:t>
             </a:r>
           </a:p>
         </p:txBody>
@@ -9255,54 +9426,7 @@
       </p:sp>
       <p:sp>
         <p:nvSpPr>
-          <p:cNvPr id="8" name="TextBox 7"/>
-          <p:cNvSpPr txBox="1"/>
-          <p:nvPr/>
-        </p:nvSpPr>
-        <p:spPr>
-          <a:xfrm>
-            <a:off x="10241280" y="6419088"/>
-            <a:ext cx="1463040" cy="365760"/>
-          </a:xfrm>
-          <a:prstGeom prst="rect">
-            <a:avLst/>
-          </a:prstGeom>
-          <a:noFill/>
-        </p:spPr>
-        <p:txBody>
-          <a:bodyPr wrap="square" anchor="ctr" lIns="0" rIns="0" tIns="0" bIns="0">
-            <a:spAutoFit/>
-          </a:bodyPr>
-          <a:lstStyle/>
-          <a:p>
-            <a:pPr algn="r">
-              <a:lnSpc>
-                <a:spcPct val="100000"/>
-              </a:lnSpc>
-              <a:spcBef>
-                <a:spcPts val="0"/>
-              </a:spcBef>
-              <a:spcAft>
-                <a:spcPts val="600"/>
-              </a:spcAft>
-            </a:pPr>
-            <a:r>
-              <a:rPr sz="900" b="1">
-                <a:solidFill>
-                  <a:srgbClr val="F59E0B"/>
-                </a:solidFill>
-                <a:latin typeface="NanumGothic"/>
-                <a:ea typeface="NanumGothic"/>
-                <a:cs typeface="NanumGothic"/>
-              </a:rPr>
-              <a:t>Day 4 · 목</a:t>
-            </a:r>
-          </a:p>
-        </p:txBody>
-      </p:sp>
-      <p:sp>
-        <p:nvSpPr>
-          <p:cNvPr id="9" name="Rounded Rectangle 8"/>
+          <p:cNvPr id="8" name="Rounded Rectangle 7"/>
           <p:cNvSpPr/>
           <p:nvPr/>
         </p:nvSpPr>
@@ -9348,7 +9472,7 @@
       </p:sp>
       <p:sp>
         <p:nvSpPr>
-          <p:cNvPr id="10" name="TextBox 9"/>
+          <p:cNvPr id="9" name="TextBox 8"/>
           <p:cNvSpPr txBox="1"/>
           <p:nvPr/>
         </p:nvSpPr>
@@ -9395,7 +9519,7 @@
       </p:sp>
       <p:sp>
         <p:nvSpPr>
-          <p:cNvPr id="11" name="Oval 10"/>
+          <p:cNvPr id="10" name="Oval 9"/>
           <p:cNvSpPr/>
           <p:nvPr/>
         </p:nvSpPr>
@@ -9439,7 +9563,7 @@
       </p:sp>
       <p:sp>
         <p:nvSpPr>
-          <p:cNvPr id="12" name="TextBox 11"/>
+          <p:cNvPr id="11" name="TextBox 10"/>
           <p:cNvSpPr txBox="1"/>
           <p:nvPr/>
         </p:nvSpPr>
@@ -9486,7 +9610,7 @@
       </p:sp>
       <p:sp>
         <p:nvSpPr>
-          <p:cNvPr id="13" name="TextBox 12"/>
+          <p:cNvPr id="12" name="TextBox 11"/>
           <p:cNvSpPr txBox="1"/>
           <p:nvPr/>
         </p:nvSpPr>
@@ -9533,7 +9657,7 @@
       </p:sp>
       <p:sp>
         <p:nvSpPr>
-          <p:cNvPr id="14" name="Oval 13"/>
+          <p:cNvPr id="13" name="Oval 12"/>
           <p:cNvSpPr/>
           <p:nvPr/>
         </p:nvSpPr>
@@ -9577,7 +9701,7 @@
       </p:sp>
       <p:sp>
         <p:nvSpPr>
-          <p:cNvPr id="15" name="TextBox 14"/>
+          <p:cNvPr id="14" name="TextBox 13"/>
           <p:cNvSpPr txBox="1"/>
           <p:nvPr/>
         </p:nvSpPr>
@@ -9624,7 +9748,7 @@
       </p:sp>
       <p:sp>
         <p:nvSpPr>
-          <p:cNvPr id="16" name="TextBox 15"/>
+          <p:cNvPr id="15" name="TextBox 14"/>
           <p:cNvSpPr txBox="1"/>
           <p:nvPr/>
         </p:nvSpPr>
@@ -9671,7 +9795,7 @@
       </p:sp>
       <p:sp>
         <p:nvSpPr>
-          <p:cNvPr id="17" name="Oval 16"/>
+          <p:cNvPr id="16" name="Oval 15"/>
           <p:cNvSpPr/>
           <p:nvPr/>
         </p:nvSpPr>
@@ -9715,7 +9839,7 @@
       </p:sp>
       <p:sp>
         <p:nvSpPr>
-          <p:cNvPr id="18" name="TextBox 17"/>
+          <p:cNvPr id="17" name="TextBox 16"/>
           <p:cNvSpPr txBox="1"/>
           <p:nvPr/>
         </p:nvSpPr>
@@ -9762,7 +9886,7 @@
       </p:sp>
       <p:sp>
         <p:nvSpPr>
-          <p:cNvPr id="19" name="TextBox 18"/>
+          <p:cNvPr id="18" name="TextBox 17"/>
           <p:cNvSpPr txBox="1"/>
           <p:nvPr/>
         </p:nvSpPr>
@@ -9809,7 +9933,7 @@
       </p:sp>
       <p:sp>
         <p:nvSpPr>
-          <p:cNvPr id="20" name="Oval 19"/>
+          <p:cNvPr id="19" name="Oval 18"/>
           <p:cNvSpPr/>
           <p:nvPr/>
         </p:nvSpPr>
@@ -9853,7 +9977,7 @@
       </p:sp>
       <p:sp>
         <p:nvSpPr>
-          <p:cNvPr id="21" name="TextBox 20"/>
+          <p:cNvPr id="20" name="TextBox 19"/>
           <p:cNvSpPr txBox="1"/>
           <p:nvPr/>
         </p:nvSpPr>
@@ -9900,7 +10024,7 @@
       </p:sp>
       <p:sp>
         <p:nvSpPr>
-          <p:cNvPr id="22" name="TextBox 21"/>
+          <p:cNvPr id="21" name="TextBox 20"/>
           <p:cNvSpPr txBox="1"/>
           <p:nvPr/>
         </p:nvSpPr>
@@ -9947,7 +10071,7 @@
       </p:sp>
       <p:sp>
         <p:nvSpPr>
-          <p:cNvPr id="23" name="Rounded Rectangle 22"/>
+          <p:cNvPr id="22" name="Rounded Rectangle 21"/>
           <p:cNvSpPr/>
           <p:nvPr/>
         </p:nvSpPr>
@@ -9991,7 +10115,7 @@
       </p:sp>
       <p:sp>
         <p:nvSpPr>
-          <p:cNvPr id="24" name="TextBox 23"/>
+          <p:cNvPr id="23" name="TextBox 22"/>
           <p:cNvSpPr txBox="1"/>
           <p:nvPr/>
         </p:nvSpPr>
@@ -10038,7 +10162,7 @@
       </p:sp>
       <p:sp>
         <p:nvSpPr>
-          <p:cNvPr id="25" name="TextBox 24"/>
+          <p:cNvPr id="24" name="TextBox 23"/>
           <p:cNvSpPr txBox="1"/>
           <p:nvPr/>
         </p:nvSpPr>
@@ -10080,6 +10204,64 @@
               </a:rPr>
               <a:t>자료 지도 + gap 목록 (근거 포함)
 규칙: examples/research-agent/CLAUDE.md</a:t>
+            </a:r>
+          </a:p>
+        </p:txBody>
+      </p:sp>
+      <p:sp>
+        <p:nvSpPr>
+          <p:cNvPr id="25" name="TextBox 24"/>
+          <p:cNvSpPr txBox="1"/>
+          <p:nvPr/>
+        </p:nvSpPr>
+        <p:spPr>
+          <a:xfrm>
+            <a:off x="8988552" y="6419088"/>
+            <a:ext cx="2697480" cy="365760"/>
+          </a:xfrm>
+          <a:prstGeom prst="rect">
+            <a:avLst/>
+          </a:prstGeom>
+          <a:noFill/>
+        </p:spPr>
+        <p:txBody>
+          <a:bodyPr wrap="square" anchor="ctr" lIns="0" rIns="0" tIns="0" bIns="0">
+            <a:spAutoFit/>
+          </a:bodyPr>
+          <a:lstStyle/>
+          <a:p>
+            <a:pPr algn="r">
+              <a:lnSpc>
+                <a:spcPct val="100000"/>
+              </a:lnSpc>
+              <a:spcBef>
+                <a:spcPts val="0"/>
+              </a:spcBef>
+              <a:spcAft>
+                <a:spcPts val="600"/>
+              </a:spcAft>
+            </a:pPr>
+            <a:r>
+              <a:rPr sz="900" b="1">
+                <a:solidFill>
+                  <a:srgbClr val="F59E0B"/>
+                </a:solidFill>
+                <a:latin typeface="NanumGothic"/>
+                <a:ea typeface="NanumGothic"/>
+                <a:cs typeface="NanumGothic"/>
+              </a:rPr>
+              <a:t>Day 4 · 목</a:t>
+            </a:r>
+            <a:r>
+              <a:rPr sz="900" b="1">
+                <a:solidFill>
+                  <a:srgbClr val="64748B"/>
+                </a:solidFill>
+                <a:latin typeface="NanumGothic"/>
+                <a:ea typeface="NanumGothic"/>
+                <a:cs typeface="NanumGothic"/>
+              </a:rPr>
+              <a:t>   ·   16 / 26</a:t>
             </a:r>
           </a:p>
         </p:txBody>
@@ -10386,6 +10568,64 @@
           </a:p>
         </p:txBody>
       </p:sp>
+      <p:sp>
+        <p:nvSpPr>
+          <p:cNvPr id="8" name="TextBox 7"/>
+          <p:cNvSpPr txBox="1"/>
+          <p:nvPr/>
+        </p:nvSpPr>
+        <p:spPr>
+          <a:xfrm>
+            <a:off x="8988552" y="6419088"/>
+            <a:ext cx="2697480" cy="365760"/>
+          </a:xfrm>
+          <a:prstGeom prst="rect">
+            <a:avLst/>
+          </a:prstGeom>
+          <a:noFill/>
+        </p:spPr>
+        <p:txBody>
+          <a:bodyPr wrap="square" anchor="ctr" lIns="0" rIns="0" tIns="0" bIns="0">
+            <a:spAutoFit/>
+          </a:bodyPr>
+          <a:lstStyle/>
+          <a:p>
+            <a:pPr algn="r">
+              <a:lnSpc>
+                <a:spcPct val="100000"/>
+              </a:lnSpc>
+              <a:spcBef>
+                <a:spcPts val="0"/>
+              </a:spcBef>
+              <a:spcAft>
+                <a:spcPts val="600"/>
+              </a:spcAft>
+            </a:pPr>
+            <a:r>
+              <a:rPr sz="900" b="1">
+                <a:solidFill>
+                  <a:srgbClr val="F59E0B"/>
+                </a:solidFill>
+                <a:latin typeface="NanumGothic"/>
+                <a:ea typeface="NanumGothic"/>
+                <a:cs typeface="NanumGothic"/>
+              </a:rPr>
+              <a:t>Day 4 · 목</a:t>
+            </a:r>
+            <a:r>
+              <a:rPr sz="900" b="1">
+                <a:solidFill>
+                  <a:srgbClr val="CBD5E1"/>
+                </a:solidFill>
+                <a:latin typeface="NanumGothic"/>
+                <a:ea typeface="NanumGothic"/>
+                <a:cs typeface="NanumGothic"/>
+              </a:rPr>
+              <a:t>   ·   17 / 26</a:t>
+            </a:r>
+          </a:p>
+        </p:txBody>
+      </p:sp>
     </p:spTree>
   </p:cSld>
   <p:clrMapOvr>
@@ -10679,54 +10919,7 @@
       </p:sp>
       <p:sp>
         <p:nvSpPr>
-          <p:cNvPr id="8" name="TextBox 7"/>
-          <p:cNvSpPr txBox="1"/>
-          <p:nvPr/>
-        </p:nvSpPr>
-        <p:spPr>
-          <a:xfrm>
-            <a:off x="10241280" y="6419088"/>
-            <a:ext cx="1463040" cy="365760"/>
-          </a:xfrm>
-          <a:prstGeom prst="rect">
-            <a:avLst/>
-          </a:prstGeom>
-          <a:noFill/>
-        </p:spPr>
-        <p:txBody>
-          <a:bodyPr wrap="square" anchor="ctr" lIns="0" rIns="0" tIns="0" bIns="0">
-            <a:spAutoFit/>
-          </a:bodyPr>
-          <a:lstStyle/>
-          <a:p>
-            <a:pPr algn="r">
-              <a:lnSpc>
-                <a:spcPct val="100000"/>
-              </a:lnSpc>
-              <a:spcBef>
-                <a:spcPts val="0"/>
-              </a:spcBef>
-              <a:spcAft>
-                <a:spcPts val="600"/>
-              </a:spcAft>
-            </a:pPr>
-            <a:r>
-              <a:rPr sz="900" b="1">
-                <a:solidFill>
-                  <a:srgbClr val="F59E0B"/>
-                </a:solidFill>
-                <a:latin typeface="NanumGothic"/>
-                <a:ea typeface="NanumGothic"/>
-                <a:cs typeface="NanumGothic"/>
-              </a:rPr>
-              <a:t>Day 4 · 목</a:t>
-            </a:r>
-          </a:p>
-        </p:txBody>
-      </p:sp>
-      <p:sp>
-        <p:nvSpPr>
-          <p:cNvPr id="9" name="Rounded Rectangle 8"/>
+          <p:cNvPr id="8" name="Rounded Rectangle 7"/>
           <p:cNvSpPr/>
           <p:nvPr/>
         </p:nvSpPr>
@@ -10772,7 +10965,7 @@
       </p:sp>
       <p:sp>
         <p:nvSpPr>
-          <p:cNvPr id="10" name="TextBox 9"/>
+          <p:cNvPr id="9" name="TextBox 8"/>
           <p:cNvSpPr txBox="1"/>
           <p:nvPr/>
         </p:nvSpPr>
@@ -10819,7 +11012,7 @@
       </p:sp>
       <p:sp>
         <p:nvSpPr>
-          <p:cNvPr id="11" name="TextBox 10"/>
+          <p:cNvPr id="10" name="TextBox 9"/>
           <p:cNvSpPr txBox="1"/>
           <p:nvPr/>
         </p:nvSpPr>
@@ -10866,7 +11059,7 @@
       </p:sp>
       <p:sp>
         <p:nvSpPr>
-          <p:cNvPr id="12" name="Rounded Rectangle 11"/>
+          <p:cNvPr id="11" name="Rounded Rectangle 10"/>
           <p:cNvSpPr/>
           <p:nvPr/>
         </p:nvSpPr>
@@ -10912,7 +11105,7 @@
       </p:sp>
       <p:sp>
         <p:nvSpPr>
-          <p:cNvPr id="13" name="Oval 12"/>
+          <p:cNvPr id="12" name="Oval 11"/>
           <p:cNvSpPr/>
           <p:nvPr/>
         </p:nvSpPr>
@@ -10956,7 +11149,7 @@
       </p:sp>
       <p:sp>
         <p:nvSpPr>
-          <p:cNvPr id="14" name="TextBox 13"/>
+          <p:cNvPr id="13" name="TextBox 12"/>
           <p:cNvSpPr txBox="1"/>
           <p:nvPr/>
         </p:nvSpPr>
@@ -11003,7 +11196,7 @@
       </p:sp>
       <p:sp>
         <p:nvSpPr>
-          <p:cNvPr id="15" name="TextBox 14"/>
+          <p:cNvPr id="14" name="TextBox 13"/>
           <p:cNvSpPr txBox="1"/>
           <p:nvPr/>
         </p:nvSpPr>
@@ -11050,7 +11243,7 @@
       </p:sp>
       <p:sp>
         <p:nvSpPr>
-          <p:cNvPr id="16" name="Rounded Rectangle 15"/>
+          <p:cNvPr id="15" name="Rounded Rectangle 14"/>
           <p:cNvSpPr/>
           <p:nvPr/>
         </p:nvSpPr>
@@ -11096,7 +11289,7 @@
       </p:sp>
       <p:sp>
         <p:nvSpPr>
-          <p:cNvPr id="17" name="Oval 16"/>
+          <p:cNvPr id="16" name="Oval 15"/>
           <p:cNvSpPr/>
           <p:nvPr/>
         </p:nvSpPr>
@@ -11140,7 +11333,7 @@
       </p:sp>
       <p:sp>
         <p:nvSpPr>
-          <p:cNvPr id="18" name="TextBox 17"/>
+          <p:cNvPr id="17" name="TextBox 16"/>
           <p:cNvSpPr txBox="1"/>
           <p:nvPr/>
         </p:nvSpPr>
@@ -11187,7 +11380,7 @@
       </p:sp>
       <p:sp>
         <p:nvSpPr>
-          <p:cNvPr id="19" name="TextBox 18"/>
+          <p:cNvPr id="18" name="TextBox 17"/>
           <p:cNvSpPr txBox="1"/>
           <p:nvPr/>
         </p:nvSpPr>
@@ -11234,7 +11427,7 @@
       </p:sp>
       <p:sp>
         <p:nvSpPr>
-          <p:cNvPr id="20" name="Rounded Rectangle 19"/>
+          <p:cNvPr id="19" name="Rounded Rectangle 18"/>
           <p:cNvSpPr/>
           <p:nvPr/>
         </p:nvSpPr>
@@ -11280,7 +11473,7 @@
       </p:sp>
       <p:sp>
         <p:nvSpPr>
-          <p:cNvPr id="21" name="Oval 20"/>
+          <p:cNvPr id="20" name="Oval 19"/>
           <p:cNvSpPr/>
           <p:nvPr/>
         </p:nvSpPr>
@@ -11324,7 +11517,7 @@
       </p:sp>
       <p:sp>
         <p:nvSpPr>
-          <p:cNvPr id="22" name="TextBox 21"/>
+          <p:cNvPr id="21" name="TextBox 20"/>
           <p:cNvSpPr txBox="1"/>
           <p:nvPr/>
         </p:nvSpPr>
@@ -11371,7 +11564,7 @@
       </p:sp>
       <p:sp>
         <p:nvSpPr>
-          <p:cNvPr id="23" name="TextBox 22"/>
+          <p:cNvPr id="22" name="TextBox 21"/>
           <p:cNvSpPr txBox="1"/>
           <p:nvPr/>
         </p:nvSpPr>
@@ -11418,7 +11611,7 @@
       </p:sp>
       <p:sp>
         <p:nvSpPr>
-          <p:cNvPr id="24" name="Rounded Rectangle 23"/>
+          <p:cNvPr id="23" name="Rounded Rectangle 22"/>
           <p:cNvSpPr/>
           <p:nvPr/>
         </p:nvSpPr>
@@ -11464,7 +11657,7 @@
       </p:sp>
       <p:sp>
         <p:nvSpPr>
-          <p:cNvPr id="25" name="Oval 24"/>
+          <p:cNvPr id="24" name="Oval 23"/>
           <p:cNvSpPr/>
           <p:nvPr/>
         </p:nvSpPr>
@@ -11508,7 +11701,7 @@
       </p:sp>
       <p:sp>
         <p:nvSpPr>
-          <p:cNvPr id="26" name="TextBox 25"/>
+          <p:cNvPr id="25" name="TextBox 24"/>
           <p:cNvSpPr txBox="1"/>
           <p:nvPr/>
         </p:nvSpPr>
@@ -11555,7 +11748,7 @@
       </p:sp>
       <p:sp>
         <p:nvSpPr>
-          <p:cNvPr id="27" name="TextBox 26"/>
+          <p:cNvPr id="26" name="TextBox 25"/>
           <p:cNvSpPr txBox="1"/>
           <p:nvPr/>
         </p:nvSpPr>
@@ -11602,7 +11795,7 @@
       </p:sp>
       <p:sp>
         <p:nvSpPr>
-          <p:cNvPr id="28" name="Rounded Rectangle 27"/>
+          <p:cNvPr id="27" name="Rounded Rectangle 26"/>
           <p:cNvSpPr/>
           <p:nvPr/>
         </p:nvSpPr>
@@ -11648,7 +11841,7 @@
       </p:sp>
       <p:sp>
         <p:nvSpPr>
-          <p:cNvPr id="29" name="Oval 28"/>
+          <p:cNvPr id="28" name="Oval 27"/>
           <p:cNvSpPr/>
           <p:nvPr/>
         </p:nvSpPr>
@@ -11692,7 +11885,7 @@
       </p:sp>
       <p:sp>
         <p:nvSpPr>
-          <p:cNvPr id="30" name="TextBox 29"/>
+          <p:cNvPr id="29" name="TextBox 28"/>
           <p:cNvSpPr txBox="1"/>
           <p:nvPr/>
         </p:nvSpPr>
@@ -11739,7 +11932,7 @@
       </p:sp>
       <p:sp>
         <p:nvSpPr>
-          <p:cNvPr id="31" name="TextBox 30"/>
+          <p:cNvPr id="30" name="TextBox 29"/>
           <p:cNvSpPr txBox="1"/>
           <p:nvPr/>
         </p:nvSpPr>
@@ -11780,6 +11973,64 @@
                 <a:cs typeface="NanumGothic"/>
               </a:rPr>
               <a:t>가설 생성·평가 실습</a:t>
+            </a:r>
+          </a:p>
+        </p:txBody>
+      </p:sp>
+      <p:sp>
+        <p:nvSpPr>
+          <p:cNvPr id="31" name="TextBox 30"/>
+          <p:cNvSpPr txBox="1"/>
+          <p:nvPr/>
+        </p:nvSpPr>
+        <p:spPr>
+          <a:xfrm>
+            <a:off x="8988552" y="6419088"/>
+            <a:ext cx="2697480" cy="365760"/>
+          </a:xfrm>
+          <a:prstGeom prst="rect">
+            <a:avLst/>
+          </a:prstGeom>
+          <a:noFill/>
+        </p:spPr>
+        <p:txBody>
+          <a:bodyPr wrap="square" anchor="ctr" lIns="0" rIns="0" tIns="0" bIns="0">
+            <a:spAutoFit/>
+          </a:bodyPr>
+          <a:lstStyle/>
+          <a:p>
+            <a:pPr algn="r">
+              <a:lnSpc>
+                <a:spcPct val="100000"/>
+              </a:lnSpc>
+              <a:spcBef>
+                <a:spcPts val="0"/>
+              </a:spcBef>
+              <a:spcAft>
+                <a:spcPts val="600"/>
+              </a:spcAft>
+            </a:pPr>
+            <a:r>
+              <a:rPr sz="900" b="1">
+                <a:solidFill>
+                  <a:srgbClr val="F59E0B"/>
+                </a:solidFill>
+                <a:latin typeface="NanumGothic"/>
+                <a:ea typeface="NanumGothic"/>
+                <a:cs typeface="NanumGothic"/>
+              </a:rPr>
+              <a:t>Day 4 · 목</a:t>
+            </a:r>
+            <a:r>
+              <a:rPr sz="900" b="1">
+                <a:solidFill>
+                  <a:srgbClr val="64748B"/>
+                </a:solidFill>
+                <a:latin typeface="NanumGothic"/>
+                <a:ea typeface="NanumGothic"/>
+                <a:cs typeface="NanumGothic"/>
+              </a:rPr>
+              <a:t>   ·   18 / 26</a:t>
             </a:r>
           </a:p>
         </p:txBody>
@@ -12077,54 +12328,7 @@
       </p:sp>
       <p:sp>
         <p:nvSpPr>
-          <p:cNvPr id="8" name="TextBox 7"/>
-          <p:cNvSpPr txBox="1"/>
-          <p:nvPr/>
-        </p:nvSpPr>
-        <p:spPr>
-          <a:xfrm>
-            <a:off x="10241280" y="6419088"/>
-            <a:ext cx="1463040" cy="365760"/>
-          </a:xfrm>
-          <a:prstGeom prst="rect">
-            <a:avLst/>
-          </a:prstGeom>
-          <a:noFill/>
-        </p:spPr>
-        <p:txBody>
-          <a:bodyPr wrap="square" anchor="ctr" lIns="0" rIns="0" tIns="0" bIns="0">
-            <a:spAutoFit/>
-          </a:bodyPr>
-          <a:lstStyle/>
-          <a:p>
-            <a:pPr algn="r">
-              <a:lnSpc>
-                <a:spcPct val="100000"/>
-              </a:lnSpc>
-              <a:spcBef>
-                <a:spcPts val="0"/>
-              </a:spcBef>
-              <a:spcAft>
-                <a:spcPts val="600"/>
-              </a:spcAft>
-            </a:pPr>
-            <a:r>
-              <a:rPr sz="900" b="1">
-                <a:solidFill>
-                  <a:srgbClr val="F59E0B"/>
-                </a:solidFill>
-                <a:latin typeface="NanumGothic"/>
-                <a:ea typeface="NanumGothic"/>
-                <a:cs typeface="NanumGothic"/>
-              </a:rPr>
-              <a:t>Day 4 · 목</a:t>
-            </a:r>
-          </a:p>
-        </p:txBody>
-      </p:sp>
-      <p:sp>
-        <p:nvSpPr>
-          <p:cNvPr id="9" name="Oval 8"/>
+          <p:cNvPr id="8" name="Oval 7"/>
           <p:cNvSpPr/>
           <p:nvPr/>
         </p:nvSpPr>
@@ -12168,7 +12372,7 @@
       </p:sp>
       <p:sp>
         <p:nvSpPr>
-          <p:cNvPr id="10" name="TextBox 9"/>
+          <p:cNvPr id="9" name="TextBox 8"/>
           <p:cNvSpPr txBox="1"/>
           <p:nvPr/>
         </p:nvSpPr>
@@ -12215,7 +12419,7 @@
       </p:sp>
       <p:sp>
         <p:nvSpPr>
-          <p:cNvPr id="11" name="TextBox 10"/>
+          <p:cNvPr id="10" name="TextBox 9"/>
           <p:cNvSpPr txBox="1"/>
           <p:nvPr/>
         </p:nvSpPr>
@@ -12262,7 +12466,7 @@
       </p:sp>
       <p:sp>
         <p:nvSpPr>
-          <p:cNvPr id="12" name="Oval 11"/>
+          <p:cNvPr id="11" name="Oval 10"/>
           <p:cNvSpPr/>
           <p:nvPr/>
         </p:nvSpPr>
@@ -12306,7 +12510,7 @@
       </p:sp>
       <p:sp>
         <p:nvSpPr>
-          <p:cNvPr id="13" name="TextBox 12"/>
+          <p:cNvPr id="12" name="TextBox 11"/>
           <p:cNvSpPr txBox="1"/>
           <p:nvPr/>
         </p:nvSpPr>
@@ -12353,7 +12557,7 @@
       </p:sp>
       <p:sp>
         <p:nvSpPr>
-          <p:cNvPr id="14" name="TextBox 13"/>
+          <p:cNvPr id="13" name="TextBox 12"/>
           <p:cNvSpPr txBox="1"/>
           <p:nvPr/>
         </p:nvSpPr>
@@ -12400,7 +12604,7 @@
       </p:sp>
       <p:sp>
         <p:nvSpPr>
-          <p:cNvPr id="15" name="Oval 14"/>
+          <p:cNvPr id="14" name="Oval 13"/>
           <p:cNvSpPr/>
           <p:nvPr/>
         </p:nvSpPr>
@@ -12444,7 +12648,7 @@
       </p:sp>
       <p:sp>
         <p:nvSpPr>
-          <p:cNvPr id="16" name="TextBox 15"/>
+          <p:cNvPr id="15" name="TextBox 14"/>
           <p:cNvSpPr txBox="1"/>
           <p:nvPr/>
         </p:nvSpPr>
@@ -12491,7 +12695,7 @@
       </p:sp>
       <p:sp>
         <p:nvSpPr>
-          <p:cNvPr id="17" name="TextBox 16"/>
+          <p:cNvPr id="16" name="TextBox 15"/>
           <p:cNvSpPr txBox="1"/>
           <p:nvPr/>
         </p:nvSpPr>
@@ -12538,7 +12742,7 @@
       </p:sp>
       <p:sp>
         <p:nvSpPr>
-          <p:cNvPr id="18" name="Rounded Rectangle 17"/>
+          <p:cNvPr id="17" name="Rounded Rectangle 16"/>
           <p:cNvSpPr/>
           <p:nvPr/>
         </p:nvSpPr>
@@ -12584,7 +12788,7 @@
       </p:sp>
       <p:sp>
         <p:nvSpPr>
-          <p:cNvPr id="19" name="TextBox 18"/>
+          <p:cNvPr id="18" name="TextBox 17"/>
           <p:cNvSpPr txBox="1"/>
           <p:nvPr/>
         </p:nvSpPr>
@@ -12636,6 +12840,64 @@
                 <a:cs typeface="NanumGothic"/>
               </a:rPr>
               <a:t>이 기준이 곧 '제안할 가설'을 고르는 잣대</a:t>
+            </a:r>
+          </a:p>
+        </p:txBody>
+      </p:sp>
+      <p:sp>
+        <p:nvSpPr>
+          <p:cNvPr id="19" name="TextBox 18"/>
+          <p:cNvSpPr txBox="1"/>
+          <p:nvPr/>
+        </p:nvSpPr>
+        <p:spPr>
+          <a:xfrm>
+            <a:off x="8988552" y="6419088"/>
+            <a:ext cx="2697480" cy="365760"/>
+          </a:xfrm>
+          <a:prstGeom prst="rect">
+            <a:avLst/>
+          </a:prstGeom>
+          <a:noFill/>
+        </p:spPr>
+        <p:txBody>
+          <a:bodyPr wrap="square" anchor="ctr" lIns="0" rIns="0" tIns="0" bIns="0">
+            <a:spAutoFit/>
+          </a:bodyPr>
+          <a:lstStyle/>
+          <a:p>
+            <a:pPr algn="r">
+              <a:lnSpc>
+                <a:spcPct val="100000"/>
+              </a:lnSpc>
+              <a:spcBef>
+                <a:spcPts val="0"/>
+              </a:spcBef>
+              <a:spcAft>
+                <a:spcPts val="600"/>
+              </a:spcAft>
+            </a:pPr>
+            <a:r>
+              <a:rPr sz="900" b="1">
+                <a:solidFill>
+                  <a:srgbClr val="F59E0B"/>
+                </a:solidFill>
+                <a:latin typeface="NanumGothic"/>
+                <a:ea typeface="NanumGothic"/>
+                <a:cs typeface="NanumGothic"/>
+              </a:rPr>
+              <a:t>Day 4 · 목</a:t>
+            </a:r>
+            <a:r>
+              <a:rPr sz="900" b="1">
+                <a:solidFill>
+                  <a:srgbClr val="64748B"/>
+                </a:solidFill>
+                <a:latin typeface="NanumGothic"/>
+                <a:ea typeface="NanumGothic"/>
+                <a:cs typeface="NanumGothic"/>
+              </a:rPr>
+              <a:t>   ·   19 / 26</a:t>
             </a:r>
           </a:p>
         </p:txBody>
@@ -12933,54 +13195,7 @@
       </p:sp>
       <p:sp>
         <p:nvSpPr>
-          <p:cNvPr id="8" name="TextBox 7"/>
-          <p:cNvSpPr txBox="1"/>
-          <p:nvPr/>
-        </p:nvSpPr>
-        <p:spPr>
-          <a:xfrm>
-            <a:off x="10241280" y="6419088"/>
-            <a:ext cx="1463040" cy="365760"/>
-          </a:xfrm>
-          <a:prstGeom prst="rect">
-            <a:avLst/>
-          </a:prstGeom>
-          <a:noFill/>
-        </p:spPr>
-        <p:txBody>
-          <a:bodyPr wrap="square" anchor="ctr" lIns="0" rIns="0" tIns="0" bIns="0">
-            <a:spAutoFit/>
-          </a:bodyPr>
-          <a:lstStyle/>
-          <a:p>
-            <a:pPr algn="r">
-              <a:lnSpc>
-                <a:spcPct val="100000"/>
-              </a:lnSpc>
-              <a:spcBef>
-                <a:spcPts val="0"/>
-              </a:spcBef>
-              <a:spcAft>
-                <a:spcPts val="600"/>
-              </a:spcAft>
-            </a:pPr>
-            <a:r>
-              <a:rPr sz="900" b="1">
-                <a:solidFill>
-                  <a:srgbClr val="F59E0B"/>
-                </a:solidFill>
-                <a:latin typeface="NanumGothic"/>
-                <a:ea typeface="NanumGothic"/>
-                <a:cs typeface="NanumGothic"/>
-              </a:rPr>
-              <a:t>Day 4 · 목</a:t>
-            </a:r>
-          </a:p>
-        </p:txBody>
-      </p:sp>
-      <p:sp>
-        <p:nvSpPr>
-          <p:cNvPr id="9" name="Rounded Rectangle 8"/>
+          <p:cNvPr id="8" name="Rounded Rectangle 7"/>
           <p:cNvSpPr/>
           <p:nvPr/>
         </p:nvSpPr>
@@ -13026,7 +13241,7 @@
       </p:sp>
       <p:sp>
         <p:nvSpPr>
-          <p:cNvPr id="10" name="TextBox 9"/>
+          <p:cNvPr id="9" name="TextBox 8"/>
           <p:cNvSpPr txBox="1"/>
           <p:nvPr/>
         </p:nvSpPr>
@@ -13097,7 +13312,7 @@
       </p:sp>
       <p:sp>
         <p:nvSpPr>
-          <p:cNvPr id="11" name="TextBox 10"/>
+          <p:cNvPr id="10" name="TextBox 9"/>
           <p:cNvSpPr txBox="1"/>
           <p:nvPr/>
         </p:nvSpPr>
@@ -13144,7 +13359,7 @@
       </p:sp>
       <p:sp>
         <p:nvSpPr>
-          <p:cNvPr id="12" name="Rounded Rectangle 11"/>
+          <p:cNvPr id="11" name="Rounded Rectangle 10"/>
           <p:cNvSpPr/>
           <p:nvPr/>
         </p:nvSpPr>
@@ -13190,7 +13405,7 @@
       </p:sp>
       <p:sp>
         <p:nvSpPr>
-          <p:cNvPr id="13" name="TextBox 12"/>
+          <p:cNvPr id="12" name="TextBox 11"/>
           <p:cNvSpPr txBox="1"/>
           <p:nvPr/>
         </p:nvSpPr>
@@ -13261,7 +13476,7 @@
       </p:sp>
       <p:sp>
         <p:nvSpPr>
-          <p:cNvPr id="14" name="TextBox 13"/>
+          <p:cNvPr id="13" name="TextBox 12"/>
           <p:cNvSpPr txBox="1"/>
           <p:nvPr/>
         </p:nvSpPr>
@@ -13308,7 +13523,7 @@
       </p:sp>
       <p:sp>
         <p:nvSpPr>
-          <p:cNvPr id="15" name="Rounded Rectangle 14"/>
+          <p:cNvPr id="14" name="Rounded Rectangle 13"/>
           <p:cNvSpPr/>
           <p:nvPr/>
         </p:nvSpPr>
@@ -13354,7 +13569,7 @@
       </p:sp>
       <p:sp>
         <p:nvSpPr>
-          <p:cNvPr id="16" name="TextBox 15"/>
+          <p:cNvPr id="15" name="TextBox 14"/>
           <p:cNvSpPr txBox="1"/>
           <p:nvPr/>
         </p:nvSpPr>
@@ -13425,7 +13640,7 @@
       </p:sp>
       <p:sp>
         <p:nvSpPr>
-          <p:cNvPr id="17" name="TextBox 16"/>
+          <p:cNvPr id="16" name="TextBox 15"/>
           <p:cNvSpPr txBox="1"/>
           <p:nvPr/>
         </p:nvSpPr>
@@ -13472,7 +13687,7 @@
       </p:sp>
       <p:sp>
         <p:nvSpPr>
-          <p:cNvPr id="18" name="Rounded Rectangle 17"/>
+          <p:cNvPr id="17" name="Rounded Rectangle 16"/>
           <p:cNvSpPr/>
           <p:nvPr/>
         </p:nvSpPr>
@@ -13516,7 +13731,7 @@
       </p:sp>
       <p:sp>
         <p:nvSpPr>
-          <p:cNvPr id="19" name="TextBox 18"/>
+          <p:cNvPr id="18" name="TextBox 17"/>
           <p:cNvSpPr txBox="1"/>
           <p:nvPr/>
         </p:nvSpPr>
@@ -13587,7 +13802,7 @@
       </p:sp>
       <p:sp>
         <p:nvSpPr>
-          <p:cNvPr id="20" name="TextBox 19"/>
+          <p:cNvPr id="19" name="TextBox 18"/>
           <p:cNvSpPr txBox="1"/>
           <p:nvPr/>
         </p:nvSpPr>
@@ -13634,7 +13849,7 @@
       </p:sp>
       <p:sp>
         <p:nvSpPr>
-          <p:cNvPr id="21" name="TextBox 20"/>
+          <p:cNvPr id="20" name="TextBox 19"/>
           <p:cNvSpPr txBox="1"/>
           <p:nvPr/>
         </p:nvSpPr>
@@ -13681,7 +13896,7 @@
       </p:sp>
       <p:sp>
         <p:nvSpPr>
-          <p:cNvPr id="22" name="Rounded Rectangle 21"/>
+          <p:cNvPr id="21" name="Rounded Rectangle 20"/>
           <p:cNvSpPr/>
           <p:nvPr/>
         </p:nvSpPr>
@@ -13727,7 +13942,7 @@
       </p:sp>
       <p:sp>
         <p:nvSpPr>
-          <p:cNvPr id="23" name="TextBox 22"/>
+          <p:cNvPr id="22" name="TextBox 21"/>
           <p:cNvSpPr txBox="1"/>
           <p:nvPr/>
         </p:nvSpPr>
@@ -13798,7 +14013,7 @@
       </p:sp>
       <p:sp>
         <p:nvSpPr>
-          <p:cNvPr id="24" name="TextBox 23"/>
+          <p:cNvPr id="23" name="TextBox 22"/>
           <p:cNvSpPr txBox="1"/>
           <p:nvPr/>
         </p:nvSpPr>
@@ -13845,7 +14060,7 @@
       </p:sp>
       <p:sp>
         <p:nvSpPr>
-          <p:cNvPr id="25" name="TextBox 24"/>
+          <p:cNvPr id="24" name="TextBox 23"/>
           <p:cNvSpPr txBox="1"/>
           <p:nvPr/>
         </p:nvSpPr>
@@ -13897,6 +14112,64 @@
                 <a:cs typeface="NanumGothic"/>
               </a:rPr>
               <a:t>이론 → 도구 → 실전 → 결과 → 발표</a:t>
+            </a:r>
+          </a:p>
+        </p:txBody>
+      </p:sp>
+      <p:sp>
+        <p:nvSpPr>
+          <p:cNvPr id="25" name="TextBox 24"/>
+          <p:cNvSpPr txBox="1"/>
+          <p:nvPr/>
+        </p:nvSpPr>
+        <p:spPr>
+          <a:xfrm>
+            <a:off x="8988552" y="6419088"/>
+            <a:ext cx="2697480" cy="365760"/>
+          </a:xfrm>
+          <a:prstGeom prst="rect">
+            <a:avLst/>
+          </a:prstGeom>
+          <a:noFill/>
+        </p:spPr>
+        <p:txBody>
+          <a:bodyPr wrap="square" anchor="ctr" lIns="0" rIns="0" tIns="0" bIns="0">
+            <a:spAutoFit/>
+          </a:bodyPr>
+          <a:lstStyle/>
+          <a:p>
+            <a:pPr algn="r">
+              <a:lnSpc>
+                <a:spcPct val="100000"/>
+              </a:lnSpc>
+              <a:spcBef>
+                <a:spcPts val="0"/>
+              </a:spcBef>
+              <a:spcAft>
+                <a:spcPts val="600"/>
+              </a:spcAft>
+            </a:pPr>
+            <a:r>
+              <a:rPr sz="900" b="1">
+                <a:solidFill>
+                  <a:srgbClr val="F59E0B"/>
+                </a:solidFill>
+                <a:latin typeface="NanumGothic"/>
+                <a:ea typeface="NanumGothic"/>
+                <a:cs typeface="NanumGothic"/>
+              </a:rPr>
+              <a:t>Day 4 · 목</a:t>
+            </a:r>
+            <a:r>
+              <a:rPr sz="900" b="1">
+                <a:solidFill>
+                  <a:srgbClr val="64748B"/>
+                </a:solidFill>
+                <a:latin typeface="NanumGothic"/>
+                <a:ea typeface="NanumGothic"/>
+                <a:cs typeface="NanumGothic"/>
+              </a:rPr>
+              <a:t>   ·   2 / 26</a:t>
             </a:r>
           </a:p>
         </p:txBody>
@@ -14194,54 +14467,7 @@
       </p:sp>
       <p:sp>
         <p:nvSpPr>
-          <p:cNvPr id="8" name="TextBox 7"/>
-          <p:cNvSpPr txBox="1"/>
-          <p:nvPr/>
-        </p:nvSpPr>
-        <p:spPr>
-          <a:xfrm>
-            <a:off x="10241280" y="6419088"/>
-            <a:ext cx="1463040" cy="365760"/>
-          </a:xfrm>
-          <a:prstGeom prst="rect">
-            <a:avLst/>
-          </a:prstGeom>
-          <a:noFill/>
-        </p:spPr>
-        <p:txBody>
-          <a:bodyPr wrap="square" anchor="ctr" lIns="0" rIns="0" tIns="0" bIns="0">
-            <a:spAutoFit/>
-          </a:bodyPr>
-          <a:lstStyle/>
-          <a:p>
-            <a:pPr algn="r">
-              <a:lnSpc>
-                <a:spcPct val="100000"/>
-              </a:lnSpc>
-              <a:spcBef>
-                <a:spcPts val="0"/>
-              </a:spcBef>
-              <a:spcAft>
-                <a:spcPts val="600"/>
-              </a:spcAft>
-            </a:pPr>
-            <a:r>
-              <a:rPr sz="900" b="1">
-                <a:solidFill>
-                  <a:srgbClr val="F59E0B"/>
-                </a:solidFill>
-                <a:latin typeface="NanumGothic"/>
-                <a:ea typeface="NanumGothic"/>
-                <a:cs typeface="NanumGothic"/>
-              </a:rPr>
-              <a:t>Day 4 · 목</a:t>
-            </a:r>
-          </a:p>
-        </p:txBody>
-      </p:sp>
-      <p:sp>
-        <p:nvSpPr>
-          <p:cNvPr id="9" name="Rounded Rectangle 8"/>
+          <p:cNvPr id="8" name="Rounded Rectangle 7"/>
           <p:cNvSpPr/>
           <p:nvPr/>
         </p:nvSpPr>
@@ -14287,7 +14513,7 @@
       </p:sp>
       <p:sp>
         <p:nvSpPr>
-          <p:cNvPr id="10" name="Rectangle 9"/>
+          <p:cNvPr id="9" name="Rectangle 8"/>
           <p:cNvSpPr/>
           <p:nvPr/>
         </p:nvSpPr>
@@ -14331,7 +14557,7 @@
       </p:sp>
       <p:sp>
         <p:nvSpPr>
-          <p:cNvPr id="11" name="TextBox 10"/>
+          <p:cNvPr id="10" name="TextBox 9"/>
           <p:cNvSpPr txBox="1"/>
           <p:nvPr/>
         </p:nvSpPr>
@@ -14378,7 +14604,7 @@
       </p:sp>
       <p:sp>
         <p:nvSpPr>
-          <p:cNvPr id="12" name="TextBox 11"/>
+          <p:cNvPr id="11" name="TextBox 10"/>
           <p:cNvSpPr txBox="1"/>
           <p:nvPr/>
         </p:nvSpPr>
@@ -14425,7 +14651,7 @@
       </p:sp>
       <p:sp>
         <p:nvSpPr>
-          <p:cNvPr id="13" name="TextBox 12"/>
+          <p:cNvPr id="12" name="TextBox 11"/>
           <p:cNvSpPr txBox="1"/>
           <p:nvPr/>
         </p:nvSpPr>
@@ -14472,7 +14698,7 @@
       </p:sp>
       <p:sp>
         <p:nvSpPr>
-          <p:cNvPr id="14" name="TextBox 13"/>
+          <p:cNvPr id="13" name="TextBox 12"/>
           <p:cNvSpPr txBox="1"/>
           <p:nvPr/>
         </p:nvSpPr>
@@ -14519,7 +14745,7 @@
       </p:sp>
       <p:sp>
         <p:nvSpPr>
-          <p:cNvPr id="15" name="Rounded Rectangle 14"/>
+          <p:cNvPr id="14" name="Rounded Rectangle 13"/>
           <p:cNvSpPr/>
           <p:nvPr/>
         </p:nvSpPr>
@@ -14565,7 +14791,7 @@
       </p:sp>
       <p:sp>
         <p:nvSpPr>
-          <p:cNvPr id="16" name="Rectangle 15"/>
+          <p:cNvPr id="15" name="Rectangle 14"/>
           <p:cNvSpPr/>
           <p:nvPr/>
         </p:nvSpPr>
@@ -14609,7 +14835,7 @@
       </p:sp>
       <p:sp>
         <p:nvSpPr>
-          <p:cNvPr id="17" name="TextBox 16"/>
+          <p:cNvPr id="16" name="TextBox 15"/>
           <p:cNvSpPr txBox="1"/>
           <p:nvPr/>
         </p:nvSpPr>
@@ -14656,7 +14882,7 @@
       </p:sp>
       <p:sp>
         <p:nvSpPr>
-          <p:cNvPr id="18" name="TextBox 17"/>
+          <p:cNvPr id="17" name="TextBox 16"/>
           <p:cNvSpPr txBox="1"/>
           <p:nvPr/>
         </p:nvSpPr>
@@ -14703,7 +14929,7 @@
       </p:sp>
       <p:sp>
         <p:nvSpPr>
-          <p:cNvPr id="19" name="TextBox 18"/>
+          <p:cNvPr id="18" name="TextBox 17"/>
           <p:cNvSpPr txBox="1"/>
           <p:nvPr/>
         </p:nvSpPr>
@@ -14750,7 +14976,7 @@
       </p:sp>
       <p:sp>
         <p:nvSpPr>
-          <p:cNvPr id="20" name="TextBox 19"/>
+          <p:cNvPr id="19" name="TextBox 18"/>
           <p:cNvSpPr txBox="1"/>
           <p:nvPr/>
         </p:nvSpPr>
@@ -14797,7 +15023,7 @@
       </p:sp>
       <p:sp>
         <p:nvSpPr>
-          <p:cNvPr id="21" name="Rounded Rectangle 20"/>
+          <p:cNvPr id="20" name="Rounded Rectangle 19"/>
           <p:cNvSpPr/>
           <p:nvPr/>
         </p:nvSpPr>
@@ -14843,7 +15069,7 @@
       </p:sp>
       <p:sp>
         <p:nvSpPr>
-          <p:cNvPr id="22" name="Rectangle 21"/>
+          <p:cNvPr id="21" name="Rectangle 20"/>
           <p:cNvSpPr/>
           <p:nvPr/>
         </p:nvSpPr>
@@ -14887,7 +15113,7 @@
       </p:sp>
       <p:sp>
         <p:nvSpPr>
-          <p:cNvPr id="23" name="TextBox 22"/>
+          <p:cNvPr id="22" name="TextBox 21"/>
           <p:cNvSpPr txBox="1"/>
           <p:nvPr/>
         </p:nvSpPr>
@@ -14934,7 +15160,7 @@
       </p:sp>
       <p:sp>
         <p:nvSpPr>
-          <p:cNvPr id="24" name="TextBox 23"/>
+          <p:cNvPr id="23" name="TextBox 22"/>
           <p:cNvSpPr txBox="1"/>
           <p:nvPr/>
         </p:nvSpPr>
@@ -14981,7 +15207,7 @@
       </p:sp>
       <p:sp>
         <p:nvSpPr>
-          <p:cNvPr id="25" name="TextBox 24"/>
+          <p:cNvPr id="24" name="TextBox 23"/>
           <p:cNvSpPr txBox="1"/>
           <p:nvPr/>
         </p:nvSpPr>
@@ -15028,7 +15254,7 @@
       </p:sp>
       <p:sp>
         <p:nvSpPr>
-          <p:cNvPr id="26" name="Rounded Rectangle 25"/>
+          <p:cNvPr id="25" name="Rounded Rectangle 24"/>
           <p:cNvSpPr/>
           <p:nvPr/>
         </p:nvSpPr>
@@ -15074,7 +15300,7 @@
       </p:sp>
       <p:sp>
         <p:nvSpPr>
-          <p:cNvPr id="27" name="TextBox 26"/>
+          <p:cNvPr id="26" name="TextBox 25"/>
           <p:cNvSpPr txBox="1"/>
           <p:nvPr/>
         </p:nvSpPr>
@@ -15126,6 +15352,64 @@
                 <a:cs typeface="NanumGothic"/>
               </a:rPr>
               <a:t>연구로 검증된 3단계 (MOOSE-Chem, ICLR'25 · 화학) — 우리는 간소화해 차용</a:t>
+            </a:r>
+          </a:p>
+        </p:txBody>
+      </p:sp>
+      <p:sp>
+        <p:nvSpPr>
+          <p:cNvPr id="27" name="TextBox 26"/>
+          <p:cNvSpPr txBox="1"/>
+          <p:nvPr/>
+        </p:nvSpPr>
+        <p:spPr>
+          <a:xfrm>
+            <a:off x="8988552" y="6419088"/>
+            <a:ext cx="2697480" cy="365760"/>
+          </a:xfrm>
+          <a:prstGeom prst="rect">
+            <a:avLst/>
+          </a:prstGeom>
+          <a:noFill/>
+        </p:spPr>
+        <p:txBody>
+          <a:bodyPr wrap="square" anchor="ctr" lIns="0" rIns="0" tIns="0" bIns="0">
+            <a:spAutoFit/>
+          </a:bodyPr>
+          <a:lstStyle/>
+          <a:p>
+            <a:pPr algn="r">
+              <a:lnSpc>
+                <a:spcPct val="100000"/>
+              </a:lnSpc>
+              <a:spcBef>
+                <a:spcPts val="0"/>
+              </a:spcBef>
+              <a:spcAft>
+                <a:spcPts val="600"/>
+              </a:spcAft>
+            </a:pPr>
+            <a:r>
+              <a:rPr sz="900" b="1">
+                <a:solidFill>
+                  <a:srgbClr val="F59E0B"/>
+                </a:solidFill>
+                <a:latin typeface="NanumGothic"/>
+                <a:ea typeface="NanumGothic"/>
+                <a:cs typeface="NanumGothic"/>
+              </a:rPr>
+              <a:t>Day 4 · 목</a:t>
+            </a:r>
+            <a:r>
+              <a:rPr sz="900" b="1">
+                <a:solidFill>
+                  <a:srgbClr val="64748B"/>
+                </a:solidFill>
+                <a:latin typeface="NanumGothic"/>
+                <a:ea typeface="NanumGothic"/>
+                <a:cs typeface="NanumGothic"/>
+              </a:rPr>
+              <a:t>   ·   20 / 26</a:t>
             </a:r>
           </a:p>
         </p:txBody>
@@ -15423,54 +15707,7 @@
       </p:sp>
       <p:sp>
         <p:nvSpPr>
-          <p:cNvPr id="8" name="TextBox 7"/>
-          <p:cNvSpPr txBox="1"/>
-          <p:nvPr/>
-        </p:nvSpPr>
-        <p:spPr>
-          <a:xfrm>
-            <a:off x="10241280" y="6419088"/>
-            <a:ext cx="1463040" cy="365760"/>
-          </a:xfrm>
-          <a:prstGeom prst="rect">
-            <a:avLst/>
-          </a:prstGeom>
-          <a:noFill/>
-        </p:spPr>
-        <p:txBody>
-          <a:bodyPr wrap="square" anchor="ctr" lIns="0" rIns="0" tIns="0" bIns="0">
-            <a:spAutoFit/>
-          </a:bodyPr>
-          <a:lstStyle/>
-          <a:p>
-            <a:pPr algn="r">
-              <a:lnSpc>
-                <a:spcPct val="100000"/>
-              </a:lnSpc>
-              <a:spcBef>
-                <a:spcPts val="0"/>
-              </a:spcBef>
-              <a:spcAft>
-                <a:spcPts val="600"/>
-              </a:spcAft>
-            </a:pPr>
-            <a:r>
-              <a:rPr sz="900" b="1">
-                <a:solidFill>
-                  <a:srgbClr val="F59E0B"/>
-                </a:solidFill>
-                <a:latin typeface="NanumGothic"/>
-                <a:ea typeface="NanumGothic"/>
-                <a:cs typeface="NanumGothic"/>
-              </a:rPr>
-              <a:t>Day 4 · 목</a:t>
-            </a:r>
-          </a:p>
-        </p:txBody>
-      </p:sp>
-      <p:sp>
-        <p:nvSpPr>
-          <p:cNvPr id="9" name="Rounded Rectangle 8"/>
+          <p:cNvPr id="8" name="Rounded Rectangle 7"/>
           <p:cNvSpPr/>
           <p:nvPr/>
         </p:nvSpPr>
@@ -15516,7 +15753,7 @@
       </p:sp>
       <p:sp>
         <p:nvSpPr>
-          <p:cNvPr id="10" name="Rounded Rectangle 9"/>
+          <p:cNvPr id="9" name="Rounded Rectangle 8"/>
           <p:cNvSpPr/>
           <p:nvPr/>
         </p:nvSpPr>
@@ -15560,7 +15797,7 @@
       </p:sp>
       <p:sp>
         <p:nvSpPr>
-          <p:cNvPr id="11" name="TextBox 10"/>
+          <p:cNvPr id="10" name="TextBox 9"/>
           <p:cNvSpPr txBox="1"/>
           <p:nvPr/>
         </p:nvSpPr>
@@ -15607,7 +15844,7 @@
       </p:sp>
       <p:sp>
         <p:nvSpPr>
-          <p:cNvPr id="12" name="TextBox 11"/>
+          <p:cNvPr id="11" name="TextBox 10"/>
           <p:cNvSpPr txBox="1"/>
           <p:nvPr/>
         </p:nvSpPr>
@@ -15665,7 +15902,7 @@
       </p:sp>
       <p:sp>
         <p:nvSpPr>
-          <p:cNvPr id="13" name="TextBox 12"/>
+          <p:cNvPr id="12" name="TextBox 11"/>
           <p:cNvSpPr txBox="1"/>
           <p:nvPr/>
         </p:nvSpPr>
@@ -15723,7 +15960,7 @@
       </p:sp>
       <p:sp>
         <p:nvSpPr>
-          <p:cNvPr id="14" name="TextBox 13"/>
+          <p:cNvPr id="13" name="TextBox 12"/>
           <p:cNvSpPr txBox="1"/>
           <p:nvPr/>
         </p:nvSpPr>
@@ -15781,7 +16018,7 @@
       </p:sp>
       <p:sp>
         <p:nvSpPr>
-          <p:cNvPr id="15" name="Rounded Rectangle 14"/>
+          <p:cNvPr id="14" name="Rounded Rectangle 13"/>
           <p:cNvSpPr/>
           <p:nvPr/>
         </p:nvSpPr>
@@ -15827,7 +16064,7 @@
       </p:sp>
       <p:sp>
         <p:nvSpPr>
-          <p:cNvPr id="16" name="Rounded Rectangle 15"/>
+          <p:cNvPr id="15" name="Rounded Rectangle 14"/>
           <p:cNvSpPr/>
           <p:nvPr/>
         </p:nvSpPr>
@@ -15871,7 +16108,7 @@
       </p:sp>
       <p:sp>
         <p:nvSpPr>
-          <p:cNvPr id="17" name="TextBox 16"/>
+          <p:cNvPr id="16" name="TextBox 15"/>
           <p:cNvSpPr txBox="1"/>
           <p:nvPr/>
         </p:nvSpPr>
@@ -15918,7 +16155,7 @@
       </p:sp>
       <p:sp>
         <p:nvSpPr>
-          <p:cNvPr id="18" name="TextBox 17"/>
+          <p:cNvPr id="17" name="TextBox 16"/>
           <p:cNvSpPr txBox="1"/>
           <p:nvPr/>
         </p:nvSpPr>
@@ -15976,7 +16213,7 @@
       </p:sp>
       <p:sp>
         <p:nvSpPr>
-          <p:cNvPr id="19" name="TextBox 18"/>
+          <p:cNvPr id="18" name="TextBox 17"/>
           <p:cNvSpPr txBox="1"/>
           <p:nvPr/>
         </p:nvSpPr>
@@ -16034,7 +16271,7 @@
       </p:sp>
       <p:sp>
         <p:nvSpPr>
-          <p:cNvPr id="20" name="TextBox 19"/>
+          <p:cNvPr id="19" name="TextBox 18"/>
           <p:cNvSpPr txBox="1"/>
           <p:nvPr/>
         </p:nvSpPr>
@@ -16086,6 +16323,64 @@
                 <a:cs typeface="NanumGothic"/>
               </a:rPr>
               <a:t>근거: 어느 논문</a:t>
+            </a:r>
+          </a:p>
+        </p:txBody>
+      </p:sp>
+      <p:sp>
+        <p:nvSpPr>
+          <p:cNvPr id="20" name="TextBox 19"/>
+          <p:cNvSpPr txBox="1"/>
+          <p:nvPr/>
+        </p:nvSpPr>
+        <p:spPr>
+          <a:xfrm>
+            <a:off x="8988552" y="6419088"/>
+            <a:ext cx="2697480" cy="365760"/>
+          </a:xfrm>
+          <a:prstGeom prst="rect">
+            <a:avLst/>
+          </a:prstGeom>
+          <a:noFill/>
+        </p:spPr>
+        <p:txBody>
+          <a:bodyPr wrap="square" anchor="ctr" lIns="0" rIns="0" tIns="0" bIns="0">
+            <a:spAutoFit/>
+          </a:bodyPr>
+          <a:lstStyle/>
+          <a:p>
+            <a:pPr algn="r">
+              <a:lnSpc>
+                <a:spcPct val="100000"/>
+              </a:lnSpc>
+              <a:spcBef>
+                <a:spcPts val="0"/>
+              </a:spcBef>
+              <a:spcAft>
+                <a:spcPts val="600"/>
+              </a:spcAft>
+            </a:pPr>
+            <a:r>
+              <a:rPr sz="900" b="1">
+                <a:solidFill>
+                  <a:srgbClr val="F59E0B"/>
+                </a:solidFill>
+                <a:latin typeface="NanumGothic"/>
+                <a:ea typeface="NanumGothic"/>
+                <a:cs typeface="NanumGothic"/>
+              </a:rPr>
+              <a:t>Day 4 · 목</a:t>
+            </a:r>
+            <a:r>
+              <a:rPr sz="900" b="1">
+                <a:solidFill>
+                  <a:srgbClr val="64748B"/>
+                </a:solidFill>
+                <a:latin typeface="NanumGothic"/>
+                <a:ea typeface="NanumGothic"/>
+                <a:cs typeface="NanumGothic"/>
+              </a:rPr>
+              <a:t>   ·   21 / 26</a:t>
             </a:r>
           </a:p>
         </p:txBody>
@@ -16383,54 +16678,7 @@
       </p:sp>
       <p:sp>
         <p:nvSpPr>
-          <p:cNvPr id="8" name="TextBox 7"/>
-          <p:cNvSpPr txBox="1"/>
-          <p:nvPr/>
-        </p:nvSpPr>
-        <p:spPr>
-          <a:xfrm>
-            <a:off x="10241280" y="6419088"/>
-            <a:ext cx="1463040" cy="365760"/>
-          </a:xfrm>
-          <a:prstGeom prst="rect">
-            <a:avLst/>
-          </a:prstGeom>
-          <a:noFill/>
-        </p:spPr>
-        <p:txBody>
-          <a:bodyPr wrap="square" anchor="ctr" lIns="0" rIns="0" tIns="0" bIns="0">
-            <a:spAutoFit/>
-          </a:bodyPr>
-          <a:lstStyle/>
-          <a:p>
-            <a:pPr algn="r">
-              <a:lnSpc>
-                <a:spcPct val="100000"/>
-              </a:lnSpc>
-              <a:spcBef>
-                <a:spcPts val="0"/>
-              </a:spcBef>
-              <a:spcAft>
-                <a:spcPts val="600"/>
-              </a:spcAft>
-            </a:pPr>
-            <a:r>
-              <a:rPr sz="900" b="1">
-                <a:solidFill>
-                  <a:srgbClr val="F59E0B"/>
-                </a:solidFill>
-                <a:latin typeface="NanumGothic"/>
-                <a:ea typeface="NanumGothic"/>
-                <a:cs typeface="NanumGothic"/>
-              </a:rPr>
-              <a:t>Day 4 · 목</a:t>
-            </a:r>
-          </a:p>
-        </p:txBody>
-      </p:sp>
-      <p:sp>
-        <p:nvSpPr>
-          <p:cNvPr id="9" name="Oval 8"/>
+          <p:cNvPr id="8" name="Oval 7"/>
           <p:cNvSpPr/>
           <p:nvPr/>
         </p:nvSpPr>
@@ -16474,7 +16722,7 @@
       </p:sp>
       <p:sp>
         <p:nvSpPr>
-          <p:cNvPr id="10" name="TextBox 9"/>
+          <p:cNvPr id="9" name="TextBox 8"/>
           <p:cNvSpPr txBox="1"/>
           <p:nvPr/>
         </p:nvSpPr>
@@ -16521,7 +16769,7 @@
       </p:sp>
       <p:sp>
         <p:nvSpPr>
-          <p:cNvPr id="11" name="TextBox 10"/>
+          <p:cNvPr id="10" name="TextBox 9"/>
           <p:cNvSpPr txBox="1"/>
           <p:nvPr/>
         </p:nvSpPr>
@@ -16568,7 +16816,7 @@
       </p:sp>
       <p:sp>
         <p:nvSpPr>
-          <p:cNvPr id="12" name="Oval 11"/>
+          <p:cNvPr id="11" name="Oval 10"/>
           <p:cNvSpPr/>
           <p:nvPr/>
         </p:nvSpPr>
@@ -16612,7 +16860,7 @@
       </p:sp>
       <p:sp>
         <p:nvSpPr>
-          <p:cNvPr id="13" name="TextBox 12"/>
+          <p:cNvPr id="12" name="TextBox 11"/>
           <p:cNvSpPr txBox="1"/>
           <p:nvPr/>
         </p:nvSpPr>
@@ -16659,7 +16907,7 @@
       </p:sp>
       <p:sp>
         <p:nvSpPr>
-          <p:cNvPr id="14" name="TextBox 13"/>
+          <p:cNvPr id="13" name="TextBox 12"/>
           <p:cNvSpPr txBox="1"/>
           <p:nvPr/>
         </p:nvSpPr>
@@ -16706,7 +16954,7 @@
       </p:sp>
       <p:sp>
         <p:nvSpPr>
-          <p:cNvPr id="15" name="Oval 14"/>
+          <p:cNvPr id="14" name="Oval 13"/>
           <p:cNvSpPr/>
           <p:nvPr/>
         </p:nvSpPr>
@@ -16750,7 +16998,7 @@
       </p:sp>
       <p:sp>
         <p:nvSpPr>
-          <p:cNvPr id="16" name="TextBox 15"/>
+          <p:cNvPr id="15" name="TextBox 14"/>
           <p:cNvSpPr txBox="1"/>
           <p:nvPr/>
         </p:nvSpPr>
@@ -16797,7 +17045,7 @@
       </p:sp>
       <p:sp>
         <p:nvSpPr>
-          <p:cNvPr id="17" name="TextBox 16"/>
+          <p:cNvPr id="16" name="TextBox 15"/>
           <p:cNvSpPr txBox="1"/>
           <p:nvPr/>
         </p:nvSpPr>
@@ -16844,7 +17092,7 @@
       </p:sp>
       <p:sp>
         <p:nvSpPr>
-          <p:cNvPr id="18" name="Oval 17"/>
+          <p:cNvPr id="17" name="Oval 16"/>
           <p:cNvSpPr/>
           <p:nvPr/>
         </p:nvSpPr>
@@ -16888,7 +17136,7 @@
       </p:sp>
       <p:sp>
         <p:nvSpPr>
-          <p:cNvPr id="19" name="TextBox 18"/>
+          <p:cNvPr id="18" name="TextBox 17"/>
           <p:cNvSpPr txBox="1"/>
           <p:nvPr/>
         </p:nvSpPr>
@@ -16935,7 +17183,7 @@
       </p:sp>
       <p:sp>
         <p:nvSpPr>
-          <p:cNvPr id="20" name="TextBox 19"/>
+          <p:cNvPr id="19" name="TextBox 18"/>
           <p:cNvSpPr txBox="1"/>
           <p:nvPr/>
         </p:nvSpPr>
@@ -16982,7 +17230,7 @@
       </p:sp>
       <p:sp>
         <p:nvSpPr>
-          <p:cNvPr id="21" name="Rounded Rectangle 20"/>
+          <p:cNvPr id="20" name="Rounded Rectangle 19"/>
           <p:cNvSpPr/>
           <p:nvPr/>
         </p:nvSpPr>
@@ -17028,7 +17276,7 @@
       </p:sp>
       <p:sp>
         <p:nvSpPr>
-          <p:cNvPr id="22" name="TextBox 21"/>
+          <p:cNvPr id="21" name="TextBox 20"/>
           <p:cNvSpPr txBox="1"/>
           <p:nvPr/>
         </p:nvSpPr>
@@ -17080,6 +17328,64 @@
                 <a:cs typeface="NanumGothic"/>
               </a:rPr>
               <a:t>많이·다양하게가 이 단계의 목표</a:t>
+            </a:r>
+          </a:p>
+        </p:txBody>
+      </p:sp>
+      <p:sp>
+        <p:nvSpPr>
+          <p:cNvPr id="22" name="TextBox 21"/>
+          <p:cNvSpPr txBox="1"/>
+          <p:nvPr/>
+        </p:nvSpPr>
+        <p:spPr>
+          <a:xfrm>
+            <a:off x="8988552" y="6419088"/>
+            <a:ext cx="2697480" cy="365760"/>
+          </a:xfrm>
+          <a:prstGeom prst="rect">
+            <a:avLst/>
+          </a:prstGeom>
+          <a:noFill/>
+        </p:spPr>
+        <p:txBody>
+          <a:bodyPr wrap="square" anchor="ctr" lIns="0" rIns="0" tIns="0" bIns="0">
+            <a:spAutoFit/>
+          </a:bodyPr>
+          <a:lstStyle/>
+          <a:p>
+            <a:pPr algn="r">
+              <a:lnSpc>
+                <a:spcPct val="100000"/>
+              </a:lnSpc>
+              <a:spcBef>
+                <a:spcPts val="0"/>
+              </a:spcBef>
+              <a:spcAft>
+                <a:spcPts val="600"/>
+              </a:spcAft>
+            </a:pPr>
+            <a:r>
+              <a:rPr sz="900" b="1">
+                <a:solidFill>
+                  <a:srgbClr val="F59E0B"/>
+                </a:solidFill>
+                <a:latin typeface="NanumGothic"/>
+                <a:ea typeface="NanumGothic"/>
+                <a:cs typeface="NanumGothic"/>
+              </a:rPr>
+              <a:t>Day 4 · 목</a:t>
+            </a:r>
+            <a:r>
+              <a:rPr sz="900" b="1">
+                <a:solidFill>
+                  <a:srgbClr val="64748B"/>
+                </a:solidFill>
+                <a:latin typeface="NanumGothic"/>
+                <a:ea typeface="NanumGothic"/>
+                <a:cs typeface="NanumGothic"/>
+              </a:rPr>
+              <a:t>   ·   22 / 26</a:t>
             </a:r>
           </a:p>
         </p:txBody>
@@ -17377,54 +17683,7 @@
       </p:sp>
       <p:sp>
         <p:nvSpPr>
-          <p:cNvPr id="8" name="TextBox 7"/>
-          <p:cNvSpPr txBox="1"/>
-          <p:nvPr/>
-        </p:nvSpPr>
-        <p:spPr>
-          <a:xfrm>
-            <a:off x="10241280" y="6419088"/>
-            <a:ext cx="1463040" cy="365760"/>
-          </a:xfrm>
-          <a:prstGeom prst="rect">
-            <a:avLst/>
-          </a:prstGeom>
-          <a:noFill/>
-        </p:spPr>
-        <p:txBody>
-          <a:bodyPr wrap="square" anchor="ctr" lIns="0" rIns="0" tIns="0" bIns="0">
-            <a:spAutoFit/>
-          </a:bodyPr>
-          <a:lstStyle/>
-          <a:p>
-            <a:pPr algn="r">
-              <a:lnSpc>
-                <a:spcPct val="100000"/>
-              </a:lnSpc>
-              <a:spcBef>
-                <a:spcPts val="0"/>
-              </a:spcBef>
-              <a:spcAft>
-                <a:spcPts val="600"/>
-              </a:spcAft>
-            </a:pPr>
-            <a:r>
-              <a:rPr sz="900" b="1">
-                <a:solidFill>
-                  <a:srgbClr val="F59E0B"/>
-                </a:solidFill>
-                <a:latin typeface="NanumGothic"/>
-                <a:ea typeface="NanumGothic"/>
-                <a:cs typeface="NanumGothic"/>
-              </a:rPr>
-              <a:t>Day 4 · 목</a:t>
-            </a:r>
-          </a:p>
-        </p:txBody>
-      </p:sp>
-      <p:sp>
-        <p:nvSpPr>
-          <p:cNvPr id="9" name="Rounded Rectangle 8"/>
+          <p:cNvPr id="8" name="Rounded Rectangle 7"/>
           <p:cNvSpPr/>
           <p:nvPr/>
         </p:nvSpPr>
@@ -17470,7 +17729,7 @@
       </p:sp>
       <p:sp>
         <p:nvSpPr>
-          <p:cNvPr id="10" name="Rounded Rectangle 9"/>
+          <p:cNvPr id="9" name="Rounded Rectangle 8"/>
           <p:cNvSpPr/>
           <p:nvPr/>
         </p:nvSpPr>
@@ -17514,7 +17773,7 @@
       </p:sp>
       <p:sp>
         <p:nvSpPr>
-          <p:cNvPr id="11" name="TextBox 10"/>
+          <p:cNvPr id="10" name="TextBox 9"/>
           <p:cNvSpPr txBox="1"/>
           <p:nvPr/>
         </p:nvSpPr>
@@ -17561,7 +17820,7 @@
       </p:sp>
       <p:sp>
         <p:nvSpPr>
-          <p:cNvPr id="12" name="TextBox 11"/>
+          <p:cNvPr id="11" name="TextBox 10"/>
           <p:cNvSpPr txBox="1"/>
           <p:nvPr/>
         </p:nvSpPr>
@@ -17619,7 +17878,7 @@
       </p:sp>
       <p:sp>
         <p:nvSpPr>
-          <p:cNvPr id="13" name="TextBox 12"/>
+          <p:cNvPr id="12" name="TextBox 11"/>
           <p:cNvSpPr txBox="1"/>
           <p:nvPr/>
         </p:nvSpPr>
@@ -17677,7 +17936,7 @@
       </p:sp>
       <p:sp>
         <p:nvSpPr>
-          <p:cNvPr id="14" name="TextBox 13"/>
+          <p:cNvPr id="13" name="TextBox 12"/>
           <p:cNvSpPr txBox="1"/>
           <p:nvPr/>
         </p:nvSpPr>
@@ -17735,7 +17994,7 @@
       </p:sp>
       <p:sp>
         <p:nvSpPr>
-          <p:cNvPr id="15" name="Rounded Rectangle 14"/>
+          <p:cNvPr id="14" name="Rounded Rectangle 13"/>
           <p:cNvSpPr/>
           <p:nvPr/>
         </p:nvSpPr>
@@ -17781,7 +18040,7 @@
       </p:sp>
       <p:sp>
         <p:nvSpPr>
-          <p:cNvPr id="16" name="Rounded Rectangle 15"/>
+          <p:cNvPr id="15" name="Rounded Rectangle 14"/>
           <p:cNvSpPr/>
           <p:nvPr/>
         </p:nvSpPr>
@@ -17825,7 +18084,7 @@
       </p:sp>
       <p:sp>
         <p:nvSpPr>
-          <p:cNvPr id="17" name="TextBox 16"/>
+          <p:cNvPr id="16" name="TextBox 15"/>
           <p:cNvSpPr txBox="1"/>
           <p:nvPr/>
         </p:nvSpPr>
@@ -17872,7 +18131,7 @@
       </p:sp>
       <p:sp>
         <p:nvSpPr>
-          <p:cNvPr id="18" name="TextBox 17"/>
+          <p:cNvPr id="17" name="TextBox 16"/>
           <p:cNvSpPr txBox="1"/>
           <p:nvPr/>
         </p:nvSpPr>
@@ -17930,7 +18189,7 @@
       </p:sp>
       <p:sp>
         <p:nvSpPr>
-          <p:cNvPr id="19" name="TextBox 18"/>
+          <p:cNvPr id="18" name="TextBox 17"/>
           <p:cNvSpPr txBox="1"/>
           <p:nvPr/>
         </p:nvSpPr>
@@ -17988,7 +18247,7 @@
       </p:sp>
       <p:sp>
         <p:nvSpPr>
-          <p:cNvPr id="20" name="TextBox 19"/>
+          <p:cNvPr id="19" name="TextBox 18"/>
           <p:cNvSpPr txBox="1"/>
           <p:nvPr/>
         </p:nvSpPr>
@@ -18040,6 +18299,64 @@
                 <a:cs typeface="NanumGothic"/>
               </a:rPr>
               <a:t>상위 1~2개 추리기</a:t>
+            </a:r>
+          </a:p>
+        </p:txBody>
+      </p:sp>
+      <p:sp>
+        <p:nvSpPr>
+          <p:cNvPr id="20" name="TextBox 19"/>
+          <p:cNvSpPr txBox="1"/>
+          <p:nvPr/>
+        </p:nvSpPr>
+        <p:spPr>
+          <a:xfrm>
+            <a:off x="8988552" y="6419088"/>
+            <a:ext cx="2697480" cy="365760"/>
+          </a:xfrm>
+          <a:prstGeom prst="rect">
+            <a:avLst/>
+          </a:prstGeom>
+          <a:noFill/>
+        </p:spPr>
+        <p:txBody>
+          <a:bodyPr wrap="square" anchor="ctr" lIns="0" rIns="0" tIns="0" bIns="0">
+            <a:spAutoFit/>
+          </a:bodyPr>
+          <a:lstStyle/>
+          <a:p>
+            <a:pPr algn="r">
+              <a:lnSpc>
+                <a:spcPct val="100000"/>
+              </a:lnSpc>
+              <a:spcBef>
+                <a:spcPts val="0"/>
+              </a:spcBef>
+              <a:spcAft>
+                <a:spcPts val="600"/>
+              </a:spcAft>
+            </a:pPr>
+            <a:r>
+              <a:rPr sz="900" b="1">
+                <a:solidFill>
+                  <a:srgbClr val="F59E0B"/>
+                </a:solidFill>
+                <a:latin typeface="NanumGothic"/>
+                <a:ea typeface="NanumGothic"/>
+                <a:cs typeface="NanumGothic"/>
+              </a:rPr>
+              <a:t>Day 4 · 목</a:t>
+            </a:r>
+            <a:r>
+              <a:rPr sz="900" b="1">
+                <a:solidFill>
+                  <a:srgbClr val="64748B"/>
+                </a:solidFill>
+                <a:latin typeface="NanumGothic"/>
+                <a:ea typeface="NanumGothic"/>
+                <a:cs typeface="NanumGothic"/>
+              </a:rPr>
+              <a:t>   ·   23 / 26</a:t>
             </a:r>
           </a:p>
         </p:txBody>
@@ -18337,54 +18654,7 @@
       </p:sp>
       <p:sp>
         <p:nvSpPr>
-          <p:cNvPr id="8" name="TextBox 7"/>
-          <p:cNvSpPr txBox="1"/>
-          <p:nvPr/>
-        </p:nvSpPr>
-        <p:spPr>
-          <a:xfrm>
-            <a:off x="10241280" y="6419088"/>
-            <a:ext cx="1463040" cy="365760"/>
-          </a:xfrm>
-          <a:prstGeom prst="rect">
-            <a:avLst/>
-          </a:prstGeom>
-          <a:noFill/>
-        </p:spPr>
-        <p:txBody>
-          <a:bodyPr wrap="square" anchor="ctr" lIns="0" rIns="0" tIns="0" bIns="0">
-            <a:spAutoFit/>
-          </a:bodyPr>
-          <a:lstStyle/>
-          <a:p>
-            <a:pPr algn="r">
-              <a:lnSpc>
-                <a:spcPct val="100000"/>
-              </a:lnSpc>
-              <a:spcBef>
-                <a:spcPts val="0"/>
-              </a:spcBef>
-              <a:spcAft>
-                <a:spcPts val="600"/>
-              </a:spcAft>
-            </a:pPr>
-            <a:r>
-              <a:rPr sz="900" b="1">
-                <a:solidFill>
-                  <a:srgbClr val="F59E0B"/>
-                </a:solidFill>
-                <a:latin typeface="NanumGothic"/>
-                <a:ea typeface="NanumGothic"/>
-                <a:cs typeface="NanumGothic"/>
-              </a:rPr>
-              <a:t>Day 4 · 목</a:t>
-            </a:r>
-          </a:p>
-        </p:txBody>
-      </p:sp>
-      <p:sp>
-        <p:nvSpPr>
-          <p:cNvPr id="9" name="Oval 8"/>
+          <p:cNvPr id="8" name="Oval 7"/>
           <p:cNvSpPr/>
           <p:nvPr/>
         </p:nvSpPr>
@@ -18428,7 +18698,7 @@
       </p:sp>
       <p:sp>
         <p:nvSpPr>
-          <p:cNvPr id="10" name="TextBox 9"/>
+          <p:cNvPr id="9" name="TextBox 8"/>
           <p:cNvSpPr txBox="1"/>
           <p:nvPr/>
         </p:nvSpPr>
@@ -18475,7 +18745,7 @@
       </p:sp>
       <p:sp>
         <p:nvSpPr>
-          <p:cNvPr id="11" name="TextBox 10"/>
+          <p:cNvPr id="10" name="TextBox 9"/>
           <p:cNvSpPr txBox="1"/>
           <p:nvPr/>
         </p:nvSpPr>
@@ -18522,7 +18792,7 @@
       </p:sp>
       <p:sp>
         <p:nvSpPr>
-          <p:cNvPr id="12" name="Oval 11"/>
+          <p:cNvPr id="11" name="Oval 10"/>
           <p:cNvSpPr/>
           <p:nvPr/>
         </p:nvSpPr>
@@ -18566,7 +18836,7 @@
       </p:sp>
       <p:sp>
         <p:nvSpPr>
-          <p:cNvPr id="13" name="TextBox 12"/>
+          <p:cNvPr id="12" name="TextBox 11"/>
           <p:cNvSpPr txBox="1"/>
           <p:nvPr/>
         </p:nvSpPr>
@@ -18613,7 +18883,7 @@
       </p:sp>
       <p:sp>
         <p:nvSpPr>
-          <p:cNvPr id="14" name="TextBox 13"/>
+          <p:cNvPr id="13" name="TextBox 12"/>
           <p:cNvSpPr txBox="1"/>
           <p:nvPr/>
         </p:nvSpPr>
@@ -18660,7 +18930,7 @@
       </p:sp>
       <p:sp>
         <p:nvSpPr>
-          <p:cNvPr id="15" name="Oval 14"/>
+          <p:cNvPr id="14" name="Oval 13"/>
           <p:cNvSpPr/>
           <p:nvPr/>
         </p:nvSpPr>
@@ -18704,7 +18974,7 @@
       </p:sp>
       <p:sp>
         <p:nvSpPr>
-          <p:cNvPr id="16" name="TextBox 15"/>
+          <p:cNvPr id="15" name="TextBox 14"/>
           <p:cNvSpPr txBox="1"/>
           <p:nvPr/>
         </p:nvSpPr>
@@ -18751,7 +19021,7 @@
       </p:sp>
       <p:sp>
         <p:nvSpPr>
-          <p:cNvPr id="17" name="TextBox 16"/>
+          <p:cNvPr id="16" name="TextBox 15"/>
           <p:cNvSpPr txBox="1"/>
           <p:nvPr/>
         </p:nvSpPr>
@@ -18798,7 +19068,7 @@
       </p:sp>
       <p:sp>
         <p:nvSpPr>
-          <p:cNvPr id="18" name="Rounded Rectangle 17"/>
+          <p:cNvPr id="17" name="Rounded Rectangle 16"/>
           <p:cNvSpPr/>
           <p:nvPr/>
         </p:nvSpPr>
@@ -18844,7 +19114,7 @@
       </p:sp>
       <p:sp>
         <p:nvSpPr>
-          <p:cNvPr id="19" name="TextBox 18"/>
+          <p:cNvPr id="18" name="TextBox 17"/>
           <p:cNvSpPr txBox="1"/>
           <p:nvPr/>
         </p:nvSpPr>
@@ -18896,6 +19166,64 @@
                 <a:cs typeface="NanumGothic"/>
               </a:rPr>
               <a:t>약하면 되돌아가 재생성·보강 (iteration)</a:t>
+            </a:r>
+          </a:p>
+        </p:txBody>
+      </p:sp>
+      <p:sp>
+        <p:nvSpPr>
+          <p:cNvPr id="19" name="TextBox 18"/>
+          <p:cNvSpPr txBox="1"/>
+          <p:nvPr/>
+        </p:nvSpPr>
+        <p:spPr>
+          <a:xfrm>
+            <a:off x="8988552" y="6419088"/>
+            <a:ext cx="2697480" cy="365760"/>
+          </a:xfrm>
+          <a:prstGeom prst="rect">
+            <a:avLst/>
+          </a:prstGeom>
+          <a:noFill/>
+        </p:spPr>
+        <p:txBody>
+          <a:bodyPr wrap="square" anchor="ctr" lIns="0" rIns="0" tIns="0" bIns="0">
+            <a:spAutoFit/>
+          </a:bodyPr>
+          <a:lstStyle/>
+          <a:p>
+            <a:pPr algn="r">
+              <a:lnSpc>
+                <a:spcPct val="100000"/>
+              </a:lnSpc>
+              <a:spcBef>
+                <a:spcPts val="0"/>
+              </a:spcBef>
+              <a:spcAft>
+                <a:spcPts val="600"/>
+              </a:spcAft>
+            </a:pPr>
+            <a:r>
+              <a:rPr sz="900" b="1">
+                <a:solidFill>
+                  <a:srgbClr val="F59E0B"/>
+                </a:solidFill>
+                <a:latin typeface="NanumGothic"/>
+                <a:ea typeface="NanumGothic"/>
+                <a:cs typeface="NanumGothic"/>
+              </a:rPr>
+              <a:t>Day 4 · 목</a:t>
+            </a:r>
+            <a:r>
+              <a:rPr sz="900" b="1">
+                <a:solidFill>
+                  <a:srgbClr val="64748B"/>
+                </a:solidFill>
+                <a:latin typeface="NanumGothic"/>
+                <a:ea typeface="NanumGothic"/>
+                <a:cs typeface="NanumGothic"/>
+              </a:rPr>
+              <a:t>   ·   24 / 26</a:t>
             </a:r>
           </a:p>
         </p:txBody>
@@ -19193,54 +19521,7 @@
       </p:sp>
       <p:sp>
         <p:nvSpPr>
-          <p:cNvPr id="8" name="TextBox 7"/>
-          <p:cNvSpPr txBox="1"/>
-          <p:nvPr/>
-        </p:nvSpPr>
-        <p:spPr>
-          <a:xfrm>
-            <a:off x="10241280" y="6419088"/>
-            <a:ext cx="1463040" cy="365760"/>
-          </a:xfrm>
-          <a:prstGeom prst="rect">
-            <a:avLst/>
-          </a:prstGeom>
-          <a:noFill/>
-        </p:spPr>
-        <p:txBody>
-          <a:bodyPr wrap="square" anchor="ctr" lIns="0" rIns="0" tIns="0" bIns="0">
-            <a:spAutoFit/>
-          </a:bodyPr>
-          <a:lstStyle/>
-          <a:p>
-            <a:pPr algn="r">
-              <a:lnSpc>
-                <a:spcPct val="100000"/>
-              </a:lnSpc>
-              <a:spcBef>
-                <a:spcPts val="0"/>
-              </a:spcBef>
-              <a:spcAft>
-                <a:spcPts val="600"/>
-              </a:spcAft>
-            </a:pPr>
-            <a:r>
-              <a:rPr sz="900" b="1">
-                <a:solidFill>
-                  <a:srgbClr val="F59E0B"/>
-                </a:solidFill>
-                <a:latin typeface="NanumGothic"/>
-                <a:ea typeface="NanumGothic"/>
-                <a:cs typeface="NanumGothic"/>
-              </a:rPr>
-              <a:t>Day 4 · 목</a:t>
-            </a:r>
-          </a:p>
-        </p:txBody>
-      </p:sp>
-      <p:sp>
-        <p:nvSpPr>
-          <p:cNvPr id="9" name="Rounded Rectangle 8"/>
+          <p:cNvPr id="8" name="Rounded Rectangle 7"/>
           <p:cNvSpPr/>
           <p:nvPr/>
         </p:nvSpPr>
@@ -19286,7 +19567,7 @@
       </p:sp>
       <p:sp>
         <p:nvSpPr>
-          <p:cNvPr id="10" name="TextBox 9"/>
+          <p:cNvPr id="9" name="TextBox 8"/>
           <p:cNvSpPr txBox="1"/>
           <p:nvPr/>
         </p:nvSpPr>
@@ -19333,7 +19614,7 @@
       </p:sp>
       <p:sp>
         <p:nvSpPr>
-          <p:cNvPr id="11" name="Oval 10"/>
+          <p:cNvPr id="10" name="Oval 9"/>
           <p:cNvSpPr/>
           <p:nvPr/>
         </p:nvSpPr>
@@ -19377,7 +19658,7 @@
       </p:sp>
       <p:sp>
         <p:nvSpPr>
-          <p:cNvPr id="12" name="TextBox 11"/>
+          <p:cNvPr id="11" name="TextBox 10"/>
           <p:cNvSpPr txBox="1"/>
           <p:nvPr/>
         </p:nvSpPr>
@@ -19424,7 +19705,7 @@
       </p:sp>
       <p:sp>
         <p:nvSpPr>
-          <p:cNvPr id="13" name="TextBox 12"/>
+          <p:cNvPr id="12" name="TextBox 11"/>
           <p:cNvSpPr txBox="1"/>
           <p:nvPr/>
         </p:nvSpPr>
@@ -19471,7 +19752,7 @@
       </p:sp>
       <p:sp>
         <p:nvSpPr>
-          <p:cNvPr id="14" name="Oval 13"/>
+          <p:cNvPr id="13" name="Oval 12"/>
           <p:cNvSpPr/>
           <p:nvPr/>
         </p:nvSpPr>
@@ -19515,7 +19796,7 @@
       </p:sp>
       <p:sp>
         <p:nvSpPr>
-          <p:cNvPr id="15" name="TextBox 14"/>
+          <p:cNvPr id="14" name="TextBox 13"/>
           <p:cNvSpPr txBox="1"/>
           <p:nvPr/>
         </p:nvSpPr>
@@ -19562,7 +19843,7 @@
       </p:sp>
       <p:sp>
         <p:nvSpPr>
-          <p:cNvPr id="16" name="TextBox 15"/>
+          <p:cNvPr id="15" name="TextBox 14"/>
           <p:cNvSpPr txBox="1"/>
           <p:nvPr/>
         </p:nvSpPr>
@@ -19609,7 +19890,7 @@
       </p:sp>
       <p:sp>
         <p:nvSpPr>
-          <p:cNvPr id="17" name="Oval 16"/>
+          <p:cNvPr id="16" name="Oval 15"/>
           <p:cNvSpPr/>
           <p:nvPr/>
         </p:nvSpPr>
@@ -19653,7 +19934,7 @@
       </p:sp>
       <p:sp>
         <p:nvSpPr>
-          <p:cNvPr id="18" name="TextBox 17"/>
+          <p:cNvPr id="17" name="TextBox 16"/>
           <p:cNvSpPr txBox="1"/>
           <p:nvPr/>
         </p:nvSpPr>
@@ -19700,7 +19981,7 @@
       </p:sp>
       <p:sp>
         <p:nvSpPr>
-          <p:cNvPr id="19" name="TextBox 18"/>
+          <p:cNvPr id="18" name="TextBox 17"/>
           <p:cNvSpPr txBox="1"/>
           <p:nvPr/>
         </p:nvSpPr>
@@ -19747,7 +20028,7 @@
       </p:sp>
       <p:sp>
         <p:nvSpPr>
-          <p:cNvPr id="20" name="Oval 19"/>
+          <p:cNvPr id="19" name="Oval 18"/>
           <p:cNvSpPr/>
           <p:nvPr/>
         </p:nvSpPr>
@@ -19791,7 +20072,7 @@
       </p:sp>
       <p:sp>
         <p:nvSpPr>
-          <p:cNvPr id="21" name="TextBox 20"/>
+          <p:cNvPr id="20" name="TextBox 19"/>
           <p:cNvSpPr txBox="1"/>
           <p:nvPr/>
         </p:nvSpPr>
@@ -19838,7 +20119,7 @@
       </p:sp>
       <p:sp>
         <p:nvSpPr>
-          <p:cNvPr id="22" name="TextBox 21"/>
+          <p:cNvPr id="21" name="TextBox 20"/>
           <p:cNvSpPr txBox="1"/>
           <p:nvPr/>
         </p:nvSpPr>
@@ -19885,7 +20166,7 @@
       </p:sp>
       <p:sp>
         <p:nvSpPr>
-          <p:cNvPr id="23" name="Rounded Rectangle 22"/>
+          <p:cNvPr id="22" name="Rounded Rectangle 21"/>
           <p:cNvSpPr/>
           <p:nvPr/>
         </p:nvSpPr>
@@ -19929,7 +20210,7 @@
       </p:sp>
       <p:sp>
         <p:nvSpPr>
-          <p:cNvPr id="24" name="TextBox 23"/>
+          <p:cNvPr id="23" name="TextBox 22"/>
           <p:cNvSpPr txBox="1"/>
           <p:nvPr/>
         </p:nvSpPr>
@@ -19976,7 +20257,7 @@
       </p:sp>
       <p:sp>
         <p:nvSpPr>
-          <p:cNvPr id="25" name="TextBox 24"/>
+          <p:cNvPr id="24" name="TextBox 23"/>
           <p:cNvSpPr txBox="1"/>
           <p:nvPr/>
         </p:nvSpPr>
@@ -20018,6 +20299,64 @@
               </a:rPr>
               <a:t>최종 가설 제안 + 분석 노트
 에이전트 완주! 양식: output/report-template.md · 분석: result-analysis-template.md</a:t>
+            </a:r>
+          </a:p>
+        </p:txBody>
+      </p:sp>
+      <p:sp>
+        <p:nvSpPr>
+          <p:cNvPr id="25" name="TextBox 24"/>
+          <p:cNvSpPr txBox="1"/>
+          <p:nvPr/>
+        </p:nvSpPr>
+        <p:spPr>
+          <a:xfrm>
+            <a:off x="8988552" y="6419088"/>
+            <a:ext cx="2697480" cy="365760"/>
+          </a:xfrm>
+          <a:prstGeom prst="rect">
+            <a:avLst/>
+          </a:prstGeom>
+          <a:noFill/>
+        </p:spPr>
+        <p:txBody>
+          <a:bodyPr wrap="square" anchor="ctr" lIns="0" rIns="0" tIns="0" bIns="0">
+            <a:spAutoFit/>
+          </a:bodyPr>
+          <a:lstStyle/>
+          <a:p>
+            <a:pPr algn="r">
+              <a:lnSpc>
+                <a:spcPct val="100000"/>
+              </a:lnSpc>
+              <a:spcBef>
+                <a:spcPts val="0"/>
+              </a:spcBef>
+              <a:spcAft>
+                <a:spcPts val="600"/>
+              </a:spcAft>
+            </a:pPr>
+            <a:r>
+              <a:rPr sz="900" b="1">
+                <a:solidFill>
+                  <a:srgbClr val="F59E0B"/>
+                </a:solidFill>
+                <a:latin typeface="NanumGothic"/>
+                <a:ea typeface="NanumGothic"/>
+                <a:cs typeface="NanumGothic"/>
+              </a:rPr>
+              <a:t>Day 4 · 목</a:t>
+            </a:r>
+            <a:r>
+              <a:rPr sz="900" b="1">
+                <a:solidFill>
+                  <a:srgbClr val="64748B"/>
+                </a:solidFill>
+                <a:latin typeface="NanumGothic"/>
+                <a:ea typeface="NanumGothic"/>
+                <a:cs typeface="NanumGothic"/>
+              </a:rPr>
+              <a:t>   ·   25 / 26</a:t>
             </a:r>
           </a:p>
         </p:txBody>
@@ -20321,53 +20660,6 @@
         </p:nvSpPr>
         <p:spPr>
           <a:xfrm>
-            <a:off x="10241280" y="6419088"/>
-            <a:ext cx="1463040" cy="365760"/>
-          </a:xfrm>
-          <a:prstGeom prst="rect">
-            <a:avLst/>
-          </a:prstGeom>
-          <a:noFill/>
-        </p:spPr>
-        <p:txBody>
-          <a:bodyPr wrap="square" anchor="ctr" lIns="0" rIns="0" tIns="0" bIns="0">
-            <a:spAutoFit/>
-          </a:bodyPr>
-          <a:lstStyle/>
-          <a:p>
-            <a:pPr algn="r">
-              <a:lnSpc>
-                <a:spcPct val="100000"/>
-              </a:lnSpc>
-              <a:spcBef>
-                <a:spcPts val="0"/>
-              </a:spcBef>
-              <a:spcAft>
-                <a:spcPts val="600"/>
-              </a:spcAft>
-            </a:pPr>
-            <a:r>
-              <a:rPr sz="900" b="1">
-                <a:solidFill>
-                  <a:srgbClr val="F59E0B"/>
-                </a:solidFill>
-                <a:latin typeface="NanumGothic"/>
-                <a:ea typeface="NanumGothic"/>
-                <a:cs typeface="NanumGothic"/>
-              </a:rPr>
-              <a:t>Day 4 · 목</a:t>
-            </a:r>
-          </a:p>
-        </p:txBody>
-      </p:sp>
-      <p:sp>
-        <p:nvSpPr>
-          <p:cNvPr id="9" name="TextBox 8"/>
-          <p:cNvSpPr txBox="1"/>
-          <p:nvPr/>
-        </p:nvSpPr>
-        <p:spPr>
-          <a:xfrm>
             <a:off x="548640" y="1783080"/>
             <a:ext cx="6400800" cy="365760"/>
           </a:xfrm>
@@ -20409,7 +20701,7 @@
       </p:sp>
       <p:sp>
         <p:nvSpPr>
-          <p:cNvPr id="10" name="Oval 9"/>
+          <p:cNvPr id="9" name="Oval 8"/>
           <p:cNvSpPr/>
           <p:nvPr/>
         </p:nvSpPr>
@@ -20453,7 +20745,7 @@
       </p:sp>
       <p:sp>
         <p:nvSpPr>
-          <p:cNvPr id="11" name="TextBox 10"/>
+          <p:cNvPr id="10" name="TextBox 9"/>
           <p:cNvSpPr txBox="1"/>
           <p:nvPr/>
         </p:nvSpPr>
@@ -20500,7 +20792,7 @@
       </p:sp>
       <p:sp>
         <p:nvSpPr>
-          <p:cNvPr id="12" name="Oval 11"/>
+          <p:cNvPr id="11" name="Oval 10"/>
           <p:cNvSpPr/>
           <p:nvPr/>
         </p:nvSpPr>
@@ -20544,7 +20836,7 @@
       </p:sp>
       <p:sp>
         <p:nvSpPr>
-          <p:cNvPr id="13" name="TextBox 12"/>
+          <p:cNvPr id="12" name="TextBox 11"/>
           <p:cNvSpPr txBox="1"/>
           <p:nvPr/>
         </p:nvSpPr>
@@ -20591,7 +20883,7 @@
       </p:sp>
       <p:sp>
         <p:nvSpPr>
-          <p:cNvPr id="14" name="Oval 13"/>
+          <p:cNvPr id="13" name="Oval 12"/>
           <p:cNvSpPr/>
           <p:nvPr/>
         </p:nvSpPr>
@@ -20635,7 +20927,7 @@
       </p:sp>
       <p:sp>
         <p:nvSpPr>
-          <p:cNvPr id="15" name="TextBox 14"/>
+          <p:cNvPr id="14" name="TextBox 13"/>
           <p:cNvSpPr txBox="1"/>
           <p:nvPr/>
         </p:nvSpPr>
@@ -20682,7 +20974,7 @@
       </p:sp>
       <p:sp>
         <p:nvSpPr>
-          <p:cNvPr id="16" name="Rounded Rectangle 15"/>
+          <p:cNvPr id="15" name="Rounded Rectangle 14"/>
           <p:cNvSpPr/>
           <p:nvPr/>
         </p:nvSpPr>
@@ -20728,7 +21020,7 @@
       </p:sp>
       <p:sp>
         <p:nvSpPr>
-          <p:cNvPr id="17" name="TextBox 16"/>
+          <p:cNvPr id="16" name="TextBox 15"/>
           <p:cNvSpPr txBox="1"/>
           <p:nvPr/>
         </p:nvSpPr>
@@ -20775,7 +21067,7 @@
       </p:sp>
       <p:sp>
         <p:nvSpPr>
-          <p:cNvPr id="18" name="TextBox 17"/>
+          <p:cNvPr id="17" name="TextBox 16"/>
           <p:cNvSpPr txBox="1"/>
           <p:nvPr/>
         </p:nvSpPr>
@@ -20816,6 +21108,64 @@
                 <a:cs typeface="NanumGothic"/>
               </a:rPr>
               <a:t>버퍼로 마무리하고, AI 에이전트로 가설 제안서·발표자료를 만들어 팀별로 발표합니다.</a:t>
+            </a:r>
+          </a:p>
+        </p:txBody>
+      </p:sp>
+      <p:sp>
+        <p:nvSpPr>
+          <p:cNvPr id="18" name="TextBox 17"/>
+          <p:cNvSpPr txBox="1"/>
+          <p:nvPr/>
+        </p:nvSpPr>
+        <p:spPr>
+          <a:xfrm>
+            <a:off x="8988552" y="6419088"/>
+            <a:ext cx="2697480" cy="365760"/>
+          </a:xfrm>
+          <a:prstGeom prst="rect">
+            <a:avLst/>
+          </a:prstGeom>
+          <a:noFill/>
+        </p:spPr>
+        <p:txBody>
+          <a:bodyPr wrap="square" anchor="ctr" lIns="0" rIns="0" tIns="0" bIns="0">
+            <a:spAutoFit/>
+          </a:bodyPr>
+          <a:lstStyle/>
+          <a:p>
+            <a:pPr algn="r">
+              <a:lnSpc>
+                <a:spcPct val="100000"/>
+              </a:lnSpc>
+              <a:spcBef>
+                <a:spcPts val="0"/>
+              </a:spcBef>
+              <a:spcAft>
+                <a:spcPts val="600"/>
+              </a:spcAft>
+            </a:pPr>
+            <a:r>
+              <a:rPr sz="900" b="1">
+                <a:solidFill>
+                  <a:srgbClr val="F59E0B"/>
+                </a:solidFill>
+                <a:latin typeface="NanumGothic"/>
+                <a:ea typeface="NanumGothic"/>
+                <a:cs typeface="NanumGothic"/>
+              </a:rPr>
+              <a:t>Day 4 · 목</a:t>
+            </a:r>
+            <a:r>
+              <a:rPr sz="900" b="1">
+                <a:solidFill>
+                  <a:srgbClr val="64748B"/>
+                </a:solidFill>
+                <a:latin typeface="NanumGothic"/>
+                <a:ea typeface="NanumGothic"/>
+                <a:cs typeface="NanumGothic"/>
+              </a:rPr>
+              <a:t>   ·   26 / 26</a:t>
             </a:r>
           </a:p>
         </p:txBody>
@@ -21113,54 +21463,7 @@
       </p:sp>
       <p:sp>
         <p:nvSpPr>
-          <p:cNvPr id="8" name="TextBox 7"/>
-          <p:cNvSpPr txBox="1"/>
-          <p:nvPr/>
-        </p:nvSpPr>
-        <p:spPr>
-          <a:xfrm>
-            <a:off x="10241280" y="6419088"/>
-            <a:ext cx="1463040" cy="365760"/>
-          </a:xfrm>
-          <a:prstGeom prst="rect">
-            <a:avLst/>
-          </a:prstGeom>
-          <a:noFill/>
-        </p:spPr>
-        <p:txBody>
-          <a:bodyPr wrap="square" anchor="ctr" lIns="0" rIns="0" tIns="0" bIns="0">
-            <a:spAutoFit/>
-          </a:bodyPr>
-          <a:lstStyle/>
-          <a:p>
-            <a:pPr algn="r">
-              <a:lnSpc>
-                <a:spcPct val="100000"/>
-              </a:lnSpc>
-              <a:spcBef>
-                <a:spcPts val="0"/>
-              </a:spcBef>
-              <a:spcAft>
-                <a:spcPts val="600"/>
-              </a:spcAft>
-            </a:pPr>
-            <a:r>
-              <a:rPr sz="900" b="1">
-                <a:solidFill>
-                  <a:srgbClr val="F59E0B"/>
-                </a:solidFill>
-                <a:latin typeface="NanumGothic"/>
-                <a:ea typeface="NanumGothic"/>
-                <a:cs typeface="NanumGothic"/>
-              </a:rPr>
-              <a:t>Day 4 · 목</a:t>
-            </a:r>
-          </a:p>
-        </p:txBody>
-      </p:sp>
-      <p:sp>
-        <p:nvSpPr>
-          <p:cNvPr id="9" name="Rounded Rectangle 8"/>
+          <p:cNvPr id="8" name="Rounded Rectangle 7"/>
           <p:cNvSpPr/>
           <p:nvPr/>
         </p:nvSpPr>
@@ -21206,7 +21509,7 @@
       </p:sp>
       <p:sp>
         <p:nvSpPr>
-          <p:cNvPr id="10" name="Rectangle 9"/>
+          <p:cNvPr id="9" name="Rectangle 8"/>
           <p:cNvSpPr/>
           <p:nvPr/>
         </p:nvSpPr>
@@ -21250,7 +21553,7 @@
       </p:sp>
       <p:sp>
         <p:nvSpPr>
-          <p:cNvPr id="11" name="Oval 10"/>
+          <p:cNvPr id="10" name="Oval 9"/>
           <p:cNvSpPr/>
           <p:nvPr/>
         </p:nvSpPr>
@@ -21294,7 +21597,7 @@
       </p:sp>
       <p:sp>
         <p:nvSpPr>
-          <p:cNvPr id="12" name="TextBox 11"/>
+          <p:cNvPr id="11" name="TextBox 10"/>
           <p:cNvSpPr txBox="1"/>
           <p:nvPr/>
         </p:nvSpPr>
@@ -21341,7 +21644,7 @@
       </p:sp>
       <p:sp>
         <p:nvSpPr>
-          <p:cNvPr id="13" name="TextBox 12"/>
+          <p:cNvPr id="12" name="TextBox 11"/>
           <p:cNvSpPr txBox="1"/>
           <p:nvPr/>
         </p:nvSpPr>
@@ -21388,7 +21691,7 @@
       </p:sp>
       <p:sp>
         <p:nvSpPr>
-          <p:cNvPr id="14" name="TextBox 13"/>
+          <p:cNvPr id="13" name="TextBox 12"/>
           <p:cNvSpPr txBox="1"/>
           <p:nvPr/>
         </p:nvSpPr>
@@ -21446,7 +21749,7 @@
       </p:sp>
       <p:sp>
         <p:nvSpPr>
-          <p:cNvPr id="15" name="TextBox 14"/>
+          <p:cNvPr id="14" name="TextBox 13"/>
           <p:cNvSpPr txBox="1"/>
           <p:nvPr/>
         </p:nvSpPr>
@@ -21493,7 +21796,7 @@
       </p:sp>
       <p:sp>
         <p:nvSpPr>
-          <p:cNvPr id="16" name="TextBox 15"/>
+          <p:cNvPr id="15" name="TextBox 14"/>
           <p:cNvSpPr txBox="1"/>
           <p:nvPr/>
         </p:nvSpPr>
@@ -21540,7 +21843,7 @@
       </p:sp>
       <p:sp>
         <p:nvSpPr>
-          <p:cNvPr id="17" name="Rounded Rectangle 16"/>
+          <p:cNvPr id="16" name="Rounded Rectangle 15"/>
           <p:cNvSpPr/>
           <p:nvPr/>
         </p:nvSpPr>
@@ -21586,7 +21889,7 @@
       </p:sp>
       <p:sp>
         <p:nvSpPr>
-          <p:cNvPr id="18" name="Rectangle 17"/>
+          <p:cNvPr id="17" name="Rectangle 16"/>
           <p:cNvSpPr/>
           <p:nvPr/>
         </p:nvSpPr>
@@ -21630,7 +21933,7 @@
       </p:sp>
       <p:sp>
         <p:nvSpPr>
-          <p:cNvPr id="19" name="Oval 18"/>
+          <p:cNvPr id="18" name="Oval 17"/>
           <p:cNvSpPr/>
           <p:nvPr/>
         </p:nvSpPr>
@@ -21674,7 +21977,7 @@
       </p:sp>
       <p:sp>
         <p:nvSpPr>
-          <p:cNvPr id="20" name="TextBox 19"/>
+          <p:cNvPr id="19" name="TextBox 18"/>
           <p:cNvSpPr txBox="1"/>
           <p:nvPr/>
         </p:nvSpPr>
@@ -21721,7 +22024,7 @@
       </p:sp>
       <p:sp>
         <p:nvSpPr>
-          <p:cNvPr id="21" name="TextBox 20"/>
+          <p:cNvPr id="20" name="TextBox 19"/>
           <p:cNvSpPr txBox="1"/>
           <p:nvPr/>
         </p:nvSpPr>
@@ -21768,7 +22071,7 @@
       </p:sp>
       <p:sp>
         <p:nvSpPr>
-          <p:cNvPr id="22" name="TextBox 21"/>
+          <p:cNvPr id="21" name="TextBox 20"/>
           <p:cNvSpPr txBox="1"/>
           <p:nvPr/>
         </p:nvSpPr>
@@ -21826,7 +22129,7 @@
       </p:sp>
       <p:sp>
         <p:nvSpPr>
-          <p:cNvPr id="23" name="TextBox 22"/>
+          <p:cNvPr id="22" name="TextBox 21"/>
           <p:cNvSpPr txBox="1"/>
           <p:nvPr/>
         </p:nvSpPr>
@@ -21873,7 +22176,7 @@
       </p:sp>
       <p:sp>
         <p:nvSpPr>
-          <p:cNvPr id="24" name="TextBox 23"/>
+          <p:cNvPr id="23" name="TextBox 22"/>
           <p:cNvSpPr txBox="1"/>
           <p:nvPr/>
         </p:nvSpPr>
@@ -21920,7 +22223,7 @@
       </p:sp>
       <p:sp>
         <p:nvSpPr>
-          <p:cNvPr id="25" name="Rounded Rectangle 24"/>
+          <p:cNvPr id="24" name="Rounded Rectangle 23"/>
           <p:cNvSpPr/>
           <p:nvPr/>
         </p:nvSpPr>
@@ -21966,7 +22269,7 @@
       </p:sp>
       <p:sp>
         <p:nvSpPr>
-          <p:cNvPr id="26" name="Rectangle 25"/>
+          <p:cNvPr id="25" name="Rectangle 24"/>
           <p:cNvSpPr/>
           <p:nvPr/>
         </p:nvSpPr>
@@ -22010,7 +22313,7 @@
       </p:sp>
       <p:sp>
         <p:nvSpPr>
-          <p:cNvPr id="27" name="Oval 26"/>
+          <p:cNvPr id="26" name="Oval 25"/>
           <p:cNvSpPr/>
           <p:nvPr/>
         </p:nvSpPr>
@@ -22054,7 +22357,7 @@
       </p:sp>
       <p:sp>
         <p:nvSpPr>
-          <p:cNvPr id="28" name="TextBox 27"/>
+          <p:cNvPr id="27" name="TextBox 26"/>
           <p:cNvSpPr txBox="1"/>
           <p:nvPr/>
         </p:nvSpPr>
@@ -22101,7 +22404,7 @@
       </p:sp>
       <p:sp>
         <p:nvSpPr>
-          <p:cNvPr id="29" name="TextBox 28"/>
+          <p:cNvPr id="28" name="TextBox 27"/>
           <p:cNvSpPr txBox="1"/>
           <p:nvPr/>
         </p:nvSpPr>
@@ -22148,7 +22451,7 @@
       </p:sp>
       <p:sp>
         <p:nvSpPr>
-          <p:cNvPr id="30" name="TextBox 29"/>
+          <p:cNvPr id="29" name="TextBox 28"/>
           <p:cNvSpPr txBox="1"/>
           <p:nvPr/>
         </p:nvSpPr>
@@ -22206,7 +22509,7 @@
       </p:sp>
       <p:sp>
         <p:nvSpPr>
-          <p:cNvPr id="31" name="TextBox 30"/>
+          <p:cNvPr id="30" name="TextBox 29"/>
           <p:cNvSpPr txBox="1"/>
           <p:nvPr/>
         </p:nvSpPr>
@@ -22253,7 +22556,7 @@
       </p:sp>
       <p:sp>
         <p:nvSpPr>
-          <p:cNvPr id="32" name="TextBox 31"/>
+          <p:cNvPr id="31" name="TextBox 30"/>
           <p:cNvSpPr txBox="1"/>
           <p:nvPr/>
         </p:nvSpPr>
@@ -22294,6 +22597,64 @@
                 <a:cs typeface="NanumGothic"/>
               </a:rPr>
               <a:t>90분</a:t>
+            </a:r>
+          </a:p>
+        </p:txBody>
+      </p:sp>
+      <p:sp>
+        <p:nvSpPr>
+          <p:cNvPr id="32" name="TextBox 31"/>
+          <p:cNvSpPr txBox="1"/>
+          <p:nvPr/>
+        </p:nvSpPr>
+        <p:spPr>
+          <a:xfrm>
+            <a:off x="8988552" y="6419088"/>
+            <a:ext cx="2697480" cy="365760"/>
+          </a:xfrm>
+          <a:prstGeom prst="rect">
+            <a:avLst/>
+          </a:prstGeom>
+          <a:noFill/>
+        </p:spPr>
+        <p:txBody>
+          <a:bodyPr wrap="square" anchor="ctr" lIns="0" rIns="0" tIns="0" bIns="0">
+            <a:spAutoFit/>
+          </a:bodyPr>
+          <a:lstStyle/>
+          <a:p>
+            <a:pPr algn="r">
+              <a:lnSpc>
+                <a:spcPct val="100000"/>
+              </a:lnSpc>
+              <a:spcBef>
+                <a:spcPts val="0"/>
+              </a:spcBef>
+              <a:spcAft>
+                <a:spcPts val="600"/>
+              </a:spcAft>
+            </a:pPr>
+            <a:r>
+              <a:rPr sz="900" b="1">
+                <a:solidFill>
+                  <a:srgbClr val="F59E0B"/>
+                </a:solidFill>
+                <a:latin typeface="NanumGothic"/>
+                <a:ea typeface="NanumGothic"/>
+                <a:cs typeface="NanumGothic"/>
+              </a:rPr>
+              <a:t>Day 4 · 목</a:t>
+            </a:r>
+            <a:r>
+              <a:rPr sz="900" b="1">
+                <a:solidFill>
+                  <a:srgbClr val="64748B"/>
+                </a:solidFill>
+                <a:latin typeface="NanumGothic"/>
+                <a:ea typeface="NanumGothic"/>
+                <a:cs typeface="NanumGothic"/>
+              </a:rPr>
+              <a:t>   ·   3 / 26</a:t>
             </a:r>
           </a:p>
         </p:txBody>
@@ -22600,6 +22961,64 @@
           </a:p>
         </p:txBody>
       </p:sp>
+      <p:sp>
+        <p:nvSpPr>
+          <p:cNvPr id="8" name="TextBox 7"/>
+          <p:cNvSpPr txBox="1"/>
+          <p:nvPr/>
+        </p:nvSpPr>
+        <p:spPr>
+          <a:xfrm>
+            <a:off x="8988552" y="6419088"/>
+            <a:ext cx="2697480" cy="365760"/>
+          </a:xfrm>
+          <a:prstGeom prst="rect">
+            <a:avLst/>
+          </a:prstGeom>
+          <a:noFill/>
+        </p:spPr>
+        <p:txBody>
+          <a:bodyPr wrap="square" anchor="ctr" lIns="0" rIns="0" tIns="0" bIns="0">
+            <a:spAutoFit/>
+          </a:bodyPr>
+          <a:lstStyle/>
+          <a:p>
+            <a:pPr algn="r">
+              <a:lnSpc>
+                <a:spcPct val="100000"/>
+              </a:lnSpc>
+              <a:spcBef>
+                <a:spcPts val="0"/>
+              </a:spcBef>
+              <a:spcAft>
+                <a:spcPts val="600"/>
+              </a:spcAft>
+            </a:pPr>
+            <a:r>
+              <a:rPr sz="900" b="1">
+                <a:solidFill>
+                  <a:srgbClr val="F59E0B"/>
+                </a:solidFill>
+                <a:latin typeface="NanumGothic"/>
+                <a:ea typeface="NanumGothic"/>
+                <a:cs typeface="NanumGothic"/>
+              </a:rPr>
+              <a:t>Day 4 · 목</a:t>
+            </a:r>
+            <a:r>
+              <a:rPr sz="900" b="1">
+                <a:solidFill>
+                  <a:srgbClr val="CBD5E1"/>
+                </a:solidFill>
+                <a:latin typeface="NanumGothic"/>
+                <a:ea typeface="NanumGothic"/>
+                <a:cs typeface="NanumGothic"/>
+              </a:rPr>
+              <a:t>   ·   4 / 26</a:t>
+            </a:r>
+          </a:p>
+        </p:txBody>
+      </p:sp>
     </p:spTree>
   </p:cSld>
   <p:clrMapOvr>
@@ -22893,54 +23312,7 @@
       </p:sp>
       <p:sp>
         <p:nvSpPr>
-          <p:cNvPr id="8" name="TextBox 7"/>
-          <p:cNvSpPr txBox="1"/>
-          <p:nvPr/>
-        </p:nvSpPr>
-        <p:spPr>
-          <a:xfrm>
-            <a:off x="10241280" y="6419088"/>
-            <a:ext cx="1463040" cy="365760"/>
-          </a:xfrm>
-          <a:prstGeom prst="rect">
-            <a:avLst/>
-          </a:prstGeom>
-          <a:noFill/>
-        </p:spPr>
-        <p:txBody>
-          <a:bodyPr wrap="square" anchor="ctr" lIns="0" rIns="0" tIns="0" bIns="0">
-            <a:spAutoFit/>
-          </a:bodyPr>
-          <a:lstStyle/>
-          <a:p>
-            <a:pPr algn="r">
-              <a:lnSpc>
-                <a:spcPct val="100000"/>
-              </a:lnSpc>
-              <a:spcBef>
-                <a:spcPts val="0"/>
-              </a:spcBef>
-              <a:spcAft>
-                <a:spcPts val="600"/>
-              </a:spcAft>
-            </a:pPr>
-            <a:r>
-              <a:rPr sz="900" b="1">
-                <a:solidFill>
-                  <a:srgbClr val="F59E0B"/>
-                </a:solidFill>
-                <a:latin typeface="NanumGothic"/>
-                <a:ea typeface="NanumGothic"/>
-                <a:cs typeface="NanumGothic"/>
-              </a:rPr>
-              <a:t>Day 4 · 목</a:t>
-            </a:r>
-          </a:p>
-        </p:txBody>
-      </p:sp>
-      <p:sp>
-        <p:nvSpPr>
-          <p:cNvPr id="9" name="Rounded Rectangle 8"/>
+          <p:cNvPr id="8" name="Rounded Rectangle 7"/>
           <p:cNvSpPr/>
           <p:nvPr/>
         </p:nvSpPr>
@@ -22986,7 +23358,7 @@
       </p:sp>
       <p:sp>
         <p:nvSpPr>
-          <p:cNvPr id="10" name="TextBox 9"/>
+          <p:cNvPr id="9" name="TextBox 8"/>
           <p:cNvSpPr txBox="1"/>
           <p:nvPr/>
         </p:nvSpPr>
@@ -23033,7 +23405,7 @@
       </p:sp>
       <p:sp>
         <p:nvSpPr>
-          <p:cNvPr id="11" name="TextBox 10"/>
+          <p:cNvPr id="10" name="TextBox 9"/>
           <p:cNvSpPr txBox="1"/>
           <p:nvPr/>
         </p:nvSpPr>
@@ -23080,7 +23452,7 @@
       </p:sp>
       <p:sp>
         <p:nvSpPr>
-          <p:cNvPr id="12" name="Rounded Rectangle 11"/>
+          <p:cNvPr id="11" name="Rounded Rectangle 10"/>
           <p:cNvSpPr/>
           <p:nvPr/>
         </p:nvSpPr>
@@ -23126,7 +23498,7 @@
       </p:sp>
       <p:sp>
         <p:nvSpPr>
-          <p:cNvPr id="13" name="Oval 12"/>
+          <p:cNvPr id="12" name="Oval 11"/>
           <p:cNvSpPr/>
           <p:nvPr/>
         </p:nvSpPr>
@@ -23170,7 +23542,7 @@
       </p:sp>
       <p:sp>
         <p:nvSpPr>
-          <p:cNvPr id="14" name="TextBox 13"/>
+          <p:cNvPr id="13" name="TextBox 12"/>
           <p:cNvSpPr txBox="1"/>
           <p:nvPr/>
         </p:nvSpPr>
@@ -23217,7 +23589,7 @@
       </p:sp>
       <p:sp>
         <p:nvSpPr>
-          <p:cNvPr id="15" name="TextBox 14"/>
+          <p:cNvPr id="14" name="TextBox 13"/>
           <p:cNvSpPr txBox="1"/>
           <p:nvPr/>
         </p:nvSpPr>
@@ -23264,7 +23636,7 @@
       </p:sp>
       <p:sp>
         <p:nvSpPr>
-          <p:cNvPr id="16" name="Rounded Rectangle 15"/>
+          <p:cNvPr id="15" name="Rounded Rectangle 14"/>
           <p:cNvSpPr/>
           <p:nvPr/>
         </p:nvSpPr>
@@ -23310,7 +23682,7 @@
       </p:sp>
       <p:sp>
         <p:nvSpPr>
-          <p:cNvPr id="17" name="Oval 16"/>
+          <p:cNvPr id="16" name="Oval 15"/>
           <p:cNvSpPr/>
           <p:nvPr/>
         </p:nvSpPr>
@@ -23354,7 +23726,7 @@
       </p:sp>
       <p:sp>
         <p:nvSpPr>
-          <p:cNvPr id="18" name="TextBox 17"/>
+          <p:cNvPr id="17" name="TextBox 16"/>
           <p:cNvSpPr txBox="1"/>
           <p:nvPr/>
         </p:nvSpPr>
@@ -23401,7 +23773,7 @@
       </p:sp>
       <p:sp>
         <p:nvSpPr>
-          <p:cNvPr id="19" name="TextBox 18"/>
+          <p:cNvPr id="18" name="TextBox 17"/>
           <p:cNvSpPr txBox="1"/>
           <p:nvPr/>
         </p:nvSpPr>
@@ -23448,7 +23820,7 @@
       </p:sp>
       <p:sp>
         <p:nvSpPr>
-          <p:cNvPr id="20" name="Rounded Rectangle 19"/>
+          <p:cNvPr id="19" name="Rounded Rectangle 18"/>
           <p:cNvSpPr/>
           <p:nvPr/>
         </p:nvSpPr>
@@ -23494,7 +23866,7 @@
       </p:sp>
       <p:sp>
         <p:nvSpPr>
-          <p:cNvPr id="21" name="Oval 20"/>
+          <p:cNvPr id="20" name="Oval 19"/>
           <p:cNvSpPr/>
           <p:nvPr/>
         </p:nvSpPr>
@@ -23538,7 +23910,7 @@
       </p:sp>
       <p:sp>
         <p:nvSpPr>
-          <p:cNvPr id="22" name="TextBox 21"/>
+          <p:cNvPr id="21" name="TextBox 20"/>
           <p:cNvSpPr txBox="1"/>
           <p:nvPr/>
         </p:nvSpPr>
@@ -23585,7 +23957,7 @@
       </p:sp>
       <p:sp>
         <p:nvSpPr>
-          <p:cNvPr id="23" name="TextBox 22"/>
+          <p:cNvPr id="22" name="TextBox 21"/>
           <p:cNvSpPr txBox="1"/>
           <p:nvPr/>
         </p:nvSpPr>
@@ -23632,7 +24004,7 @@
       </p:sp>
       <p:sp>
         <p:nvSpPr>
-          <p:cNvPr id="24" name="Rounded Rectangle 23"/>
+          <p:cNvPr id="23" name="Rounded Rectangle 22"/>
           <p:cNvSpPr/>
           <p:nvPr/>
         </p:nvSpPr>
@@ -23678,7 +24050,7 @@
       </p:sp>
       <p:sp>
         <p:nvSpPr>
-          <p:cNvPr id="25" name="Oval 24"/>
+          <p:cNvPr id="24" name="Oval 23"/>
           <p:cNvSpPr/>
           <p:nvPr/>
         </p:nvSpPr>
@@ -23722,7 +24094,7 @@
       </p:sp>
       <p:sp>
         <p:nvSpPr>
-          <p:cNvPr id="26" name="TextBox 25"/>
+          <p:cNvPr id="25" name="TextBox 24"/>
           <p:cNvSpPr txBox="1"/>
           <p:nvPr/>
         </p:nvSpPr>
@@ -23769,7 +24141,7 @@
       </p:sp>
       <p:sp>
         <p:nvSpPr>
-          <p:cNvPr id="27" name="TextBox 26"/>
+          <p:cNvPr id="26" name="TextBox 25"/>
           <p:cNvSpPr txBox="1"/>
           <p:nvPr/>
         </p:nvSpPr>
@@ -23816,7 +24188,7 @@
       </p:sp>
       <p:sp>
         <p:nvSpPr>
-          <p:cNvPr id="28" name="Rounded Rectangle 27"/>
+          <p:cNvPr id="27" name="Rounded Rectangle 26"/>
           <p:cNvSpPr/>
           <p:nvPr/>
         </p:nvSpPr>
@@ -23862,7 +24234,7 @@
       </p:sp>
       <p:sp>
         <p:nvSpPr>
-          <p:cNvPr id="29" name="Oval 28"/>
+          <p:cNvPr id="28" name="Oval 27"/>
           <p:cNvSpPr/>
           <p:nvPr/>
         </p:nvSpPr>
@@ -23906,7 +24278,7 @@
       </p:sp>
       <p:sp>
         <p:nvSpPr>
-          <p:cNvPr id="30" name="TextBox 29"/>
+          <p:cNvPr id="29" name="TextBox 28"/>
           <p:cNvSpPr txBox="1"/>
           <p:nvPr/>
         </p:nvSpPr>
@@ -23953,7 +24325,7 @@
       </p:sp>
       <p:sp>
         <p:nvSpPr>
-          <p:cNvPr id="31" name="TextBox 30"/>
+          <p:cNvPr id="30" name="TextBox 29"/>
           <p:cNvSpPr txBox="1"/>
           <p:nvPr/>
         </p:nvSpPr>
@@ -23994,6 +24366,64 @@
                 <a:cs typeface="NanumGothic"/>
               </a:rPr>
               <a:t>수집할 때 꼭 확인할 것</a:t>
+            </a:r>
+          </a:p>
+        </p:txBody>
+      </p:sp>
+      <p:sp>
+        <p:nvSpPr>
+          <p:cNvPr id="31" name="TextBox 30"/>
+          <p:cNvSpPr txBox="1"/>
+          <p:nvPr/>
+        </p:nvSpPr>
+        <p:spPr>
+          <a:xfrm>
+            <a:off x="8988552" y="6419088"/>
+            <a:ext cx="2697480" cy="365760"/>
+          </a:xfrm>
+          <a:prstGeom prst="rect">
+            <a:avLst/>
+          </a:prstGeom>
+          <a:noFill/>
+        </p:spPr>
+        <p:txBody>
+          <a:bodyPr wrap="square" anchor="ctr" lIns="0" rIns="0" tIns="0" bIns="0">
+            <a:spAutoFit/>
+          </a:bodyPr>
+          <a:lstStyle/>
+          <a:p>
+            <a:pPr algn="r">
+              <a:lnSpc>
+                <a:spcPct val="100000"/>
+              </a:lnSpc>
+              <a:spcBef>
+                <a:spcPts val="0"/>
+              </a:spcBef>
+              <a:spcAft>
+                <a:spcPts val="600"/>
+              </a:spcAft>
+            </a:pPr>
+            <a:r>
+              <a:rPr sz="900" b="1">
+                <a:solidFill>
+                  <a:srgbClr val="F59E0B"/>
+                </a:solidFill>
+                <a:latin typeface="NanumGothic"/>
+                <a:ea typeface="NanumGothic"/>
+                <a:cs typeface="NanumGothic"/>
+              </a:rPr>
+              <a:t>Day 4 · 목</a:t>
+            </a:r>
+            <a:r>
+              <a:rPr sz="900" b="1">
+                <a:solidFill>
+                  <a:srgbClr val="64748B"/>
+                </a:solidFill>
+                <a:latin typeface="NanumGothic"/>
+                <a:ea typeface="NanumGothic"/>
+                <a:cs typeface="NanumGothic"/>
+              </a:rPr>
+              <a:t>   ·   5 / 26</a:t>
             </a:r>
           </a:p>
         </p:txBody>
@@ -24291,54 +24721,7 @@
       </p:sp>
       <p:sp>
         <p:nvSpPr>
-          <p:cNvPr id="8" name="TextBox 7"/>
-          <p:cNvSpPr txBox="1"/>
-          <p:nvPr/>
-        </p:nvSpPr>
-        <p:spPr>
-          <a:xfrm>
-            <a:off x="10241280" y="6419088"/>
-            <a:ext cx="1463040" cy="365760"/>
-          </a:xfrm>
-          <a:prstGeom prst="rect">
-            <a:avLst/>
-          </a:prstGeom>
-          <a:noFill/>
-        </p:spPr>
-        <p:txBody>
-          <a:bodyPr wrap="square" anchor="ctr" lIns="0" rIns="0" tIns="0" bIns="0">
-            <a:spAutoFit/>
-          </a:bodyPr>
-          <a:lstStyle/>
-          <a:p>
-            <a:pPr algn="r">
-              <a:lnSpc>
-                <a:spcPct val="100000"/>
-              </a:lnSpc>
-              <a:spcBef>
-                <a:spcPts val="0"/>
-              </a:spcBef>
-              <a:spcAft>
-                <a:spcPts val="600"/>
-              </a:spcAft>
-            </a:pPr>
-            <a:r>
-              <a:rPr sz="900" b="1">
-                <a:solidFill>
-                  <a:srgbClr val="F59E0B"/>
-                </a:solidFill>
-                <a:latin typeface="NanumGothic"/>
-                <a:ea typeface="NanumGothic"/>
-                <a:cs typeface="NanumGothic"/>
-              </a:rPr>
-              <a:t>Day 4 · 목</a:t>
-            </a:r>
-          </a:p>
-        </p:txBody>
-      </p:sp>
-      <p:sp>
-        <p:nvSpPr>
-          <p:cNvPr id="9" name="Oval 8"/>
+          <p:cNvPr id="8" name="Oval 7"/>
           <p:cNvSpPr/>
           <p:nvPr/>
         </p:nvSpPr>
@@ -24382,7 +24765,7 @@
       </p:sp>
       <p:sp>
         <p:nvSpPr>
-          <p:cNvPr id="10" name="TextBox 9"/>
+          <p:cNvPr id="9" name="TextBox 8"/>
           <p:cNvSpPr txBox="1"/>
           <p:nvPr/>
         </p:nvSpPr>
@@ -24429,7 +24812,7 @@
       </p:sp>
       <p:sp>
         <p:nvSpPr>
-          <p:cNvPr id="11" name="TextBox 10"/>
+          <p:cNvPr id="10" name="TextBox 9"/>
           <p:cNvSpPr txBox="1"/>
           <p:nvPr/>
         </p:nvSpPr>
@@ -24476,7 +24859,7 @@
       </p:sp>
       <p:sp>
         <p:nvSpPr>
-          <p:cNvPr id="12" name="Oval 11"/>
+          <p:cNvPr id="11" name="Oval 10"/>
           <p:cNvSpPr/>
           <p:nvPr/>
         </p:nvSpPr>
@@ -24520,7 +24903,7 @@
       </p:sp>
       <p:sp>
         <p:nvSpPr>
-          <p:cNvPr id="13" name="TextBox 12"/>
+          <p:cNvPr id="12" name="TextBox 11"/>
           <p:cNvSpPr txBox="1"/>
           <p:nvPr/>
         </p:nvSpPr>
@@ -24567,7 +24950,7 @@
       </p:sp>
       <p:sp>
         <p:nvSpPr>
-          <p:cNvPr id="14" name="TextBox 13"/>
+          <p:cNvPr id="13" name="TextBox 12"/>
           <p:cNvSpPr txBox="1"/>
           <p:nvPr/>
         </p:nvSpPr>
@@ -24614,7 +24997,7 @@
       </p:sp>
       <p:sp>
         <p:nvSpPr>
-          <p:cNvPr id="15" name="Oval 14"/>
+          <p:cNvPr id="14" name="Oval 13"/>
           <p:cNvSpPr/>
           <p:nvPr/>
         </p:nvSpPr>
@@ -24658,7 +25041,7 @@
       </p:sp>
       <p:sp>
         <p:nvSpPr>
-          <p:cNvPr id="16" name="TextBox 15"/>
+          <p:cNvPr id="15" name="TextBox 14"/>
           <p:cNvSpPr txBox="1"/>
           <p:nvPr/>
         </p:nvSpPr>
@@ -24705,7 +25088,7 @@
       </p:sp>
       <p:sp>
         <p:nvSpPr>
-          <p:cNvPr id="17" name="TextBox 16"/>
+          <p:cNvPr id="16" name="TextBox 15"/>
           <p:cNvSpPr txBox="1"/>
           <p:nvPr/>
         </p:nvSpPr>
@@ -24752,7 +25135,7 @@
       </p:sp>
       <p:sp>
         <p:nvSpPr>
-          <p:cNvPr id="18" name="Rounded Rectangle 17"/>
+          <p:cNvPr id="17" name="Rounded Rectangle 16"/>
           <p:cNvSpPr/>
           <p:nvPr/>
         </p:nvSpPr>
@@ -24798,7 +25181,7 @@
       </p:sp>
       <p:sp>
         <p:nvSpPr>
-          <p:cNvPr id="19" name="TextBox 18"/>
+          <p:cNvPr id="18" name="TextBox 17"/>
           <p:cNvSpPr txBox="1"/>
           <p:nvPr/>
         </p:nvSpPr>
@@ -24850,6 +25233,64 @@
                 <a:cs typeface="NanumGothic"/>
               </a:rPr>
               <a:t>방향을 확정하고 — 오늘은 '재료(논문)'부터 모은다</a:t>
+            </a:r>
+          </a:p>
+        </p:txBody>
+      </p:sp>
+      <p:sp>
+        <p:nvSpPr>
+          <p:cNvPr id="19" name="TextBox 18"/>
+          <p:cNvSpPr txBox="1"/>
+          <p:nvPr/>
+        </p:nvSpPr>
+        <p:spPr>
+          <a:xfrm>
+            <a:off x="8988552" y="6419088"/>
+            <a:ext cx="2697480" cy="365760"/>
+          </a:xfrm>
+          <a:prstGeom prst="rect">
+            <a:avLst/>
+          </a:prstGeom>
+          <a:noFill/>
+        </p:spPr>
+        <p:txBody>
+          <a:bodyPr wrap="square" anchor="ctr" lIns="0" rIns="0" tIns="0" bIns="0">
+            <a:spAutoFit/>
+          </a:bodyPr>
+          <a:lstStyle/>
+          <a:p>
+            <a:pPr algn="r">
+              <a:lnSpc>
+                <a:spcPct val="100000"/>
+              </a:lnSpc>
+              <a:spcBef>
+                <a:spcPts val="0"/>
+              </a:spcBef>
+              <a:spcAft>
+                <a:spcPts val="600"/>
+              </a:spcAft>
+            </a:pPr>
+            <a:r>
+              <a:rPr sz="900" b="1">
+                <a:solidFill>
+                  <a:srgbClr val="F59E0B"/>
+                </a:solidFill>
+                <a:latin typeface="NanumGothic"/>
+                <a:ea typeface="NanumGothic"/>
+                <a:cs typeface="NanumGothic"/>
+              </a:rPr>
+              <a:t>Day 4 · 목</a:t>
+            </a:r>
+            <a:r>
+              <a:rPr sz="900" b="1">
+                <a:solidFill>
+                  <a:srgbClr val="64748B"/>
+                </a:solidFill>
+                <a:latin typeface="NanumGothic"/>
+                <a:ea typeface="NanumGothic"/>
+                <a:cs typeface="NanumGothic"/>
+              </a:rPr>
+              <a:t>   ·   6 / 26</a:t>
             </a:r>
           </a:p>
         </p:txBody>
@@ -25147,54 +25588,7 @@
       </p:sp>
       <p:sp>
         <p:nvSpPr>
-          <p:cNvPr id="8" name="TextBox 7"/>
-          <p:cNvSpPr txBox="1"/>
-          <p:nvPr/>
-        </p:nvSpPr>
-        <p:spPr>
-          <a:xfrm>
-            <a:off x="10241280" y="6419088"/>
-            <a:ext cx="1463040" cy="365760"/>
-          </a:xfrm>
-          <a:prstGeom prst="rect">
-            <a:avLst/>
-          </a:prstGeom>
-          <a:noFill/>
-        </p:spPr>
-        <p:txBody>
-          <a:bodyPr wrap="square" anchor="ctr" lIns="0" rIns="0" tIns="0" bIns="0">
-            <a:spAutoFit/>
-          </a:bodyPr>
-          <a:lstStyle/>
-          <a:p>
-            <a:pPr algn="r">
-              <a:lnSpc>
-                <a:spcPct val="100000"/>
-              </a:lnSpc>
-              <a:spcBef>
-                <a:spcPts val="0"/>
-              </a:spcBef>
-              <a:spcAft>
-                <a:spcPts val="600"/>
-              </a:spcAft>
-            </a:pPr>
-            <a:r>
-              <a:rPr sz="900" b="1">
-                <a:solidFill>
-                  <a:srgbClr val="F59E0B"/>
-                </a:solidFill>
-                <a:latin typeface="NanumGothic"/>
-                <a:ea typeface="NanumGothic"/>
-                <a:cs typeface="NanumGothic"/>
-              </a:rPr>
-              <a:t>Day 4 · 목</a:t>
-            </a:r>
-          </a:p>
-        </p:txBody>
-      </p:sp>
-      <p:sp>
-        <p:nvSpPr>
-          <p:cNvPr id="9" name="Rounded Rectangle 8"/>
+          <p:cNvPr id="8" name="Rounded Rectangle 7"/>
           <p:cNvSpPr/>
           <p:nvPr/>
         </p:nvSpPr>
@@ -25240,7 +25634,7 @@
       </p:sp>
       <p:sp>
         <p:nvSpPr>
-          <p:cNvPr id="10" name="Rectangle 9"/>
+          <p:cNvPr id="9" name="Rectangle 8"/>
           <p:cNvSpPr/>
           <p:nvPr/>
         </p:nvSpPr>
@@ -25284,7 +25678,7 @@
       </p:sp>
       <p:sp>
         <p:nvSpPr>
-          <p:cNvPr id="11" name="TextBox 10"/>
+          <p:cNvPr id="10" name="TextBox 9"/>
           <p:cNvSpPr txBox="1"/>
           <p:nvPr/>
         </p:nvSpPr>
@@ -25331,7 +25725,7 @@
       </p:sp>
       <p:sp>
         <p:nvSpPr>
-          <p:cNvPr id="12" name="TextBox 11"/>
+          <p:cNvPr id="11" name="TextBox 10"/>
           <p:cNvSpPr txBox="1"/>
           <p:nvPr/>
         </p:nvSpPr>
@@ -25378,7 +25772,7 @@
       </p:sp>
       <p:sp>
         <p:nvSpPr>
-          <p:cNvPr id="13" name="TextBox 12"/>
+          <p:cNvPr id="12" name="TextBox 11"/>
           <p:cNvSpPr txBox="1"/>
           <p:nvPr/>
         </p:nvSpPr>
@@ -25425,7 +25819,7 @@
       </p:sp>
       <p:sp>
         <p:nvSpPr>
-          <p:cNvPr id="14" name="TextBox 13"/>
+          <p:cNvPr id="13" name="TextBox 12"/>
           <p:cNvSpPr txBox="1"/>
           <p:nvPr/>
         </p:nvSpPr>
@@ -25472,7 +25866,7 @@
       </p:sp>
       <p:sp>
         <p:nvSpPr>
-          <p:cNvPr id="15" name="Rounded Rectangle 14"/>
+          <p:cNvPr id="14" name="Rounded Rectangle 13"/>
           <p:cNvSpPr/>
           <p:nvPr/>
         </p:nvSpPr>
@@ -25518,7 +25912,7 @@
       </p:sp>
       <p:sp>
         <p:nvSpPr>
-          <p:cNvPr id="16" name="Rectangle 15"/>
+          <p:cNvPr id="15" name="Rectangle 14"/>
           <p:cNvSpPr/>
           <p:nvPr/>
         </p:nvSpPr>
@@ -25562,7 +25956,7 @@
       </p:sp>
       <p:sp>
         <p:nvSpPr>
-          <p:cNvPr id="17" name="TextBox 16"/>
+          <p:cNvPr id="16" name="TextBox 15"/>
           <p:cNvSpPr txBox="1"/>
           <p:nvPr/>
         </p:nvSpPr>
@@ -25609,7 +26003,7 @@
       </p:sp>
       <p:sp>
         <p:nvSpPr>
-          <p:cNvPr id="18" name="TextBox 17"/>
+          <p:cNvPr id="17" name="TextBox 16"/>
           <p:cNvSpPr txBox="1"/>
           <p:nvPr/>
         </p:nvSpPr>
@@ -25656,7 +26050,7 @@
       </p:sp>
       <p:sp>
         <p:nvSpPr>
-          <p:cNvPr id="19" name="TextBox 18"/>
+          <p:cNvPr id="18" name="TextBox 17"/>
           <p:cNvSpPr txBox="1"/>
           <p:nvPr/>
         </p:nvSpPr>
@@ -25703,7 +26097,7 @@
       </p:sp>
       <p:sp>
         <p:nvSpPr>
-          <p:cNvPr id="20" name="TextBox 19"/>
+          <p:cNvPr id="19" name="TextBox 18"/>
           <p:cNvSpPr txBox="1"/>
           <p:nvPr/>
         </p:nvSpPr>
@@ -25750,7 +26144,7 @@
       </p:sp>
       <p:sp>
         <p:nvSpPr>
-          <p:cNvPr id="21" name="Rounded Rectangle 20"/>
+          <p:cNvPr id="20" name="Rounded Rectangle 19"/>
           <p:cNvSpPr/>
           <p:nvPr/>
         </p:nvSpPr>
@@ -25796,7 +26190,7 @@
       </p:sp>
       <p:sp>
         <p:nvSpPr>
-          <p:cNvPr id="22" name="Rectangle 21"/>
+          <p:cNvPr id="21" name="Rectangle 20"/>
           <p:cNvSpPr/>
           <p:nvPr/>
         </p:nvSpPr>
@@ -25840,7 +26234,7 @@
       </p:sp>
       <p:sp>
         <p:nvSpPr>
-          <p:cNvPr id="23" name="TextBox 22"/>
+          <p:cNvPr id="22" name="TextBox 21"/>
           <p:cNvSpPr txBox="1"/>
           <p:nvPr/>
         </p:nvSpPr>
@@ -25887,7 +26281,7 @@
       </p:sp>
       <p:sp>
         <p:nvSpPr>
-          <p:cNvPr id="24" name="TextBox 23"/>
+          <p:cNvPr id="23" name="TextBox 22"/>
           <p:cNvSpPr txBox="1"/>
           <p:nvPr/>
         </p:nvSpPr>
@@ -25934,7 +26328,7 @@
       </p:sp>
       <p:sp>
         <p:nvSpPr>
-          <p:cNvPr id="25" name="TextBox 24"/>
+          <p:cNvPr id="24" name="TextBox 23"/>
           <p:cNvSpPr txBox="1"/>
           <p:nvPr/>
         </p:nvSpPr>
@@ -25981,7 +26375,7 @@
       </p:sp>
       <p:sp>
         <p:nvSpPr>
-          <p:cNvPr id="26" name="TextBox 25"/>
+          <p:cNvPr id="25" name="TextBox 24"/>
           <p:cNvSpPr txBox="1"/>
           <p:nvPr/>
         </p:nvSpPr>
@@ -26028,7 +26422,7 @@
       </p:sp>
       <p:sp>
         <p:nvSpPr>
-          <p:cNvPr id="27" name="Rounded Rectangle 26"/>
+          <p:cNvPr id="26" name="Rounded Rectangle 25"/>
           <p:cNvSpPr/>
           <p:nvPr/>
         </p:nvSpPr>
@@ -26074,7 +26468,7 @@
       </p:sp>
       <p:sp>
         <p:nvSpPr>
-          <p:cNvPr id="28" name="Rectangle 27"/>
+          <p:cNvPr id="27" name="Rectangle 26"/>
           <p:cNvSpPr/>
           <p:nvPr/>
         </p:nvSpPr>
@@ -26118,7 +26512,7 @@
       </p:sp>
       <p:sp>
         <p:nvSpPr>
-          <p:cNvPr id="29" name="TextBox 28"/>
+          <p:cNvPr id="28" name="TextBox 27"/>
           <p:cNvSpPr txBox="1"/>
           <p:nvPr/>
         </p:nvSpPr>
@@ -26165,7 +26559,7 @@
       </p:sp>
       <p:sp>
         <p:nvSpPr>
-          <p:cNvPr id="30" name="TextBox 29"/>
+          <p:cNvPr id="29" name="TextBox 28"/>
           <p:cNvSpPr txBox="1"/>
           <p:nvPr/>
         </p:nvSpPr>
@@ -26212,7 +26606,7 @@
       </p:sp>
       <p:sp>
         <p:nvSpPr>
-          <p:cNvPr id="31" name="TextBox 30"/>
+          <p:cNvPr id="30" name="TextBox 29"/>
           <p:cNvSpPr txBox="1"/>
           <p:nvPr/>
         </p:nvSpPr>
@@ -26259,7 +26653,7 @@
       </p:sp>
       <p:sp>
         <p:nvSpPr>
-          <p:cNvPr id="32" name="TextBox 31"/>
+          <p:cNvPr id="31" name="TextBox 30"/>
           <p:cNvSpPr txBox="1"/>
           <p:nvPr/>
         </p:nvSpPr>
@@ -26306,7 +26700,7 @@
       </p:sp>
       <p:sp>
         <p:nvSpPr>
-          <p:cNvPr id="33" name="Rounded Rectangle 32"/>
+          <p:cNvPr id="32" name="Rounded Rectangle 31"/>
           <p:cNvSpPr/>
           <p:nvPr/>
         </p:nvSpPr>
@@ -26352,7 +26746,7 @@
       </p:sp>
       <p:sp>
         <p:nvSpPr>
-          <p:cNvPr id="34" name="Rectangle 33"/>
+          <p:cNvPr id="33" name="Rectangle 32"/>
           <p:cNvSpPr/>
           <p:nvPr/>
         </p:nvSpPr>
@@ -26396,7 +26790,7 @@
       </p:sp>
       <p:sp>
         <p:nvSpPr>
-          <p:cNvPr id="35" name="TextBox 34"/>
+          <p:cNvPr id="34" name="TextBox 33"/>
           <p:cNvSpPr txBox="1"/>
           <p:nvPr/>
         </p:nvSpPr>
@@ -26443,7 +26837,7 @@
       </p:sp>
       <p:sp>
         <p:nvSpPr>
-          <p:cNvPr id="36" name="TextBox 35"/>
+          <p:cNvPr id="35" name="TextBox 34"/>
           <p:cNvSpPr txBox="1"/>
           <p:nvPr/>
         </p:nvSpPr>
@@ -26490,7 +26884,7 @@
       </p:sp>
       <p:sp>
         <p:nvSpPr>
-          <p:cNvPr id="37" name="TextBox 36"/>
+          <p:cNvPr id="36" name="TextBox 35"/>
           <p:cNvSpPr txBox="1"/>
           <p:nvPr/>
         </p:nvSpPr>
@@ -26537,7 +26931,7 @@
       </p:sp>
       <p:sp>
         <p:nvSpPr>
-          <p:cNvPr id="38" name="Rounded Rectangle 37"/>
+          <p:cNvPr id="37" name="Rounded Rectangle 36"/>
           <p:cNvSpPr/>
           <p:nvPr/>
         </p:nvSpPr>
@@ -26583,7 +26977,7 @@
       </p:sp>
       <p:sp>
         <p:nvSpPr>
-          <p:cNvPr id="39" name="TextBox 38"/>
+          <p:cNvPr id="38" name="TextBox 37"/>
           <p:cNvSpPr txBox="1"/>
           <p:nvPr/>
         </p:nvSpPr>
@@ -26635,6 +27029,64 @@
                 <a:cs typeface="NanumGothic"/>
               </a:rPr>
               <a:t>오전=수집 · 오후1=자료파악·gap · 오후2=가설생성·평가 (한 세션 한 단계)</a:t>
+            </a:r>
+          </a:p>
+        </p:txBody>
+      </p:sp>
+      <p:sp>
+        <p:nvSpPr>
+          <p:cNvPr id="39" name="TextBox 38"/>
+          <p:cNvSpPr txBox="1"/>
+          <p:nvPr/>
+        </p:nvSpPr>
+        <p:spPr>
+          <a:xfrm>
+            <a:off x="8988552" y="6419088"/>
+            <a:ext cx="2697480" cy="365760"/>
+          </a:xfrm>
+          <a:prstGeom prst="rect">
+            <a:avLst/>
+          </a:prstGeom>
+          <a:noFill/>
+        </p:spPr>
+        <p:txBody>
+          <a:bodyPr wrap="square" anchor="ctr" lIns="0" rIns="0" tIns="0" bIns="0">
+            <a:spAutoFit/>
+          </a:bodyPr>
+          <a:lstStyle/>
+          <a:p>
+            <a:pPr algn="r">
+              <a:lnSpc>
+                <a:spcPct val="100000"/>
+              </a:lnSpc>
+              <a:spcBef>
+                <a:spcPts val="0"/>
+              </a:spcBef>
+              <a:spcAft>
+                <a:spcPts val="600"/>
+              </a:spcAft>
+            </a:pPr>
+            <a:r>
+              <a:rPr sz="900" b="1">
+                <a:solidFill>
+                  <a:srgbClr val="F59E0B"/>
+                </a:solidFill>
+                <a:latin typeface="NanumGothic"/>
+                <a:ea typeface="NanumGothic"/>
+                <a:cs typeface="NanumGothic"/>
+              </a:rPr>
+              <a:t>Day 4 · 목</a:t>
+            </a:r>
+            <a:r>
+              <a:rPr sz="900" b="1">
+                <a:solidFill>
+                  <a:srgbClr val="64748B"/>
+                </a:solidFill>
+                <a:latin typeface="NanumGothic"/>
+                <a:ea typeface="NanumGothic"/>
+                <a:cs typeface="NanumGothic"/>
+              </a:rPr>
+              <a:t>   ·   7 / 26</a:t>
             </a:r>
           </a:p>
         </p:txBody>
@@ -26932,54 +27384,7 @@
       </p:sp>
       <p:sp>
         <p:nvSpPr>
-          <p:cNvPr id="8" name="TextBox 7"/>
-          <p:cNvSpPr txBox="1"/>
-          <p:nvPr/>
-        </p:nvSpPr>
-        <p:spPr>
-          <a:xfrm>
-            <a:off x="10241280" y="6419088"/>
-            <a:ext cx="1463040" cy="365760"/>
-          </a:xfrm>
-          <a:prstGeom prst="rect">
-            <a:avLst/>
-          </a:prstGeom>
-          <a:noFill/>
-        </p:spPr>
-        <p:txBody>
-          <a:bodyPr wrap="square" anchor="ctr" lIns="0" rIns="0" tIns="0" bIns="0">
-            <a:spAutoFit/>
-          </a:bodyPr>
-          <a:lstStyle/>
-          <a:p>
-            <a:pPr algn="r">
-              <a:lnSpc>
-                <a:spcPct val="100000"/>
-              </a:lnSpc>
-              <a:spcBef>
-                <a:spcPts val="0"/>
-              </a:spcBef>
-              <a:spcAft>
-                <a:spcPts val="600"/>
-              </a:spcAft>
-            </a:pPr>
-            <a:r>
-              <a:rPr sz="900" b="1">
-                <a:solidFill>
-                  <a:srgbClr val="F59E0B"/>
-                </a:solidFill>
-                <a:latin typeface="NanumGothic"/>
-                <a:ea typeface="NanumGothic"/>
-                <a:cs typeface="NanumGothic"/>
-              </a:rPr>
-              <a:t>Day 4 · 목</a:t>
-            </a:r>
-          </a:p>
-        </p:txBody>
-      </p:sp>
-      <p:sp>
-        <p:nvSpPr>
-          <p:cNvPr id="9" name="Oval 8"/>
+          <p:cNvPr id="8" name="Oval 7"/>
           <p:cNvSpPr/>
           <p:nvPr/>
         </p:nvSpPr>
@@ -27023,7 +27428,7 @@
       </p:sp>
       <p:sp>
         <p:nvSpPr>
-          <p:cNvPr id="10" name="TextBox 9"/>
+          <p:cNvPr id="9" name="TextBox 8"/>
           <p:cNvSpPr txBox="1"/>
           <p:nvPr/>
         </p:nvSpPr>
@@ -27070,7 +27475,7 @@
       </p:sp>
       <p:sp>
         <p:nvSpPr>
-          <p:cNvPr id="11" name="TextBox 10"/>
+          <p:cNvPr id="10" name="TextBox 9"/>
           <p:cNvSpPr txBox="1"/>
           <p:nvPr/>
         </p:nvSpPr>
@@ -27117,7 +27522,7 @@
       </p:sp>
       <p:sp>
         <p:nvSpPr>
-          <p:cNvPr id="12" name="Oval 11"/>
+          <p:cNvPr id="11" name="Oval 10"/>
           <p:cNvSpPr/>
           <p:nvPr/>
         </p:nvSpPr>
@@ -27161,7 +27566,7 @@
       </p:sp>
       <p:sp>
         <p:nvSpPr>
-          <p:cNvPr id="13" name="TextBox 12"/>
+          <p:cNvPr id="12" name="TextBox 11"/>
           <p:cNvSpPr txBox="1"/>
           <p:nvPr/>
         </p:nvSpPr>
@@ -27208,7 +27613,7 @@
       </p:sp>
       <p:sp>
         <p:nvSpPr>
-          <p:cNvPr id="14" name="TextBox 13"/>
+          <p:cNvPr id="13" name="TextBox 12"/>
           <p:cNvSpPr txBox="1"/>
           <p:nvPr/>
         </p:nvSpPr>
@@ -27255,7 +27660,7 @@
       </p:sp>
       <p:sp>
         <p:nvSpPr>
-          <p:cNvPr id="15" name="Oval 14"/>
+          <p:cNvPr id="14" name="Oval 13"/>
           <p:cNvSpPr/>
           <p:nvPr/>
         </p:nvSpPr>
@@ -27299,7 +27704,7 @@
       </p:sp>
       <p:sp>
         <p:nvSpPr>
-          <p:cNvPr id="16" name="TextBox 15"/>
+          <p:cNvPr id="15" name="TextBox 14"/>
           <p:cNvSpPr txBox="1"/>
           <p:nvPr/>
         </p:nvSpPr>
@@ -27346,7 +27751,7 @@
       </p:sp>
       <p:sp>
         <p:nvSpPr>
-          <p:cNvPr id="17" name="TextBox 16"/>
+          <p:cNvPr id="16" name="TextBox 15"/>
           <p:cNvSpPr txBox="1"/>
           <p:nvPr/>
         </p:nvSpPr>
@@ -27393,7 +27798,7 @@
       </p:sp>
       <p:sp>
         <p:nvSpPr>
-          <p:cNvPr id="18" name="Rounded Rectangle 17"/>
+          <p:cNvPr id="17" name="Rounded Rectangle 16"/>
           <p:cNvSpPr/>
           <p:nvPr/>
         </p:nvSpPr>
@@ -27439,7 +27844,7 @@
       </p:sp>
       <p:sp>
         <p:nvSpPr>
-          <p:cNvPr id="19" name="TextBox 18"/>
+          <p:cNvPr id="18" name="TextBox 17"/>
           <p:cNvSpPr txBox="1"/>
           <p:nvPr/>
         </p:nvSpPr>
@@ -27491,6 +27896,64 @@
                 <a:cs typeface="NanumGothic"/>
               </a:rPr>
               <a:t>검색어 예: (관심 키워드) AND (review[필터] 또는 최근 N년)</a:t>
+            </a:r>
+          </a:p>
+        </p:txBody>
+      </p:sp>
+      <p:sp>
+        <p:nvSpPr>
+          <p:cNvPr id="19" name="TextBox 18"/>
+          <p:cNvSpPr txBox="1"/>
+          <p:nvPr/>
+        </p:nvSpPr>
+        <p:spPr>
+          <a:xfrm>
+            <a:off x="8988552" y="6419088"/>
+            <a:ext cx="2697480" cy="365760"/>
+          </a:xfrm>
+          <a:prstGeom prst="rect">
+            <a:avLst/>
+          </a:prstGeom>
+          <a:noFill/>
+        </p:spPr>
+        <p:txBody>
+          <a:bodyPr wrap="square" anchor="ctr" lIns="0" rIns="0" tIns="0" bIns="0">
+            <a:spAutoFit/>
+          </a:bodyPr>
+          <a:lstStyle/>
+          <a:p>
+            <a:pPr algn="r">
+              <a:lnSpc>
+                <a:spcPct val="100000"/>
+              </a:lnSpc>
+              <a:spcBef>
+                <a:spcPts val="0"/>
+              </a:spcBef>
+              <a:spcAft>
+                <a:spcPts val="600"/>
+              </a:spcAft>
+            </a:pPr>
+            <a:r>
+              <a:rPr sz="900" b="1">
+                <a:solidFill>
+                  <a:srgbClr val="F59E0B"/>
+                </a:solidFill>
+                <a:latin typeface="NanumGothic"/>
+                <a:ea typeface="NanumGothic"/>
+                <a:cs typeface="NanumGothic"/>
+              </a:rPr>
+              <a:t>Day 4 · 목</a:t>
+            </a:r>
+            <a:r>
+              <a:rPr sz="900" b="1">
+                <a:solidFill>
+                  <a:srgbClr val="64748B"/>
+                </a:solidFill>
+                <a:latin typeface="NanumGothic"/>
+                <a:ea typeface="NanumGothic"/>
+                <a:cs typeface="NanumGothic"/>
+              </a:rPr>
+              <a:t>   ·   8 / 26</a:t>
             </a:r>
           </a:p>
         </p:txBody>
@@ -27788,54 +28251,7 @@
       </p:sp>
       <p:sp>
         <p:nvSpPr>
-          <p:cNvPr id="8" name="TextBox 7"/>
-          <p:cNvSpPr txBox="1"/>
-          <p:nvPr/>
-        </p:nvSpPr>
-        <p:spPr>
-          <a:xfrm>
-            <a:off x="10241280" y="6419088"/>
-            <a:ext cx="1463040" cy="365760"/>
-          </a:xfrm>
-          <a:prstGeom prst="rect">
-            <a:avLst/>
-          </a:prstGeom>
-          <a:noFill/>
-        </p:spPr>
-        <p:txBody>
-          <a:bodyPr wrap="square" anchor="ctr" lIns="0" rIns="0" tIns="0" bIns="0">
-            <a:spAutoFit/>
-          </a:bodyPr>
-          <a:lstStyle/>
-          <a:p>
-            <a:pPr algn="r">
-              <a:lnSpc>
-                <a:spcPct val="100000"/>
-              </a:lnSpc>
-              <a:spcBef>
-                <a:spcPts val="0"/>
-              </a:spcBef>
-              <a:spcAft>
-                <a:spcPts val="600"/>
-              </a:spcAft>
-            </a:pPr>
-            <a:r>
-              <a:rPr sz="900" b="1">
-                <a:solidFill>
-                  <a:srgbClr val="F59E0B"/>
-                </a:solidFill>
-                <a:latin typeface="NanumGothic"/>
-                <a:ea typeface="NanumGothic"/>
-                <a:cs typeface="NanumGothic"/>
-              </a:rPr>
-              <a:t>Day 4 · 목</a:t>
-            </a:r>
-          </a:p>
-        </p:txBody>
-      </p:sp>
-      <p:sp>
-        <p:nvSpPr>
-          <p:cNvPr id="9" name="Rounded Rectangle 8"/>
+          <p:cNvPr id="8" name="Rounded Rectangle 7"/>
           <p:cNvSpPr/>
           <p:nvPr/>
         </p:nvSpPr>
@@ -27881,7 +28297,7 @@
       </p:sp>
       <p:sp>
         <p:nvSpPr>
-          <p:cNvPr id="10" name="TextBox 9"/>
+          <p:cNvPr id="9" name="TextBox 8"/>
           <p:cNvSpPr txBox="1"/>
           <p:nvPr/>
         </p:nvSpPr>
@@ -27928,7 +28344,7 @@
       </p:sp>
       <p:sp>
         <p:nvSpPr>
-          <p:cNvPr id="11" name="Oval 10"/>
+          <p:cNvPr id="10" name="Oval 9"/>
           <p:cNvSpPr/>
           <p:nvPr/>
         </p:nvSpPr>
@@ -27972,7 +28388,7 @@
       </p:sp>
       <p:sp>
         <p:nvSpPr>
-          <p:cNvPr id="12" name="TextBox 11"/>
+          <p:cNvPr id="11" name="TextBox 10"/>
           <p:cNvSpPr txBox="1"/>
           <p:nvPr/>
         </p:nvSpPr>
@@ -28019,7 +28435,7 @@
       </p:sp>
       <p:sp>
         <p:nvSpPr>
-          <p:cNvPr id="13" name="TextBox 12"/>
+          <p:cNvPr id="12" name="TextBox 11"/>
           <p:cNvSpPr txBox="1"/>
           <p:nvPr/>
         </p:nvSpPr>
@@ -28066,7 +28482,7 @@
       </p:sp>
       <p:sp>
         <p:nvSpPr>
-          <p:cNvPr id="14" name="Oval 13"/>
+          <p:cNvPr id="13" name="Oval 12"/>
           <p:cNvSpPr/>
           <p:nvPr/>
         </p:nvSpPr>
@@ -28110,7 +28526,7 @@
       </p:sp>
       <p:sp>
         <p:nvSpPr>
-          <p:cNvPr id="15" name="TextBox 14"/>
+          <p:cNvPr id="14" name="TextBox 13"/>
           <p:cNvSpPr txBox="1"/>
           <p:nvPr/>
         </p:nvSpPr>
@@ -28157,7 +28573,7 @@
       </p:sp>
       <p:sp>
         <p:nvSpPr>
-          <p:cNvPr id="16" name="TextBox 15"/>
+          <p:cNvPr id="15" name="TextBox 14"/>
           <p:cNvSpPr txBox="1"/>
           <p:nvPr/>
         </p:nvSpPr>
@@ -28204,7 +28620,7 @@
       </p:sp>
       <p:sp>
         <p:nvSpPr>
-          <p:cNvPr id="17" name="Oval 16"/>
+          <p:cNvPr id="16" name="Oval 15"/>
           <p:cNvSpPr/>
           <p:nvPr/>
         </p:nvSpPr>
@@ -28248,7 +28664,7 @@
       </p:sp>
       <p:sp>
         <p:nvSpPr>
-          <p:cNvPr id="18" name="TextBox 17"/>
+          <p:cNvPr id="17" name="TextBox 16"/>
           <p:cNvSpPr txBox="1"/>
           <p:nvPr/>
         </p:nvSpPr>
@@ -28295,7 +28711,7 @@
       </p:sp>
       <p:sp>
         <p:nvSpPr>
-          <p:cNvPr id="19" name="TextBox 18"/>
+          <p:cNvPr id="18" name="TextBox 17"/>
           <p:cNvSpPr txBox="1"/>
           <p:nvPr/>
         </p:nvSpPr>
@@ -28342,7 +28758,7 @@
       </p:sp>
       <p:sp>
         <p:nvSpPr>
-          <p:cNvPr id="20" name="Oval 19"/>
+          <p:cNvPr id="19" name="Oval 18"/>
           <p:cNvSpPr/>
           <p:nvPr/>
         </p:nvSpPr>
@@ -28386,7 +28802,7 @@
       </p:sp>
       <p:sp>
         <p:nvSpPr>
-          <p:cNvPr id="21" name="TextBox 20"/>
+          <p:cNvPr id="20" name="TextBox 19"/>
           <p:cNvSpPr txBox="1"/>
           <p:nvPr/>
         </p:nvSpPr>
@@ -28433,7 +28849,7 @@
       </p:sp>
       <p:sp>
         <p:nvSpPr>
-          <p:cNvPr id="22" name="TextBox 21"/>
+          <p:cNvPr id="21" name="TextBox 20"/>
           <p:cNvSpPr txBox="1"/>
           <p:nvPr/>
         </p:nvSpPr>
@@ -28480,7 +28896,7 @@
       </p:sp>
       <p:sp>
         <p:nvSpPr>
-          <p:cNvPr id="23" name="Rounded Rectangle 22"/>
+          <p:cNvPr id="22" name="Rounded Rectangle 21"/>
           <p:cNvSpPr/>
           <p:nvPr/>
         </p:nvSpPr>
@@ -28524,7 +28940,7 @@
       </p:sp>
       <p:sp>
         <p:nvSpPr>
-          <p:cNvPr id="24" name="TextBox 23"/>
+          <p:cNvPr id="23" name="TextBox 22"/>
           <p:cNvSpPr txBox="1"/>
           <p:nvPr/>
         </p:nvSpPr>
@@ -28571,7 +28987,7 @@
       </p:sp>
       <p:sp>
         <p:nvSpPr>
-          <p:cNvPr id="25" name="TextBox 24"/>
+          <p:cNvPr id="24" name="TextBox 23"/>
           <p:cNvSpPr txBox="1"/>
           <p:nvPr/>
         </p:nvSpPr>
@@ -28613,6 +29029,64 @@
               </a:rPr>
               <a:t>papers/ 폴더 = 팀 corpus (초록·메타데이터)
 참고: examples/research-agent/sources 형식</a:t>
+            </a:r>
+          </a:p>
+        </p:txBody>
+      </p:sp>
+      <p:sp>
+        <p:nvSpPr>
+          <p:cNvPr id="25" name="TextBox 24"/>
+          <p:cNvSpPr txBox="1"/>
+          <p:nvPr/>
+        </p:nvSpPr>
+        <p:spPr>
+          <a:xfrm>
+            <a:off x="8988552" y="6419088"/>
+            <a:ext cx="2697480" cy="365760"/>
+          </a:xfrm>
+          <a:prstGeom prst="rect">
+            <a:avLst/>
+          </a:prstGeom>
+          <a:noFill/>
+        </p:spPr>
+        <p:txBody>
+          <a:bodyPr wrap="square" anchor="ctr" lIns="0" rIns="0" tIns="0" bIns="0">
+            <a:spAutoFit/>
+          </a:bodyPr>
+          <a:lstStyle/>
+          <a:p>
+            <a:pPr algn="r">
+              <a:lnSpc>
+                <a:spcPct val="100000"/>
+              </a:lnSpc>
+              <a:spcBef>
+                <a:spcPts val="0"/>
+              </a:spcBef>
+              <a:spcAft>
+                <a:spcPts val="600"/>
+              </a:spcAft>
+            </a:pPr>
+            <a:r>
+              <a:rPr sz="900" b="1">
+                <a:solidFill>
+                  <a:srgbClr val="F59E0B"/>
+                </a:solidFill>
+                <a:latin typeface="NanumGothic"/>
+                <a:ea typeface="NanumGothic"/>
+                <a:cs typeface="NanumGothic"/>
+              </a:rPr>
+              <a:t>Day 4 · 목</a:t>
+            </a:r>
+            <a:r>
+              <a:rPr sz="900" b="1">
+                <a:solidFill>
+                  <a:srgbClr val="64748B"/>
+                </a:solidFill>
+                <a:latin typeface="NanumGothic"/>
+                <a:ea typeface="NanumGothic"/>
+                <a:cs typeface="NanumGothic"/>
+              </a:rPr>
+              <a:t>   ·   9 / 26</a:t>
             </a:r>
           </a:p>
         </p:txBody>

--- a/slides/day4.pptx
+++ b/slides/day4.pptx
@@ -4332,7 +4332,7 @@
                 <a:ea typeface="NanumGothic"/>
                 <a:cs typeface="NanumGothic"/>
               </a:rPr>
-              <a:t>AI 에이전트와 응용  ·  원광대학교 5일 교육</a:t>
+              <a:t>신약 개발을 위한 AI Agent 특강</a:t>
             </a:r>
           </a:p>
         </p:txBody>
@@ -5559,7 +5559,7 @@
                 <a:ea typeface="NanumGothic"/>
                 <a:cs typeface="NanumGothic"/>
               </a:rPr>
-              <a:t>AI 에이전트와 응용  ·  원광대학교 5일 교육</a:t>
+              <a:t>신약 개발을 위한 AI Agent 특강</a:t>
             </a:r>
           </a:p>
         </p:txBody>
@@ -6784,7 +6784,7 @@
                 <a:ea typeface="NanumGothic"/>
                 <a:cs typeface="NanumGothic"/>
               </a:rPr>
-              <a:t>AI 에이전트와 응용  ·  원광대학교 5일 교육</a:t>
+              <a:t>신약 개발을 위한 AI Agent 특강</a:t>
             </a:r>
           </a:p>
         </p:txBody>
@@ -7547,7 +7547,7 @@
                 <a:ea typeface="NanumGothic"/>
                 <a:cs typeface="NanumGothic"/>
               </a:rPr>
-              <a:t>AI 에이전트와 응용  ·  원광대학교 5일 교육</a:t>
+              <a:t>신약 개발을 위한 AI Agent 특강</a:t>
             </a:r>
           </a:p>
         </p:txBody>
@@ -8552,7 +8552,7 @@
                 <a:ea typeface="NanumGothic"/>
                 <a:cs typeface="NanumGothic"/>
               </a:rPr>
-              <a:t>AI 에이전트와 응용  ·  원광대학교 5일 교육</a:t>
+              <a:t>신약 개발을 위한 AI Agent 특강</a:t>
             </a:r>
           </a:p>
         </p:txBody>
@@ -9419,7 +9419,7 @@
                 <a:ea typeface="NanumGothic"/>
                 <a:cs typeface="NanumGothic"/>
               </a:rPr>
-              <a:t>AI 에이전트와 응용  ·  원광대학교 5일 교육</a:t>
+              <a:t>신약 개발을 위한 AI Agent 특강</a:t>
             </a:r>
           </a:p>
         </p:txBody>
@@ -10912,7 +10912,7 @@
                 <a:ea typeface="NanumGothic"/>
                 <a:cs typeface="NanumGothic"/>
               </a:rPr>
-              <a:t>AI 에이전트와 응용  ·  원광대학교 5일 교육</a:t>
+              <a:t>신약 개발을 위한 AI Agent 특강</a:t>
             </a:r>
           </a:p>
         </p:txBody>
@@ -12321,7 +12321,7 @@
                 <a:ea typeface="NanumGothic"/>
                 <a:cs typeface="NanumGothic"/>
               </a:rPr>
-              <a:t>AI 에이전트와 응용  ·  원광대학교 5일 교육</a:t>
+              <a:t>신약 개발을 위한 AI Agent 특강</a:t>
             </a:r>
           </a:p>
         </p:txBody>
@@ -13188,7 +13188,7 @@
                 <a:ea typeface="NanumGothic"/>
                 <a:cs typeface="NanumGothic"/>
               </a:rPr>
-              <a:t>AI 에이전트와 응용  ·  원광대학교 5일 교육</a:t>
+              <a:t>신약 개발을 위한 AI Agent 특강</a:t>
             </a:r>
           </a:p>
         </p:txBody>
@@ -14460,7 +14460,7 @@
                 <a:ea typeface="NanumGothic"/>
                 <a:cs typeface="NanumGothic"/>
               </a:rPr>
-              <a:t>AI 에이전트와 응용  ·  원광대학교 5일 교육</a:t>
+              <a:t>신약 개발을 위한 AI Agent 특강</a:t>
             </a:r>
           </a:p>
         </p:txBody>
@@ -15700,7 +15700,7 @@
                 <a:ea typeface="NanumGothic"/>
                 <a:cs typeface="NanumGothic"/>
               </a:rPr>
-              <a:t>AI 에이전트와 응용  ·  원광대학교 5일 교육</a:t>
+              <a:t>신약 개발을 위한 AI Agent 특강</a:t>
             </a:r>
           </a:p>
         </p:txBody>
@@ -16671,7 +16671,7 @@
                 <a:ea typeface="NanumGothic"/>
                 <a:cs typeface="NanumGothic"/>
               </a:rPr>
-              <a:t>AI 에이전트와 응용  ·  원광대학교 5일 교육</a:t>
+              <a:t>신약 개발을 위한 AI Agent 특강</a:t>
             </a:r>
           </a:p>
         </p:txBody>
@@ -17676,7 +17676,7 @@
                 <a:ea typeface="NanumGothic"/>
                 <a:cs typeface="NanumGothic"/>
               </a:rPr>
-              <a:t>AI 에이전트와 응용  ·  원광대학교 5일 교육</a:t>
+              <a:t>신약 개발을 위한 AI Agent 특강</a:t>
             </a:r>
           </a:p>
         </p:txBody>
@@ -18647,7 +18647,7 @@
                 <a:ea typeface="NanumGothic"/>
                 <a:cs typeface="NanumGothic"/>
               </a:rPr>
-              <a:t>AI 에이전트와 응용  ·  원광대학교 5일 교육</a:t>
+              <a:t>신약 개발을 위한 AI Agent 특강</a:t>
             </a:r>
           </a:p>
         </p:txBody>
@@ -19514,7 +19514,7 @@
                 <a:ea typeface="NanumGothic"/>
                 <a:cs typeface="NanumGothic"/>
               </a:rPr>
-              <a:t>AI 에이전트와 응용  ·  원광대학교 5일 교육</a:t>
+              <a:t>신약 개발을 위한 AI Agent 특강</a:t>
             </a:r>
           </a:p>
         </p:txBody>
@@ -20647,7 +20647,7 @@
                 <a:ea typeface="NanumGothic"/>
                 <a:cs typeface="NanumGothic"/>
               </a:rPr>
-              <a:t>AI 에이전트와 응용  ·  원광대학교 5일 교육</a:t>
+              <a:t>신약 개발을 위한 AI Agent 특강</a:t>
             </a:r>
           </a:p>
         </p:txBody>
@@ -21456,7 +21456,7 @@
                 <a:ea typeface="NanumGothic"/>
                 <a:cs typeface="NanumGothic"/>
               </a:rPr>
-              <a:t>AI 에이전트와 응용  ·  원광대학교 5일 교육</a:t>
+              <a:t>신약 개발을 위한 AI Agent 특강</a:t>
             </a:r>
           </a:p>
         </p:txBody>
@@ -23305,7 +23305,7 @@
                 <a:ea typeface="NanumGothic"/>
                 <a:cs typeface="NanumGothic"/>
               </a:rPr>
-              <a:t>AI 에이전트와 응용  ·  원광대학교 5일 교육</a:t>
+              <a:t>신약 개발을 위한 AI Agent 특강</a:t>
             </a:r>
           </a:p>
         </p:txBody>
@@ -24714,7 +24714,7 @@
                 <a:ea typeface="NanumGothic"/>
                 <a:cs typeface="NanumGothic"/>
               </a:rPr>
-              <a:t>AI 에이전트와 응용  ·  원광대학교 5일 교육</a:t>
+              <a:t>신약 개발을 위한 AI Agent 특강</a:t>
             </a:r>
           </a:p>
         </p:txBody>
@@ -25581,7 +25581,7 @@
                 <a:ea typeface="NanumGothic"/>
                 <a:cs typeface="NanumGothic"/>
               </a:rPr>
-              <a:t>AI 에이전트와 응용  ·  원광대학교 5일 교육</a:t>
+              <a:t>신약 개발을 위한 AI Agent 특강</a:t>
             </a:r>
           </a:p>
         </p:txBody>
@@ -27377,7 +27377,7 @@
                 <a:ea typeface="NanumGothic"/>
                 <a:cs typeface="NanumGothic"/>
               </a:rPr>
-              <a:t>AI 에이전트와 응용  ·  원광대학교 5일 교육</a:t>
+              <a:t>신약 개발을 위한 AI Agent 특강</a:t>
             </a:r>
           </a:p>
         </p:txBody>
@@ -28244,7 +28244,7 @@
                 <a:ea typeface="NanumGothic"/>
                 <a:cs typeface="NanumGothic"/>
               </a:rPr>
-              <a:t>AI 에이전트와 응용  ·  원광대학교 5일 교육</a:t>
+              <a:t>신약 개발을 위한 AI Agent 특강</a:t>
             </a:r>
           </a:p>
         </p:txBody>

--- a/slides/day4.pptx
+++ b/slides/day4.pptx
@@ -4850,7 +4850,7 @@
                 <a:ea typeface="NanumGothic"/>
                 <a:cs typeface="NanumGothic"/>
               </a:rPr>
-              <a:t>corpus 품질이 이후 가설 품질을 좌우한다</a:t>
+              <a:t>수집한 corpus의 품질이 이후 생성되는 가설의 품질을 좌우한다.</a:t>
             </a:r>
           </a:p>
         </p:txBody>
@@ -8203,7 +8203,7 @@
                 <a:ea typeface="NanumGothic"/>
                 <a:cs typeface="NanumGothic"/>
               </a:rPr>
-              <a:t>정규화해야 비교가 되고, 비교에서 gap이 드러난다</a:t>
+              <a:t>같은 틀로 정규화해야 비교가 가능하며, 그 비교 과정에서 gap이 드러난다.</a:t>
             </a:r>
           </a:p>
         </p:txBody>
@@ -9070,7 +9070,7 @@
                 <a:ea typeface="NanumGothic"/>
                 <a:cs typeface="NanumGothic"/>
               </a:rPr>
-              <a:t>각 gap에 '어느 논문에서 나왔나' 근거를 반드시 표기</a:t>
+              <a:t>각 gap에는 어느 논문에서 비롯되었는지 근거를 반드시 표기해야 한다.</a:t>
             </a:r>
           </a:p>
         </p:txBody>
@@ -12839,7 +12839,7 @@
                 <a:ea typeface="NanumGothic"/>
                 <a:cs typeface="NanumGothic"/>
               </a:rPr>
-              <a:t>이 기준이 곧 '제안할 가설'을 고르는 잣대</a:t>
+              <a:t>이 네 가지 기준이 곧 최종적으로 제안할 가설을 선별하는 잣대가 된다.</a:t>
             </a:r>
           </a:p>
         </p:txBody>
@@ -15351,7 +15351,7 @@
                 <a:ea typeface="NanumGothic"/>
                 <a:cs typeface="NanumGothic"/>
               </a:rPr>
-              <a:t>연구로 검증된 3단계 (MOOSE-Chem, ICLR'25 · 화학) — 우리는 간소화해 차용</a:t>
+              <a:t>MOOSE-Chem(ICLR 2025, 화학 분야)에서 검증된 3단계 방법론이며, 본 특강에서는 이를 간소화하여 차용한다.</a:t>
             </a:r>
           </a:p>
         </p:txBody>
@@ -17327,7 +17327,7 @@
                 <a:ea typeface="NanumGothic"/>
                 <a:cs typeface="NanumGothic"/>
               </a:rPr>
-              <a:t>많이·다양하게가 이 단계의 목표</a:t>
+              <a:t>가능한 한 많고 다양하게 생성하는 것이 이 단계의 목표다.</a:t>
             </a:r>
           </a:p>
         </p:txBody>
@@ -19165,7 +19165,7 @@
                 <a:ea typeface="NanumGothic"/>
                 <a:cs typeface="NanumGothic"/>
               </a:rPr>
-              <a:t>약하면 되돌아가 재생성·보강 (iteration)</a:t>
+              <a:t>근거가 약한 가설은 이전 단계로 돌아가 다시 생성하거나 보강한다.</a:t>
             </a:r>
           </a:p>
         </p:txBody>
@@ -25232,7 +25232,7 @@
                 <a:ea typeface="NanumGothic"/>
                 <a:cs typeface="NanumGothic"/>
               </a:rPr>
-              <a:t>방향을 확정하고 — 오늘은 '재료(논문)'부터 모은다</a:t>
+              <a:t>방향을 확정한 뒤, 오늘은 연구의 '재료'가 되는 논문부터 수집한다.</a:t>
             </a:r>
           </a:p>
         </p:txBody>
@@ -27028,7 +27028,7 @@
                 <a:ea typeface="NanumGothic"/>
                 <a:cs typeface="NanumGothic"/>
               </a:rPr>
-              <a:t>오전=수집 · 오후1=자료파악·gap · 오후2=가설생성·평가 (한 세션 한 단계)</a:t>
+              <a:t>오전에는 논문 수집, 오후 첫 세션에는 자료 파악과 gap 발견, 오후 둘째 세션에는 가설 생성과 평가를 진행하며, 한 세션에 한 단계씩 다룬다.</a:t>
             </a:r>
           </a:p>
         </p:txBody>
@@ -27895,7 +27895,7 @@
                 <a:ea typeface="NanumGothic"/>
                 <a:cs typeface="NanumGothic"/>
               </a:rPr>
-              <a:t>검색어 예: (관심 키워드) AND (review[필터] 또는 최근 N년)</a:t>
+              <a:t>검색어는 관심 키워드에 리뷰 필터(review[pt])나 최근 연도 조건을 결합하여 구성한다.</a:t>
             </a:r>
           </a:p>
         </p:txBody>

--- a/slides/day4.pptx
+++ b/slides/day4.pptx
@@ -12389,8 +12389,8 @@
                 <a:ea typeface="NanumGothic"/>
                 <a:cs typeface="NanumGothic"/>
               </a:rPr>
-              <a:t>자료 지도 + gap 목록 (근거 포함)
-규칙: examples/research-agent/CLAUDE.md</a:t>
+              <a:t>논문 정리표 + gap 목록 (근거 포함)
+시트: worksheets/1-literature-matrix · 2-gap-list</a:t>
             </a:r>
           </a:p>
         </p:txBody>
@@ -23961,8 +23961,8 @@
                 <a:ea typeface="NanumGothic"/>
                 <a:cs typeface="NanumGothic"/>
               </a:rPr>
-              <a:t>최종 가설 제안 + 분석 노트
-에이전트 완주! 양식: output/report-template.md · 분석: result-analysis-template.md</a:t>
+              <a:t>가설 평가표 → 최종 가설 제안
+시트: worksheets/3-hypothesis-eval · 제안서: output/report-template.md</a:t>
             </a:r>
           </a:p>
         </p:txBody>
